--- a/docs/plots/carbo/jx_carbo_linsubhr_egfrdisc_akikdigo.pptx
+++ b/docs/plots/carbo/jx_carbo_linsubhr_egfrdisc_akikdigo.pptx
@@ -3003,491 +3003,479 @@
           <p:spPr>
             <a:xfrm>
               <a:off x="1172049" y="2073503"/>
-              <a:ext cx="7090630" cy="3307283"/>
+              <a:ext cx="7090630" cy="3358221"/>
             </a:xfrm>
             <a:custGeom>
               <a:avLst/>
               <a:pathLst>
-                <a:path w="7090630" h="3307283">
+                <a:path w="7090630" h="3358221">
                   <a:moveTo>
-                    <a:pt x="2868254" y="0"/>
+                    <a:pt x="3234924" y="0"/>
                   </a:moveTo>
                   <a:lnTo>
-                    <a:pt x="2936523" y="164205"/>
-                  </a:lnTo>
-                  <a:lnTo>
-                    <a:pt x="3008146" y="327977"/>
-                  </a:lnTo>
-                  <a:lnTo>
-                    <a:pt x="3079768" y="483669"/>
-                  </a:lnTo>
-                  <a:lnTo>
-                    <a:pt x="3151391" y="631680"/>
-                  </a:lnTo>
-                  <a:lnTo>
-                    <a:pt x="3223013" y="772389"/>
-                  </a:lnTo>
-                  <a:lnTo>
-                    <a:pt x="3294636" y="906156"/>
-                  </a:lnTo>
-                  <a:lnTo>
-                    <a:pt x="3366258" y="1033323"/>
-                  </a:lnTo>
-                  <a:lnTo>
-                    <a:pt x="3437881" y="1154216"/>
-                  </a:lnTo>
-                  <a:lnTo>
-                    <a:pt x="3509503" y="1269145"/>
-                  </a:lnTo>
-                  <a:lnTo>
-                    <a:pt x="3581126" y="1378404"/>
-                  </a:lnTo>
-                  <a:lnTo>
-                    <a:pt x="3652748" y="1482273"/>
-                  </a:lnTo>
-                  <a:lnTo>
-                    <a:pt x="3724371" y="1581017"/>
-                  </a:lnTo>
-                  <a:lnTo>
-                    <a:pt x="3795993" y="1674889"/>
-                  </a:lnTo>
-                  <a:lnTo>
-                    <a:pt x="3867616" y="1764131"/>
-                  </a:lnTo>
-                  <a:lnTo>
-                    <a:pt x="3939238" y="1848969"/>
-                  </a:lnTo>
-                  <a:lnTo>
-                    <a:pt x="4010861" y="1929622"/>
-                  </a:lnTo>
-                  <a:lnTo>
-                    <a:pt x="4082483" y="2006296"/>
-                  </a:lnTo>
-                  <a:lnTo>
-                    <a:pt x="4154106" y="2079187"/>
-                  </a:lnTo>
-                  <a:lnTo>
-                    <a:pt x="4225729" y="2148482"/>
-                  </a:lnTo>
-                  <a:lnTo>
-                    <a:pt x="4297351" y="2214358"/>
-                  </a:lnTo>
-                  <a:lnTo>
-                    <a:pt x="4368974" y="2276984"/>
-                  </a:lnTo>
-                  <a:lnTo>
-                    <a:pt x="4440596" y="2336521"/>
-                  </a:lnTo>
-                  <a:lnTo>
-                    <a:pt x="4512219" y="2393120"/>
-                  </a:lnTo>
-                  <a:lnTo>
-                    <a:pt x="4583841" y="2446927"/>
-                  </a:lnTo>
-                  <a:lnTo>
-                    <a:pt x="4655464" y="2498079"/>
-                  </a:lnTo>
-                  <a:lnTo>
-                    <a:pt x="4727086" y="2546707"/>
-                  </a:lnTo>
-                  <a:lnTo>
-                    <a:pt x="4798709" y="2592937"/>
-                  </a:lnTo>
-                  <a:lnTo>
-                    <a:pt x="4870331" y="2636886"/>
-                  </a:lnTo>
-                  <a:lnTo>
-                    <a:pt x="4941954" y="2657724"/>
-                  </a:lnTo>
-                  <a:lnTo>
-                    <a:pt x="5013576" y="2663525"/>
-                  </a:lnTo>
-                  <a:lnTo>
-                    <a:pt x="5085199" y="2669286"/>
-                  </a:lnTo>
-                  <a:lnTo>
-                    <a:pt x="5156821" y="2675007"/>
-                  </a:lnTo>
-                  <a:lnTo>
-                    <a:pt x="5228444" y="2680687"/>
-                  </a:lnTo>
-                  <a:lnTo>
-                    <a:pt x="5300066" y="2686327"/>
-                  </a:lnTo>
-                  <a:lnTo>
-                    <a:pt x="5371689" y="2691928"/>
-                  </a:lnTo>
-                  <a:lnTo>
-                    <a:pt x="5443311" y="2697489"/>
-                  </a:lnTo>
-                  <a:lnTo>
-                    <a:pt x="5514934" y="2703012"/>
-                  </a:lnTo>
-                  <a:lnTo>
-                    <a:pt x="5586557" y="2708495"/>
-                  </a:lnTo>
-                  <a:lnTo>
-                    <a:pt x="5658179" y="2713940"/>
-                  </a:lnTo>
-                  <a:lnTo>
-                    <a:pt x="5729802" y="2719347"/>
-                  </a:lnTo>
-                  <a:lnTo>
-                    <a:pt x="5801424" y="2724716"/>
-                  </a:lnTo>
-                  <a:lnTo>
-                    <a:pt x="5873047" y="2730047"/>
-                  </a:lnTo>
-                  <a:lnTo>
-                    <a:pt x="5944669" y="2735341"/>
-                  </a:lnTo>
-                  <a:lnTo>
-                    <a:pt x="6016292" y="2740597"/>
-                  </a:lnTo>
-                  <a:lnTo>
-                    <a:pt x="6087914" y="2745817"/>
-                  </a:lnTo>
-                  <a:lnTo>
-                    <a:pt x="6159537" y="2751000"/>
-                  </a:lnTo>
-                  <a:lnTo>
-                    <a:pt x="6231159" y="2756146"/>
-                  </a:lnTo>
-                  <a:lnTo>
-                    <a:pt x="6302782" y="2761257"/>
-                  </a:lnTo>
-                  <a:lnTo>
-                    <a:pt x="6374404" y="2766331"/>
-                  </a:lnTo>
-                  <a:lnTo>
-                    <a:pt x="6446027" y="2771370"/>
-                  </a:lnTo>
-                  <a:lnTo>
-                    <a:pt x="6517649" y="2776374"/>
-                  </a:lnTo>
-                  <a:lnTo>
-                    <a:pt x="6589272" y="2781342"/>
-                  </a:lnTo>
-                  <a:lnTo>
-                    <a:pt x="6660894" y="2786275"/>
-                  </a:lnTo>
-                  <a:lnTo>
-                    <a:pt x="6732517" y="2791174"/>
-                  </a:lnTo>
-                  <a:lnTo>
-                    <a:pt x="6804139" y="2796038"/>
-                  </a:lnTo>
-                  <a:lnTo>
-                    <a:pt x="6875762" y="2800869"/>
-                  </a:lnTo>
-                  <a:lnTo>
-                    <a:pt x="6947385" y="2805665"/>
-                  </a:lnTo>
-                  <a:lnTo>
-                    <a:pt x="7019007" y="2810427"/>
-                  </a:lnTo>
-                  <a:lnTo>
-                    <a:pt x="7090630" y="2815157"/>
-                  </a:lnTo>
-                  <a:lnTo>
-                    <a:pt x="7090630" y="3307283"/>
-                  </a:lnTo>
-                  <a:lnTo>
-                    <a:pt x="7019007" y="3298125"/>
-                  </a:lnTo>
-                  <a:lnTo>
-                    <a:pt x="6947385" y="3288492"/>
-                  </a:lnTo>
-                  <a:lnTo>
-                    <a:pt x="6875762" y="3278359"/>
-                  </a:lnTo>
-                  <a:lnTo>
-                    <a:pt x="6804139" y="3267701"/>
-                  </a:lnTo>
-                  <a:lnTo>
-                    <a:pt x="6732517" y="3256489"/>
-                  </a:lnTo>
-                  <a:lnTo>
-                    <a:pt x="6660894" y="3244695"/>
-                  </a:lnTo>
-                  <a:lnTo>
-                    <a:pt x="6589272" y="3232289"/>
-                  </a:lnTo>
-                  <a:lnTo>
-                    <a:pt x="6517649" y="3219239"/>
-                  </a:lnTo>
-                  <a:lnTo>
-                    <a:pt x="6446027" y="3205513"/>
-                  </a:lnTo>
-                  <a:lnTo>
-                    <a:pt x="6374404" y="3191073"/>
-                  </a:lnTo>
-                  <a:lnTo>
-                    <a:pt x="6302782" y="3175885"/>
-                  </a:lnTo>
-                  <a:lnTo>
-                    <a:pt x="6231159" y="3159908"/>
-                  </a:lnTo>
-                  <a:lnTo>
-                    <a:pt x="6159537" y="3143102"/>
-                  </a:lnTo>
-                  <a:lnTo>
-                    <a:pt x="6087914" y="3125424"/>
-                  </a:lnTo>
-                  <a:lnTo>
-                    <a:pt x="6016292" y="3106828"/>
-                  </a:lnTo>
-                  <a:lnTo>
-                    <a:pt x="5944669" y="3087268"/>
-                  </a:lnTo>
-                  <a:lnTo>
-                    <a:pt x="5873047" y="3066692"/>
-                  </a:lnTo>
-                  <a:lnTo>
-                    <a:pt x="5801424" y="3045049"/>
-                  </a:lnTo>
-                  <a:lnTo>
-                    <a:pt x="5729802" y="3022282"/>
-                  </a:lnTo>
-                  <a:lnTo>
-                    <a:pt x="5658179" y="2998334"/>
-                  </a:lnTo>
-                  <a:lnTo>
-                    <a:pt x="5586557" y="2973143"/>
-                  </a:lnTo>
-                  <a:lnTo>
-                    <a:pt x="5514934" y="2946645"/>
-                  </a:lnTo>
-                  <a:lnTo>
-                    <a:pt x="5443311" y="2918771"/>
-                  </a:lnTo>
-                  <a:lnTo>
-                    <a:pt x="5371689" y="2889451"/>
-                  </a:lnTo>
-                  <a:lnTo>
-                    <a:pt x="5300066" y="2858610"/>
-                  </a:lnTo>
-                  <a:lnTo>
-                    <a:pt x="5228444" y="2826167"/>
-                  </a:lnTo>
-                  <a:lnTo>
-                    <a:pt x="5156821" y="2792042"/>
-                  </a:lnTo>
-                  <a:lnTo>
-                    <a:pt x="5085199" y="2756145"/>
-                  </a:lnTo>
-                  <a:lnTo>
-                    <a:pt x="5013576" y="2718385"/>
-                  </a:lnTo>
-                  <a:lnTo>
-                    <a:pt x="4941954" y="2678666"/>
-                  </a:lnTo>
-                  <a:lnTo>
-                    <a:pt x="4870331" y="2651881"/>
-                  </a:lnTo>
-                  <a:lnTo>
-                    <a:pt x="4798709" y="2645997"/>
-                  </a:lnTo>
-                  <a:lnTo>
-                    <a:pt x="4727086" y="2640071"/>
-                  </a:lnTo>
-                  <a:lnTo>
-                    <a:pt x="4655464" y="2634104"/>
-                  </a:lnTo>
-                  <a:lnTo>
-                    <a:pt x="4583841" y="2628094"/>
-                  </a:lnTo>
-                  <a:lnTo>
-                    <a:pt x="4512219" y="2622042"/>
-                  </a:lnTo>
-                  <a:lnTo>
-                    <a:pt x="4440596" y="2615946"/>
-                  </a:lnTo>
-                  <a:lnTo>
-                    <a:pt x="4368974" y="2609808"/>
-                  </a:lnTo>
-                  <a:lnTo>
-                    <a:pt x="4297351" y="2603627"/>
-                  </a:lnTo>
-                  <a:lnTo>
-                    <a:pt x="4225729" y="2597401"/>
-                  </a:lnTo>
-                  <a:lnTo>
-                    <a:pt x="4154106" y="2591132"/>
-                  </a:lnTo>
-                  <a:lnTo>
-                    <a:pt x="4082483" y="2584818"/>
-                  </a:lnTo>
-                  <a:lnTo>
-                    <a:pt x="4010861" y="2578460"/>
-                  </a:lnTo>
-                  <a:lnTo>
-                    <a:pt x="3939238" y="2572056"/>
-                  </a:lnTo>
-                  <a:lnTo>
-                    <a:pt x="3867616" y="2565608"/>
-                  </a:lnTo>
-                  <a:lnTo>
-                    <a:pt x="3795993" y="2559114"/>
-                  </a:lnTo>
-                  <a:lnTo>
-                    <a:pt x="3724371" y="2552573"/>
-                  </a:lnTo>
-                  <a:lnTo>
-                    <a:pt x="3652748" y="2545987"/>
-                  </a:lnTo>
-                  <a:lnTo>
-                    <a:pt x="3581126" y="2539354"/>
-                  </a:lnTo>
-                  <a:lnTo>
-                    <a:pt x="3509503" y="2532674"/>
-                  </a:lnTo>
-                  <a:lnTo>
-                    <a:pt x="3437881" y="2525947"/>
-                  </a:lnTo>
-                  <a:lnTo>
-                    <a:pt x="3366258" y="2519172"/>
-                  </a:lnTo>
-                  <a:lnTo>
-                    <a:pt x="3294636" y="2512349"/>
-                  </a:lnTo>
-                  <a:lnTo>
-                    <a:pt x="3223013" y="2505478"/>
-                  </a:lnTo>
-                  <a:lnTo>
-                    <a:pt x="3151391" y="2498559"/>
-                  </a:lnTo>
-                  <a:lnTo>
-                    <a:pt x="3079768" y="2491590"/>
-                  </a:lnTo>
-                  <a:lnTo>
-                    <a:pt x="3008146" y="2484572"/>
-                  </a:lnTo>
-                  <a:lnTo>
-                    <a:pt x="2936523" y="2477505"/>
-                  </a:lnTo>
-                  <a:lnTo>
-                    <a:pt x="2864901" y="2470387"/>
-                  </a:lnTo>
-                  <a:lnTo>
-                    <a:pt x="2793278" y="2463220"/>
-                  </a:lnTo>
-                  <a:lnTo>
-                    <a:pt x="2721655" y="2456001"/>
-                  </a:lnTo>
-                  <a:lnTo>
-                    <a:pt x="2650033" y="2448732"/>
-                  </a:lnTo>
-                  <a:lnTo>
-                    <a:pt x="2578410" y="2441411"/>
-                  </a:lnTo>
-                  <a:lnTo>
-                    <a:pt x="2506788" y="2434038"/>
-                  </a:lnTo>
-                  <a:lnTo>
-                    <a:pt x="2435165" y="2426613"/>
-                  </a:lnTo>
-                  <a:lnTo>
-                    <a:pt x="2363543" y="2419136"/>
-                  </a:lnTo>
-                  <a:lnTo>
-                    <a:pt x="2291920" y="2411605"/>
-                  </a:lnTo>
-                  <a:lnTo>
-                    <a:pt x="2220298" y="2404022"/>
-                  </a:lnTo>
-                  <a:lnTo>
-                    <a:pt x="2148675" y="2396385"/>
-                  </a:lnTo>
-                  <a:lnTo>
-                    <a:pt x="2077053" y="2388693"/>
-                  </a:lnTo>
-                  <a:lnTo>
-                    <a:pt x="2005430" y="2380948"/>
-                  </a:lnTo>
-                  <a:lnTo>
-                    <a:pt x="1933808" y="2373147"/>
-                  </a:lnTo>
-                  <a:lnTo>
-                    <a:pt x="1862185" y="2365292"/>
-                  </a:lnTo>
-                  <a:lnTo>
-                    <a:pt x="1790563" y="2357381"/>
-                  </a:lnTo>
-                  <a:lnTo>
-                    <a:pt x="1718940" y="2349413"/>
-                  </a:lnTo>
-                  <a:lnTo>
-                    <a:pt x="1647318" y="2341390"/>
-                  </a:lnTo>
-                  <a:lnTo>
-                    <a:pt x="1575695" y="2333310"/>
-                  </a:lnTo>
-                  <a:lnTo>
-                    <a:pt x="1504073" y="2325172"/>
-                  </a:lnTo>
-                  <a:lnTo>
-                    <a:pt x="1432450" y="2316977"/>
-                  </a:lnTo>
-                  <a:lnTo>
-                    <a:pt x="1360827" y="2308725"/>
-                  </a:lnTo>
-                  <a:lnTo>
-                    <a:pt x="1289205" y="2300413"/>
-                  </a:lnTo>
-                  <a:lnTo>
-                    <a:pt x="1217582" y="2292043"/>
-                  </a:lnTo>
-                  <a:lnTo>
-                    <a:pt x="1145960" y="2283614"/>
-                  </a:lnTo>
-                  <a:lnTo>
-                    <a:pt x="1074337" y="2275125"/>
-                  </a:lnTo>
-                  <a:lnTo>
-                    <a:pt x="1002715" y="2266576"/>
-                  </a:lnTo>
-                  <a:lnTo>
-                    <a:pt x="931092" y="2257967"/>
-                  </a:lnTo>
-                  <a:lnTo>
-                    <a:pt x="859470" y="2249297"/>
-                  </a:lnTo>
-                  <a:lnTo>
-                    <a:pt x="787847" y="2240565"/>
-                  </a:lnTo>
-                  <a:lnTo>
-                    <a:pt x="716225" y="2231772"/>
-                  </a:lnTo>
-                  <a:lnTo>
-                    <a:pt x="644602" y="2222916"/>
-                  </a:lnTo>
-                  <a:lnTo>
-                    <a:pt x="572980" y="2213998"/>
-                  </a:lnTo>
-                  <a:lnTo>
-                    <a:pt x="501357" y="2205016"/>
-                  </a:lnTo>
-                  <a:lnTo>
-                    <a:pt x="429735" y="2195972"/>
-                  </a:lnTo>
-                  <a:lnTo>
-                    <a:pt x="358112" y="2186863"/>
-                  </a:lnTo>
-                  <a:lnTo>
-                    <a:pt x="286490" y="2177690"/>
-                  </a:lnTo>
-                  <a:lnTo>
-                    <a:pt x="214867" y="2168451"/>
-                  </a:lnTo>
-                  <a:lnTo>
-                    <a:pt x="143245" y="2159148"/>
-                  </a:lnTo>
-                  <a:lnTo>
-                    <a:pt x="71622" y="2149779"/>
-                  </a:lnTo>
-                  <a:lnTo>
-                    <a:pt x="0" y="2140343"/>
+                    <a:pt x="3294636" y="175612"/>
+                  </a:lnTo>
+                  <a:lnTo>
+                    <a:pt x="3366258" y="373644"/>
+                  </a:lnTo>
+                  <a:lnTo>
+                    <a:pt x="3437881" y="559822"/>
+                  </a:lnTo>
+                  <a:lnTo>
+                    <a:pt x="3509503" y="734855"/>
+                  </a:lnTo>
+                  <a:lnTo>
+                    <a:pt x="3581126" y="899410"/>
+                  </a:lnTo>
+                  <a:lnTo>
+                    <a:pt x="3652748" y="1054114"/>
+                  </a:lnTo>
+                  <a:lnTo>
+                    <a:pt x="3724371" y="1199557"/>
+                  </a:lnTo>
+                  <a:lnTo>
+                    <a:pt x="3795993" y="1336294"/>
+                  </a:lnTo>
+                  <a:lnTo>
+                    <a:pt x="3867616" y="1464845"/>
+                  </a:lnTo>
+                  <a:lnTo>
+                    <a:pt x="3939238" y="1585701"/>
+                  </a:lnTo>
+                  <a:lnTo>
+                    <a:pt x="4010861" y="1699322"/>
+                  </a:lnTo>
+                  <a:lnTo>
+                    <a:pt x="4082483" y="1806142"/>
+                  </a:lnTo>
+                  <a:lnTo>
+                    <a:pt x="4154106" y="1906567"/>
+                  </a:lnTo>
+                  <a:lnTo>
+                    <a:pt x="4225729" y="2000981"/>
+                  </a:lnTo>
+                  <a:lnTo>
+                    <a:pt x="4297351" y="2089742"/>
+                  </a:lnTo>
+                  <a:lnTo>
+                    <a:pt x="4368974" y="2173191"/>
+                  </a:lnTo>
+                  <a:lnTo>
+                    <a:pt x="4440596" y="2251643"/>
+                  </a:lnTo>
+                  <a:lnTo>
+                    <a:pt x="4512219" y="2325400"/>
+                  </a:lnTo>
+                  <a:lnTo>
+                    <a:pt x="4583841" y="2394741"/>
+                  </a:lnTo>
+                  <a:lnTo>
+                    <a:pt x="4655464" y="2459931"/>
+                  </a:lnTo>
+                  <a:lnTo>
+                    <a:pt x="4727086" y="2521219"/>
+                  </a:lnTo>
+                  <a:lnTo>
+                    <a:pt x="4798709" y="2578838"/>
+                  </a:lnTo>
+                  <a:lnTo>
+                    <a:pt x="4870331" y="2633008"/>
+                  </a:lnTo>
+                  <a:lnTo>
+                    <a:pt x="4941954" y="2651655"/>
+                  </a:lnTo>
+                  <a:lnTo>
+                    <a:pt x="5013576" y="2647179"/>
+                  </a:lnTo>
+                  <a:lnTo>
+                    <a:pt x="5085199" y="2642679"/>
+                  </a:lnTo>
+                  <a:lnTo>
+                    <a:pt x="5156821" y="2638155"/>
+                  </a:lnTo>
+                  <a:lnTo>
+                    <a:pt x="5228444" y="2633606"/>
+                  </a:lnTo>
+                  <a:lnTo>
+                    <a:pt x="5300066" y="2629033"/>
+                  </a:lnTo>
+                  <a:lnTo>
+                    <a:pt x="5371689" y="2624436"/>
+                  </a:lnTo>
+                  <a:lnTo>
+                    <a:pt x="5443311" y="2619813"/>
+                  </a:lnTo>
+                  <a:lnTo>
+                    <a:pt x="5514934" y="2615166"/>
+                  </a:lnTo>
+                  <a:lnTo>
+                    <a:pt x="5586557" y="2610494"/>
+                  </a:lnTo>
+                  <a:lnTo>
+                    <a:pt x="5658179" y="2605797"/>
+                  </a:lnTo>
+                  <a:lnTo>
+                    <a:pt x="5729802" y="2601074"/>
+                  </a:lnTo>
+                  <a:lnTo>
+                    <a:pt x="5801424" y="2596326"/>
+                  </a:lnTo>
+                  <a:lnTo>
+                    <a:pt x="5873047" y="2591553"/>
+                  </a:lnTo>
+                  <a:lnTo>
+                    <a:pt x="5944669" y="2586754"/>
+                  </a:lnTo>
+                  <a:lnTo>
+                    <a:pt x="6016292" y="2581929"/>
+                  </a:lnTo>
+                  <a:lnTo>
+                    <a:pt x="6087914" y="2577078"/>
+                  </a:lnTo>
+                  <a:lnTo>
+                    <a:pt x="6159537" y="2572201"/>
+                  </a:lnTo>
+                  <a:lnTo>
+                    <a:pt x="6231159" y="2567298"/>
+                  </a:lnTo>
+                  <a:lnTo>
+                    <a:pt x="6302782" y="2562368"/>
+                  </a:lnTo>
+                  <a:lnTo>
+                    <a:pt x="6374404" y="2557412"/>
+                  </a:lnTo>
+                  <a:lnTo>
+                    <a:pt x="6446027" y="2552429"/>
+                  </a:lnTo>
+                  <a:lnTo>
+                    <a:pt x="6517649" y="2547419"/>
+                  </a:lnTo>
+                  <a:lnTo>
+                    <a:pt x="6589272" y="2542383"/>
+                  </a:lnTo>
+                  <a:lnTo>
+                    <a:pt x="6660894" y="2537319"/>
+                  </a:lnTo>
+                  <a:lnTo>
+                    <a:pt x="6732517" y="2532228"/>
+                  </a:lnTo>
+                  <a:lnTo>
+                    <a:pt x="6804139" y="2527110"/>
+                  </a:lnTo>
+                  <a:lnTo>
+                    <a:pt x="6875762" y="2521964"/>
+                  </a:lnTo>
+                  <a:lnTo>
+                    <a:pt x="6947385" y="2516791"/>
+                  </a:lnTo>
+                  <a:lnTo>
+                    <a:pt x="7019007" y="2511589"/>
+                  </a:lnTo>
+                  <a:lnTo>
+                    <a:pt x="7090630" y="2506360"/>
+                  </a:lnTo>
+                  <a:lnTo>
+                    <a:pt x="7090630" y="3358221"/>
+                  </a:lnTo>
+                  <a:lnTo>
+                    <a:pt x="7019007" y="3350228"/>
+                  </a:lnTo>
+                  <a:lnTo>
+                    <a:pt x="6947385" y="3341727"/>
+                  </a:lnTo>
+                  <a:lnTo>
+                    <a:pt x="6875762" y="3332684"/>
+                  </a:lnTo>
+                  <a:lnTo>
+                    <a:pt x="6804139" y="3323065"/>
+                  </a:lnTo>
+                  <a:lnTo>
+                    <a:pt x="6732517" y="3312834"/>
+                  </a:lnTo>
+                  <a:lnTo>
+                    <a:pt x="6660894" y="3301951"/>
+                  </a:lnTo>
+                  <a:lnTo>
+                    <a:pt x="6589272" y="3290375"/>
+                  </a:lnTo>
+                  <a:lnTo>
+                    <a:pt x="6517649" y="3278063"/>
+                  </a:lnTo>
+                  <a:lnTo>
+                    <a:pt x="6446027" y="3264966"/>
+                  </a:lnTo>
+                  <a:lnTo>
+                    <a:pt x="6374404" y="3251035"/>
+                  </a:lnTo>
+                  <a:lnTo>
+                    <a:pt x="6302782" y="3236218"/>
+                  </a:lnTo>
+                  <a:lnTo>
+                    <a:pt x="6231159" y="3220456"/>
+                  </a:lnTo>
+                  <a:lnTo>
+                    <a:pt x="6159537" y="3203692"/>
+                  </a:lnTo>
+                  <a:lnTo>
+                    <a:pt x="6087914" y="3185860"/>
+                  </a:lnTo>
+                  <a:lnTo>
+                    <a:pt x="6016292" y="3166892"/>
+                  </a:lnTo>
+                  <a:lnTo>
+                    <a:pt x="5944669" y="3146717"/>
+                  </a:lnTo>
+                  <a:lnTo>
+                    <a:pt x="5873047" y="3125257"/>
+                  </a:lnTo>
+                  <a:lnTo>
+                    <a:pt x="5801424" y="3102430"/>
+                  </a:lnTo>
+                  <a:lnTo>
+                    <a:pt x="5729802" y="3078150"/>
+                  </a:lnTo>
+                  <a:lnTo>
+                    <a:pt x="5658179" y="3052324"/>
+                  </a:lnTo>
+                  <a:lnTo>
+                    <a:pt x="5586557" y="3024854"/>
+                  </a:lnTo>
+                  <a:lnTo>
+                    <a:pt x="5514934" y="2995635"/>
+                  </a:lnTo>
+                  <a:lnTo>
+                    <a:pt x="5443311" y="2964555"/>
+                  </a:lnTo>
+                  <a:lnTo>
+                    <a:pt x="5371689" y="2931496"/>
+                  </a:lnTo>
+                  <a:lnTo>
+                    <a:pt x="5300066" y="2896332"/>
+                  </a:lnTo>
+                  <a:lnTo>
+                    <a:pt x="5228444" y="2858929"/>
+                  </a:lnTo>
+                  <a:lnTo>
+                    <a:pt x="5156821" y="2819144"/>
+                  </a:lnTo>
+                  <a:lnTo>
+                    <a:pt x="5085199" y="2776826"/>
+                  </a:lnTo>
+                  <a:lnTo>
+                    <a:pt x="5013576" y="2731814"/>
+                  </a:lnTo>
+                  <a:lnTo>
+                    <a:pt x="4941954" y="2683935"/>
+                  </a:lnTo>
+                  <a:lnTo>
+                    <a:pt x="4870331" y="2656106"/>
+                  </a:lnTo>
+                  <a:lnTo>
+                    <a:pt x="4798709" y="2660535"/>
+                  </a:lnTo>
+                  <a:lnTo>
+                    <a:pt x="4727086" y="2664939"/>
+                  </a:lnTo>
+                  <a:lnTo>
+                    <a:pt x="4655464" y="2669320"/>
+                  </a:lnTo>
+                  <a:lnTo>
+                    <a:pt x="4583841" y="2673677"/>
+                  </a:lnTo>
+                  <a:lnTo>
+                    <a:pt x="4512219" y="2678011"/>
+                  </a:lnTo>
+                  <a:lnTo>
+                    <a:pt x="4440596" y="2682322"/>
+                  </a:lnTo>
+                  <a:lnTo>
+                    <a:pt x="4368974" y="2686610"/>
+                  </a:lnTo>
+                  <a:lnTo>
+                    <a:pt x="4297351" y="2690875"/>
+                  </a:lnTo>
+                  <a:lnTo>
+                    <a:pt x="4225729" y="2695117"/>
+                  </a:lnTo>
+                  <a:lnTo>
+                    <a:pt x="4154106" y="2699336"/>
+                  </a:lnTo>
+                  <a:lnTo>
+                    <a:pt x="4082483" y="2703533"/>
+                  </a:lnTo>
+                  <a:lnTo>
+                    <a:pt x="4010861" y="2707708"/>
+                  </a:lnTo>
+                  <a:lnTo>
+                    <a:pt x="3939238" y="2711860"/>
+                  </a:lnTo>
+                  <a:lnTo>
+                    <a:pt x="3867616" y="2715989"/>
+                  </a:lnTo>
+                  <a:lnTo>
+                    <a:pt x="3795993" y="2720097"/>
+                  </a:lnTo>
+                  <a:lnTo>
+                    <a:pt x="3724371" y="2724183"/>
+                  </a:lnTo>
+                  <a:lnTo>
+                    <a:pt x="3652748" y="2728247"/>
+                  </a:lnTo>
+                  <a:lnTo>
+                    <a:pt x="3581126" y="2732289"/>
+                  </a:lnTo>
+                  <a:lnTo>
+                    <a:pt x="3509503" y="2736309"/>
+                  </a:lnTo>
+                  <a:lnTo>
+                    <a:pt x="3437881" y="2740308"/>
+                  </a:lnTo>
+                  <a:lnTo>
+                    <a:pt x="3366258" y="2744286"/>
+                  </a:lnTo>
+                  <a:lnTo>
+                    <a:pt x="3294636" y="2748242"/>
+                  </a:lnTo>
+                  <a:lnTo>
+                    <a:pt x="3223013" y="2752177"/>
+                  </a:lnTo>
+                  <a:lnTo>
+                    <a:pt x="3151391" y="2756091"/>
+                  </a:lnTo>
+                  <a:lnTo>
+                    <a:pt x="3079768" y="2759985"/>
+                  </a:lnTo>
+                  <a:lnTo>
+                    <a:pt x="3008146" y="2763857"/>
+                  </a:lnTo>
+                  <a:lnTo>
+                    <a:pt x="2936523" y="2767709"/>
+                  </a:lnTo>
+                  <a:lnTo>
+                    <a:pt x="2864901" y="2771540"/>
+                  </a:lnTo>
+                  <a:lnTo>
+                    <a:pt x="2793278" y="2775350"/>
+                  </a:lnTo>
+                  <a:lnTo>
+                    <a:pt x="2721655" y="2779140"/>
+                  </a:lnTo>
+                  <a:lnTo>
+                    <a:pt x="2650033" y="2782910"/>
+                  </a:lnTo>
+                  <a:lnTo>
+                    <a:pt x="2578410" y="2786660"/>
+                  </a:lnTo>
+                  <a:lnTo>
+                    <a:pt x="2506788" y="2790389"/>
+                  </a:lnTo>
+                  <a:lnTo>
+                    <a:pt x="2435165" y="2794099"/>
+                  </a:lnTo>
+                  <a:lnTo>
+                    <a:pt x="2363543" y="2797789"/>
+                  </a:lnTo>
+                  <a:lnTo>
+                    <a:pt x="2291920" y="2801459"/>
+                  </a:lnTo>
+                  <a:lnTo>
+                    <a:pt x="2220298" y="2805109"/>
+                  </a:lnTo>
+                  <a:lnTo>
+                    <a:pt x="2148675" y="2808740"/>
+                  </a:lnTo>
+                  <a:lnTo>
+                    <a:pt x="2077053" y="2812352"/>
+                  </a:lnTo>
+                  <a:lnTo>
+                    <a:pt x="2005430" y="2815944"/>
+                  </a:lnTo>
+                  <a:lnTo>
+                    <a:pt x="1933808" y="2819517"/>
+                  </a:lnTo>
+                  <a:lnTo>
+                    <a:pt x="1862185" y="2823070"/>
+                  </a:lnTo>
+                  <a:lnTo>
+                    <a:pt x="1790563" y="2826605"/>
+                  </a:lnTo>
+                  <a:lnTo>
+                    <a:pt x="1718940" y="2830121"/>
+                  </a:lnTo>
+                  <a:lnTo>
+                    <a:pt x="1647318" y="2833618"/>
+                  </a:lnTo>
+                  <a:lnTo>
+                    <a:pt x="1575695" y="2837097"/>
+                  </a:lnTo>
+                  <a:lnTo>
+                    <a:pt x="1504073" y="2840556"/>
+                  </a:lnTo>
+                  <a:lnTo>
+                    <a:pt x="1432450" y="2843998"/>
+                  </a:lnTo>
+                  <a:lnTo>
+                    <a:pt x="1360827" y="2847420"/>
+                  </a:lnTo>
+                  <a:lnTo>
+                    <a:pt x="1289205" y="2850825"/>
+                  </a:lnTo>
+                  <a:lnTo>
+                    <a:pt x="1217582" y="2854211"/>
+                  </a:lnTo>
+                  <a:lnTo>
+                    <a:pt x="1145960" y="2857579"/>
+                  </a:lnTo>
+                  <a:lnTo>
+                    <a:pt x="1074337" y="2860930"/>
+                  </a:lnTo>
+                  <a:lnTo>
+                    <a:pt x="1002715" y="2864262"/>
+                  </a:lnTo>
+                  <a:lnTo>
+                    <a:pt x="931092" y="2867576"/>
+                  </a:lnTo>
+                  <a:lnTo>
+                    <a:pt x="859470" y="2870873"/>
+                  </a:lnTo>
+                  <a:lnTo>
+                    <a:pt x="787847" y="2874152"/>
+                  </a:lnTo>
+                  <a:lnTo>
+                    <a:pt x="716225" y="2877413"/>
+                  </a:lnTo>
+                  <a:lnTo>
+                    <a:pt x="644602" y="2880657"/>
+                  </a:lnTo>
+                  <a:lnTo>
+                    <a:pt x="572980" y="2883884"/>
+                  </a:lnTo>
+                  <a:lnTo>
+                    <a:pt x="501357" y="2887094"/>
+                  </a:lnTo>
+                  <a:lnTo>
+                    <a:pt x="429735" y="2890286"/>
+                  </a:lnTo>
+                  <a:lnTo>
+                    <a:pt x="358112" y="2893461"/>
+                  </a:lnTo>
+                  <a:lnTo>
+                    <a:pt x="286490" y="2896619"/>
+                  </a:lnTo>
+                  <a:lnTo>
+                    <a:pt x="214867" y="2899760"/>
+                  </a:lnTo>
+                  <a:lnTo>
+                    <a:pt x="143245" y="2902885"/>
+                  </a:lnTo>
+                  <a:lnTo>
+                    <a:pt x="71622" y="2905993"/>
+                  </a:lnTo>
+                  <a:lnTo>
+                    <a:pt x="0" y="2909084"/>
+                  </a:lnTo>
+                  <a:lnTo>
+                    <a:pt x="0" y="0"/>
                   </a:lnTo>
                   <a:close/>
                 </a:path>
@@ -3513,192 +3501,177 @@
           </p:nvSpPr>
           <p:spPr>
             <a:xfrm>
-              <a:off x="4040303" y="2073503"/>
-              <a:ext cx="4222375" cy="2815157"/>
+              <a:off x="4406973" y="2073503"/>
+              <a:ext cx="3855705" cy="2651655"/>
             </a:xfrm>
             <a:custGeom>
               <a:avLst/>
               <a:pathLst>
-                <a:path w="4222375" h="2815157">
+                <a:path w="3855705" h="2651655">
                   <a:moveTo>
                     <a:pt x="0" y="0"/>
                   </a:moveTo>
                   <a:lnTo>
-                    <a:pt x="68269" y="164205"/>
-                  </a:lnTo>
-                  <a:lnTo>
-                    <a:pt x="139891" y="327977"/>
-                  </a:lnTo>
-                  <a:lnTo>
-                    <a:pt x="211514" y="483669"/>
-                  </a:lnTo>
-                  <a:lnTo>
-                    <a:pt x="283136" y="631680"/>
-                  </a:lnTo>
-                  <a:lnTo>
-                    <a:pt x="354759" y="772389"/>
-                  </a:lnTo>
-                  <a:lnTo>
-                    <a:pt x="426381" y="906156"/>
-                  </a:lnTo>
-                  <a:lnTo>
-                    <a:pt x="498004" y="1033323"/>
-                  </a:lnTo>
-                  <a:lnTo>
-                    <a:pt x="569627" y="1154216"/>
-                  </a:lnTo>
-                  <a:lnTo>
-                    <a:pt x="641249" y="1269145"/>
-                  </a:lnTo>
-                  <a:lnTo>
-                    <a:pt x="712872" y="1378404"/>
-                  </a:lnTo>
-                  <a:lnTo>
-                    <a:pt x="784494" y="1482273"/>
-                  </a:lnTo>
-                  <a:lnTo>
-                    <a:pt x="856117" y="1581017"/>
-                  </a:lnTo>
-                  <a:lnTo>
-                    <a:pt x="927739" y="1674889"/>
-                  </a:lnTo>
-                  <a:lnTo>
-                    <a:pt x="999362" y="1764131"/>
-                  </a:lnTo>
-                  <a:lnTo>
-                    <a:pt x="1070984" y="1848969"/>
-                  </a:lnTo>
-                  <a:lnTo>
-                    <a:pt x="1142607" y="1929622"/>
-                  </a:lnTo>
-                  <a:lnTo>
-                    <a:pt x="1214229" y="2006296"/>
-                  </a:lnTo>
-                  <a:lnTo>
-                    <a:pt x="1285852" y="2079187"/>
-                  </a:lnTo>
-                  <a:lnTo>
-                    <a:pt x="1357474" y="2148482"/>
-                  </a:lnTo>
-                  <a:lnTo>
-                    <a:pt x="1429097" y="2214358"/>
-                  </a:lnTo>
-                  <a:lnTo>
-                    <a:pt x="1500719" y="2276984"/>
-                  </a:lnTo>
-                  <a:lnTo>
-                    <a:pt x="1572342" y="2336521"/>
-                  </a:lnTo>
-                  <a:lnTo>
-                    <a:pt x="1643964" y="2393120"/>
-                  </a:lnTo>
-                  <a:lnTo>
-                    <a:pt x="1715587" y="2446927"/>
-                  </a:lnTo>
-                  <a:lnTo>
-                    <a:pt x="1787209" y="2498079"/>
-                  </a:lnTo>
-                  <a:lnTo>
-                    <a:pt x="1858832" y="2546707"/>
-                  </a:lnTo>
-                  <a:lnTo>
-                    <a:pt x="1930455" y="2592937"/>
-                  </a:lnTo>
-                  <a:lnTo>
-                    <a:pt x="2002077" y="2636886"/>
-                  </a:lnTo>
-                  <a:lnTo>
-                    <a:pt x="2073700" y="2657724"/>
-                  </a:lnTo>
-                  <a:lnTo>
-                    <a:pt x="2145322" y="2663525"/>
-                  </a:lnTo>
-                  <a:lnTo>
-                    <a:pt x="2216945" y="2669286"/>
-                  </a:lnTo>
-                  <a:lnTo>
-                    <a:pt x="2288567" y="2675007"/>
-                  </a:lnTo>
-                  <a:lnTo>
-                    <a:pt x="2360190" y="2680687"/>
-                  </a:lnTo>
-                  <a:lnTo>
-                    <a:pt x="2431812" y="2686327"/>
-                  </a:lnTo>
-                  <a:lnTo>
-                    <a:pt x="2503435" y="2691928"/>
-                  </a:lnTo>
-                  <a:lnTo>
-                    <a:pt x="2575057" y="2697489"/>
-                  </a:lnTo>
-                  <a:lnTo>
-                    <a:pt x="2646680" y="2703012"/>
-                  </a:lnTo>
-                  <a:lnTo>
-                    <a:pt x="2718302" y="2708495"/>
-                  </a:lnTo>
-                  <a:lnTo>
-                    <a:pt x="2789925" y="2713940"/>
-                  </a:lnTo>
-                  <a:lnTo>
-                    <a:pt x="2861547" y="2719347"/>
-                  </a:lnTo>
-                  <a:lnTo>
-                    <a:pt x="2933170" y="2724716"/>
-                  </a:lnTo>
-                  <a:lnTo>
-                    <a:pt x="3004792" y="2730047"/>
-                  </a:lnTo>
-                  <a:lnTo>
-                    <a:pt x="3076415" y="2735341"/>
-                  </a:lnTo>
-                  <a:lnTo>
-                    <a:pt x="3148037" y="2740597"/>
-                  </a:lnTo>
-                  <a:lnTo>
-                    <a:pt x="3219660" y="2745817"/>
-                  </a:lnTo>
-                  <a:lnTo>
-                    <a:pt x="3291283" y="2751000"/>
-                  </a:lnTo>
-                  <a:lnTo>
-                    <a:pt x="3362905" y="2756146"/>
-                  </a:lnTo>
-                  <a:lnTo>
-                    <a:pt x="3434528" y="2761257"/>
-                  </a:lnTo>
-                  <a:lnTo>
-                    <a:pt x="3506150" y="2766331"/>
-                  </a:lnTo>
-                  <a:lnTo>
-                    <a:pt x="3577773" y="2771370"/>
-                  </a:lnTo>
-                  <a:lnTo>
-                    <a:pt x="3649395" y="2776374"/>
-                  </a:lnTo>
-                  <a:lnTo>
-                    <a:pt x="3721018" y="2781342"/>
-                  </a:lnTo>
-                  <a:lnTo>
-                    <a:pt x="3792640" y="2786275"/>
-                  </a:lnTo>
-                  <a:lnTo>
-                    <a:pt x="3864263" y="2791174"/>
-                  </a:lnTo>
-                  <a:lnTo>
-                    <a:pt x="3935885" y="2796038"/>
-                  </a:lnTo>
-                  <a:lnTo>
-                    <a:pt x="4007508" y="2800869"/>
-                  </a:lnTo>
-                  <a:lnTo>
-                    <a:pt x="4079130" y="2805665"/>
-                  </a:lnTo>
-                  <a:lnTo>
-                    <a:pt x="4150753" y="2810427"/>
-                  </a:lnTo>
-                  <a:lnTo>
-                    <a:pt x="4222375" y="2815157"/>
+                    <a:pt x="59711" y="175612"/>
+                  </a:lnTo>
+                  <a:lnTo>
+                    <a:pt x="131334" y="373644"/>
+                  </a:lnTo>
+                  <a:lnTo>
+                    <a:pt x="202956" y="559822"/>
+                  </a:lnTo>
+                  <a:lnTo>
+                    <a:pt x="274579" y="734855"/>
+                  </a:lnTo>
+                  <a:lnTo>
+                    <a:pt x="346201" y="899410"/>
+                  </a:lnTo>
+                  <a:lnTo>
+                    <a:pt x="417824" y="1054114"/>
+                  </a:lnTo>
+                  <a:lnTo>
+                    <a:pt x="489447" y="1199557"/>
+                  </a:lnTo>
+                  <a:lnTo>
+                    <a:pt x="561069" y="1336294"/>
+                  </a:lnTo>
+                  <a:lnTo>
+                    <a:pt x="632692" y="1464845"/>
+                  </a:lnTo>
+                  <a:lnTo>
+                    <a:pt x="704314" y="1585701"/>
+                  </a:lnTo>
+                  <a:lnTo>
+                    <a:pt x="775937" y="1699322"/>
+                  </a:lnTo>
+                  <a:lnTo>
+                    <a:pt x="847559" y="1806142"/>
+                  </a:lnTo>
+                  <a:lnTo>
+                    <a:pt x="919182" y="1906567"/>
+                  </a:lnTo>
+                  <a:lnTo>
+                    <a:pt x="990804" y="2000981"/>
+                  </a:lnTo>
+                  <a:lnTo>
+                    <a:pt x="1062427" y="2089742"/>
+                  </a:lnTo>
+                  <a:lnTo>
+                    <a:pt x="1134049" y="2173191"/>
+                  </a:lnTo>
+                  <a:lnTo>
+                    <a:pt x="1205672" y="2251643"/>
+                  </a:lnTo>
+                  <a:lnTo>
+                    <a:pt x="1277294" y="2325400"/>
+                  </a:lnTo>
+                  <a:lnTo>
+                    <a:pt x="1348917" y="2394741"/>
+                  </a:lnTo>
+                  <a:lnTo>
+                    <a:pt x="1420539" y="2459931"/>
+                  </a:lnTo>
+                  <a:lnTo>
+                    <a:pt x="1492162" y="2521219"/>
+                  </a:lnTo>
+                  <a:lnTo>
+                    <a:pt x="1563784" y="2578838"/>
+                  </a:lnTo>
+                  <a:lnTo>
+                    <a:pt x="1635407" y="2633008"/>
+                  </a:lnTo>
+                  <a:lnTo>
+                    <a:pt x="1707029" y="2651655"/>
+                  </a:lnTo>
+                  <a:lnTo>
+                    <a:pt x="1778652" y="2647179"/>
+                  </a:lnTo>
+                  <a:lnTo>
+                    <a:pt x="1850275" y="2642679"/>
+                  </a:lnTo>
+                  <a:lnTo>
+                    <a:pt x="1921897" y="2638155"/>
+                  </a:lnTo>
+                  <a:lnTo>
+                    <a:pt x="1993520" y="2633606"/>
+                  </a:lnTo>
+                  <a:lnTo>
+                    <a:pt x="2065142" y="2629033"/>
+                  </a:lnTo>
+                  <a:lnTo>
+                    <a:pt x="2136765" y="2624436"/>
+                  </a:lnTo>
+                  <a:lnTo>
+                    <a:pt x="2208387" y="2619813"/>
+                  </a:lnTo>
+                  <a:lnTo>
+                    <a:pt x="2280010" y="2615166"/>
+                  </a:lnTo>
+                  <a:lnTo>
+                    <a:pt x="2351632" y="2610494"/>
+                  </a:lnTo>
+                  <a:lnTo>
+                    <a:pt x="2423255" y="2605797"/>
+                  </a:lnTo>
+                  <a:lnTo>
+                    <a:pt x="2494877" y="2601074"/>
+                  </a:lnTo>
+                  <a:lnTo>
+                    <a:pt x="2566500" y="2596326"/>
+                  </a:lnTo>
+                  <a:lnTo>
+                    <a:pt x="2638122" y="2591553"/>
+                  </a:lnTo>
+                  <a:lnTo>
+                    <a:pt x="2709745" y="2586754"/>
+                  </a:lnTo>
+                  <a:lnTo>
+                    <a:pt x="2781367" y="2581929"/>
+                  </a:lnTo>
+                  <a:lnTo>
+                    <a:pt x="2852990" y="2577078"/>
+                  </a:lnTo>
+                  <a:lnTo>
+                    <a:pt x="2924612" y="2572201"/>
+                  </a:lnTo>
+                  <a:lnTo>
+                    <a:pt x="2996235" y="2567298"/>
+                  </a:lnTo>
+                  <a:lnTo>
+                    <a:pt x="3067857" y="2562368"/>
+                  </a:lnTo>
+                  <a:lnTo>
+                    <a:pt x="3139480" y="2557412"/>
+                  </a:lnTo>
+                  <a:lnTo>
+                    <a:pt x="3211103" y="2552429"/>
+                  </a:lnTo>
+                  <a:lnTo>
+                    <a:pt x="3282725" y="2547419"/>
+                  </a:lnTo>
+                  <a:lnTo>
+                    <a:pt x="3354348" y="2542383"/>
+                  </a:lnTo>
+                  <a:lnTo>
+                    <a:pt x="3425970" y="2537319"/>
+                  </a:lnTo>
+                  <a:lnTo>
+                    <a:pt x="3497593" y="2532228"/>
+                  </a:lnTo>
+                  <a:lnTo>
+                    <a:pt x="3569215" y="2527110"/>
+                  </a:lnTo>
+                  <a:lnTo>
+                    <a:pt x="3640838" y="2521964"/>
+                  </a:lnTo>
+                  <a:lnTo>
+                    <a:pt x="3712460" y="2516791"/>
+                  </a:lnTo>
+                  <a:lnTo>
+                    <a:pt x="3784083" y="2511589"/>
+                  </a:lnTo>
+                  <a:lnTo>
+                    <a:pt x="3855705" y="2506360"/>
                   </a:lnTo>
                 </a:path>
               </a:pathLst>
@@ -3718,312 +3691,312 @@
           </p:nvSpPr>
           <p:spPr>
             <a:xfrm>
-              <a:off x="1172049" y="4213846"/>
-              <a:ext cx="7090630" cy="1166939"/>
+              <a:off x="1172049" y="4729609"/>
+              <a:ext cx="7090630" cy="702114"/>
             </a:xfrm>
             <a:custGeom>
               <a:avLst/>
               <a:pathLst>
-                <a:path w="7090630" h="1166939">
+                <a:path w="7090630" h="702114">
                   <a:moveTo>
-                    <a:pt x="7090630" y="1166939"/>
+                    <a:pt x="7090630" y="702114"/>
                   </a:moveTo>
                   <a:lnTo>
-                    <a:pt x="7019007" y="1157782"/>
-                  </a:lnTo>
-                  <a:lnTo>
-                    <a:pt x="6947385" y="1148149"/>
-                  </a:lnTo>
-                  <a:lnTo>
-                    <a:pt x="6875762" y="1138016"/>
-                  </a:lnTo>
-                  <a:lnTo>
-                    <a:pt x="6804139" y="1127357"/>
-                  </a:lnTo>
-                  <a:lnTo>
-                    <a:pt x="6732517" y="1116145"/>
-                  </a:lnTo>
-                  <a:lnTo>
-                    <a:pt x="6660894" y="1104351"/>
-                  </a:lnTo>
-                  <a:lnTo>
-                    <a:pt x="6589272" y="1091945"/>
-                  </a:lnTo>
-                  <a:lnTo>
-                    <a:pt x="6517649" y="1078896"/>
-                  </a:lnTo>
-                  <a:lnTo>
-                    <a:pt x="6446027" y="1065169"/>
-                  </a:lnTo>
-                  <a:lnTo>
-                    <a:pt x="6374404" y="1050730"/>
-                  </a:lnTo>
-                  <a:lnTo>
-                    <a:pt x="6302782" y="1035541"/>
-                  </a:lnTo>
-                  <a:lnTo>
-                    <a:pt x="6231159" y="1019564"/>
-                  </a:lnTo>
-                  <a:lnTo>
-                    <a:pt x="6159537" y="1002758"/>
-                  </a:lnTo>
-                  <a:lnTo>
-                    <a:pt x="6087914" y="985080"/>
-                  </a:lnTo>
-                  <a:lnTo>
-                    <a:pt x="6016292" y="966485"/>
-                  </a:lnTo>
-                  <a:lnTo>
-                    <a:pt x="5944669" y="946924"/>
-                  </a:lnTo>
-                  <a:lnTo>
-                    <a:pt x="5873047" y="926348"/>
-                  </a:lnTo>
-                  <a:lnTo>
-                    <a:pt x="5801424" y="904705"/>
-                  </a:lnTo>
-                  <a:lnTo>
-                    <a:pt x="5729802" y="881938"/>
-                  </a:lnTo>
-                  <a:lnTo>
-                    <a:pt x="5658179" y="857990"/>
-                  </a:lnTo>
-                  <a:lnTo>
-                    <a:pt x="5586557" y="832799"/>
-                  </a:lnTo>
-                  <a:lnTo>
-                    <a:pt x="5514934" y="806301"/>
-                  </a:lnTo>
-                  <a:lnTo>
-                    <a:pt x="5443311" y="778427"/>
-                  </a:lnTo>
-                  <a:lnTo>
-                    <a:pt x="5371689" y="749107"/>
-                  </a:lnTo>
-                  <a:lnTo>
-                    <a:pt x="5300066" y="718266"/>
-                  </a:lnTo>
-                  <a:lnTo>
-                    <a:pt x="5228444" y="685824"/>
-                  </a:lnTo>
-                  <a:lnTo>
-                    <a:pt x="5156821" y="651698"/>
-                  </a:lnTo>
-                  <a:lnTo>
-                    <a:pt x="5085199" y="615801"/>
-                  </a:lnTo>
-                  <a:lnTo>
-                    <a:pt x="5013576" y="578042"/>
-                  </a:lnTo>
-                  <a:lnTo>
-                    <a:pt x="4941954" y="538322"/>
-                  </a:lnTo>
-                  <a:lnTo>
-                    <a:pt x="4870331" y="511537"/>
-                  </a:lnTo>
-                  <a:lnTo>
-                    <a:pt x="4798709" y="505653"/>
-                  </a:lnTo>
-                  <a:lnTo>
-                    <a:pt x="4727086" y="499727"/>
-                  </a:lnTo>
-                  <a:lnTo>
-                    <a:pt x="4655464" y="493760"/>
-                  </a:lnTo>
-                  <a:lnTo>
-                    <a:pt x="4583841" y="487750"/>
-                  </a:lnTo>
-                  <a:lnTo>
-                    <a:pt x="4512219" y="481698"/>
-                  </a:lnTo>
-                  <a:lnTo>
-                    <a:pt x="4440596" y="475603"/>
-                  </a:lnTo>
-                  <a:lnTo>
-                    <a:pt x="4368974" y="469465"/>
-                  </a:lnTo>
-                  <a:lnTo>
-                    <a:pt x="4297351" y="463283"/>
-                  </a:lnTo>
-                  <a:lnTo>
-                    <a:pt x="4225729" y="457058"/>
-                  </a:lnTo>
-                  <a:lnTo>
-                    <a:pt x="4154106" y="450788"/>
-                  </a:lnTo>
-                  <a:lnTo>
-                    <a:pt x="4082483" y="444475"/>
-                  </a:lnTo>
-                  <a:lnTo>
-                    <a:pt x="4010861" y="438116"/>
-                  </a:lnTo>
-                  <a:lnTo>
-                    <a:pt x="3939238" y="431713"/>
-                  </a:lnTo>
-                  <a:lnTo>
-                    <a:pt x="3867616" y="425264"/>
-                  </a:lnTo>
-                  <a:lnTo>
-                    <a:pt x="3795993" y="418770"/>
-                  </a:lnTo>
-                  <a:lnTo>
-                    <a:pt x="3724371" y="412230"/>
-                  </a:lnTo>
-                  <a:lnTo>
-                    <a:pt x="3652748" y="405643"/>
-                  </a:lnTo>
-                  <a:lnTo>
-                    <a:pt x="3581126" y="399010"/>
-                  </a:lnTo>
-                  <a:lnTo>
-                    <a:pt x="3509503" y="392330"/>
-                  </a:lnTo>
-                  <a:lnTo>
-                    <a:pt x="3437881" y="385603"/>
-                  </a:lnTo>
-                  <a:lnTo>
-                    <a:pt x="3366258" y="378828"/>
-                  </a:lnTo>
-                  <a:lnTo>
-                    <a:pt x="3294636" y="372006"/>
-                  </a:lnTo>
-                  <a:lnTo>
-                    <a:pt x="3223013" y="365135"/>
-                  </a:lnTo>
-                  <a:lnTo>
-                    <a:pt x="3151391" y="358215"/>
-                  </a:lnTo>
-                  <a:lnTo>
-                    <a:pt x="3079768" y="351246"/>
-                  </a:lnTo>
-                  <a:lnTo>
-                    <a:pt x="3008146" y="344229"/>
-                  </a:lnTo>
-                  <a:lnTo>
-                    <a:pt x="2936523" y="337161"/>
-                  </a:lnTo>
-                  <a:lnTo>
-                    <a:pt x="2864901" y="330044"/>
-                  </a:lnTo>
-                  <a:lnTo>
-                    <a:pt x="2793278" y="322876"/>
-                  </a:lnTo>
-                  <a:lnTo>
-                    <a:pt x="2721655" y="315658"/>
-                  </a:lnTo>
-                  <a:lnTo>
-                    <a:pt x="2650033" y="308388"/>
-                  </a:lnTo>
-                  <a:lnTo>
-                    <a:pt x="2578410" y="301067"/>
-                  </a:lnTo>
-                  <a:lnTo>
-                    <a:pt x="2506788" y="293694"/>
-                  </a:lnTo>
-                  <a:lnTo>
-                    <a:pt x="2435165" y="286269"/>
-                  </a:lnTo>
-                  <a:lnTo>
-                    <a:pt x="2363543" y="278792"/>
-                  </a:lnTo>
-                  <a:lnTo>
-                    <a:pt x="2291920" y="271262"/>
-                  </a:lnTo>
-                  <a:lnTo>
-                    <a:pt x="2220298" y="263678"/>
-                  </a:lnTo>
-                  <a:lnTo>
-                    <a:pt x="2148675" y="256041"/>
-                  </a:lnTo>
-                  <a:lnTo>
-                    <a:pt x="2077053" y="248350"/>
-                  </a:lnTo>
-                  <a:lnTo>
-                    <a:pt x="2005430" y="240604"/>
-                  </a:lnTo>
-                  <a:lnTo>
-                    <a:pt x="1933808" y="232804"/>
-                  </a:lnTo>
-                  <a:lnTo>
-                    <a:pt x="1862185" y="224948"/>
-                  </a:lnTo>
-                  <a:lnTo>
-                    <a:pt x="1790563" y="217037"/>
-                  </a:lnTo>
-                  <a:lnTo>
-                    <a:pt x="1718940" y="209070"/>
-                  </a:lnTo>
-                  <a:lnTo>
-                    <a:pt x="1647318" y="201046"/>
-                  </a:lnTo>
-                  <a:lnTo>
-                    <a:pt x="1575695" y="192966"/>
-                  </a:lnTo>
-                  <a:lnTo>
-                    <a:pt x="1504073" y="184829"/>
-                  </a:lnTo>
-                  <a:lnTo>
-                    <a:pt x="1432450" y="176634"/>
-                  </a:lnTo>
-                  <a:lnTo>
-                    <a:pt x="1360827" y="168381"/>
-                  </a:lnTo>
-                  <a:lnTo>
-                    <a:pt x="1289205" y="160070"/>
-                  </a:lnTo>
-                  <a:lnTo>
-                    <a:pt x="1217582" y="151700"/>
-                  </a:lnTo>
-                  <a:lnTo>
-                    <a:pt x="1145960" y="143270"/>
-                  </a:lnTo>
-                  <a:lnTo>
-                    <a:pt x="1074337" y="134781"/>
-                  </a:lnTo>
-                  <a:lnTo>
-                    <a:pt x="1002715" y="126233"/>
-                  </a:lnTo>
-                  <a:lnTo>
-                    <a:pt x="931092" y="117623"/>
-                  </a:lnTo>
-                  <a:lnTo>
-                    <a:pt x="859470" y="108953"/>
-                  </a:lnTo>
-                  <a:lnTo>
-                    <a:pt x="787847" y="100221"/>
-                  </a:lnTo>
-                  <a:lnTo>
-                    <a:pt x="716225" y="91428"/>
-                  </a:lnTo>
-                  <a:lnTo>
-                    <a:pt x="644602" y="82572"/>
-                  </a:lnTo>
-                  <a:lnTo>
-                    <a:pt x="572980" y="73654"/>
-                  </a:lnTo>
-                  <a:lnTo>
-                    <a:pt x="501357" y="64673"/>
-                  </a:lnTo>
-                  <a:lnTo>
-                    <a:pt x="429735" y="55628"/>
-                  </a:lnTo>
-                  <a:lnTo>
-                    <a:pt x="358112" y="46519"/>
-                  </a:lnTo>
-                  <a:lnTo>
-                    <a:pt x="286490" y="37346"/>
-                  </a:lnTo>
-                  <a:lnTo>
-                    <a:pt x="214867" y="28108"/>
-                  </a:lnTo>
-                  <a:lnTo>
-                    <a:pt x="143245" y="18804"/>
-                  </a:lnTo>
-                  <a:lnTo>
-                    <a:pt x="71622" y="9435"/>
-                  </a:lnTo>
-                  <a:lnTo>
-                    <a:pt x="0" y="0"/>
+                    <a:pt x="7019007" y="694121"/>
+                  </a:lnTo>
+                  <a:lnTo>
+                    <a:pt x="6947385" y="685620"/>
+                  </a:lnTo>
+                  <a:lnTo>
+                    <a:pt x="6875762" y="676577"/>
+                  </a:lnTo>
+                  <a:lnTo>
+                    <a:pt x="6804139" y="666958"/>
+                  </a:lnTo>
+                  <a:lnTo>
+                    <a:pt x="6732517" y="656727"/>
+                  </a:lnTo>
+                  <a:lnTo>
+                    <a:pt x="6660894" y="645844"/>
+                  </a:lnTo>
+                  <a:lnTo>
+                    <a:pt x="6589272" y="634268"/>
+                  </a:lnTo>
+                  <a:lnTo>
+                    <a:pt x="6517649" y="621956"/>
+                  </a:lnTo>
+                  <a:lnTo>
+                    <a:pt x="6446027" y="608859"/>
+                  </a:lnTo>
+                  <a:lnTo>
+                    <a:pt x="6374404" y="594928"/>
+                  </a:lnTo>
+                  <a:lnTo>
+                    <a:pt x="6302782" y="580111"/>
+                  </a:lnTo>
+                  <a:lnTo>
+                    <a:pt x="6231159" y="564350"/>
+                  </a:lnTo>
+                  <a:lnTo>
+                    <a:pt x="6159537" y="547585"/>
+                  </a:lnTo>
+                  <a:lnTo>
+                    <a:pt x="6087914" y="529753"/>
+                  </a:lnTo>
+                  <a:lnTo>
+                    <a:pt x="6016292" y="510785"/>
+                  </a:lnTo>
+                  <a:lnTo>
+                    <a:pt x="5944669" y="490610"/>
+                  </a:lnTo>
+                  <a:lnTo>
+                    <a:pt x="5873047" y="469150"/>
+                  </a:lnTo>
+                  <a:lnTo>
+                    <a:pt x="5801424" y="446323"/>
+                  </a:lnTo>
+                  <a:lnTo>
+                    <a:pt x="5729802" y="422043"/>
+                  </a:lnTo>
+                  <a:lnTo>
+                    <a:pt x="5658179" y="396217"/>
+                  </a:lnTo>
+                  <a:lnTo>
+                    <a:pt x="5586557" y="368747"/>
+                  </a:lnTo>
+                  <a:lnTo>
+                    <a:pt x="5514934" y="339528"/>
+                  </a:lnTo>
+                  <a:lnTo>
+                    <a:pt x="5443311" y="308448"/>
+                  </a:lnTo>
+                  <a:lnTo>
+                    <a:pt x="5371689" y="275389"/>
+                  </a:lnTo>
+                  <a:lnTo>
+                    <a:pt x="5300066" y="240225"/>
+                  </a:lnTo>
+                  <a:lnTo>
+                    <a:pt x="5228444" y="202822"/>
+                  </a:lnTo>
+                  <a:lnTo>
+                    <a:pt x="5156821" y="163037"/>
+                  </a:lnTo>
+                  <a:lnTo>
+                    <a:pt x="5085199" y="120719"/>
+                  </a:lnTo>
+                  <a:lnTo>
+                    <a:pt x="5013576" y="75707"/>
+                  </a:lnTo>
+                  <a:lnTo>
+                    <a:pt x="4941954" y="27828"/>
+                  </a:lnTo>
+                  <a:lnTo>
+                    <a:pt x="4870331" y="0"/>
+                  </a:lnTo>
+                  <a:lnTo>
+                    <a:pt x="4798709" y="4428"/>
+                  </a:lnTo>
+                  <a:lnTo>
+                    <a:pt x="4727086" y="8832"/>
+                  </a:lnTo>
+                  <a:lnTo>
+                    <a:pt x="4655464" y="13213"/>
+                  </a:lnTo>
+                  <a:lnTo>
+                    <a:pt x="4583841" y="17570"/>
+                  </a:lnTo>
+                  <a:lnTo>
+                    <a:pt x="4512219" y="21904"/>
+                  </a:lnTo>
+                  <a:lnTo>
+                    <a:pt x="4440596" y="26215"/>
+                  </a:lnTo>
+                  <a:lnTo>
+                    <a:pt x="4368974" y="30503"/>
+                  </a:lnTo>
+                  <a:lnTo>
+                    <a:pt x="4297351" y="34768"/>
+                  </a:lnTo>
+                  <a:lnTo>
+                    <a:pt x="4225729" y="39010"/>
+                  </a:lnTo>
+                  <a:lnTo>
+                    <a:pt x="4154106" y="43229"/>
+                  </a:lnTo>
+                  <a:lnTo>
+                    <a:pt x="4082483" y="47426"/>
+                  </a:lnTo>
+                  <a:lnTo>
+                    <a:pt x="4010861" y="51601"/>
+                  </a:lnTo>
+                  <a:lnTo>
+                    <a:pt x="3939238" y="55753"/>
+                  </a:lnTo>
+                  <a:lnTo>
+                    <a:pt x="3867616" y="59882"/>
+                  </a:lnTo>
+                  <a:lnTo>
+                    <a:pt x="3795993" y="63990"/>
+                  </a:lnTo>
+                  <a:lnTo>
+                    <a:pt x="3724371" y="68076"/>
+                  </a:lnTo>
+                  <a:lnTo>
+                    <a:pt x="3652748" y="72140"/>
+                  </a:lnTo>
+                  <a:lnTo>
+                    <a:pt x="3581126" y="76182"/>
+                  </a:lnTo>
+                  <a:lnTo>
+                    <a:pt x="3509503" y="80202"/>
+                  </a:lnTo>
+                  <a:lnTo>
+                    <a:pt x="3437881" y="84201"/>
+                  </a:lnTo>
+                  <a:lnTo>
+                    <a:pt x="3366258" y="88179"/>
+                  </a:lnTo>
+                  <a:lnTo>
+                    <a:pt x="3294636" y="92135"/>
+                  </a:lnTo>
+                  <a:lnTo>
+                    <a:pt x="3223013" y="96070"/>
+                  </a:lnTo>
+                  <a:lnTo>
+                    <a:pt x="3151391" y="99984"/>
+                  </a:lnTo>
+                  <a:lnTo>
+                    <a:pt x="3079768" y="103878"/>
+                  </a:lnTo>
+                  <a:lnTo>
+                    <a:pt x="3008146" y="107750"/>
+                  </a:lnTo>
+                  <a:lnTo>
+                    <a:pt x="2936523" y="111602"/>
+                  </a:lnTo>
+                  <a:lnTo>
+                    <a:pt x="2864901" y="115433"/>
+                  </a:lnTo>
+                  <a:lnTo>
+                    <a:pt x="2793278" y="119243"/>
+                  </a:lnTo>
+                  <a:lnTo>
+                    <a:pt x="2721655" y="123033"/>
+                  </a:lnTo>
+                  <a:lnTo>
+                    <a:pt x="2650033" y="126803"/>
+                  </a:lnTo>
+                  <a:lnTo>
+                    <a:pt x="2578410" y="130553"/>
+                  </a:lnTo>
+                  <a:lnTo>
+                    <a:pt x="2506788" y="134282"/>
+                  </a:lnTo>
+                  <a:lnTo>
+                    <a:pt x="2435165" y="137992"/>
+                  </a:lnTo>
+                  <a:lnTo>
+                    <a:pt x="2363543" y="141682"/>
+                  </a:lnTo>
+                  <a:lnTo>
+                    <a:pt x="2291920" y="145352"/>
+                  </a:lnTo>
+                  <a:lnTo>
+                    <a:pt x="2220298" y="149002"/>
+                  </a:lnTo>
+                  <a:lnTo>
+                    <a:pt x="2148675" y="152633"/>
+                  </a:lnTo>
+                  <a:lnTo>
+                    <a:pt x="2077053" y="156245"/>
+                  </a:lnTo>
+                  <a:lnTo>
+                    <a:pt x="2005430" y="159837"/>
+                  </a:lnTo>
+                  <a:lnTo>
+                    <a:pt x="1933808" y="163410"/>
+                  </a:lnTo>
+                  <a:lnTo>
+                    <a:pt x="1862185" y="166963"/>
+                  </a:lnTo>
+                  <a:lnTo>
+                    <a:pt x="1790563" y="170498"/>
+                  </a:lnTo>
+                  <a:lnTo>
+                    <a:pt x="1718940" y="174014"/>
+                  </a:lnTo>
+                  <a:lnTo>
+                    <a:pt x="1647318" y="177511"/>
+                  </a:lnTo>
+                  <a:lnTo>
+                    <a:pt x="1575695" y="180990"/>
+                  </a:lnTo>
+                  <a:lnTo>
+                    <a:pt x="1504073" y="184449"/>
+                  </a:lnTo>
+                  <a:lnTo>
+                    <a:pt x="1432450" y="187891"/>
+                  </a:lnTo>
+                  <a:lnTo>
+                    <a:pt x="1360827" y="191313"/>
+                  </a:lnTo>
+                  <a:lnTo>
+                    <a:pt x="1289205" y="194718"/>
+                  </a:lnTo>
+                  <a:lnTo>
+                    <a:pt x="1217582" y="198104"/>
+                  </a:lnTo>
+                  <a:lnTo>
+                    <a:pt x="1145960" y="201472"/>
+                  </a:lnTo>
+                  <a:lnTo>
+                    <a:pt x="1074337" y="204823"/>
+                  </a:lnTo>
+                  <a:lnTo>
+                    <a:pt x="1002715" y="208155"/>
+                  </a:lnTo>
+                  <a:lnTo>
+                    <a:pt x="931092" y="211469"/>
+                  </a:lnTo>
+                  <a:lnTo>
+                    <a:pt x="859470" y="214766"/>
+                  </a:lnTo>
+                  <a:lnTo>
+                    <a:pt x="787847" y="218045"/>
+                  </a:lnTo>
+                  <a:lnTo>
+                    <a:pt x="716225" y="221306"/>
+                  </a:lnTo>
+                  <a:lnTo>
+                    <a:pt x="644602" y="224550"/>
+                  </a:lnTo>
+                  <a:lnTo>
+                    <a:pt x="572980" y="227777"/>
+                  </a:lnTo>
+                  <a:lnTo>
+                    <a:pt x="501357" y="230987"/>
+                  </a:lnTo>
+                  <a:lnTo>
+                    <a:pt x="429735" y="234179"/>
+                  </a:lnTo>
+                  <a:lnTo>
+                    <a:pt x="358112" y="237354"/>
+                  </a:lnTo>
+                  <a:lnTo>
+                    <a:pt x="286490" y="240512"/>
+                  </a:lnTo>
+                  <a:lnTo>
+                    <a:pt x="214867" y="243654"/>
+                  </a:lnTo>
+                  <a:lnTo>
+                    <a:pt x="143245" y="246778"/>
+                  </a:lnTo>
+                  <a:lnTo>
+                    <a:pt x="71622" y="249886"/>
+                  </a:lnTo>
+                  <a:lnTo>
+                    <a:pt x="0" y="252977"/>
                   </a:lnTo>
                 </a:path>
               </a:pathLst>
@@ -4043,258 +4016,261 @@
           </p:nvSpPr>
           <p:spPr>
             <a:xfrm>
-              <a:off x="2505748" y="2073503"/>
-              <a:ext cx="5756930" cy="3140262"/>
+              <a:off x="2424868" y="2073503"/>
+              <a:ext cx="5837810" cy="3133479"/>
             </a:xfrm>
             <a:custGeom>
               <a:avLst/>
               <a:pathLst>
-                <a:path w="5756930" h="3140262">
+                <a:path w="5837810" h="3133479">
                   <a:moveTo>
                     <a:pt x="0" y="0"/>
                   </a:moveTo>
                   <a:lnTo>
-                    <a:pt x="27128" y="38161"/>
-                  </a:lnTo>
-                  <a:lnTo>
-                    <a:pt x="98751" y="136050"/>
-                  </a:lnTo>
-                  <a:lnTo>
-                    <a:pt x="170373" y="231158"/>
-                  </a:lnTo>
-                  <a:lnTo>
-                    <a:pt x="241996" y="323564"/>
-                  </a:lnTo>
-                  <a:lnTo>
-                    <a:pt x="313618" y="413345"/>
-                  </a:lnTo>
-                  <a:lnTo>
-                    <a:pt x="385241" y="500575"/>
-                  </a:lnTo>
-                  <a:lnTo>
-                    <a:pt x="456863" y="585327"/>
-                  </a:lnTo>
-                  <a:lnTo>
-                    <a:pt x="528486" y="667671"/>
-                  </a:lnTo>
-                  <a:lnTo>
-                    <a:pt x="600108" y="747675"/>
-                  </a:lnTo>
-                  <a:lnTo>
-                    <a:pt x="671731" y="825407"/>
-                  </a:lnTo>
-                  <a:lnTo>
-                    <a:pt x="743353" y="900930"/>
-                  </a:lnTo>
-                  <a:lnTo>
-                    <a:pt x="814976" y="974308"/>
-                  </a:lnTo>
-                  <a:lnTo>
-                    <a:pt x="886598" y="1045601"/>
-                  </a:lnTo>
-                  <a:lnTo>
-                    <a:pt x="958221" y="1114869"/>
-                  </a:lnTo>
-                  <a:lnTo>
-                    <a:pt x="1029844" y="1182168"/>
-                  </a:lnTo>
-                  <a:lnTo>
-                    <a:pt x="1101466" y="1247556"/>
-                  </a:lnTo>
-                  <a:lnTo>
-                    <a:pt x="1173089" y="1311086"/>
-                  </a:lnTo>
-                  <a:lnTo>
-                    <a:pt x="1244711" y="1372811"/>
-                  </a:lnTo>
-                  <a:lnTo>
-                    <a:pt x="1316334" y="1432783"/>
-                  </a:lnTo>
-                  <a:lnTo>
-                    <a:pt x="1387956" y="1491051"/>
-                  </a:lnTo>
-                  <a:lnTo>
-                    <a:pt x="1459579" y="1547663"/>
-                  </a:lnTo>
-                  <a:lnTo>
-                    <a:pt x="1531201" y="1602667"/>
-                  </a:lnTo>
-                  <a:lnTo>
-                    <a:pt x="1602824" y="1656109"/>
-                  </a:lnTo>
-                  <a:lnTo>
-                    <a:pt x="1674446" y="1708032"/>
-                  </a:lnTo>
-                  <a:lnTo>
-                    <a:pt x="1746069" y="1758480"/>
-                  </a:lnTo>
-                  <a:lnTo>
-                    <a:pt x="1817691" y="1807494"/>
-                  </a:lnTo>
-                  <a:lnTo>
-                    <a:pt x="1889314" y="1855117"/>
-                  </a:lnTo>
-                  <a:lnTo>
-                    <a:pt x="1960936" y="1901386"/>
-                  </a:lnTo>
-                  <a:lnTo>
-                    <a:pt x="2032559" y="1946341"/>
-                  </a:lnTo>
-                  <a:lnTo>
-                    <a:pt x="2104181" y="1990018"/>
-                  </a:lnTo>
-                  <a:lnTo>
-                    <a:pt x="2175804" y="2032455"/>
-                  </a:lnTo>
-                  <a:lnTo>
-                    <a:pt x="2247426" y="2073686"/>
-                  </a:lnTo>
-                  <a:lnTo>
-                    <a:pt x="2319049" y="2113746"/>
-                  </a:lnTo>
-                  <a:lnTo>
-                    <a:pt x="2390672" y="2152668"/>
-                  </a:lnTo>
-                  <a:lnTo>
-                    <a:pt x="2462294" y="2190484"/>
-                  </a:lnTo>
-                  <a:lnTo>
-                    <a:pt x="2533917" y="2227225"/>
-                  </a:lnTo>
-                  <a:lnTo>
-                    <a:pt x="2605539" y="2262923"/>
-                  </a:lnTo>
-                  <a:lnTo>
-                    <a:pt x="2677162" y="2297606"/>
-                  </a:lnTo>
-                  <a:lnTo>
-                    <a:pt x="2748784" y="2331305"/>
-                  </a:lnTo>
-                  <a:lnTo>
-                    <a:pt x="2820407" y="2364045"/>
-                  </a:lnTo>
-                  <a:lnTo>
-                    <a:pt x="2892029" y="2395856"/>
-                  </a:lnTo>
-                  <a:lnTo>
-                    <a:pt x="2963652" y="2426763"/>
-                  </a:lnTo>
-                  <a:lnTo>
-                    <a:pt x="3035274" y="2456792"/>
-                  </a:lnTo>
-                  <a:lnTo>
-                    <a:pt x="3106897" y="2485968"/>
-                  </a:lnTo>
-                  <a:lnTo>
-                    <a:pt x="3178519" y="2514314"/>
-                  </a:lnTo>
-                  <a:lnTo>
-                    <a:pt x="3250142" y="2541856"/>
-                  </a:lnTo>
-                  <a:lnTo>
-                    <a:pt x="3321764" y="2568615"/>
-                  </a:lnTo>
-                  <a:lnTo>
-                    <a:pt x="3393387" y="2594614"/>
-                  </a:lnTo>
-                  <a:lnTo>
-                    <a:pt x="3465009" y="2619874"/>
-                  </a:lnTo>
-                  <a:lnTo>
-                    <a:pt x="3536632" y="2644417"/>
-                  </a:lnTo>
-                  <a:lnTo>
-                    <a:pt x="3608254" y="2668262"/>
-                  </a:lnTo>
-                  <a:lnTo>
-                    <a:pt x="3679877" y="2691430"/>
-                  </a:lnTo>
-                  <a:lnTo>
-                    <a:pt x="3751500" y="2713940"/>
-                  </a:lnTo>
-                  <a:lnTo>
-                    <a:pt x="3823122" y="2735810"/>
-                  </a:lnTo>
-                  <a:lnTo>
-                    <a:pt x="3894745" y="2757059"/>
-                  </a:lnTo>
-                  <a:lnTo>
-                    <a:pt x="3966367" y="2777704"/>
-                  </a:lnTo>
-                  <a:lnTo>
-                    <a:pt x="4037990" y="2797762"/>
-                  </a:lnTo>
-                  <a:lnTo>
-                    <a:pt x="4109612" y="2817251"/>
-                  </a:lnTo>
-                  <a:lnTo>
-                    <a:pt x="4181235" y="2836186"/>
-                  </a:lnTo>
-                  <a:lnTo>
-                    <a:pt x="4252857" y="2854583"/>
-                  </a:lnTo>
-                  <a:lnTo>
-                    <a:pt x="4324480" y="2872458"/>
-                  </a:lnTo>
-                  <a:lnTo>
-                    <a:pt x="4396102" y="2889825"/>
-                  </a:lnTo>
-                  <a:lnTo>
-                    <a:pt x="4467725" y="2906698"/>
-                  </a:lnTo>
-                  <a:lnTo>
-                    <a:pt x="4539347" y="2923092"/>
-                  </a:lnTo>
-                  <a:lnTo>
-                    <a:pt x="4610970" y="2939020"/>
-                  </a:lnTo>
-                  <a:lnTo>
-                    <a:pt x="4682592" y="2954496"/>
-                  </a:lnTo>
-                  <a:lnTo>
-                    <a:pt x="4754215" y="2969532"/>
-                  </a:lnTo>
-                  <a:lnTo>
-                    <a:pt x="4825837" y="2984141"/>
-                  </a:lnTo>
-                  <a:lnTo>
-                    <a:pt x="4897460" y="2998334"/>
-                  </a:lnTo>
-                  <a:lnTo>
-                    <a:pt x="4969082" y="3012125"/>
-                  </a:lnTo>
-                  <a:lnTo>
-                    <a:pt x="5040705" y="3025524"/>
-                  </a:lnTo>
-                  <a:lnTo>
-                    <a:pt x="5112328" y="3038542"/>
-                  </a:lnTo>
-                  <a:lnTo>
-                    <a:pt x="5183950" y="3051190"/>
-                  </a:lnTo>
-                  <a:lnTo>
-                    <a:pt x="5255573" y="3063479"/>
-                  </a:lnTo>
-                  <a:lnTo>
-                    <a:pt x="5327195" y="3075419"/>
-                  </a:lnTo>
-                  <a:lnTo>
-                    <a:pt x="5398818" y="3087019"/>
-                  </a:lnTo>
-                  <a:lnTo>
-                    <a:pt x="5470440" y="3098290"/>
-                  </a:lnTo>
-                  <a:lnTo>
-                    <a:pt x="5542063" y="3109241"/>
-                  </a:lnTo>
-                  <a:lnTo>
-                    <a:pt x="5613685" y="3119881"/>
-                  </a:lnTo>
-                  <a:lnTo>
-                    <a:pt x="5685308" y="3130218"/>
-                  </a:lnTo>
-                  <a:lnTo>
-                    <a:pt x="5756930" y="3140262"/>
+                    <a:pt x="36385" y="49862"/>
+                  </a:lnTo>
+                  <a:lnTo>
+                    <a:pt x="108008" y="145285"/>
+                  </a:lnTo>
+                  <a:lnTo>
+                    <a:pt x="179630" y="238057"/>
+                  </a:lnTo>
+                  <a:lnTo>
+                    <a:pt x="251253" y="328251"/>
+                  </a:lnTo>
+                  <a:lnTo>
+                    <a:pt x="322875" y="415938"/>
+                  </a:lnTo>
+                  <a:lnTo>
+                    <a:pt x="394498" y="501188"/>
+                  </a:lnTo>
+                  <a:lnTo>
+                    <a:pt x="466121" y="584070"/>
+                  </a:lnTo>
+                  <a:lnTo>
+                    <a:pt x="537743" y="664648"/>
+                  </a:lnTo>
+                  <a:lnTo>
+                    <a:pt x="609366" y="742987"/>
+                  </a:lnTo>
+                  <a:lnTo>
+                    <a:pt x="680988" y="819149"/>
+                  </a:lnTo>
+                  <a:lnTo>
+                    <a:pt x="752611" y="893195"/>
+                  </a:lnTo>
+                  <a:lnTo>
+                    <a:pt x="824233" y="965183"/>
+                  </a:lnTo>
+                  <a:lnTo>
+                    <a:pt x="895856" y="1035171"/>
+                  </a:lnTo>
+                  <a:lnTo>
+                    <a:pt x="967478" y="1103213"/>
+                  </a:lnTo>
+                  <a:lnTo>
+                    <a:pt x="1039101" y="1169365"/>
+                  </a:lnTo>
+                  <a:lnTo>
+                    <a:pt x="1110723" y="1233679"/>
+                  </a:lnTo>
+                  <a:lnTo>
+                    <a:pt x="1182346" y="1296205"/>
+                  </a:lnTo>
+                  <a:lnTo>
+                    <a:pt x="1253968" y="1356994"/>
+                  </a:lnTo>
+                  <a:lnTo>
+                    <a:pt x="1325591" y="1416094"/>
+                  </a:lnTo>
+                  <a:lnTo>
+                    <a:pt x="1397213" y="1473551"/>
+                  </a:lnTo>
+                  <a:lnTo>
+                    <a:pt x="1468836" y="1529412"/>
+                  </a:lnTo>
+                  <a:lnTo>
+                    <a:pt x="1540458" y="1583721"/>
+                  </a:lnTo>
+                  <a:lnTo>
+                    <a:pt x="1612081" y="1636520"/>
+                  </a:lnTo>
+                  <a:lnTo>
+                    <a:pt x="1683703" y="1687852"/>
+                  </a:lnTo>
+                  <a:lnTo>
+                    <a:pt x="1755326" y="1737757"/>
+                  </a:lnTo>
+                  <a:lnTo>
+                    <a:pt x="1826949" y="1786276"/>
+                  </a:lnTo>
+                  <a:lnTo>
+                    <a:pt x="1898571" y="1833447"/>
+                  </a:lnTo>
+                  <a:lnTo>
+                    <a:pt x="1970194" y="1879306"/>
+                  </a:lnTo>
+                  <a:lnTo>
+                    <a:pt x="2041816" y="1923892"/>
+                  </a:lnTo>
+                  <a:lnTo>
+                    <a:pt x="2113439" y="1967238"/>
+                  </a:lnTo>
+                  <a:lnTo>
+                    <a:pt x="2185061" y="2009380"/>
+                  </a:lnTo>
+                  <a:lnTo>
+                    <a:pt x="2256684" y="2050351"/>
+                  </a:lnTo>
+                  <a:lnTo>
+                    <a:pt x="2328306" y="2090183"/>
+                  </a:lnTo>
+                  <a:lnTo>
+                    <a:pt x="2399929" y="2128908"/>
+                  </a:lnTo>
+                  <a:lnTo>
+                    <a:pt x="2471551" y="2166557"/>
+                  </a:lnTo>
+                  <a:lnTo>
+                    <a:pt x="2543174" y="2203160"/>
+                  </a:lnTo>
+                  <a:lnTo>
+                    <a:pt x="2614796" y="2238746"/>
+                  </a:lnTo>
+                  <a:lnTo>
+                    <a:pt x="2686419" y="2273343"/>
+                  </a:lnTo>
+                  <a:lnTo>
+                    <a:pt x="2758041" y="2306979"/>
+                  </a:lnTo>
+                  <a:lnTo>
+                    <a:pt x="2829664" y="2339680"/>
+                  </a:lnTo>
+                  <a:lnTo>
+                    <a:pt x="2901286" y="2371472"/>
+                  </a:lnTo>
+                  <a:lnTo>
+                    <a:pt x="2972909" y="2402380"/>
+                  </a:lnTo>
+                  <a:lnTo>
+                    <a:pt x="3044531" y="2432430"/>
+                  </a:lnTo>
+                  <a:lnTo>
+                    <a:pt x="3116154" y="2461645"/>
+                  </a:lnTo>
+                  <a:lnTo>
+                    <a:pt x="3187777" y="2490048"/>
+                  </a:lnTo>
+                  <a:lnTo>
+                    <a:pt x="3259399" y="2517661"/>
+                  </a:lnTo>
+                  <a:lnTo>
+                    <a:pt x="3331022" y="2544508"/>
+                  </a:lnTo>
+                  <a:lnTo>
+                    <a:pt x="3402644" y="2570608"/>
+                  </a:lnTo>
+                  <a:lnTo>
+                    <a:pt x="3474267" y="2595983"/>
+                  </a:lnTo>
+                  <a:lnTo>
+                    <a:pt x="3545889" y="2620653"/>
+                  </a:lnTo>
+                  <a:lnTo>
+                    <a:pt x="3617512" y="2644637"/>
+                  </a:lnTo>
+                  <a:lnTo>
+                    <a:pt x="3689134" y="2667955"/>
+                  </a:lnTo>
+                  <a:lnTo>
+                    <a:pt x="3760757" y="2690624"/>
+                  </a:lnTo>
+                  <a:lnTo>
+                    <a:pt x="3832379" y="2712664"/>
+                  </a:lnTo>
+                  <a:lnTo>
+                    <a:pt x="3904002" y="2734092"/>
+                  </a:lnTo>
+                  <a:lnTo>
+                    <a:pt x="3975624" y="2754924"/>
+                  </a:lnTo>
+                  <a:lnTo>
+                    <a:pt x="4047247" y="2775177"/>
+                  </a:lnTo>
+                  <a:lnTo>
+                    <a:pt x="4118869" y="2794867"/>
+                  </a:lnTo>
+                  <a:lnTo>
+                    <a:pt x="4190492" y="2814010"/>
+                  </a:lnTo>
+                  <a:lnTo>
+                    <a:pt x="4262114" y="2832621"/>
+                  </a:lnTo>
+                  <a:lnTo>
+                    <a:pt x="4333737" y="2850715"/>
+                  </a:lnTo>
+                  <a:lnTo>
+                    <a:pt x="4405359" y="2868306"/>
+                  </a:lnTo>
+                  <a:lnTo>
+                    <a:pt x="4476982" y="2885408"/>
+                  </a:lnTo>
+                  <a:lnTo>
+                    <a:pt x="4548605" y="2902035"/>
+                  </a:lnTo>
+                  <a:lnTo>
+                    <a:pt x="4620227" y="2918200"/>
+                  </a:lnTo>
+                  <a:lnTo>
+                    <a:pt x="4691850" y="2933916"/>
+                  </a:lnTo>
+                  <a:lnTo>
+                    <a:pt x="4763472" y="2949195"/>
+                  </a:lnTo>
+                  <a:lnTo>
+                    <a:pt x="4835095" y="2964050"/>
+                  </a:lnTo>
+                  <a:lnTo>
+                    <a:pt x="4906717" y="2978491"/>
+                  </a:lnTo>
+                  <a:lnTo>
+                    <a:pt x="4978340" y="2992532"/>
+                  </a:lnTo>
+                  <a:lnTo>
+                    <a:pt x="5049962" y="3006182"/>
+                  </a:lnTo>
+                  <a:lnTo>
+                    <a:pt x="5121585" y="3019453"/>
+                  </a:lnTo>
+                  <a:lnTo>
+                    <a:pt x="5193207" y="3032355"/>
+                  </a:lnTo>
+                  <a:lnTo>
+                    <a:pt x="5264830" y="3044899"/>
+                  </a:lnTo>
+                  <a:lnTo>
+                    <a:pt x="5336452" y="3057094"/>
+                  </a:lnTo>
+                  <a:lnTo>
+                    <a:pt x="5408075" y="3068950"/>
+                  </a:lnTo>
+                  <a:lnTo>
+                    <a:pt x="5479697" y="3080476"/>
+                  </a:lnTo>
+                  <a:lnTo>
+                    <a:pt x="5551320" y="3091683"/>
+                  </a:lnTo>
+                  <a:lnTo>
+                    <a:pt x="5622942" y="3102578"/>
+                  </a:lnTo>
+                  <a:lnTo>
+                    <a:pt x="5694565" y="3113170"/>
+                  </a:lnTo>
+                  <a:lnTo>
+                    <a:pt x="5766187" y="3123468"/>
+                  </a:lnTo>
+                  <a:lnTo>
+                    <a:pt x="5837810" y="3133479"/>
                   </a:lnTo>
                 </a:path>
               </a:pathLst>
@@ -5034,7 +5010,7 @@
                   <a:latin typeface="Helvetica"/>
                   <a:cs typeface="Helvetica"/>
                 </a:rPr>
-                <a:t>subHR per 1 mL/min: 0.96 (0.94-0.99)  |  per IQR (Δ = 18.2): 0.51 (0.30-0.85)  |  IQR: [-11.5, 6.7]</a:t>
+                <a:t>subHR per 1 mL/min: 0.96 (0.92-1.01)  |  per IQR (Δ = 18.2): 0.52 (0.23-1.13)  |  IQR: [-11.5, 6.7]</a:t>
               </a:r>
             </a:p>
           </p:txBody>

--- a/docs/plots/carbo/jx_carbo_linsubhr_egfrdisc_akikdigo.pptx
+++ b/docs/plots/carbo/jx_carbo_linsubhr_egfrdisc_akikdigo.pptx
@@ -3003,479 +3003,491 @@
           <p:spPr>
             <a:xfrm>
               <a:off x="1172049" y="2073503"/>
-              <a:ext cx="7090630" cy="3358221"/>
+              <a:ext cx="7090630" cy="3316084"/>
             </a:xfrm>
             <a:custGeom>
               <a:avLst/>
               <a:pathLst>
-                <a:path w="7090630" h="3358221">
+                <a:path w="7090630" h="3316084">
                   <a:moveTo>
-                    <a:pt x="3234924" y="0"/>
+                    <a:pt x="2933268" y="0"/>
                   </a:moveTo>
                   <a:lnTo>
-                    <a:pt x="3294636" y="175612"/>
-                  </a:lnTo>
-                  <a:lnTo>
-                    <a:pt x="3366258" y="373644"/>
-                  </a:lnTo>
-                  <a:lnTo>
-                    <a:pt x="3437881" y="559822"/>
-                  </a:lnTo>
-                  <a:lnTo>
-                    <a:pt x="3509503" y="734855"/>
-                  </a:lnTo>
-                  <a:lnTo>
-                    <a:pt x="3581126" y="899410"/>
-                  </a:lnTo>
-                  <a:lnTo>
-                    <a:pt x="3652748" y="1054114"/>
-                  </a:lnTo>
-                  <a:lnTo>
-                    <a:pt x="3724371" y="1199557"/>
-                  </a:lnTo>
-                  <a:lnTo>
-                    <a:pt x="3795993" y="1336294"/>
-                  </a:lnTo>
-                  <a:lnTo>
-                    <a:pt x="3867616" y="1464845"/>
-                  </a:lnTo>
-                  <a:lnTo>
-                    <a:pt x="3939238" y="1585701"/>
-                  </a:lnTo>
-                  <a:lnTo>
-                    <a:pt x="4010861" y="1699322"/>
-                  </a:lnTo>
-                  <a:lnTo>
-                    <a:pt x="4082483" y="1806142"/>
-                  </a:lnTo>
-                  <a:lnTo>
-                    <a:pt x="4154106" y="1906567"/>
-                  </a:lnTo>
-                  <a:lnTo>
-                    <a:pt x="4225729" y="2000981"/>
-                  </a:lnTo>
-                  <a:lnTo>
-                    <a:pt x="4297351" y="2089742"/>
-                  </a:lnTo>
-                  <a:lnTo>
-                    <a:pt x="4368974" y="2173191"/>
-                  </a:lnTo>
-                  <a:lnTo>
-                    <a:pt x="4440596" y="2251643"/>
-                  </a:lnTo>
-                  <a:lnTo>
-                    <a:pt x="4512219" y="2325400"/>
-                  </a:lnTo>
-                  <a:lnTo>
-                    <a:pt x="4583841" y="2394741"/>
-                  </a:lnTo>
-                  <a:lnTo>
-                    <a:pt x="4655464" y="2459931"/>
-                  </a:lnTo>
-                  <a:lnTo>
-                    <a:pt x="4727086" y="2521219"/>
-                  </a:lnTo>
-                  <a:lnTo>
-                    <a:pt x="4798709" y="2578838"/>
-                  </a:lnTo>
-                  <a:lnTo>
-                    <a:pt x="4870331" y="2633008"/>
-                  </a:lnTo>
-                  <a:lnTo>
-                    <a:pt x="4941954" y="2651655"/>
-                  </a:lnTo>
-                  <a:lnTo>
-                    <a:pt x="5013576" y="2647179"/>
-                  </a:lnTo>
-                  <a:lnTo>
-                    <a:pt x="5085199" y="2642679"/>
-                  </a:lnTo>
-                  <a:lnTo>
-                    <a:pt x="5156821" y="2638155"/>
-                  </a:lnTo>
-                  <a:lnTo>
-                    <a:pt x="5228444" y="2633606"/>
-                  </a:lnTo>
-                  <a:lnTo>
-                    <a:pt x="5300066" y="2629033"/>
-                  </a:lnTo>
-                  <a:lnTo>
-                    <a:pt x="5371689" y="2624436"/>
-                  </a:lnTo>
-                  <a:lnTo>
-                    <a:pt x="5443311" y="2619813"/>
-                  </a:lnTo>
-                  <a:lnTo>
-                    <a:pt x="5514934" y="2615166"/>
-                  </a:lnTo>
-                  <a:lnTo>
-                    <a:pt x="5586557" y="2610494"/>
-                  </a:lnTo>
-                  <a:lnTo>
-                    <a:pt x="5658179" y="2605797"/>
-                  </a:lnTo>
-                  <a:lnTo>
-                    <a:pt x="5729802" y="2601074"/>
-                  </a:lnTo>
-                  <a:lnTo>
-                    <a:pt x="5801424" y="2596326"/>
-                  </a:lnTo>
-                  <a:lnTo>
-                    <a:pt x="5873047" y="2591553"/>
-                  </a:lnTo>
-                  <a:lnTo>
-                    <a:pt x="5944669" y="2586754"/>
-                  </a:lnTo>
-                  <a:lnTo>
-                    <a:pt x="6016292" y="2581929"/>
-                  </a:lnTo>
-                  <a:lnTo>
-                    <a:pt x="6087914" y="2577078"/>
-                  </a:lnTo>
-                  <a:lnTo>
-                    <a:pt x="6159537" y="2572201"/>
-                  </a:lnTo>
-                  <a:lnTo>
-                    <a:pt x="6231159" y="2567298"/>
-                  </a:lnTo>
-                  <a:lnTo>
-                    <a:pt x="6302782" y="2562368"/>
-                  </a:lnTo>
-                  <a:lnTo>
-                    <a:pt x="6374404" y="2557412"/>
-                  </a:lnTo>
-                  <a:lnTo>
-                    <a:pt x="6446027" y="2552429"/>
-                  </a:lnTo>
-                  <a:lnTo>
-                    <a:pt x="6517649" y="2547419"/>
-                  </a:lnTo>
-                  <a:lnTo>
-                    <a:pt x="6589272" y="2542383"/>
-                  </a:lnTo>
-                  <a:lnTo>
-                    <a:pt x="6660894" y="2537319"/>
-                  </a:lnTo>
-                  <a:lnTo>
-                    <a:pt x="6732517" y="2532228"/>
-                  </a:lnTo>
-                  <a:lnTo>
-                    <a:pt x="6804139" y="2527110"/>
-                  </a:lnTo>
-                  <a:lnTo>
-                    <a:pt x="6875762" y="2521964"/>
-                  </a:lnTo>
-                  <a:lnTo>
-                    <a:pt x="6947385" y="2516791"/>
-                  </a:lnTo>
-                  <a:lnTo>
-                    <a:pt x="7019007" y="2511589"/>
-                  </a:lnTo>
-                  <a:lnTo>
-                    <a:pt x="7090630" y="2506360"/>
-                  </a:lnTo>
-                  <a:lnTo>
-                    <a:pt x="7090630" y="3358221"/>
-                  </a:lnTo>
-                  <a:lnTo>
-                    <a:pt x="7019007" y="3350228"/>
-                  </a:lnTo>
-                  <a:lnTo>
-                    <a:pt x="6947385" y="3341727"/>
-                  </a:lnTo>
-                  <a:lnTo>
-                    <a:pt x="6875762" y="3332684"/>
-                  </a:lnTo>
-                  <a:lnTo>
-                    <a:pt x="6804139" y="3323065"/>
-                  </a:lnTo>
-                  <a:lnTo>
-                    <a:pt x="6732517" y="3312834"/>
-                  </a:lnTo>
-                  <a:lnTo>
-                    <a:pt x="6660894" y="3301951"/>
-                  </a:lnTo>
-                  <a:lnTo>
-                    <a:pt x="6589272" y="3290375"/>
-                  </a:lnTo>
-                  <a:lnTo>
-                    <a:pt x="6517649" y="3278063"/>
-                  </a:lnTo>
-                  <a:lnTo>
-                    <a:pt x="6446027" y="3264966"/>
-                  </a:lnTo>
-                  <a:lnTo>
-                    <a:pt x="6374404" y="3251035"/>
-                  </a:lnTo>
-                  <a:lnTo>
-                    <a:pt x="6302782" y="3236218"/>
-                  </a:lnTo>
-                  <a:lnTo>
-                    <a:pt x="6231159" y="3220456"/>
-                  </a:lnTo>
-                  <a:lnTo>
-                    <a:pt x="6159537" y="3203692"/>
-                  </a:lnTo>
-                  <a:lnTo>
-                    <a:pt x="6087914" y="3185860"/>
-                  </a:lnTo>
-                  <a:lnTo>
-                    <a:pt x="6016292" y="3166892"/>
-                  </a:lnTo>
-                  <a:lnTo>
-                    <a:pt x="5944669" y="3146717"/>
-                  </a:lnTo>
-                  <a:lnTo>
-                    <a:pt x="5873047" y="3125257"/>
-                  </a:lnTo>
-                  <a:lnTo>
-                    <a:pt x="5801424" y="3102430"/>
-                  </a:lnTo>
-                  <a:lnTo>
-                    <a:pt x="5729802" y="3078150"/>
-                  </a:lnTo>
-                  <a:lnTo>
-                    <a:pt x="5658179" y="3052324"/>
-                  </a:lnTo>
-                  <a:lnTo>
-                    <a:pt x="5586557" y="3024854"/>
-                  </a:lnTo>
-                  <a:lnTo>
-                    <a:pt x="5514934" y="2995635"/>
-                  </a:lnTo>
-                  <a:lnTo>
-                    <a:pt x="5443311" y="2964555"/>
-                  </a:lnTo>
-                  <a:lnTo>
-                    <a:pt x="5371689" y="2931496"/>
-                  </a:lnTo>
-                  <a:lnTo>
-                    <a:pt x="5300066" y="2896332"/>
-                  </a:lnTo>
-                  <a:lnTo>
-                    <a:pt x="5228444" y="2858929"/>
-                  </a:lnTo>
-                  <a:lnTo>
-                    <a:pt x="5156821" y="2819144"/>
-                  </a:lnTo>
-                  <a:lnTo>
-                    <a:pt x="5085199" y="2776826"/>
-                  </a:lnTo>
-                  <a:lnTo>
-                    <a:pt x="5013576" y="2731814"/>
-                  </a:lnTo>
-                  <a:lnTo>
-                    <a:pt x="4941954" y="2683935"/>
-                  </a:lnTo>
-                  <a:lnTo>
-                    <a:pt x="4870331" y="2656106"/>
-                  </a:lnTo>
-                  <a:lnTo>
-                    <a:pt x="4798709" y="2660535"/>
-                  </a:lnTo>
-                  <a:lnTo>
-                    <a:pt x="4727086" y="2664939"/>
-                  </a:lnTo>
-                  <a:lnTo>
-                    <a:pt x="4655464" y="2669320"/>
-                  </a:lnTo>
-                  <a:lnTo>
-                    <a:pt x="4583841" y="2673677"/>
-                  </a:lnTo>
-                  <a:lnTo>
-                    <a:pt x="4512219" y="2678011"/>
-                  </a:lnTo>
-                  <a:lnTo>
-                    <a:pt x="4440596" y="2682322"/>
-                  </a:lnTo>
-                  <a:lnTo>
-                    <a:pt x="4368974" y="2686610"/>
-                  </a:lnTo>
-                  <a:lnTo>
-                    <a:pt x="4297351" y="2690875"/>
-                  </a:lnTo>
-                  <a:lnTo>
-                    <a:pt x="4225729" y="2695117"/>
-                  </a:lnTo>
-                  <a:lnTo>
-                    <a:pt x="4154106" y="2699336"/>
-                  </a:lnTo>
-                  <a:lnTo>
-                    <a:pt x="4082483" y="2703533"/>
-                  </a:lnTo>
-                  <a:lnTo>
-                    <a:pt x="4010861" y="2707708"/>
-                  </a:lnTo>
-                  <a:lnTo>
-                    <a:pt x="3939238" y="2711860"/>
-                  </a:lnTo>
-                  <a:lnTo>
-                    <a:pt x="3867616" y="2715989"/>
-                  </a:lnTo>
-                  <a:lnTo>
-                    <a:pt x="3795993" y="2720097"/>
-                  </a:lnTo>
-                  <a:lnTo>
-                    <a:pt x="3724371" y="2724183"/>
-                  </a:lnTo>
-                  <a:lnTo>
-                    <a:pt x="3652748" y="2728247"/>
-                  </a:lnTo>
-                  <a:lnTo>
-                    <a:pt x="3581126" y="2732289"/>
-                  </a:lnTo>
-                  <a:lnTo>
-                    <a:pt x="3509503" y="2736309"/>
-                  </a:lnTo>
-                  <a:lnTo>
-                    <a:pt x="3437881" y="2740308"/>
-                  </a:lnTo>
-                  <a:lnTo>
-                    <a:pt x="3366258" y="2744286"/>
-                  </a:lnTo>
-                  <a:lnTo>
-                    <a:pt x="3294636" y="2748242"/>
-                  </a:lnTo>
-                  <a:lnTo>
-                    <a:pt x="3223013" y="2752177"/>
-                  </a:lnTo>
-                  <a:lnTo>
-                    <a:pt x="3151391" y="2756091"/>
-                  </a:lnTo>
-                  <a:lnTo>
-                    <a:pt x="3079768" y="2759985"/>
-                  </a:lnTo>
-                  <a:lnTo>
-                    <a:pt x="3008146" y="2763857"/>
-                  </a:lnTo>
-                  <a:lnTo>
-                    <a:pt x="2936523" y="2767709"/>
-                  </a:lnTo>
-                  <a:lnTo>
-                    <a:pt x="2864901" y="2771540"/>
-                  </a:lnTo>
-                  <a:lnTo>
-                    <a:pt x="2793278" y="2775350"/>
-                  </a:lnTo>
-                  <a:lnTo>
-                    <a:pt x="2721655" y="2779140"/>
-                  </a:lnTo>
-                  <a:lnTo>
-                    <a:pt x="2650033" y="2782910"/>
-                  </a:lnTo>
-                  <a:lnTo>
-                    <a:pt x="2578410" y="2786660"/>
-                  </a:lnTo>
-                  <a:lnTo>
-                    <a:pt x="2506788" y="2790389"/>
-                  </a:lnTo>
-                  <a:lnTo>
-                    <a:pt x="2435165" y="2794099"/>
-                  </a:lnTo>
-                  <a:lnTo>
-                    <a:pt x="2363543" y="2797789"/>
-                  </a:lnTo>
-                  <a:lnTo>
-                    <a:pt x="2291920" y="2801459"/>
-                  </a:lnTo>
-                  <a:lnTo>
-                    <a:pt x="2220298" y="2805109"/>
-                  </a:lnTo>
-                  <a:lnTo>
-                    <a:pt x="2148675" y="2808740"/>
-                  </a:lnTo>
-                  <a:lnTo>
-                    <a:pt x="2077053" y="2812352"/>
-                  </a:lnTo>
-                  <a:lnTo>
-                    <a:pt x="2005430" y="2815944"/>
-                  </a:lnTo>
-                  <a:lnTo>
-                    <a:pt x="1933808" y="2819517"/>
-                  </a:lnTo>
-                  <a:lnTo>
-                    <a:pt x="1862185" y="2823070"/>
-                  </a:lnTo>
-                  <a:lnTo>
-                    <a:pt x="1790563" y="2826605"/>
-                  </a:lnTo>
-                  <a:lnTo>
-                    <a:pt x="1718940" y="2830121"/>
-                  </a:lnTo>
-                  <a:lnTo>
-                    <a:pt x="1647318" y="2833618"/>
-                  </a:lnTo>
-                  <a:lnTo>
-                    <a:pt x="1575695" y="2837097"/>
-                  </a:lnTo>
-                  <a:lnTo>
-                    <a:pt x="1504073" y="2840556"/>
-                  </a:lnTo>
-                  <a:lnTo>
-                    <a:pt x="1432450" y="2843998"/>
-                  </a:lnTo>
-                  <a:lnTo>
-                    <a:pt x="1360827" y="2847420"/>
-                  </a:lnTo>
-                  <a:lnTo>
-                    <a:pt x="1289205" y="2850825"/>
-                  </a:lnTo>
-                  <a:lnTo>
-                    <a:pt x="1217582" y="2854211"/>
-                  </a:lnTo>
-                  <a:lnTo>
-                    <a:pt x="1145960" y="2857579"/>
-                  </a:lnTo>
-                  <a:lnTo>
-                    <a:pt x="1074337" y="2860930"/>
-                  </a:lnTo>
-                  <a:lnTo>
-                    <a:pt x="1002715" y="2864262"/>
-                  </a:lnTo>
-                  <a:lnTo>
-                    <a:pt x="931092" y="2867576"/>
-                  </a:lnTo>
-                  <a:lnTo>
-                    <a:pt x="859470" y="2870873"/>
-                  </a:lnTo>
-                  <a:lnTo>
-                    <a:pt x="787847" y="2874152"/>
-                  </a:lnTo>
-                  <a:lnTo>
-                    <a:pt x="716225" y="2877413"/>
-                  </a:lnTo>
-                  <a:lnTo>
-                    <a:pt x="644602" y="2880657"/>
-                  </a:lnTo>
-                  <a:lnTo>
-                    <a:pt x="572980" y="2883884"/>
-                  </a:lnTo>
-                  <a:lnTo>
-                    <a:pt x="501357" y="2887094"/>
-                  </a:lnTo>
-                  <a:lnTo>
-                    <a:pt x="429735" y="2890286"/>
-                  </a:lnTo>
-                  <a:lnTo>
-                    <a:pt x="358112" y="2893461"/>
-                  </a:lnTo>
-                  <a:lnTo>
-                    <a:pt x="286490" y="2896619"/>
-                  </a:lnTo>
-                  <a:lnTo>
-                    <a:pt x="214867" y="2899760"/>
-                  </a:lnTo>
-                  <a:lnTo>
-                    <a:pt x="143245" y="2902885"/>
-                  </a:lnTo>
-                  <a:lnTo>
-                    <a:pt x="71622" y="2905993"/>
-                  </a:lnTo>
-                  <a:lnTo>
-                    <a:pt x="0" y="2909084"/>
-                  </a:lnTo>
-                  <a:lnTo>
-                    <a:pt x="0" y="0"/>
+                    <a:pt x="2936523" y="8475"/>
+                  </a:lnTo>
+                  <a:lnTo>
+                    <a:pt x="3008146" y="185451"/>
+                  </a:lnTo>
+                  <a:lnTo>
+                    <a:pt x="3079768" y="353415"/>
+                  </a:lnTo>
+                  <a:lnTo>
+                    <a:pt x="3151391" y="512825"/>
+                  </a:lnTo>
+                  <a:lnTo>
+                    <a:pt x="3223013" y="664118"/>
+                  </a:lnTo>
+                  <a:lnTo>
+                    <a:pt x="3294636" y="807706"/>
+                  </a:lnTo>
+                  <a:lnTo>
+                    <a:pt x="3366258" y="943982"/>
+                  </a:lnTo>
+                  <a:lnTo>
+                    <a:pt x="3437881" y="1073318"/>
+                  </a:lnTo>
+                  <a:lnTo>
+                    <a:pt x="3509503" y="1196068"/>
+                  </a:lnTo>
+                  <a:lnTo>
+                    <a:pt x="3581126" y="1312566"/>
+                  </a:lnTo>
+                  <a:lnTo>
+                    <a:pt x="3652748" y="1423133"/>
+                  </a:lnTo>
+                  <a:lnTo>
+                    <a:pt x="3724371" y="1528068"/>
+                  </a:lnTo>
+                  <a:lnTo>
+                    <a:pt x="3795993" y="1627660"/>
+                  </a:lnTo>
+                  <a:lnTo>
+                    <a:pt x="3867616" y="1722180"/>
+                  </a:lnTo>
+                  <a:lnTo>
+                    <a:pt x="3939238" y="1811887"/>
+                  </a:lnTo>
+                  <a:lnTo>
+                    <a:pt x="4010861" y="1897025"/>
+                  </a:lnTo>
+                  <a:lnTo>
+                    <a:pt x="4082483" y="1977828"/>
+                  </a:lnTo>
+                  <a:lnTo>
+                    <a:pt x="4154106" y="2054516"/>
+                  </a:lnTo>
+                  <a:lnTo>
+                    <a:pt x="4225729" y="2127299"/>
+                  </a:lnTo>
+                  <a:lnTo>
+                    <a:pt x="4297351" y="2196375"/>
+                  </a:lnTo>
+                  <a:lnTo>
+                    <a:pt x="4368974" y="2261934"/>
+                  </a:lnTo>
+                  <a:lnTo>
+                    <a:pt x="4440596" y="2324154"/>
+                  </a:lnTo>
+                  <a:lnTo>
+                    <a:pt x="4512219" y="2383206"/>
+                  </a:lnTo>
+                  <a:lnTo>
+                    <a:pt x="4583841" y="2439250"/>
+                  </a:lnTo>
+                  <a:lnTo>
+                    <a:pt x="4655464" y="2492441"/>
+                  </a:lnTo>
+                  <a:lnTo>
+                    <a:pt x="4727086" y="2542922"/>
+                  </a:lnTo>
+                  <a:lnTo>
+                    <a:pt x="4798709" y="2590833"/>
+                  </a:lnTo>
+                  <a:lnTo>
+                    <a:pt x="4870331" y="2636304"/>
+                  </a:lnTo>
+                  <a:lnTo>
+                    <a:pt x="4941954" y="2655979"/>
+                  </a:lnTo>
+                  <a:lnTo>
+                    <a:pt x="5013576" y="2658848"/>
+                  </a:lnTo>
+                  <a:lnTo>
+                    <a:pt x="5085199" y="2661707"/>
+                  </a:lnTo>
+                  <a:lnTo>
+                    <a:pt x="5156821" y="2664556"/>
+                  </a:lnTo>
+                  <a:lnTo>
+                    <a:pt x="5228444" y="2667396"/>
+                  </a:lnTo>
+                  <a:lnTo>
+                    <a:pt x="5300066" y="2670225"/>
+                  </a:lnTo>
+                  <a:lnTo>
+                    <a:pt x="5371689" y="2673044"/>
+                  </a:lnTo>
+                  <a:lnTo>
+                    <a:pt x="5443311" y="2675854"/>
+                  </a:lnTo>
+                  <a:lnTo>
+                    <a:pt x="5514934" y="2678654"/>
+                  </a:lnTo>
+                  <a:lnTo>
+                    <a:pt x="5586557" y="2681444"/>
+                  </a:lnTo>
+                  <a:lnTo>
+                    <a:pt x="5658179" y="2684225"/>
+                  </a:lnTo>
+                  <a:lnTo>
+                    <a:pt x="5729802" y="2686996"/>
+                  </a:lnTo>
+                  <a:lnTo>
+                    <a:pt x="5801424" y="2689758"/>
+                  </a:lnTo>
+                  <a:lnTo>
+                    <a:pt x="5873047" y="2692509"/>
+                  </a:lnTo>
+                  <a:lnTo>
+                    <a:pt x="5944669" y="2695252"/>
+                  </a:lnTo>
+                  <a:lnTo>
+                    <a:pt x="6016292" y="2697984"/>
+                  </a:lnTo>
+                  <a:lnTo>
+                    <a:pt x="6087914" y="2700708"/>
+                  </a:lnTo>
+                  <a:lnTo>
+                    <a:pt x="6159537" y="2703422"/>
+                  </a:lnTo>
+                  <a:lnTo>
+                    <a:pt x="6231159" y="2706126"/>
+                  </a:lnTo>
+                  <a:lnTo>
+                    <a:pt x="6302782" y="2708821"/>
+                  </a:lnTo>
+                  <a:lnTo>
+                    <a:pt x="6374404" y="2711507"/>
+                  </a:lnTo>
+                  <a:lnTo>
+                    <a:pt x="6446027" y="2714183"/>
+                  </a:lnTo>
+                  <a:lnTo>
+                    <a:pt x="6517649" y="2716851"/>
+                  </a:lnTo>
+                  <a:lnTo>
+                    <a:pt x="6589272" y="2719509"/>
+                  </a:lnTo>
+                  <a:lnTo>
+                    <a:pt x="6660894" y="2722157"/>
+                  </a:lnTo>
+                  <a:lnTo>
+                    <a:pt x="6732517" y="2724797"/>
+                  </a:lnTo>
+                  <a:lnTo>
+                    <a:pt x="6804139" y="2727427"/>
+                  </a:lnTo>
+                  <a:lnTo>
+                    <a:pt x="6875762" y="2730049"/>
+                  </a:lnTo>
+                  <a:lnTo>
+                    <a:pt x="6947385" y="2732661"/>
+                  </a:lnTo>
+                  <a:lnTo>
+                    <a:pt x="7019007" y="2735264"/>
+                  </a:lnTo>
+                  <a:lnTo>
+                    <a:pt x="7090630" y="2737858"/>
+                  </a:lnTo>
+                  <a:lnTo>
+                    <a:pt x="7090630" y="3316084"/>
+                  </a:lnTo>
+                  <a:lnTo>
+                    <a:pt x="7019007" y="3307088"/>
+                  </a:lnTo>
+                  <a:lnTo>
+                    <a:pt x="6947385" y="3297609"/>
+                  </a:lnTo>
+                  <a:lnTo>
+                    <a:pt x="6875762" y="3287622"/>
+                  </a:lnTo>
+                  <a:lnTo>
+                    <a:pt x="6804139" y="3277098"/>
+                  </a:lnTo>
+                  <a:lnTo>
+                    <a:pt x="6732517" y="3266010"/>
+                  </a:lnTo>
+                  <a:lnTo>
+                    <a:pt x="6660894" y="3254327"/>
+                  </a:lnTo>
+                  <a:lnTo>
+                    <a:pt x="6589272" y="3242017"/>
+                  </a:lnTo>
+                  <a:lnTo>
+                    <a:pt x="6517649" y="3229047"/>
+                  </a:lnTo>
+                  <a:lnTo>
+                    <a:pt x="6446027" y="3215380"/>
+                  </a:lnTo>
+                  <a:lnTo>
+                    <a:pt x="6374404" y="3200981"/>
+                  </a:lnTo>
+                  <a:lnTo>
+                    <a:pt x="6302782" y="3185808"/>
+                  </a:lnTo>
+                  <a:lnTo>
+                    <a:pt x="6231159" y="3169822"/>
+                  </a:lnTo>
+                  <a:lnTo>
+                    <a:pt x="6159537" y="3152978"/>
+                  </a:lnTo>
+                  <a:lnTo>
+                    <a:pt x="6087914" y="3135230"/>
+                  </a:lnTo>
+                  <a:lnTo>
+                    <a:pt x="6016292" y="3116530"/>
+                  </a:lnTo>
+                  <a:lnTo>
+                    <a:pt x="5944669" y="3096826"/>
+                  </a:lnTo>
+                  <a:lnTo>
+                    <a:pt x="5873047" y="3076065"/>
+                  </a:lnTo>
+                  <a:lnTo>
+                    <a:pt x="5801424" y="3054190"/>
+                  </a:lnTo>
+                  <a:lnTo>
+                    <a:pt x="5729802" y="3031141"/>
+                  </a:lnTo>
+                  <a:lnTo>
+                    <a:pt x="5658179" y="3006856"/>
+                  </a:lnTo>
+                  <a:lnTo>
+                    <a:pt x="5586557" y="2981267"/>
+                  </a:lnTo>
+                  <a:lnTo>
+                    <a:pt x="5514934" y="2954306"/>
+                  </a:lnTo>
+                  <a:lnTo>
+                    <a:pt x="5443311" y="2925898"/>
+                  </a:lnTo>
+                  <a:lnTo>
+                    <a:pt x="5371689" y="2895965"/>
+                  </a:lnTo>
+                  <a:lnTo>
+                    <a:pt x="5300066" y="2864427"/>
+                  </a:lnTo>
+                  <a:lnTo>
+                    <a:pt x="5228444" y="2831196"/>
+                  </a:lnTo>
+                  <a:lnTo>
+                    <a:pt x="5156821" y="2796182"/>
+                  </a:lnTo>
+                  <a:lnTo>
+                    <a:pt x="5085199" y="2759290"/>
+                  </a:lnTo>
+                  <a:lnTo>
+                    <a:pt x="5013576" y="2720418"/>
+                  </a:lnTo>
+                  <a:lnTo>
+                    <a:pt x="4941954" y="2679460"/>
+                  </a:lnTo>
+                  <a:lnTo>
+                    <a:pt x="4870331" y="2653101"/>
+                  </a:lnTo>
+                  <a:lnTo>
+                    <a:pt x="4798709" y="2650212"/>
+                  </a:lnTo>
+                  <a:lnTo>
+                    <a:pt x="4727086" y="2647313"/>
+                  </a:lnTo>
+                  <a:lnTo>
+                    <a:pt x="4655464" y="2644404"/>
+                  </a:lnTo>
+                  <a:lnTo>
+                    <a:pt x="4583841" y="2641485"/>
+                  </a:lnTo>
+                  <a:lnTo>
+                    <a:pt x="4512219" y="2638555"/>
+                  </a:lnTo>
+                  <a:lnTo>
+                    <a:pt x="4440596" y="2635616"/>
+                  </a:lnTo>
+                  <a:lnTo>
+                    <a:pt x="4368974" y="2632666"/>
+                  </a:lnTo>
+                  <a:lnTo>
+                    <a:pt x="4297351" y="2629706"/>
+                  </a:lnTo>
+                  <a:lnTo>
+                    <a:pt x="4225729" y="2626736"/>
+                  </a:lnTo>
+                  <a:lnTo>
+                    <a:pt x="4154106" y="2623755"/>
+                  </a:lnTo>
+                  <a:lnTo>
+                    <a:pt x="4082483" y="2620764"/>
+                  </a:lnTo>
+                  <a:lnTo>
+                    <a:pt x="4010861" y="2617763"/>
+                  </a:lnTo>
+                  <a:lnTo>
+                    <a:pt x="3939238" y="2614751"/>
+                  </a:lnTo>
+                  <a:lnTo>
+                    <a:pt x="3867616" y="2611729"/>
+                  </a:lnTo>
+                  <a:lnTo>
+                    <a:pt x="3795993" y="2608696"/>
+                  </a:lnTo>
+                  <a:lnTo>
+                    <a:pt x="3724371" y="2605653"/>
+                  </a:lnTo>
+                  <a:lnTo>
+                    <a:pt x="3652748" y="2602599"/>
+                  </a:lnTo>
+                  <a:lnTo>
+                    <a:pt x="3581126" y="2599534"/>
+                  </a:lnTo>
+                  <a:lnTo>
+                    <a:pt x="3509503" y="2596459"/>
+                  </a:lnTo>
+                  <a:lnTo>
+                    <a:pt x="3437881" y="2593373"/>
+                  </a:lnTo>
+                  <a:lnTo>
+                    <a:pt x="3366258" y="2590277"/>
+                  </a:lnTo>
+                  <a:lnTo>
+                    <a:pt x="3294636" y="2587169"/>
+                  </a:lnTo>
+                  <a:lnTo>
+                    <a:pt x="3223013" y="2584051"/>
+                  </a:lnTo>
+                  <a:lnTo>
+                    <a:pt x="3151391" y="2580922"/>
+                  </a:lnTo>
+                  <a:lnTo>
+                    <a:pt x="3079768" y="2577782"/>
+                  </a:lnTo>
+                  <a:lnTo>
+                    <a:pt x="3008146" y="2574631"/>
+                  </a:lnTo>
+                  <a:lnTo>
+                    <a:pt x="2936523" y="2571469"/>
+                  </a:lnTo>
+                  <a:lnTo>
+                    <a:pt x="2864901" y="2568297"/>
+                  </a:lnTo>
+                  <a:lnTo>
+                    <a:pt x="2793278" y="2565113"/>
+                  </a:lnTo>
+                  <a:lnTo>
+                    <a:pt x="2721655" y="2561918"/>
+                  </a:lnTo>
+                  <a:lnTo>
+                    <a:pt x="2650033" y="2558712"/>
+                  </a:lnTo>
+                  <a:lnTo>
+                    <a:pt x="2578410" y="2555495"/>
+                  </a:lnTo>
+                  <a:lnTo>
+                    <a:pt x="2506788" y="2552266"/>
+                  </a:lnTo>
+                  <a:lnTo>
+                    <a:pt x="2435165" y="2549027"/>
+                  </a:lnTo>
+                  <a:lnTo>
+                    <a:pt x="2363543" y="2545776"/>
+                  </a:lnTo>
+                  <a:lnTo>
+                    <a:pt x="2291920" y="2542514"/>
+                  </a:lnTo>
+                  <a:lnTo>
+                    <a:pt x="2220298" y="2539240"/>
+                  </a:lnTo>
+                  <a:lnTo>
+                    <a:pt x="2148675" y="2535955"/>
+                  </a:lnTo>
+                  <a:lnTo>
+                    <a:pt x="2077053" y="2532659"/>
+                  </a:lnTo>
+                  <a:lnTo>
+                    <a:pt x="2005430" y="2529351"/>
+                  </a:lnTo>
+                  <a:lnTo>
+                    <a:pt x="1933808" y="2526032"/>
+                  </a:lnTo>
+                  <a:lnTo>
+                    <a:pt x="1862185" y="2522701"/>
+                  </a:lnTo>
+                  <a:lnTo>
+                    <a:pt x="1790563" y="2519359"/>
+                  </a:lnTo>
+                  <a:lnTo>
+                    <a:pt x="1718940" y="2516005"/>
+                  </a:lnTo>
+                  <a:lnTo>
+                    <a:pt x="1647318" y="2512639"/>
+                  </a:lnTo>
+                  <a:lnTo>
+                    <a:pt x="1575695" y="2509262"/>
+                  </a:lnTo>
+                  <a:lnTo>
+                    <a:pt x="1504073" y="2505872"/>
+                  </a:lnTo>
+                  <a:lnTo>
+                    <a:pt x="1432450" y="2502472"/>
+                  </a:lnTo>
+                  <a:lnTo>
+                    <a:pt x="1360827" y="2499059"/>
+                  </a:lnTo>
+                  <a:lnTo>
+                    <a:pt x="1289205" y="2495634"/>
+                  </a:lnTo>
+                  <a:lnTo>
+                    <a:pt x="1217582" y="2492198"/>
+                  </a:lnTo>
+                  <a:lnTo>
+                    <a:pt x="1145960" y="2488749"/>
+                  </a:lnTo>
+                  <a:lnTo>
+                    <a:pt x="1074337" y="2485289"/>
+                  </a:lnTo>
+                  <a:lnTo>
+                    <a:pt x="1002715" y="2481816"/>
+                  </a:lnTo>
+                  <a:lnTo>
+                    <a:pt x="931092" y="2478331"/>
+                  </a:lnTo>
+                  <a:lnTo>
+                    <a:pt x="859470" y="2474835"/>
+                  </a:lnTo>
+                  <a:lnTo>
+                    <a:pt x="787847" y="2471326"/>
+                  </a:lnTo>
+                  <a:lnTo>
+                    <a:pt x="716225" y="2467805"/>
+                  </a:lnTo>
+                  <a:lnTo>
+                    <a:pt x="644602" y="2464271"/>
+                  </a:lnTo>
+                  <a:lnTo>
+                    <a:pt x="572980" y="2460726"/>
+                  </a:lnTo>
+                  <a:lnTo>
+                    <a:pt x="501357" y="2457168"/>
+                  </a:lnTo>
+                  <a:lnTo>
+                    <a:pt x="429735" y="2453598"/>
+                  </a:lnTo>
+                  <a:lnTo>
+                    <a:pt x="358112" y="2450015"/>
+                  </a:lnTo>
+                  <a:lnTo>
+                    <a:pt x="286490" y="2446420"/>
+                  </a:lnTo>
+                  <a:lnTo>
+                    <a:pt x="214867" y="2442812"/>
+                  </a:lnTo>
+                  <a:lnTo>
+                    <a:pt x="143245" y="2439192"/>
+                  </a:lnTo>
+                  <a:lnTo>
+                    <a:pt x="71622" y="2435559"/>
+                  </a:lnTo>
+                  <a:lnTo>
+                    <a:pt x="0" y="2431913"/>
                   </a:lnTo>
                   <a:close/>
                 </a:path>
@@ -3501,177 +3513,192 @@
           </p:nvSpPr>
           <p:spPr>
             <a:xfrm>
-              <a:off x="4406973" y="2073503"/>
-              <a:ext cx="3855705" cy="2651655"/>
+              <a:off x="4105317" y="2073503"/>
+              <a:ext cx="4157361" cy="2737858"/>
             </a:xfrm>
             <a:custGeom>
               <a:avLst/>
               <a:pathLst>
-                <a:path w="3855705" h="2651655">
+                <a:path w="4157361" h="2737858">
                   <a:moveTo>
                     <a:pt x="0" y="0"/>
                   </a:moveTo>
                   <a:lnTo>
-                    <a:pt x="59711" y="175612"/>
-                  </a:lnTo>
-                  <a:lnTo>
-                    <a:pt x="131334" y="373644"/>
-                  </a:lnTo>
-                  <a:lnTo>
-                    <a:pt x="202956" y="559822"/>
-                  </a:lnTo>
-                  <a:lnTo>
-                    <a:pt x="274579" y="734855"/>
-                  </a:lnTo>
-                  <a:lnTo>
-                    <a:pt x="346201" y="899410"/>
-                  </a:lnTo>
-                  <a:lnTo>
-                    <a:pt x="417824" y="1054114"/>
-                  </a:lnTo>
-                  <a:lnTo>
-                    <a:pt x="489447" y="1199557"/>
-                  </a:lnTo>
-                  <a:lnTo>
-                    <a:pt x="561069" y="1336294"/>
-                  </a:lnTo>
-                  <a:lnTo>
-                    <a:pt x="632692" y="1464845"/>
-                  </a:lnTo>
-                  <a:lnTo>
-                    <a:pt x="704314" y="1585701"/>
-                  </a:lnTo>
-                  <a:lnTo>
-                    <a:pt x="775937" y="1699322"/>
-                  </a:lnTo>
-                  <a:lnTo>
-                    <a:pt x="847559" y="1806142"/>
-                  </a:lnTo>
-                  <a:lnTo>
-                    <a:pt x="919182" y="1906567"/>
-                  </a:lnTo>
-                  <a:lnTo>
-                    <a:pt x="990804" y="2000981"/>
-                  </a:lnTo>
-                  <a:lnTo>
-                    <a:pt x="1062427" y="2089742"/>
-                  </a:lnTo>
-                  <a:lnTo>
-                    <a:pt x="1134049" y="2173191"/>
-                  </a:lnTo>
-                  <a:lnTo>
-                    <a:pt x="1205672" y="2251643"/>
-                  </a:lnTo>
-                  <a:lnTo>
-                    <a:pt x="1277294" y="2325400"/>
-                  </a:lnTo>
-                  <a:lnTo>
-                    <a:pt x="1348917" y="2394741"/>
-                  </a:lnTo>
-                  <a:lnTo>
-                    <a:pt x="1420539" y="2459931"/>
-                  </a:lnTo>
-                  <a:lnTo>
-                    <a:pt x="1492162" y="2521219"/>
-                  </a:lnTo>
-                  <a:lnTo>
-                    <a:pt x="1563784" y="2578838"/>
-                  </a:lnTo>
-                  <a:lnTo>
-                    <a:pt x="1635407" y="2633008"/>
-                  </a:lnTo>
-                  <a:lnTo>
-                    <a:pt x="1707029" y="2651655"/>
-                  </a:lnTo>
-                  <a:lnTo>
-                    <a:pt x="1778652" y="2647179"/>
-                  </a:lnTo>
-                  <a:lnTo>
-                    <a:pt x="1850275" y="2642679"/>
-                  </a:lnTo>
-                  <a:lnTo>
-                    <a:pt x="1921897" y="2638155"/>
-                  </a:lnTo>
-                  <a:lnTo>
-                    <a:pt x="1993520" y="2633606"/>
-                  </a:lnTo>
-                  <a:lnTo>
-                    <a:pt x="2065142" y="2629033"/>
-                  </a:lnTo>
-                  <a:lnTo>
-                    <a:pt x="2136765" y="2624436"/>
-                  </a:lnTo>
-                  <a:lnTo>
-                    <a:pt x="2208387" y="2619813"/>
-                  </a:lnTo>
-                  <a:lnTo>
-                    <a:pt x="2280010" y="2615166"/>
-                  </a:lnTo>
-                  <a:lnTo>
-                    <a:pt x="2351632" y="2610494"/>
-                  </a:lnTo>
-                  <a:lnTo>
-                    <a:pt x="2423255" y="2605797"/>
-                  </a:lnTo>
-                  <a:lnTo>
-                    <a:pt x="2494877" y="2601074"/>
-                  </a:lnTo>
-                  <a:lnTo>
-                    <a:pt x="2566500" y="2596326"/>
-                  </a:lnTo>
-                  <a:lnTo>
-                    <a:pt x="2638122" y="2591553"/>
-                  </a:lnTo>
-                  <a:lnTo>
-                    <a:pt x="2709745" y="2586754"/>
-                  </a:lnTo>
-                  <a:lnTo>
-                    <a:pt x="2781367" y="2581929"/>
-                  </a:lnTo>
-                  <a:lnTo>
-                    <a:pt x="2852990" y="2577078"/>
-                  </a:lnTo>
-                  <a:lnTo>
-                    <a:pt x="2924612" y="2572201"/>
-                  </a:lnTo>
-                  <a:lnTo>
-                    <a:pt x="2996235" y="2567298"/>
-                  </a:lnTo>
-                  <a:lnTo>
-                    <a:pt x="3067857" y="2562368"/>
-                  </a:lnTo>
-                  <a:lnTo>
-                    <a:pt x="3139480" y="2557412"/>
-                  </a:lnTo>
-                  <a:lnTo>
-                    <a:pt x="3211103" y="2552429"/>
-                  </a:lnTo>
-                  <a:lnTo>
-                    <a:pt x="3282725" y="2547419"/>
-                  </a:lnTo>
-                  <a:lnTo>
-                    <a:pt x="3354348" y="2542383"/>
-                  </a:lnTo>
-                  <a:lnTo>
-                    <a:pt x="3425970" y="2537319"/>
-                  </a:lnTo>
-                  <a:lnTo>
-                    <a:pt x="3497593" y="2532228"/>
-                  </a:lnTo>
-                  <a:lnTo>
-                    <a:pt x="3569215" y="2527110"/>
-                  </a:lnTo>
-                  <a:lnTo>
-                    <a:pt x="3640838" y="2521964"/>
-                  </a:lnTo>
-                  <a:lnTo>
-                    <a:pt x="3712460" y="2516791"/>
-                  </a:lnTo>
-                  <a:lnTo>
-                    <a:pt x="3784083" y="2511589"/>
-                  </a:lnTo>
-                  <a:lnTo>
-                    <a:pt x="3855705" y="2506360"/>
+                    <a:pt x="3255" y="8475"/>
+                  </a:lnTo>
+                  <a:lnTo>
+                    <a:pt x="74877" y="185451"/>
+                  </a:lnTo>
+                  <a:lnTo>
+                    <a:pt x="146500" y="353415"/>
+                  </a:lnTo>
+                  <a:lnTo>
+                    <a:pt x="218122" y="512825"/>
+                  </a:lnTo>
+                  <a:lnTo>
+                    <a:pt x="289745" y="664118"/>
+                  </a:lnTo>
+                  <a:lnTo>
+                    <a:pt x="361368" y="807706"/>
+                  </a:lnTo>
+                  <a:lnTo>
+                    <a:pt x="432990" y="943982"/>
+                  </a:lnTo>
+                  <a:lnTo>
+                    <a:pt x="504613" y="1073318"/>
+                  </a:lnTo>
+                  <a:lnTo>
+                    <a:pt x="576235" y="1196068"/>
+                  </a:lnTo>
+                  <a:lnTo>
+                    <a:pt x="647858" y="1312566"/>
+                  </a:lnTo>
+                  <a:lnTo>
+                    <a:pt x="719480" y="1423133"/>
+                  </a:lnTo>
+                  <a:lnTo>
+                    <a:pt x="791103" y="1528068"/>
+                  </a:lnTo>
+                  <a:lnTo>
+                    <a:pt x="862725" y="1627660"/>
+                  </a:lnTo>
+                  <a:lnTo>
+                    <a:pt x="934348" y="1722180"/>
+                  </a:lnTo>
+                  <a:lnTo>
+                    <a:pt x="1005970" y="1811887"/>
+                  </a:lnTo>
+                  <a:lnTo>
+                    <a:pt x="1077593" y="1897025"/>
+                  </a:lnTo>
+                  <a:lnTo>
+                    <a:pt x="1149215" y="1977828"/>
+                  </a:lnTo>
+                  <a:lnTo>
+                    <a:pt x="1220838" y="2054516"/>
+                  </a:lnTo>
+                  <a:lnTo>
+                    <a:pt x="1292460" y="2127299"/>
+                  </a:lnTo>
+                  <a:lnTo>
+                    <a:pt x="1364083" y="2196375"/>
+                  </a:lnTo>
+                  <a:lnTo>
+                    <a:pt x="1435705" y="2261934"/>
+                  </a:lnTo>
+                  <a:lnTo>
+                    <a:pt x="1507328" y="2324154"/>
+                  </a:lnTo>
+                  <a:lnTo>
+                    <a:pt x="1578950" y="2383206"/>
+                  </a:lnTo>
+                  <a:lnTo>
+                    <a:pt x="1650573" y="2439250"/>
+                  </a:lnTo>
+                  <a:lnTo>
+                    <a:pt x="1722196" y="2492441"/>
+                  </a:lnTo>
+                  <a:lnTo>
+                    <a:pt x="1793818" y="2542922"/>
+                  </a:lnTo>
+                  <a:lnTo>
+                    <a:pt x="1865441" y="2590833"/>
+                  </a:lnTo>
+                  <a:lnTo>
+                    <a:pt x="1937063" y="2636304"/>
+                  </a:lnTo>
+                  <a:lnTo>
+                    <a:pt x="2008686" y="2655979"/>
+                  </a:lnTo>
+                  <a:lnTo>
+                    <a:pt x="2080308" y="2658848"/>
+                  </a:lnTo>
+                  <a:lnTo>
+                    <a:pt x="2151931" y="2661707"/>
+                  </a:lnTo>
+                  <a:lnTo>
+                    <a:pt x="2223553" y="2664556"/>
+                  </a:lnTo>
+                  <a:lnTo>
+                    <a:pt x="2295176" y="2667396"/>
+                  </a:lnTo>
+                  <a:lnTo>
+                    <a:pt x="2366798" y="2670225"/>
+                  </a:lnTo>
+                  <a:lnTo>
+                    <a:pt x="2438421" y="2673044"/>
+                  </a:lnTo>
+                  <a:lnTo>
+                    <a:pt x="2510043" y="2675854"/>
+                  </a:lnTo>
+                  <a:lnTo>
+                    <a:pt x="2581666" y="2678654"/>
+                  </a:lnTo>
+                  <a:lnTo>
+                    <a:pt x="2653288" y="2681444"/>
+                  </a:lnTo>
+                  <a:lnTo>
+                    <a:pt x="2724911" y="2684225"/>
+                  </a:lnTo>
+                  <a:lnTo>
+                    <a:pt x="2796533" y="2686996"/>
+                  </a:lnTo>
+                  <a:lnTo>
+                    <a:pt x="2868156" y="2689758"/>
+                  </a:lnTo>
+                  <a:lnTo>
+                    <a:pt x="2939778" y="2692509"/>
+                  </a:lnTo>
+                  <a:lnTo>
+                    <a:pt x="3011401" y="2695252"/>
+                  </a:lnTo>
+                  <a:lnTo>
+                    <a:pt x="3083024" y="2697984"/>
+                  </a:lnTo>
+                  <a:lnTo>
+                    <a:pt x="3154646" y="2700708"/>
+                  </a:lnTo>
+                  <a:lnTo>
+                    <a:pt x="3226269" y="2703422"/>
+                  </a:lnTo>
+                  <a:lnTo>
+                    <a:pt x="3297891" y="2706126"/>
+                  </a:lnTo>
+                  <a:lnTo>
+                    <a:pt x="3369514" y="2708821"/>
+                  </a:lnTo>
+                  <a:lnTo>
+                    <a:pt x="3441136" y="2711507"/>
+                  </a:lnTo>
+                  <a:lnTo>
+                    <a:pt x="3512759" y="2714183"/>
+                  </a:lnTo>
+                  <a:lnTo>
+                    <a:pt x="3584381" y="2716851"/>
+                  </a:lnTo>
+                  <a:lnTo>
+                    <a:pt x="3656004" y="2719509"/>
+                  </a:lnTo>
+                  <a:lnTo>
+                    <a:pt x="3727626" y="2722157"/>
+                  </a:lnTo>
+                  <a:lnTo>
+                    <a:pt x="3799249" y="2724797"/>
+                  </a:lnTo>
+                  <a:lnTo>
+                    <a:pt x="3870871" y="2727427"/>
+                  </a:lnTo>
+                  <a:lnTo>
+                    <a:pt x="3942494" y="2730049"/>
+                  </a:lnTo>
+                  <a:lnTo>
+                    <a:pt x="4014116" y="2732661"/>
+                  </a:lnTo>
+                  <a:lnTo>
+                    <a:pt x="4085739" y="2735264"/>
+                  </a:lnTo>
+                  <a:lnTo>
+                    <a:pt x="4157361" y="2737858"/>
                   </a:lnTo>
                 </a:path>
               </a:pathLst>
@@ -3691,312 +3718,312 @@
           </p:nvSpPr>
           <p:spPr>
             <a:xfrm>
-              <a:off x="1172049" y="4729609"/>
-              <a:ext cx="7090630" cy="702114"/>
+              <a:off x="1172049" y="4505416"/>
+              <a:ext cx="7090630" cy="884171"/>
             </a:xfrm>
             <a:custGeom>
               <a:avLst/>
               <a:pathLst>
-                <a:path w="7090630" h="702114">
+                <a:path w="7090630" h="884171">
                   <a:moveTo>
-                    <a:pt x="7090630" y="702114"/>
+                    <a:pt x="7090630" y="884171"/>
                   </a:moveTo>
                   <a:lnTo>
-                    <a:pt x="7019007" y="694121"/>
-                  </a:lnTo>
-                  <a:lnTo>
-                    <a:pt x="6947385" y="685620"/>
-                  </a:lnTo>
-                  <a:lnTo>
-                    <a:pt x="6875762" y="676577"/>
-                  </a:lnTo>
-                  <a:lnTo>
-                    <a:pt x="6804139" y="666958"/>
-                  </a:lnTo>
-                  <a:lnTo>
-                    <a:pt x="6732517" y="656727"/>
-                  </a:lnTo>
-                  <a:lnTo>
-                    <a:pt x="6660894" y="645844"/>
-                  </a:lnTo>
-                  <a:lnTo>
-                    <a:pt x="6589272" y="634268"/>
-                  </a:lnTo>
-                  <a:lnTo>
-                    <a:pt x="6517649" y="621956"/>
-                  </a:lnTo>
-                  <a:lnTo>
-                    <a:pt x="6446027" y="608859"/>
-                  </a:lnTo>
-                  <a:lnTo>
-                    <a:pt x="6374404" y="594928"/>
-                  </a:lnTo>
-                  <a:lnTo>
-                    <a:pt x="6302782" y="580111"/>
-                  </a:lnTo>
-                  <a:lnTo>
-                    <a:pt x="6231159" y="564350"/>
-                  </a:lnTo>
-                  <a:lnTo>
-                    <a:pt x="6159537" y="547585"/>
-                  </a:lnTo>
-                  <a:lnTo>
-                    <a:pt x="6087914" y="529753"/>
-                  </a:lnTo>
-                  <a:lnTo>
-                    <a:pt x="6016292" y="510785"/>
-                  </a:lnTo>
-                  <a:lnTo>
-                    <a:pt x="5944669" y="490610"/>
-                  </a:lnTo>
-                  <a:lnTo>
-                    <a:pt x="5873047" y="469150"/>
-                  </a:lnTo>
-                  <a:lnTo>
-                    <a:pt x="5801424" y="446323"/>
-                  </a:lnTo>
-                  <a:lnTo>
-                    <a:pt x="5729802" y="422043"/>
-                  </a:lnTo>
-                  <a:lnTo>
-                    <a:pt x="5658179" y="396217"/>
-                  </a:lnTo>
-                  <a:lnTo>
-                    <a:pt x="5586557" y="368747"/>
-                  </a:lnTo>
-                  <a:lnTo>
-                    <a:pt x="5514934" y="339528"/>
-                  </a:lnTo>
-                  <a:lnTo>
-                    <a:pt x="5443311" y="308448"/>
-                  </a:lnTo>
-                  <a:lnTo>
-                    <a:pt x="5371689" y="275389"/>
-                  </a:lnTo>
-                  <a:lnTo>
-                    <a:pt x="5300066" y="240225"/>
-                  </a:lnTo>
-                  <a:lnTo>
-                    <a:pt x="5228444" y="202822"/>
-                  </a:lnTo>
-                  <a:lnTo>
-                    <a:pt x="5156821" y="163037"/>
-                  </a:lnTo>
-                  <a:lnTo>
-                    <a:pt x="5085199" y="120719"/>
-                  </a:lnTo>
-                  <a:lnTo>
-                    <a:pt x="5013576" y="75707"/>
-                  </a:lnTo>
-                  <a:lnTo>
-                    <a:pt x="4941954" y="27828"/>
-                  </a:lnTo>
-                  <a:lnTo>
-                    <a:pt x="4870331" y="0"/>
-                  </a:lnTo>
-                  <a:lnTo>
-                    <a:pt x="4798709" y="4428"/>
-                  </a:lnTo>
-                  <a:lnTo>
-                    <a:pt x="4727086" y="8832"/>
-                  </a:lnTo>
-                  <a:lnTo>
-                    <a:pt x="4655464" y="13213"/>
-                  </a:lnTo>
-                  <a:lnTo>
-                    <a:pt x="4583841" y="17570"/>
-                  </a:lnTo>
-                  <a:lnTo>
-                    <a:pt x="4512219" y="21904"/>
-                  </a:lnTo>
-                  <a:lnTo>
-                    <a:pt x="4440596" y="26215"/>
-                  </a:lnTo>
-                  <a:lnTo>
-                    <a:pt x="4368974" y="30503"/>
-                  </a:lnTo>
-                  <a:lnTo>
-                    <a:pt x="4297351" y="34768"/>
-                  </a:lnTo>
-                  <a:lnTo>
-                    <a:pt x="4225729" y="39010"/>
-                  </a:lnTo>
-                  <a:lnTo>
-                    <a:pt x="4154106" y="43229"/>
-                  </a:lnTo>
-                  <a:lnTo>
-                    <a:pt x="4082483" y="47426"/>
-                  </a:lnTo>
-                  <a:lnTo>
-                    <a:pt x="4010861" y="51601"/>
-                  </a:lnTo>
-                  <a:lnTo>
-                    <a:pt x="3939238" y="55753"/>
-                  </a:lnTo>
-                  <a:lnTo>
-                    <a:pt x="3867616" y="59882"/>
-                  </a:lnTo>
-                  <a:lnTo>
-                    <a:pt x="3795993" y="63990"/>
-                  </a:lnTo>
-                  <a:lnTo>
-                    <a:pt x="3724371" y="68076"/>
-                  </a:lnTo>
-                  <a:lnTo>
-                    <a:pt x="3652748" y="72140"/>
-                  </a:lnTo>
-                  <a:lnTo>
-                    <a:pt x="3581126" y="76182"/>
-                  </a:lnTo>
-                  <a:lnTo>
-                    <a:pt x="3509503" y="80202"/>
-                  </a:lnTo>
-                  <a:lnTo>
-                    <a:pt x="3437881" y="84201"/>
-                  </a:lnTo>
-                  <a:lnTo>
-                    <a:pt x="3366258" y="88179"/>
-                  </a:lnTo>
-                  <a:lnTo>
-                    <a:pt x="3294636" y="92135"/>
-                  </a:lnTo>
-                  <a:lnTo>
-                    <a:pt x="3223013" y="96070"/>
-                  </a:lnTo>
-                  <a:lnTo>
-                    <a:pt x="3151391" y="99984"/>
-                  </a:lnTo>
-                  <a:lnTo>
-                    <a:pt x="3079768" y="103878"/>
-                  </a:lnTo>
-                  <a:lnTo>
-                    <a:pt x="3008146" y="107750"/>
-                  </a:lnTo>
-                  <a:lnTo>
-                    <a:pt x="2936523" y="111602"/>
-                  </a:lnTo>
-                  <a:lnTo>
-                    <a:pt x="2864901" y="115433"/>
-                  </a:lnTo>
-                  <a:lnTo>
-                    <a:pt x="2793278" y="119243"/>
-                  </a:lnTo>
-                  <a:lnTo>
-                    <a:pt x="2721655" y="123033"/>
-                  </a:lnTo>
-                  <a:lnTo>
-                    <a:pt x="2650033" y="126803"/>
-                  </a:lnTo>
-                  <a:lnTo>
-                    <a:pt x="2578410" y="130553"/>
-                  </a:lnTo>
-                  <a:lnTo>
-                    <a:pt x="2506788" y="134282"/>
-                  </a:lnTo>
-                  <a:lnTo>
-                    <a:pt x="2435165" y="137992"/>
-                  </a:lnTo>
-                  <a:lnTo>
-                    <a:pt x="2363543" y="141682"/>
-                  </a:lnTo>
-                  <a:lnTo>
-                    <a:pt x="2291920" y="145352"/>
-                  </a:lnTo>
-                  <a:lnTo>
-                    <a:pt x="2220298" y="149002"/>
-                  </a:lnTo>
-                  <a:lnTo>
-                    <a:pt x="2148675" y="152633"/>
-                  </a:lnTo>
-                  <a:lnTo>
-                    <a:pt x="2077053" y="156245"/>
-                  </a:lnTo>
-                  <a:lnTo>
-                    <a:pt x="2005430" y="159837"/>
-                  </a:lnTo>
-                  <a:lnTo>
-                    <a:pt x="1933808" y="163410"/>
-                  </a:lnTo>
-                  <a:lnTo>
-                    <a:pt x="1862185" y="166963"/>
-                  </a:lnTo>
-                  <a:lnTo>
-                    <a:pt x="1790563" y="170498"/>
-                  </a:lnTo>
-                  <a:lnTo>
-                    <a:pt x="1718940" y="174014"/>
-                  </a:lnTo>
-                  <a:lnTo>
-                    <a:pt x="1647318" y="177511"/>
-                  </a:lnTo>
-                  <a:lnTo>
-                    <a:pt x="1575695" y="180990"/>
-                  </a:lnTo>
-                  <a:lnTo>
-                    <a:pt x="1504073" y="184449"/>
-                  </a:lnTo>
-                  <a:lnTo>
-                    <a:pt x="1432450" y="187891"/>
-                  </a:lnTo>
-                  <a:lnTo>
-                    <a:pt x="1360827" y="191313"/>
-                  </a:lnTo>
-                  <a:lnTo>
-                    <a:pt x="1289205" y="194718"/>
-                  </a:lnTo>
-                  <a:lnTo>
-                    <a:pt x="1217582" y="198104"/>
-                  </a:lnTo>
-                  <a:lnTo>
-                    <a:pt x="1145960" y="201472"/>
-                  </a:lnTo>
-                  <a:lnTo>
-                    <a:pt x="1074337" y="204823"/>
-                  </a:lnTo>
-                  <a:lnTo>
-                    <a:pt x="1002715" y="208155"/>
-                  </a:lnTo>
-                  <a:lnTo>
-                    <a:pt x="931092" y="211469"/>
-                  </a:lnTo>
-                  <a:lnTo>
-                    <a:pt x="859470" y="214766"/>
-                  </a:lnTo>
-                  <a:lnTo>
-                    <a:pt x="787847" y="218045"/>
-                  </a:lnTo>
-                  <a:lnTo>
-                    <a:pt x="716225" y="221306"/>
-                  </a:lnTo>
-                  <a:lnTo>
-                    <a:pt x="644602" y="224550"/>
-                  </a:lnTo>
-                  <a:lnTo>
-                    <a:pt x="572980" y="227777"/>
-                  </a:lnTo>
-                  <a:lnTo>
-                    <a:pt x="501357" y="230987"/>
-                  </a:lnTo>
-                  <a:lnTo>
-                    <a:pt x="429735" y="234179"/>
-                  </a:lnTo>
-                  <a:lnTo>
-                    <a:pt x="358112" y="237354"/>
-                  </a:lnTo>
-                  <a:lnTo>
-                    <a:pt x="286490" y="240512"/>
-                  </a:lnTo>
-                  <a:lnTo>
-                    <a:pt x="214867" y="243654"/>
-                  </a:lnTo>
-                  <a:lnTo>
-                    <a:pt x="143245" y="246778"/>
-                  </a:lnTo>
-                  <a:lnTo>
-                    <a:pt x="71622" y="249886"/>
-                  </a:lnTo>
-                  <a:lnTo>
-                    <a:pt x="0" y="252977"/>
+                    <a:pt x="7019007" y="875174"/>
+                  </a:lnTo>
+                  <a:lnTo>
+                    <a:pt x="6947385" y="865696"/>
+                  </a:lnTo>
+                  <a:lnTo>
+                    <a:pt x="6875762" y="855708"/>
+                  </a:lnTo>
+                  <a:lnTo>
+                    <a:pt x="6804139" y="845185"/>
+                  </a:lnTo>
+                  <a:lnTo>
+                    <a:pt x="6732517" y="834096"/>
+                  </a:lnTo>
+                  <a:lnTo>
+                    <a:pt x="6660894" y="822413"/>
+                  </a:lnTo>
+                  <a:lnTo>
+                    <a:pt x="6589272" y="810103"/>
+                  </a:lnTo>
+                  <a:lnTo>
+                    <a:pt x="6517649" y="797133"/>
+                  </a:lnTo>
+                  <a:lnTo>
+                    <a:pt x="6446027" y="783467"/>
+                  </a:lnTo>
+                  <a:lnTo>
+                    <a:pt x="6374404" y="769067"/>
+                  </a:lnTo>
+                  <a:lnTo>
+                    <a:pt x="6302782" y="753895"/>
+                  </a:lnTo>
+                  <a:lnTo>
+                    <a:pt x="6231159" y="737908"/>
+                  </a:lnTo>
+                  <a:lnTo>
+                    <a:pt x="6159537" y="721064"/>
+                  </a:lnTo>
+                  <a:lnTo>
+                    <a:pt x="6087914" y="703316"/>
+                  </a:lnTo>
+                  <a:lnTo>
+                    <a:pt x="6016292" y="684616"/>
+                  </a:lnTo>
+                  <a:lnTo>
+                    <a:pt x="5944669" y="664912"/>
+                  </a:lnTo>
+                  <a:lnTo>
+                    <a:pt x="5873047" y="644151"/>
+                  </a:lnTo>
+                  <a:lnTo>
+                    <a:pt x="5801424" y="622276"/>
+                  </a:lnTo>
+                  <a:lnTo>
+                    <a:pt x="5729802" y="599227"/>
+                  </a:lnTo>
+                  <a:lnTo>
+                    <a:pt x="5658179" y="574942"/>
+                  </a:lnTo>
+                  <a:lnTo>
+                    <a:pt x="5586557" y="549354"/>
+                  </a:lnTo>
+                  <a:lnTo>
+                    <a:pt x="5514934" y="522392"/>
+                  </a:lnTo>
+                  <a:lnTo>
+                    <a:pt x="5443311" y="493984"/>
+                  </a:lnTo>
+                  <a:lnTo>
+                    <a:pt x="5371689" y="464052"/>
+                  </a:lnTo>
+                  <a:lnTo>
+                    <a:pt x="5300066" y="432513"/>
+                  </a:lnTo>
+                  <a:lnTo>
+                    <a:pt x="5228444" y="399282"/>
+                  </a:lnTo>
+                  <a:lnTo>
+                    <a:pt x="5156821" y="364269"/>
+                  </a:lnTo>
+                  <a:lnTo>
+                    <a:pt x="5085199" y="327376"/>
+                  </a:lnTo>
+                  <a:lnTo>
+                    <a:pt x="5013576" y="288504"/>
+                  </a:lnTo>
+                  <a:lnTo>
+                    <a:pt x="4941954" y="247546"/>
+                  </a:lnTo>
+                  <a:lnTo>
+                    <a:pt x="4870331" y="221187"/>
+                  </a:lnTo>
+                  <a:lnTo>
+                    <a:pt x="4798709" y="218298"/>
+                  </a:lnTo>
+                  <a:lnTo>
+                    <a:pt x="4727086" y="215399"/>
+                  </a:lnTo>
+                  <a:lnTo>
+                    <a:pt x="4655464" y="212490"/>
+                  </a:lnTo>
+                  <a:lnTo>
+                    <a:pt x="4583841" y="209571"/>
+                  </a:lnTo>
+                  <a:lnTo>
+                    <a:pt x="4512219" y="206641"/>
+                  </a:lnTo>
+                  <a:lnTo>
+                    <a:pt x="4440596" y="203702"/>
+                  </a:lnTo>
+                  <a:lnTo>
+                    <a:pt x="4368974" y="200752"/>
+                  </a:lnTo>
+                  <a:lnTo>
+                    <a:pt x="4297351" y="197792"/>
+                  </a:lnTo>
+                  <a:lnTo>
+                    <a:pt x="4225729" y="194822"/>
+                  </a:lnTo>
+                  <a:lnTo>
+                    <a:pt x="4154106" y="191841"/>
+                  </a:lnTo>
+                  <a:lnTo>
+                    <a:pt x="4082483" y="188850"/>
+                  </a:lnTo>
+                  <a:lnTo>
+                    <a:pt x="4010861" y="185849"/>
+                  </a:lnTo>
+                  <a:lnTo>
+                    <a:pt x="3939238" y="182837"/>
+                  </a:lnTo>
+                  <a:lnTo>
+                    <a:pt x="3867616" y="179815"/>
+                  </a:lnTo>
+                  <a:lnTo>
+                    <a:pt x="3795993" y="176782"/>
+                  </a:lnTo>
+                  <a:lnTo>
+                    <a:pt x="3724371" y="173739"/>
+                  </a:lnTo>
+                  <a:lnTo>
+                    <a:pt x="3652748" y="170685"/>
+                  </a:lnTo>
+                  <a:lnTo>
+                    <a:pt x="3581126" y="167621"/>
+                  </a:lnTo>
+                  <a:lnTo>
+                    <a:pt x="3509503" y="164545"/>
+                  </a:lnTo>
+                  <a:lnTo>
+                    <a:pt x="3437881" y="161459"/>
+                  </a:lnTo>
+                  <a:lnTo>
+                    <a:pt x="3366258" y="158363"/>
+                  </a:lnTo>
+                  <a:lnTo>
+                    <a:pt x="3294636" y="155255"/>
+                  </a:lnTo>
+                  <a:lnTo>
+                    <a:pt x="3223013" y="152137"/>
+                  </a:lnTo>
+                  <a:lnTo>
+                    <a:pt x="3151391" y="149008"/>
+                  </a:lnTo>
+                  <a:lnTo>
+                    <a:pt x="3079768" y="145868"/>
+                  </a:lnTo>
+                  <a:lnTo>
+                    <a:pt x="3008146" y="142717"/>
+                  </a:lnTo>
+                  <a:lnTo>
+                    <a:pt x="2936523" y="139556"/>
+                  </a:lnTo>
+                  <a:lnTo>
+                    <a:pt x="2864901" y="136383"/>
+                  </a:lnTo>
+                  <a:lnTo>
+                    <a:pt x="2793278" y="133199"/>
+                  </a:lnTo>
+                  <a:lnTo>
+                    <a:pt x="2721655" y="130004"/>
+                  </a:lnTo>
+                  <a:lnTo>
+                    <a:pt x="2650033" y="126798"/>
+                  </a:lnTo>
+                  <a:lnTo>
+                    <a:pt x="2578410" y="123581"/>
+                  </a:lnTo>
+                  <a:lnTo>
+                    <a:pt x="2506788" y="120353"/>
+                  </a:lnTo>
+                  <a:lnTo>
+                    <a:pt x="2435165" y="117113"/>
+                  </a:lnTo>
+                  <a:lnTo>
+                    <a:pt x="2363543" y="113862"/>
+                  </a:lnTo>
+                  <a:lnTo>
+                    <a:pt x="2291920" y="110600"/>
+                  </a:lnTo>
+                  <a:lnTo>
+                    <a:pt x="2220298" y="107326"/>
+                  </a:lnTo>
+                  <a:lnTo>
+                    <a:pt x="2148675" y="104042"/>
+                  </a:lnTo>
+                  <a:lnTo>
+                    <a:pt x="2077053" y="100745"/>
+                  </a:lnTo>
+                  <a:lnTo>
+                    <a:pt x="2005430" y="97437"/>
+                  </a:lnTo>
+                  <a:lnTo>
+                    <a:pt x="1933808" y="94118"/>
+                  </a:lnTo>
+                  <a:lnTo>
+                    <a:pt x="1862185" y="90787"/>
+                  </a:lnTo>
+                  <a:lnTo>
+                    <a:pt x="1790563" y="87445"/>
+                  </a:lnTo>
+                  <a:lnTo>
+                    <a:pt x="1718940" y="84091"/>
+                  </a:lnTo>
+                  <a:lnTo>
+                    <a:pt x="1647318" y="80725"/>
+                  </a:lnTo>
+                  <a:lnTo>
+                    <a:pt x="1575695" y="77348"/>
+                  </a:lnTo>
+                  <a:lnTo>
+                    <a:pt x="1504073" y="73959"/>
+                  </a:lnTo>
+                  <a:lnTo>
+                    <a:pt x="1432450" y="70558"/>
+                  </a:lnTo>
+                  <a:lnTo>
+                    <a:pt x="1360827" y="67145"/>
+                  </a:lnTo>
+                  <a:lnTo>
+                    <a:pt x="1289205" y="63720"/>
+                  </a:lnTo>
+                  <a:lnTo>
+                    <a:pt x="1217582" y="60284"/>
+                  </a:lnTo>
+                  <a:lnTo>
+                    <a:pt x="1145960" y="56835"/>
+                  </a:lnTo>
+                  <a:lnTo>
+                    <a:pt x="1074337" y="53375"/>
+                  </a:lnTo>
+                  <a:lnTo>
+                    <a:pt x="1002715" y="49902"/>
+                  </a:lnTo>
+                  <a:lnTo>
+                    <a:pt x="931092" y="46418"/>
+                  </a:lnTo>
+                  <a:lnTo>
+                    <a:pt x="859470" y="42921"/>
+                  </a:lnTo>
+                  <a:lnTo>
+                    <a:pt x="787847" y="39412"/>
+                  </a:lnTo>
+                  <a:lnTo>
+                    <a:pt x="716225" y="35891"/>
+                  </a:lnTo>
+                  <a:lnTo>
+                    <a:pt x="644602" y="32358"/>
+                  </a:lnTo>
+                  <a:lnTo>
+                    <a:pt x="572980" y="28812"/>
+                  </a:lnTo>
+                  <a:lnTo>
+                    <a:pt x="501357" y="25254"/>
+                  </a:lnTo>
+                  <a:lnTo>
+                    <a:pt x="429735" y="21684"/>
+                  </a:lnTo>
+                  <a:lnTo>
+                    <a:pt x="358112" y="18101"/>
+                  </a:lnTo>
+                  <a:lnTo>
+                    <a:pt x="286490" y="14506"/>
+                  </a:lnTo>
+                  <a:lnTo>
+                    <a:pt x="214867" y="10898"/>
+                  </a:lnTo>
+                  <a:lnTo>
+                    <a:pt x="143245" y="7278"/>
+                  </a:lnTo>
+                  <a:lnTo>
+                    <a:pt x="71622" y="3645"/>
+                  </a:lnTo>
+                  <a:lnTo>
+                    <a:pt x="0" y="0"/>
                   </a:lnTo>
                 </a:path>
               </a:pathLst>
@@ -4016,261 +4043,264 @@
           </p:nvSpPr>
           <p:spPr>
             <a:xfrm>
-              <a:off x="2424868" y="2073503"/>
-              <a:ext cx="5837810" cy="3133479"/>
+              <a:off x="2383762" y="2073503"/>
+              <a:ext cx="5878916" cy="3130112"/>
             </a:xfrm>
             <a:custGeom>
               <a:avLst/>
               <a:pathLst>
-                <a:path w="5837810" h="3133479">
+                <a:path w="5878916" h="3130112">
                   <a:moveTo>
                     <a:pt x="0" y="0"/>
                   </a:moveTo>
                   <a:lnTo>
-                    <a:pt x="36385" y="49862"/>
-                  </a:lnTo>
-                  <a:lnTo>
-                    <a:pt x="108008" y="145285"/>
-                  </a:lnTo>
-                  <a:lnTo>
-                    <a:pt x="179630" y="238057"/>
-                  </a:lnTo>
-                  <a:lnTo>
-                    <a:pt x="251253" y="328251"/>
-                  </a:lnTo>
-                  <a:lnTo>
-                    <a:pt x="322875" y="415938"/>
-                  </a:lnTo>
-                  <a:lnTo>
-                    <a:pt x="394498" y="501188"/>
-                  </a:lnTo>
-                  <a:lnTo>
-                    <a:pt x="466121" y="584070"/>
-                  </a:lnTo>
-                  <a:lnTo>
-                    <a:pt x="537743" y="664648"/>
-                  </a:lnTo>
-                  <a:lnTo>
-                    <a:pt x="609366" y="742987"/>
-                  </a:lnTo>
-                  <a:lnTo>
-                    <a:pt x="680988" y="819149"/>
-                  </a:lnTo>
-                  <a:lnTo>
-                    <a:pt x="752611" y="893195"/>
-                  </a:lnTo>
-                  <a:lnTo>
-                    <a:pt x="824233" y="965183"/>
-                  </a:lnTo>
-                  <a:lnTo>
-                    <a:pt x="895856" y="1035171"/>
-                  </a:lnTo>
-                  <a:lnTo>
-                    <a:pt x="967478" y="1103213"/>
-                  </a:lnTo>
-                  <a:lnTo>
-                    <a:pt x="1039101" y="1169365"/>
-                  </a:lnTo>
-                  <a:lnTo>
-                    <a:pt x="1110723" y="1233679"/>
-                  </a:lnTo>
-                  <a:lnTo>
-                    <a:pt x="1182346" y="1296205"/>
-                  </a:lnTo>
-                  <a:lnTo>
-                    <a:pt x="1253968" y="1356994"/>
-                  </a:lnTo>
-                  <a:lnTo>
-                    <a:pt x="1325591" y="1416094"/>
-                  </a:lnTo>
-                  <a:lnTo>
-                    <a:pt x="1397213" y="1473551"/>
-                  </a:lnTo>
-                  <a:lnTo>
-                    <a:pt x="1468836" y="1529412"/>
-                  </a:lnTo>
-                  <a:lnTo>
-                    <a:pt x="1540458" y="1583721"/>
-                  </a:lnTo>
-                  <a:lnTo>
-                    <a:pt x="1612081" y="1636520"/>
-                  </a:lnTo>
-                  <a:lnTo>
-                    <a:pt x="1683703" y="1687852"/>
-                  </a:lnTo>
-                  <a:lnTo>
-                    <a:pt x="1755326" y="1737757"/>
-                  </a:lnTo>
-                  <a:lnTo>
-                    <a:pt x="1826949" y="1786276"/>
-                  </a:lnTo>
-                  <a:lnTo>
-                    <a:pt x="1898571" y="1833447"/>
-                  </a:lnTo>
-                  <a:lnTo>
-                    <a:pt x="1970194" y="1879306"/>
-                  </a:lnTo>
-                  <a:lnTo>
-                    <a:pt x="2041816" y="1923892"/>
-                  </a:lnTo>
-                  <a:lnTo>
-                    <a:pt x="2113439" y="1967238"/>
-                  </a:lnTo>
-                  <a:lnTo>
-                    <a:pt x="2185061" y="2009380"/>
-                  </a:lnTo>
-                  <a:lnTo>
-                    <a:pt x="2256684" y="2050351"/>
-                  </a:lnTo>
-                  <a:lnTo>
-                    <a:pt x="2328306" y="2090183"/>
-                  </a:lnTo>
-                  <a:lnTo>
-                    <a:pt x="2399929" y="2128908"/>
-                  </a:lnTo>
-                  <a:lnTo>
-                    <a:pt x="2471551" y="2166557"/>
-                  </a:lnTo>
-                  <a:lnTo>
-                    <a:pt x="2543174" y="2203160"/>
-                  </a:lnTo>
-                  <a:lnTo>
-                    <a:pt x="2614796" y="2238746"/>
-                  </a:lnTo>
-                  <a:lnTo>
-                    <a:pt x="2686419" y="2273343"/>
-                  </a:lnTo>
-                  <a:lnTo>
-                    <a:pt x="2758041" y="2306979"/>
-                  </a:lnTo>
-                  <a:lnTo>
-                    <a:pt x="2829664" y="2339680"/>
-                  </a:lnTo>
-                  <a:lnTo>
-                    <a:pt x="2901286" y="2371472"/>
-                  </a:lnTo>
-                  <a:lnTo>
-                    <a:pt x="2972909" y="2402380"/>
-                  </a:lnTo>
-                  <a:lnTo>
-                    <a:pt x="3044531" y="2432430"/>
-                  </a:lnTo>
-                  <a:lnTo>
-                    <a:pt x="3116154" y="2461645"/>
-                  </a:lnTo>
-                  <a:lnTo>
-                    <a:pt x="3187777" y="2490048"/>
-                  </a:lnTo>
-                  <a:lnTo>
-                    <a:pt x="3259399" y="2517661"/>
-                  </a:lnTo>
-                  <a:lnTo>
-                    <a:pt x="3331022" y="2544508"/>
-                  </a:lnTo>
-                  <a:lnTo>
-                    <a:pt x="3402644" y="2570608"/>
-                  </a:lnTo>
-                  <a:lnTo>
-                    <a:pt x="3474267" y="2595983"/>
-                  </a:lnTo>
-                  <a:lnTo>
-                    <a:pt x="3545889" y="2620653"/>
-                  </a:lnTo>
-                  <a:lnTo>
-                    <a:pt x="3617512" y="2644637"/>
-                  </a:lnTo>
-                  <a:lnTo>
-                    <a:pt x="3689134" y="2667955"/>
-                  </a:lnTo>
-                  <a:lnTo>
-                    <a:pt x="3760757" y="2690624"/>
-                  </a:lnTo>
-                  <a:lnTo>
-                    <a:pt x="3832379" y="2712664"/>
-                  </a:lnTo>
-                  <a:lnTo>
-                    <a:pt x="3904002" y="2734092"/>
-                  </a:lnTo>
-                  <a:lnTo>
-                    <a:pt x="3975624" y="2754924"/>
-                  </a:lnTo>
-                  <a:lnTo>
-                    <a:pt x="4047247" y="2775177"/>
-                  </a:lnTo>
-                  <a:lnTo>
-                    <a:pt x="4118869" y="2794867"/>
-                  </a:lnTo>
-                  <a:lnTo>
-                    <a:pt x="4190492" y="2814010"/>
-                  </a:lnTo>
-                  <a:lnTo>
-                    <a:pt x="4262114" y="2832621"/>
-                  </a:lnTo>
-                  <a:lnTo>
-                    <a:pt x="4333737" y="2850715"/>
-                  </a:lnTo>
-                  <a:lnTo>
-                    <a:pt x="4405359" y="2868306"/>
-                  </a:lnTo>
-                  <a:lnTo>
-                    <a:pt x="4476982" y="2885408"/>
-                  </a:lnTo>
-                  <a:lnTo>
-                    <a:pt x="4548605" y="2902035"/>
-                  </a:lnTo>
-                  <a:lnTo>
-                    <a:pt x="4620227" y="2918200"/>
-                  </a:lnTo>
-                  <a:lnTo>
-                    <a:pt x="4691850" y="2933916"/>
-                  </a:lnTo>
-                  <a:lnTo>
-                    <a:pt x="4763472" y="2949195"/>
-                  </a:lnTo>
-                  <a:lnTo>
-                    <a:pt x="4835095" y="2964050"/>
-                  </a:lnTo>
-                  <a:lnTo>
-                    <a:pt x="4906717" y="2978491"/>
-                  </a:lnTo>
-                  <a:lnTo>
-                    <a:pt x="4978340" y="2992532"/>
-                  </a:lnTo>
-                  <a:lnTo>
-                    <a:pt x="5049962" y="3006182"/>
-                  </a:lnTo>
-                  <a:lnTo>
-                    <a:pt x="5121585" y="3019453"/>
-                  </a:lnTo>
-                  <a:lnTo>
-                    <a:pt x="5193207" y="3032355"/>
-                  </a:lnTo>
-                  <a:lnTo>
-                    <a:pt x="5264830" y="3044899"/>
-                  </a:lnTo>
-                  <a:lnTo>
-                    <a:pt x="5336452" y="3057094"/>
-                  </a:lnTo>
-                  <a:lnTo>
-                    <a:pt x="5408075" y="3068950"/>
-                  </a:lnTo>
-                  <a:lnTo>
-                    <a:pt x="5479697" y="3080476"/>
-                  </a:lnTo>
-                  <a:lnTo>
-                    <a:pt x="5551320" y="3091683"/>
-                  </a:lnTo>
-                  <a:lnTo>
-                    <a:pt x="5622942" y="3102578"/>
-                  </a:lnTo>
-                  <a:lnTo>
-                    <a:pt x="5694565" y="3113170"/>
-                  </a:lnTo>
-                  <a:lnTo>
-                    <a:pt x="5766187" y="3123468"/>
-                  </a:lnTo>
-                  <a:lnTo>
-                    <a:pt x="5837810" y="3133479"/>
+                    <a:pt x="5869" y="8049"/>
+                  </a:lnTo>
+                  <a:lnTo>
+                    <a:pt x="77491" y="103577"/>
+                  </a:lnTo>
+                  <a:lnTo>
+                    <a:pt x="149114" y="196480"/>
+                  </a:lnTo>
+                  <a:lnTo>
+                    <a:pt x="220736" y="286829"/>
+                  </a:lnTo>
+                  <a:lnTo>
+                    <a:pt x="292359" y="374695"/>
+                  </a:lnTo>
+                  <a:lnTo>
+                    <a:pt x="363981" y="460146"/>
+                  </a:lnTo>
+                  <a:lnTo>
+                    <a:pt x="435604" y="543248"/>
+                  </a:lnTo>
+                  <a:lnTo>
+                    <a:pt x="507227" y="624067"/>
+                  </a:lnTo>
+                  <a:lnTo>
+                    <a:pt x="578849" y="702664"/>
+                  </a:lnTo>
+                  <a:lnTo>
+                    <a:pt x="650472" y="779101"/>
+                  </a:lnTo>
+                  <a:lnTo>
+                    <a:pt x="722094" y="853437"/>
+                  </a:lnTo>
+                  <a:lnTo>
+                    <a:pt x="793717" y="925730"/>
+                  </a:lnTo>
+                  <a:lnTo>
+                    <a:pt x="865339" y="996036"/>
+                  </a:lnTo>
+                  <a:lnTo>
+                    <a:pt x="936962" y="1064410"/>
+                  </a:lnTo>
+                  <a:lnTo>
+                    <a:pt x="1008584" y="1130904"/>
+                  </a:lnTo>
+                  <a:lnTo>
+                    <a:pt x="1080207" y="1195571"/>
+                  </a:lnTo>
+                  <a:lnTo>
+                    <a:pt x="1151829" y="1258461"/>
+                  </a:lnTo>
+                  <a:lnTo>
+                    <a:pt x="1223452" y="1319622"/>
+                  </a:lnTo>
+                  <a:lnTo>
+                    <a:pt x="1295074" y="1379102"/>
+                  </a:lnTo>
+                  <a:lnTo>
+                    <a:pt x="1366697" y="1436947"/>
+                  </a:lnTo>
+                  <a:lnTo>
+                    <a:pt x="1438319" y="1493203"/>
+                  </a:lnTo>
+                  <a:lnTo>
+                    <a:pt x="1509942" y="1547912"/>
+                  </a:lnTo>
+                  <a:lnTo>
+                    <a:pt x="1581564" y="1601117"/>
+                  </a:lnTo>
+                  <a:lnTo>
+                    <a:pt x="1653187" y="1652861"/>
+                  </a:lnTo>
+                  <a:lnTo>
+                    <a:pt x="1724809" y="1703182"/>
+                  </a:lnTo>
+                  <a:lnTo>
+                    <a:pt x="1796432" y="1752120"/>
+                  </a:lnTo>
+                  <a:lnTo>
+                    <a:pt x="1868055" y="1799713"/>
+                  </a:lnTo>
+                  <a:lnTo>
+                    <a:pt x="1939677" y="1845998"/>
+                  </a:lnTo>
+                  <a:lnTo>
+                    <a:pt x="2011300" y="1891011"/>
+                  </a:lnTo>
+                  <a:lnTo>
+                    <a:pt x="2082922" y="1934787"/>
+                  </a:lnTo>
+                  <a:lnTo>
+                    <a:pt x="2154545" y="1977359"/>
+                  </a:lnTo>
+                  <a:lnTo>
+                    <a:pt x="2226167" y="2018761"/>
+                  </a:lnTo>
+                  <a:lnTo>
+                    <a:pt x="2297790" y="2059026"/>
+                  </a:lnTo>
+                  <a:lnTo>
+                    <a:pt x="2369412" y="2098184"/>
+                  </a:lnTo>
+                  <a:lnTo>
+                    <a:pt x="2441035" y="2136265"/>
+                  </a:lnTo>
+                  <a:lnTo>
+                    <a:pt x="2512657" y="2173300"/>
+                  </a:lnTo>
+                  <a:lnTo>
+                    <a:pt x="2584280" y="2209318"/>
+                  </a:lnTo>
+                  <a:lnTo>
+                    <a:pt x="2655902" y="2244345"/>
+                  </a:lnTo>
+                  <a:lnTo>
+                    <a:pt x="2727525" y="2278409"/>
+                  </a:lnTo>
+                  <a:lnTo>
+                    <a:pt x="2799147" y="2311537"/>
+                  </a:lnTo>
+                  <a:lnTo>
+                    <a:pt x="2870770" y="2343755"/>
+                  </a:lnTo>
+                  <a:lnTo>
+                    <a:pt x="2942392" y="2375087"/>
+                  </a:lnTo>
+                  <a:lnTo>
+                    <a:pt x="3014015" y="2405558"/>
+                  </a:lnTo>
+                  <a:lnTo>
+                    <a:pt x="3085637" y="2435192"/>
+                  </a:lnTo>
+                  <a:lnTo>
+                    <a:pt x="3157260" y="2464011"/>
+                  </a:lnTo>
+                  <a:lnTo>
+                    <a:pt x="3228883" y="2492038"/>
+                  </a:lnTo>
+                  <a:lnTo>
+                    <a:pt x="3300505" y="2519295"/>
+                  </a:lnTo>
+                  <a:lnTo>
+                    <a:pt x="3372128" y="2545802"/>
+                  </a:lnTo>
+                  <a:lnTo>
+                    <a:pt x="3443750" y="2571581"/>
+                  </a:lnTo>
+                  <a:lnTo>
+                    <a:pt x="3515373" y="2596652"/>
+                  </a:lnTo>
+                  <a:lnTo>
+                    <a:pt x="3586995" y="2621033"/>
+                  </a:lnTo>
+                  <a:lnTo>
+                    <a:pt x="3658618" y="2644744"/>
+                  </a:lnTo>
+                  <a:lnTo>
+                    <a:pt x="3730240" y="2667804"/>
+                  </a:lnTo>
+                  <a:lnTo>
+                    <a:pt x="3801863" y="2690230"/>
+                  </a:lnTo>
+                  <a:lnTo>
+                    <a:pt x="3873485" y="2712039"/>
+                  </a:lnTo>
+                  <a:lnTo>
+                    <a:pt x="3945108" y="2733249"/>
+                  </a:lnTo>
+                  <a:lnTo>
+                    <a:pt x="4016730" y="2753877"/>
+                  </a:lnTo>
+                  <a:lnTo>
+                    <a:pt x="4088353" y="2773937"/>
+                  </a:lnTo>
+                  <a:lnTo>
+                    <a:pt x="4159975" y="2793446"/>
+                  </a:lnTo>
+                  <a:lnTo>
+                    <a:pt x="4231598" y="2812418"/>
+                  </a:lnTo>
+                  <a:lnTo>
+                    <a:pt x="4303220" y="2830869"/>
+                  </a:lnTo>
+                  <a:lnTo>
+                    <a:pt x="4374843" y="2848813"/>
+                  </a:lnTo>
+                  <a:lnTo>
+                    <a:pt x="4446465" y="2866264"/>
+                  </a:lnTo>
+                  <a:lnTo>
+                    <a:pt x="4518088" y="2883236"/>
+                  </a:lnTo>
+                  <a:lnTo>
+                    <a:pt x="4589711" y="2899740"/>
+                  </a:lnTo>
+                  <a:lnTo>
+                    <a:pt x="4661333" y="2915792"/>
+                  </a:lnTo>
+                  <a:lnTo>
+                    <a:pt x="4732956" y="2931402"/>
+                  </a:lnTo>
+                  <a:lnTo>
+                    <a:pt x="4804578" y="2946583"/>
+                  </a:lnTo>
+                  <a:lnTo>
+                    <a:pt x="4876201" y="2961346"/>
+                  </a:lnTo>
+                  <a:lnTo>
+                    <a:pt x="4947823" y="2975704"/>
+                  </a:lnTo>
+                  <a:lnTo>
+                    <a:pt x="5019446" y="2989668"/>
+                  </a:lnTo>
+                  <a:lnTo>
+                    <a:pt x="5091068" y="3003247"/>
+                  </a:lnTo>
+                  <a:lnTo>
+                    <a:pt x="5162691" y="3016453"/>
+                  </a:lnTo>
+                  <a:lnTo>
+                    <a:pt x="5234313" y="3029297"/>
+                  </a:lnTo>
+                  <a:lnTo>
+                    <a:pt x="5305936" y="3041787"/>
+                  </a:lnTo>
+                  <a:lnTo>
+                    <a:pt x="5377558" y="3053934"/>
+                  </a:lnTo>
+                  <a:lnTo>
+                    <a:pt x="5449181" y="3065747"/>
+                  </a:lnTo>
+                  <a:lnTo>
+                    <a:pt x="5520803" y="3077236"/>
+                  </a:lnTo>
+                  <a:lnTo>
+                    <a:pt x="5592426" y="3088409"/>
+                  </a:lnTo>
+                  <a:lnTo>
+                    <a:pt x="5664048" y="3099274"/>
+                  </a:lnTo>
+                  <a:lnTo>
+                    <a:pt x="5735671" y="3109841"/>
+                  </a:lnTo>
+                  <a:lnTo>
+                    <a:pt x="5807293" y="3120118"/>
+                  </a:lnTo>
+                  <a:lnTo>
+                    <a:pt x="5878916" y="3130112"/>
                   </a:lnTo>
                 </a:path>
               </a:pathLst>
@@ -5010,7 +5040,7 @@
                   <a:latin typeface="Helvetica"/>
                   <a:cs typeface="Helvetica"/>
                 </a:rPr>
-                <a:t>subHR per 1 mL/min: 0.96 (0.92-1.01)  |  per IQR (Δ = 18.2): 0.52 (0.23-1.13)  |  IQR: [-11.5, 6.7]</a:t>
+                <a:t>subHR per 1 mL/min: 0.96 (0.93-1.00)  |  per IQR (Δ = 18.2): 0.52 (0.29-0.92)  |  IQR: [-11.5, 6.7]</a:t>
               </a:r>
             </a:p>
           </p:txBody>

--- a/docs/plots/carbo/jx_carbo_linsubhr_egfrdisc_akikdigo.pptx
+++ b/docs/plots/carbo/jx_carbo_linsubhr_egfrdisc_akikdigo.pptx
@@ -3003,491 +3003,479 @@
           <p:spPr>
             <a:xfrm>
               <a:off x="1172049" y="2073503"/>
-              <a:ext cx="7090630" cy="3316084"/>
+              <a:ext cx="7090630" cy="3358221"/>
             </a:xfrm>
             <a:custGeom>
               <a:avLst/>
               <a:pathLst>
-                <a:path w="7090630" h="3316084">
+                <a:path w="7090630" h="3358221">
                   <a:moveTo>
-                    <a:pt x="2933268" y="0"/>
+                    <a:pt x="3234924" y="0"/>
                   </a:moveTo>
                   <a:lnTo>
-                    <a:pt x="2936523" y="8475"/>
-                  </a:lnTo>
-                  <a:lnTo>
-                    <a:pt x="3008146" y="185451"/>
-                  </a:lnTo>
-                  <a:lnTo>
-                    <a:pt x="3079768" y="353415"/>
-                  </a:lnTo>
-                  <a:lnTo>
-                    <a:pt x="3151391" y="512825"/>
-                  </a:lnTo>
-                  <a:lnTo>
-                    <a:pt x="3223013" y="664118"/>
-                  </a:lnTo>
-                  <a:lnTo>
-                    <a:pt x="3294636" y="807706"/>
-                  </a:lnTo>
-                  <a:lnTo>
-                    <a:pt x="3366258" y="943982"/>
-                  </a:lnTo>
-                  <a:lnTo>
-                    <a:pt x="3437881" y="1073318"/>
-                  </a:lnTo>
-                  <a:lnTo>
-                    <a:pt x="3509503" y="1196068"/>
-                  </a:lnTo>
-                  <a:lnTo>
-                    <a:pt x="3581126" y="1312566"/>
-                  </a:lnTo>
-                  <a:lnTo>
-                    <a:pt x="3652748" y="1423133"/>
-                  </a:lnTo>
-                  <a:lnTo>
-                    <a:pt x="3724371" y="1528068"/>
-                  </a:lnTo>
-                  <a:lnTo>
-                    <a:pt x="3795993" y="1627660"/>
-                  </a:lnTo>
-                  <a:lnTo>
-                    <a:pt x="3867616" y="1722180"/>
-                  </a:lnTo>
-                  <a:lnTo>
-                    <a:pt x="3939238" y="1811887"/>
-                  </a:lnTo>
-                  <a:lnTo>
-                    <a:pt x="4010861" y="1897025"/>
-                  </a:lnTo>
-                  <a:lnTo>
-                    <a:pt x="4082483" y="1977828"/>
-                  </a:lnTo>
-                  <a:lnTo>
-                    <a:pt x="4154106" y="2054516"/>
-                  </a:lnTo>
-                  <a:lnTo>
-                    <a:pt x="4225729" y="2127299"/>
-                  </a:lnTo>
-                  <a:lnTo>
-                    <a:pt x="4297351" y="2196375"/>
-                  </a:lnTo>
-                  <a:lnTo>
-                    <a:pt x="4368974" y="2261934"/>
-                  </a:lnTo>
-                  <a:lnTo>
-                    <a:pt x="4440596" y="2324154"/>
-                  </a:lnTo>
-                  <a:lnTo>
-                    <a:pt x="4512219" y="2383206"/>
-                  </a:lnTo>
-                  <a:lnTo>
-                    <a:pt x="4583841" y="2439250"/>
-                  </a:lnTo>
-                  <a:lnTo>
-                    <a:pt x="4655464" y="2492441"/>
-                  </a:lnTo>
-                  <a:lnTo>
-                    <a:pt x="4727086" y="2542922"/>
-                  </a:lnTo>
-                  <a:lnTo>
-                    <a:pt x="4798709" y="2590833"/>
-                  </a:lnTo>
-                  <a:lnTo>
-                    <a:pt x="4870331" y="2636304"/>
-                  </a:lnTo>
-                  <a:lnTo>
-                    <a:pt x="4941954" y="2655979"/>
-                  </a:lnTo>
-                  <a:lnTo>
-                    <a:pt x="5013576" y="2658848"/>
-                  </a:lnTo>
-                  <a:lnTo>
-                    <a:pt x="5085199" y="2661707"/>
-                  </a:lnTo>
-                  <a:lnTo>
-                    <a:pt x="5156821" y="2664556"/>
-                  </a:lnTo>
-                  <a:lnTo>
-                    <a:pt x="5228444" y="2667396"/>
-                  </a:lnTo>
-                  <a:lnTo>
-                    <a:pt x="5300066" y="2670225"/>
-                  </a:lnTo>
-                  <a:lnTo>
-                    <a:pt x="5371689" y="2673044"/>
-                  </a:lnTo>
-                  <a:lnTo>
-                    <a:pt x="5443311" y="2675854"/>
-                  </a:lnTo>
-                  <a:lnTo>
-                    <a:pt x="5514934" y="2678654"/>
-                  </a:lnTo>
-                  <a:lnTo>
-                    <a:pt x="5586557" y="2681444"/>
-                  </a:lnTo>
-                  <a:lnTo>
-                    <a:pt x="5658179" y="2684225"/>
-                  </a:lnTo>
-                  <a:lnTo>
-                    <a:pt x="5729802" y="2686996"/>
-                  </a:lnTo>
-                  <a:lnTo>
-                    <a:pt x="5801424" y="2689758"/>
-                  </a:lnTo>
-                  <a:lnTo>
-                    <a:pt x="5873047" y="2692509"/>
-                  </a:lnTo>
-                  <a:lnTo>
-                    <a:pt x="5944669" y="2695252"/>
-                  </a:lnTo>
-                  <a:lnTo>
-                    <a:pt x="6016292" y="2697984"/>
-                  </a:lnTo>
-                  <a:lnTo>
-                    <a:pt x="6087914" y="2700708"/>
-                  </a:lnTo>
-                  <a:lnTo>
-                    <a:pt x="6159537" y="2703422"/>
-                  </a:lnTo>
-                  <a:lnTo>
-                    <a:pt x="6231159" y="2706126"/>
-                  </a:lnTo>
-                  <a:lnTo>
-                    <a:pt x="6302782" y="2708821"/>
-                  </a:lnTo>
-                  <a:lnTo>
-                    <a:pt x="6374404" y="2711507"/>
-                  </a:lnTo>
-                  <a:lnTo>
-                    <a:pt x="6446027" y="2714183"/>
-                  </a:lnTo>
-                  <a:lnTo>
-                    <a:pt x="6517649" y="2716851"/>
-                  </a:lnTo>
-                  <a:lnTo>
-                    <a:pt x="6589272" y="2719509"/>
-                  </a:lnTo>
-                  <a:lnTo>
-                    <a:pt x="6660894" y="2722157"/>
-                  </a:lnTo>
-                  <a:lnTo>
-                    <a:pt x="6732517" y="2724797"/>
-                  </a:lnTo>
-                  <a:lnTo>
-                    <a:pt x="6804139" y="2727427"/>
-                  </a:lnTo>
-                  <a:lnTo>
-                    <a:pt x="6875762" y="2730049"/>
-                  </a:lnTo>
-                  <a:lnTo>
-                    <a:pt x="6947385" y="2732661"/>
-                  </a:lnTo>
-                  <a:lnTo>
-                    <a:pt x="7019007" y="2735264"/>
-                  </a:lnTo>
-                  <a:lnTo>
-                    <a:pt x="7090630" y="2737858"/>
-                  </a:lnTo>
-                  <a:lnTo>
-                    <a:pt x="7090630" y="3316084"/>
-                  </a:lnTo>
-                  <a:lnTo>
-                    <a:pt x="7019007" y="3307088"/>
-                  </a:lnTo>
-                  <a:lnTo>
-                    <a:pt x="6947385" y="3297609"/>
-                  </a:lnTo>
-                  <a:lnTo>
-                    <a:pt x="6875762" y="3287622"/>
-                  </a:lnTo>
-                  <a:lnTo>
-                    <a:pt x="6804139" y="3277098"/>
-                  </a:lnTo>
-                  <a:lnTo>
-                    <a:pt x="6732517" y="3266010"/>
-                  </a:lnTo>
-                  <a:lnTo>
-                    <a:pt x="6660894" y="3254327"/>
-                  </a:lnTo>
-                  <a:lnTo>
-                    <a:pt x="6589272" y="3242017"/>
-                  </a:lnTo>
-                  <a:lnTo>
-                    <a:pt x="6517649" y="3229047"/>
-                  </a:lnTo>
-                  <a:lnTo>
-                    <a:pt x="6446027" y="3215380"/>
-                  </a:lnTo>
-                  <a:lnTo>
-                    <a:pt x="6374404" y="3200981"/>
-                  </a:lnTo>
-                  <a:lnTo>
-                    <a:pt x="6302782" y="3185808"/>
-                  </a:lnTo>
-                  <a:lnTo>
-                    <a:pt x="6231159" y="3169822"/>
-                  </a:lnTo>
-                  <a:lnTo>
-                    <a:pt x="6159537" y="3152978"/>
-                  </a:lnTo>
-                  <a:lnTo>
-                    <a:pt x="6087914" y="3135230"/>
-                  </a:lnTo>
-                  <a:lnTo>
-                    <a:pt x="6016292" y="3116530"/>
-                  </a:lnTo>
-                  <a:lnTo>
-                    <a:pt x="5944669" y="3096826"/>
-                  </a:lnTo>
-                  <a:lnTo>
-                    <a:pt x="5873047" y="3076065"/>
-                  </a:lnTo>
-                  <a:lnTo>
-                    <a:pt x="5801424" y="3054190"/>
-                  </a:lnTo>
-                  <a:lnTo>
-                    <a:pt x="5729802" y="3031141"/>
-                  </a:lnTo>
-                  <a:lnTo>
-                    <a:pt x="5658179" y="3006856"/>
-                  </a:lnTo>
-                  <a:lnTo>
-                    <a:pt x="5586557" y="2981267"/>
-                  </a:lnTo>
-                  <a:lnTo>
-                    <a:pt x="5514934" y="2954306"/>
-                  </a:lnTo>
-                  <a:lnTo>
-                    <a:pt x="5443311" y="2925898"/>
-                  </a:lnTo>
-                  <a:lnTo>
-                    <a:pt x="5371689" y="2895965"/>
-                  </a:lnTo>
-                  <a:lnTo>
-                    <a:pt x="5300066" y="2864427"/>
-                  </a:lnTo>
-                  <a:lnTo>
-                    <a:pt x="5228444" y="2831196"/>
-                  </a:lnTo>
-                  <a:lnTo>
-                    <a:pt x="5156821" y="2796182"/>
-                  </a:lnTo>
-                  <a:lnTo>
-                    <a:pt x="5085199" y="2759290"/>
-                  </a:lnTo>
-                  <a:lnTo>
-                    <a:pt x="5013576" y="2720418"/>
-                  </a:lnTo>
-                  <a:lnTo>
-                    <a:pt x="4941954" y="2679460"/>
-                  </a:lnTo>
-                  <a:lnTo>
-                    <a:pt x="4870331" y="2653101"/>
-                  </a:lnTo>
-                  <a:lnTo>
-                    <a:pt x="4798709" y="2650212"/>
-                  </a:lnTo>
-                  <a:lnTo>
-                    <a:pt x="4727086" y="2647313"/>
-                  </a:lnTo>
-                  <a:lnTo>
-                    <a:pt x="4655464" y="2644404"/>
-                  </a:lnTo>
-                  <a:lnTo>
-                    <a:pt x="4583841" y="2641485"/>
-                  </a:lnTo>
-                  <a:lnTo>
-                    <a:pt x="4512219" y="2638555"/>
-                  </a:lnTo>
-                  <a:lnTo>
-                    <a:pt x="4440596" y="2635616"/>
-                  </a:lnTo>
-                  <a:lnTo>
-                    <a:pt x="4368974" y="2632666"/>
-                  </a:lnTo>
-                  <a:lnTo>
-                    <a:pt x="4297351" y="2629706"/>
-                  </a:lnTo>
-                  <a:lnTo>
-                    <a:pt x="4225729" y="2626736"/>
-                  </a:lnTo>
-                  <a:lnTo>
-                    <a:pt x="4154106" y="2623755"/>
-                  </a:lnTo>
-                  <a:lnTo>
-                    <a:pt x="4082483" y="2620764"/>
-                  </a:lnTo>
-                  <a:lnTo>
-                    <a:pt x="4010861" y="2617763"/>
-                  </a:lnTo>
-                  <a:lnTo>
-                    <a:pt x="3939238" y="2614751"/>
-                  </a:lnTo>
-                  <a:lnTo>
-                    <a:pt x="3867616" y="2611729"/>
-                  </a:lnTo>
-                  <a:lnTo>
-                    <a:pt x="3795993" y="2608696"/>
-                  </a:lnTo>
-                  <a:lnTo>
-                    <a:pt x="3724371" y="2605653"/>
-                  </a:lnTo>
-                  <a:lnTo>
-                    <a:pt x="3652748" y="2602599"/>
-                  </a:lnTo>
-                  <a:lnTo>
-                    <a:pt x="3581126" y="2599534"/>
-                  </a:lnTo>
-                  <a:lnTo>
-                    <a:pt x="3509503" y="2596459"/>
-                  </a:lnTo>
-                  <a:lnTo>
-                    <a:pt x="3437881" y="2593373"/>
-                  </a:lnTo>
-                  <a:lnTo>
-                    <a:pt x="3366258" y="2590277"/>
-                  </a:lnTo>
-                  <a:lnTo>
-                    <a:pt x="3294636" y="2587169"/>
-                  </a:lnTo>
-                  <a:lnTo>
-                    <a:pt x="3223013" y="2584051"/>
-                  </a:lnTo>
-                  <a:lnTo>
-                    <a:pt x="3151391" y="2580922"/>
-                  </a:lnTo>
-                  <a:lnTo>
-                    <a:pt x="3079768" y="2577782"/>
-                  </a:lnTo>
-                  <a:lnTo>
-                    <a:pt x="3008146" y="2574631"/>
-                  </a:lnTo>
-                  <a:lnTo>
-                    <a:pt x="2936523" y="2571469"/>
-                  </a:lnTo>
-                  <a:lnTo>
-                    <a:pt x="2864901" y="2568297"/>
-                  </a:lnTo>
-                  <a:lnTo>
-                    <a:pt x="2793278" y="2565113"/>
-                  </a:lnTo>
-                  <a:lnTo>
-                    <a:pt x="2721655" y="2561918"/>
-                  </a:lnTo>
-                  <a:lnTo>
-                    <a:pt x="2650033" y="2558712"/>
-                  </a:lnTo>
-                  <a:lnTo>
-                    <a:pt x="2578410" y="2555495"/>
-                  </a:lnTo>
-                  <a:lnTo>
-                    <a:pt x="2506788" y="2552266"/>
-                  </a:lnTo>
-                  <a:lnTo>
-                    <a:pt x="2435165" y="2549027"/>
-                  </a:lnTo>
-                  <a:lnTo>
-                    <a:pt x="2363543" y="2545776"/>
-                  </a:lnTo>
-                  <a:lnTo>
-                    <a:pt x="2291920" y="2542514"/>
-                  </a:lnTo>
-                  <a:lnTo>
-                    <a:pt x="2220298" y="2539240"/>
-                  </a:lnTo>
-                  <a:lnTo>
-                    <a:pt x="2148675" y="2535955"/>
-                  </a:lnTo>
-                  <a:lnTo>
-                    <a:pt x="2077053" y="2532659"/>
-                  </a:lnTo>
-                  <a:lnTo>
-                    <a:pt x="2005430" y="2529351"/>
-                  </a:lnTo>
-                  <a:lnTo>
-                    <a:pt x="1933808" y="2526032"/>
-                  </a:lnTo>
-                  <a:lnTo>
-                    <a:pt x="1862185" y="2522701"/>
-                  </a:lnTo>
-                  <a:lnTo>
-                    <a:pt x="1790563" y="2519359"/>
-                  </a:lnTo>
-                  <a:lnTo>
-                    <a:pt x="1718940" y="2516005"/>
-                  </a:lnTo>
-                  <a:lnTo>
-                    <a:pt x="1647318" y="2512639"/>
-                  </a:lnTo>
-                  <a:lnTo>
-                    <a:pt x="1575695" y="2509262"/>
-                  </a:lnTo>
-                  <a:lnTo>
-                    <a:pt x="1504073" y="2505872"/>
-                  </a:lnTo>
-                  <a:lnTo>
-                    <a:pt x="1432450" y="2502472"/>
-                  </a:lnTo>
-                  <a:lnTo>
-                    <a:pt x="1360827" y="2499059"/>
-                  </a:lnTo>
-                  <a:lnTo>
-                    <a:pt x="1289205" y="2495634"/>
-                  </a:lnTo>
-                  <a:lnTo>
-                    <a:pt x="1217582" y="2492198"/>
-                  </a:lnTo>
-                  <a:lnTo>
-                    <a:pt x="1145960" y="2488749"/>
-                  </a:lnTo>
-                  <a:lnTo>
-                    <a:pt x="1074337" y="2485289"/>
-                  </a:lnTo>
-                  <a:lnTo>
-                    <a:pt x="1002715" y="2481816"/>
-                  </a:lnTo>
-                  <a:lnTo>
-                    <a:pt x="931092" y="2478331"/>
-                  </a:lnTo>
-                  <a:lnTo>
-                    <a:pt x="859470" y="2474835"/>
-                  </a:lnTo>
-                  <a:lnTo>
-                    <a:pt x="787847" y="2471326"/>
-                  </a:lnTo>
-                  <a:lnTo>
-                    <a:pt x="716225" y="2467805"/>
-                  </a:lnTo>
-                  <a:lnTo>
-                    <a:pt x="644602" y="2464271"/>
-                  </a:lnTo>
-                  <a:lnTo>
-                    <a:pt x="572980" y="2460726"/>
-                  </a:lnTo>
-                  <a:lnTo>
-                    <a:pt x="501357" y="2457168"/>
-                  </a:lnTo>
-                  <a:lnTo>
-                    <a:pt x="429735" y="2453598"/>
-                  </a:lnTo>
-                  <a:lnTo>
-                    <a:pt x="358112" y="2450015"/>
-                  </a:lnTo>
-                  <a:lnTo>
-                    <a:pt x="286490" y="2446420"/>
-                  </a:lnTo>
-                  <a:lnTo>
-                    <a:pt x="214867" y="2442812"/>
-                  </a:lnTo>
-                  <a:lnTo>
-                    <a:pt x="143245" y="2439192"/>
-                  </a:lnTo>
-                  <a:lnTo>
-                    <a:pt x="71622" y="2435559"/>
-                  </a:lnTo>
-                  <a:lnTo>
-                    <a:pt x="0" y="2431913"/>
+                    <a:pt x="3294636" y="175612"/>
+                  </a:lnTo>
+                  <a:lnTo>
+                    <a:pt x="3366258" y="373644"/>
+                  </a:lnTo>
+                  <a:lnTo>
+                    <a:pt x="3437881" y="559822"/>
+                  </a:lnTo>
+                  <a:lnTo>
+                    <a:pt x="3509503" y="734855"/>
+                  </a:lnTo>
+                  <a:lnTo>
+                    <a:pt x="3581126" y="899410"/>
+                  </a:lnTo>
+                  <a:lnTo>
+                    <a:pt x="3652748" y="1054114"/>
+                  </a:lnTo>
+                  <a:lnTo>
+                    <a:pt x="3724371" y="1199557"/>
+                  </a:lnTo>
+                  <a:lnTo>
+                    <a:pt x="3795993" y="1336294"/>
+                  </a:lnTo>
+                  <a:lnTo>
+                    <a:pt x="3867616" y="1464845"/>
+                  </a:lnTo>
+                  <a:lnTo>
+                    <a:pt x="3939238" y="1585701"/>
+                  </a:lnTo>
+                  <a:lnTo>
+                    <a:pt x="4010861" y="1699322"/>
+                  </a:lnTo>
+                  <a:lnTo>
+                    <a:pt x="4082483" y="1806142"/>
+                  </a:lnTo>
+                  <a:lnTo>
+                    <a:pt x="4154106" y="1906567"/>
+                  </a:lnTo>
+                  <a:lnTo>
+                    <a:pt x="4225729" y="2000981"/>
+                  </a:lnTo>
+                  <a:lnTo>
+                    <a:pt x="4297351" y="2089742"/>
+                  </a:lnTo>
+                  <a:lnTo>
+                    <a:pt x="4368974" y="2173191"/>
+                  </a:lnTo>
+                  <a:lnTo>
+                    <a:pt x="4440596" y="2251643"/>
+                  </a:lnTo>
+                  <a:lnTo>
+                    <a:pt x="4512219" y="2325400"/>
+                  </a:lnTo>
+                  <a:lnTo>
+                    <a:pt x="4583841" y="2394741"/>
+                  </a:lnTo>
+                  <a:lnTo>
+                    <a:pt x="4655464" y="2459931"/>
+                  </a:lnTo>
+                  <a:lnTo>
+                    <a:pt x="4727086" y="2521219"/>
+                  </a:lnTo>
+                  <a:lnTo>
+                    <a:pt x="4798709" y="2578838"/>
+                  </a:lnTo>
+                  <a:lnTo>
+                    <a:pt x="4870331" y="2633008"/>
+                  </a:lnTo>
+                  <a:lnTo>
+                    <a:pt x="4941954" y="2651655"/>
+                  </a:lnTo>
+                  <a:lnTo>
+                    <a:pt x="5013576" y="2647179"/>
+                  </a:lnTo>
+                  <a:lnTo>
+                    <a:pt x="5085199" y="2642679"/>
+                  </a:lnTo>
+                  <a:lnTo>
+                    <a:pt x="5156821" y="2638155"/>
+                  </a:lnTo>
+                  <a:lnTo>
+                    <a:pt x="5228444" y="2633606"/>
+                  </a:lnTo>
+                  <a:lnTo>
+                    <a:pt x="5300066" y="2629033"/>
+                  </a:lnTo>
+                  <a:lnTo>
+                    <a:pt x="5371689" y="2624436"/>
+                  </a:lnTo>
+                  <a:lnTo>
+                    <a:pt x="5443311" y="2619813"/>
+                  </a:lnTo>
+                  <a:lnTo>
+                    <a:pt x="5514934" y="2615166"/>
+                  </a:lnTo>
+                  <a:lnTo>
+                    <a:pt x="5586557" y="2610494"/>
+                  </a:lnTo>
+                  <a:lnTo>
+                    <a:pt x="5658179" y="2605797"/>
+                  </a:lnTo>
+                  <a:lnTo>
+                    <a:pt x="5729802" y="2601074"/>
+                  </a:lnTo>
+                  <a:lnTo>
+                    <a:pt x="5801424" y="2596326"/>
+                  </a:lnTo>
+                  <a:lnTo>
+                    <a:pt x="5873047" y="2591553"/>
+                  </a:lnTo>
+                  <a:lnTo>
+                    <a:pt x="5944669" y="2586754"/>
+                  </a:lnTo>
+                  <a:lnTo>
+                    <a:pt x="6016292" y="2581929"/>
+                  </a:lnTo>
+                  <a:lnTo>
+                    <a:pt x="6087914" y="2577078"/>
+                  </a:lnTo>
+                  <a:lnTo>
+                    <a:pt x="6159537" y="2572201"/>
+                  </a:lnTo>
+                  <a:lnTo>
+                    <a:pt x="6231159" y="2567298"/>
+                  </a:lnTo>
+                  <a:lnTo>
+                    <a:pt x="6302782" y="2562368"/>
+                  </a:lnTo>
+                  <a:lnTo>
+                    <a:pt x="6374404" y="2557412"/>
+                  </a:lnTo>
+                  <a:lnTo>
+                    <a:pt x="6446027" y="2552429"/>
+                  </a:lnTo>
+                  <a:lnTo>
+                    <a:pt x="6517649" y="2547419"/>
+                  </a:lnTo>
+                  <a:lnTo>
+                    <a:pt x="6589272" y="2542383"/>
+                  </a:lnTo>
+                  <a:lnTo>
+                    <a:pt x="6660894" y="2537319"/>
+                  </a:lnTo>
+                  <a:lnTo>
+                    <a:pt x="6732517" y="2532228"/>
+                  </a:lnTo>
+                  <a:lnTo>
+                    <a:pt x="6804139" y="2527110"/>
+                  </a:lnTo>
+                  <a:lnTo>
+                    <a:pt x="6875762" y="2521964"/>
+                  </a:lnTo>
+                  <a:lnTo>
+                    <a:pt x="6947385" y="2516791"/>
+                  </a:lnTo>
+                  <a:lnTo>
+                    <a:pt x="7019007" y="2511589"/>
+                  </a:lnTo>
+                  <a:lnTo>
+                    <a:pt x="7090630" y="2506360"/>
+                  </a:lnTo>
+                  <a:lnTo>
+                    <a:pt x="7090630" y="3358221"/>
+                  </a:lnTo>
+                  <a:lnTo>
+                    <a:pt x="7019007" y="3350228"/>
+                  </a:lnTo>
+                  <a:lnTo>
+                    <a:pt x="6947385" y="3341727"/>
+                  </a:lnTo>
+                  <a:lnTo>
+                    <a:pt x="6875762" y="3332684"/>
+                  </a:lnTo>
+                  <a:lnTo>
+                    <a:pt x="6804139" y="3323065"/>
+                  </a:lnTo>
+                  <a:lnTo>
+                    <a:pt x="6732517" y="3312834"/>
+                  </a:lnTo>
+                  <a:lnTo>
+                    <a:pt x="6660894" y="3301951"/>
+                  </a:lnTo>
+                  <a:lnTo>
+                    <a:pt x="6589272" y="3290375"/>
+                  </a:lnTo>
+                  <a:lnTo>
+                    <a:pt x="6517649" y="3278063"/>
+                  </a:lnTo>
+                  <a:lnTo>
+                    <a:pt x="6446027" y="3264966"/>
+                  </a:lnTo>
+                  <a:lnTo>
+                    <a:pt x="6374404" y="3251035"/>
+                  </a:lnTo>
+                  <a:lnTo>
+                    <a:pt x="6302782" y="3236218"/>
+                  </a:lnTo>
+                  <a:lnTo>
+                    <a:pt x="6231159" y="3220456"/>
+                  </a:lnTo>
+                  <a:lnTo>
+                    <a:pt x="6159537" y="3203692"/>
+                  </a:lnTo>
+                  <a:lnTo>
+                    <a:pt x="6087914" y="3185860"/>
+                  </a:lnTo>
+                  <a:lnTo>
+                    <a:pt x="6016292" y="3166892"/>
+                  </a:lnTo>
+                  <a:lnTo>
+                    <a:pt x="5944669" y="3146717"/>
+                  </a:lnTo>
+                  <a:lnTo>
+                    <a:pt x="5873047" y="3125257"/>
+                  </a:lnTo>
+                  <a:lnTo>
+                    <a:pt x="5801424" y="3102430"/>
+                  </a:lnTo>
+                  <a:lnTo>
+                    <a:pt x="5729802" y="3078150"/>
+                  </a:lnTo>
+                  <a:lnTo>
+                    <a:pt x="5658179" y="3052324"/>
+                  </a:lnTo>
+                  <a:lnTo>
+                    <a:pt x="5586557" y="3024854"/>
+                  </a:lnTo>
+                  <a:lnTo>
+                    <a:pt x="5514934" y="2995635"/>
+                  </a:lnTo>
+                  <a:lnTo>
+                    <a:pt x="5443311" y="2964555"/>
+                  </a:lnTo>
+                  <a:lnTo>
+                    <a:pt x="5371689" y="2931496"/>
+                  </a:lnTo>
+                  <a:lnTo>
+                    <a:pt x="5300066" y="2896332"/>
+                  </a:lnTo>
+                  <a:lnTo>
+                    <a:pt x="5228444" y="2858929"/>
+                  </a:lnTo>
+                  <a:lnTo>
+                    <a:pt x="5156821" y="2819144"/>
+                  </a:lnTo>
+                  <a:lnTo>
+                    <a:pt x="5085199" y="2776826"/>
+                  </a:lnTo>
+                  <a:lnTo>
+                    <a:pt x="5013576" y="2731814"/>
+                  </a:lnTo>
+                  <a:lnTo>
+                    <a:pt x="4941954" y="2683935"/>
+                  </a:lnTo>
+                  <a:lnTo>
+                    <a:pt x="4870331" y="2656106"/>
+                  </a:lnTo>
+                  <a:lnTo>
+                    <a:pt x="4798709" y="2660535"/>
+                  </a:lnTo>
+                  <a:lnTo>
+                    <a:pt x="4727086" y="2664939"/>
+                  </a:lnTo>
+                  <a:lnTo>
+                    <a:pt x="4655464" y="2669320"/>
+                  </a:lnTo>
+                  <a:lnTo>
+                    <a:pt x="4583841" y="2673677"/>
+                  </a:lnTo>
+                  <a:lnTo>
+                    <a:pt x="4512219" y="2678011"/>
+                  </a:lnTo>
+                  <a:lnTo>
+                    <a:pt x="4440596" y="2682322"/>
+                  </a:lnTo>
+                  <a:lnTo>
+                    <a:pt x="4368974" y="2686610"/>
+                  </a:lnTo>
+                  <a:lnTo>
+                    <a:pt x="4297351" y="2690875"/>
+                  </a:lnTo>
+                  <a:lnTo>
+                    <a:pt x="4225729" y="2695117"/>
+                  </a:lnTo>
+                  <a:lnTo>
+                    <a:pt x="4154106" y="2699336"/>
+                  </a:lnTo>
+                  <a:lnTo>
+                    <a:pt x="4082483" y="2703533"/>
+                  </a:lnTo>
+                  <a:lnTo>
+                    <a:pt x="4010861" y="2707708"/>
+                  </a:lnTo>
+                  <a:lnTo>
+                    <a:pt x="3939238" y="2711860"/>
+                  </a:lnTo>
+                  <a:lnTo>
+                    <a:pt x="3867616" y="2715989"/>
+                  </a:lnTo>
+                  <a:lnTo>
+                    <a:pt x="3795993" y="2720097"/>
+                  </a:lnTo>
+                  <a:lnTo>
+                    <a:pt x="3724371" y="2724183"/>
+                  </a:lnTo>
+                  <a:lnTo>
+                    <a:pt x="3652748" y="2728247"/>
+                  </a:lnTo>
+                  <a:lnTo>
+                    <a:pt x="3581126" y="2732289"/>
+                  </a:lnTo>
+                  <a:lnTo>
+                    <a:pt x="3509503" y="2736309"/>
+                  </a:lnTo>
+                  <a:lnTo>
+                    <a:pt x="3437881" y="2740308"/>
+                  </a:lnTo>
+                  <a:lnTo>
+                    <a:pt x="3366258" y="2744286"/>
+                  </a:lnTo>
+                  <a:lnTo>
+                    <a:pt x="3294636" y="2748242"/>
+                  </a:lnTo>
+                  <a:lnTo>
+                    <a:pt x="3223013" y="2752177"/>
+                  </a:lnTo>
+                  <a:lnTo>
+                    <a:pt x="3151391" y="2756091"/>
+                  </a:lnTo>
+                  <a:lnTo>
+                    <a:pt x="3079768" y="2759985"/>
+                  </a:lnTo>
+                  <a:lnTo>
+                    <a:pt x="3008146" y="2763857"/>
+                  </a:lnTo>
+                  <a:lnTo>
+                    <a:pt x="2936523" y="2767709"/>
+                  </a:lnTo>
+                  <a:lnTo>
+                    <a:pt x="2864901" y="2771540"/>
+                  </a:lnTo>
+                  <a:lnTo>
+                    <a:pt x="2793278" y="2775350"/>
+                  </a:lnTo>
+                  <a:lnTo>
+                    <a:pt x="2721655" y="2779140"/>
+                  </a:lnTo>
+                  <a:lnTo>
+                    <a:pt x="2650033" y="2782910"/>
+                  </a:lnTo>
+                  <a:lnTo>
+                    <a:pt x="2578410" y="2786660"/>
+                  </a:lnTo>
+                  <a:lnTo>
+                    <a:pt x="2506788" y="2790389"/>
+                  </a:lnTo>
+                  <a:lnTo>
+                    <a:pt x="2435165" y="2794099"/>
+                  </a:lnTo>
+                  <a:lnTo>
+                    <a:pt x="2363543" y="2797789"/>
+                  </a:lnTo>
+                  <a:lnTo>
+                    <a:pt x="2291920" y="2801459"/>
+                  </a:lnTo>
+                  <a:lnTo>
+                    <a:pt x="2220298" y="2805109"/>
+                  </a:lnTo>
+                  <a:lnTo>
+                    <a:pt x="2148675" y="2808740"/>
+                  </a:lnTo>
+                  <a:lnTo>
+                    <a:pt x="2077053" y="2812352"/>
+                  </a:lnTo>
+                  <a:lnTo>
+                    <a:pt x="2005430" y="2815944"/>
+                  </a:lnTo>
+                  <a:lnTo>
+                    <a:pt x="1933808" y="2819517"/>
+                  </a:lnTo>
+                  <a:lnTo>
+                    <a:pt x="1862185" y="2823070"/>
+                  </a:lnTo>
+                  <a:lnTo>
+                    <a:pt x="1790563" y="2826605"/>
+                  </a:lnTo>
+                  <a:lnTo>
+                    <a:pt x="1718940" y="2830121"/>
+                  </a:lnTo>
+                  <a:lnTo>
+                    <a:pt x="1647318" y="2833618"/>
+                  </a:lnTo>
+                  <a:lnTo>
+                    <a:pt x="1575695" y="2837097"/>
+                  </a:lnTo>
+                  <a:lnTo>
+                    <a:pt x="1504073" y="2840556"/>
+                  </a:lnTo>
+                  <a:lnTo>
+                    <a:pt x="1432450" y="2843998"/>
+                  </a:lnTo>
+                  <a:lnTo>
+                    <a:pt x="1360827" y="2847420"/>
+                  </a:lnTo>
+                  <a:lnTo>
+                    <a:pt x="1289205" y="2850825"/>
+                  </a:lnTo>
+                  <a:lnTo>
+                    <a:pt x="1217582" y="2854211"/>
+                  </a:lnTo>
+                  <a:lnTo>
+                    <a:pt x="1145960" y="2857579"/>
+                  </a:lnTo>
+                  <a:lnTo>
+                    <a:pt x="1074337" y="2860930"/>
+                  </a:lnTo>
+                  <a:lnTo>
+                    <a:pt x="1002715" y="2864262"/>
+                  </a:lnTo>
+                  <a:lnTo>
+                    <a:pt x="931092" y="2867576"/>
+                  </a:lnTo>
+                  <a:lnTo>
+                    <a:pt x="859470" y="2870873"/>
+                  </a:lnTo>
+                  <a:lnTo>
+                    <a:pt x="787847" y="2874152"/>
+                  </a:lnTo>
+                  <a:lnTo>
+                    <a:pt x="716225" y="2877413"/>
+                  </a:lnTo>
+                  <a:lnTo>
+                    <a:pt x="644602" y="2880657"/>
+                  </a:lnTo>
+                  <a:lnTo>
+                    <a:pt x="572980" y="2883884"/>
+                  </a:lnTo>
+                  <a:lnTo>
+                    <a:pt x="501357" y="2887094"/>
+                  </a:lnTo>
+                  <a:lnTo>
+                    <a:pt x="429735" y="2890286"/>
+                  </a:lnTo>
+                  <a:lnTo>
+                    <a:pt x="358112" y="2893461"/>
+                  </a:lnTo>
+                  <a:lnTo>
+                    <a:pt x="286490" y="2896619"/>
+                  </a:lnTo>
+                  <a:lnTo>
+                    <a:pt x="214867" y="2899760"/>
+                  </a:lnTo>
+                  <a:lnTo>
+                    <a:pt x="143245" y="2902885"/>
+                  </a:lnTo>
+                  <a:lnTo>
+                    <a:pt x="71622" y="2905993"/>
+                  </a:lnTo>
+                  <a:lnTo>
+                    <a:pt x="0" y="2909084"/>
+                  </a:lnTo>
+                  <a:lnTo>
+                    <a:pt x="0" y="0"/>
                   </a:lnTo>
                   <a:close/>
                 </a:path>
@@ -3513,192 +3501,177 @@
           </p:nvSpPr>
           <p:spPr>
             <a:xfrm>
-              <a:off x="4105317" y="2073503"/>
-              <a:ext cx="4157361" cy="2737858"/>
+              <a:off x="4406973" y="2073503"/>
+              <a:ext cx="3855705" cy="2651655"/>
             </a:xfrm>
             <a:custGeom>
               <a:avLst/>
               <a:pathLst>
-                <a:path w="4157361" h="2737858">
+                <a:path w="3855705" h="2651655">
                   <a:moveTo>
                     <a:pt x="0" y="0"/>
                   </a:moveTo>
                   <a:lnTo>
-                    <a:pt x="3255" y="8475"/>
-                  </a:lnTo>
-                  <a:lnTo>
-                    <a:pt x="74877" y="185451"/>
-                  </a:lnTo>
-                  <a:lnTo>
-                    <a:pt x="146500" y="353415"/>
-                  </a:lnTo>
-                  <a:lnTo>
-                    <a:pt x="218122" y="512825"/>
-                  </a:lnTo>
-                  <a:lnTo>
-                    <a:pt x="289745" y="664118"/>
-                  </a:lnTo>
-                  <a:lnTo>
-                    <a:pt x="361368" y="807706"/>
-                  </a:lnTo>
-                  <a:lnTo>
-                    <a:pt x="432990" y="943982"/>
-                  </a:lnTo>
-                  <a:lnTo>
-                    <a:pt x="504613" y="1073318"/>
-                  </a:lnTo>
-                  <a:lnTo>
-                    <a:pt x="576235" y="1196068"/>
-                  </a:lnTo>
-                  <a:lnTo>
-                    <a:pt x="647858" y="1312566"/>
-                  </a:lnTo>
-                  <a:lnTo>
-                    <a:pt x="719480" y="1423133"/>
-                  </a:lnTo>
-                  <a:lnTo>
-                    <a:pt x="791103" y="1528068"/>
-                  </a:lnTo>
-                  <a:lnTo>
-                    <a:pt x="862725" y="1627660"/>
-                  </a:lnTo>
-                  <a:lnTo>
-                    <a:pt x="934348" y="1722180"/>
-                  </a:lnTo>
-                  <a:lnTo>
-                    <a:pt x="1005970" y="1811887"/>
-                  </a:lnTo>
-                  <a:lnTo>
-                    <a:pt x="1077593" y="1897025"/>
-                  </a:lnTo>
-                  <a:lnTo>
-                    <a:pt x="1149215" y="1977828"/>
-                  </a:lnTo>
-                  <a:lnTo>
-                    <a:pt x="1220838" y="2054516"/>
-                  </a:lnTo>
-                  <a:lnTo>
-                    <a:pt x="1292460" y="2127299"/>
-                  </a:lnTo>
-                  <a:lnTo>
-                    <a:pt x="1364083" y="2196375"/>
-                  </a:lnTo>
-                  <a:lnTo>
-                    <a:pt x="1435705" y="2261934"/>
-                  </a:lnTo>
-                  <a:lnTo>
-                    <a:pt x="1507328" y="2324154"/>
-                  </a:lnTo>
-                  <a:lnTo>
-                    <a:pt x="1578950" y="2383206"/>
-                  </a:lnTo>
-                  <a:lnTo>
-                    <a:pt x="1650573" y="2439250"/>
-                  </a:lnTo>
-                  <a:lnTo>
-                    <a:pt x="1722196" y="2492441"/>
-                  </a:lnTo>
-                  <a:lnTo>
-                    <a:pt x="1793818" y="2542922"/>
-                  </a:lnTo>
-                  <a:lnTo>
-                    <a:pt x="1865441" y="2590833"/>
-                  </a:lnTo>
-                  <a:lnTo>
-                    <a:pt x="1937063" y="2636304"/>
-                  </a:lnTo>
-                  <a:lnTo>
-                    <a:pt x="2008686" y="2655979"/>
-                  </a:lnTo>
-                  <a:lnTo>
-                    <a:pt x="2080308" y="2658848"/>
-                  </a:lnTo>
-                  <a:lnTo>
-                    <a:pt x="2151931" y="2661707"/>
-                  </a:lnTo>
-                  <a:lnTo>
-                    <a:pt x="2223553" y="2664556"/>
-                  </a:lnTo>
-                  <a:lnTo>
-                    <a:pt x="2295176" y="2667396"/>
-                  </a:lnTo>
-                  <a:lnTo>
-                    <a:pt x="2366798" y="2670225"/>
-                  </a:lnTo>
-                  <a:lnTo>
-                    <a:pt x="2438421" y="2673044"/>
-                  </a:lnTo>
-                  <a:lnTo>
-                    <a:pt x="2510043" y="2675854"/>
-                  </a:lnTo>
-                  <a:lnTo>
-                    <a:pt x="2581666" y="2678654"/>
-                  </a:lnTo>
-                  <a:lnTo>
-                    <a:pt x="2653288" y="2681444"/>
-                  </a:lnTo>
-                  <a:lnTo>
-                    <a:pt x="2724911" y="2684225"/>
-                  </a:lnTo>
-                  <a:lnTo>
-                    <a:pt x="2796533" y="2686996"/>
-                  </a:lnTo>
-                  <a:lnTo>
-                    <a:pt x="2868156" y="2689758"/>
-                  </a:lnTo>
-                  <a:lnTo>
-                    <a:pt x="2939778" y="2692509"/>
-                  </a:lnTo>
-                  <a:lnTo>
-                    <a:pt x="3011401" y="2695252"/>
-                  </a:lnTo>
-                  <a:lnTo>
-                    <a:pt x="3083024" y="2697984"/>
-                  </a:lnTo>
-                  <a:lnTo>
-                    <a:pt x="3154646" y="2700708"/>
-                  </a:lnTo>
-                  <a:lnTo>
-                    <a:pt x="3226269" y="2703422"/>
-                  </a:lnTo>
-                  <a:lnTo>
-                    <a:pt x="3297891" y="2706126"/>
-                  </a:lnTo>
-                  <a:lnTo>
-                    <a:pt x="3369514" y="2708821"/>
-                  </a:lnTo>
-                  <a:lnTo>
-                    <a:pt x="3441136" y="2711507"/>
-                  </a:lnTo>
-                  <a:lnTo>
-                    <a:pt x="3512759" y="2714183"/>
-                  </a:lnTo>
-                  <a:lnTo>
-                    <a:pt x="3584381" y="2716851"/>
-                  </a:lnTo>
-                  <a:lnTo>
-                    <a:pt x="3656004" y="2719509"/>
-                  </a:lnTo>
-                  <a:lnTo>
-                    <a:pt x="3727626" y="2722157"/>
-                  </a:lnTo>
-                  <a:lnTo>
-                    <a:pt x="3799249" y="2724797"/>
-                  </a:lnTo>
-                  <a:lnTo>
-                    <a:pt x="3870871" y="2727427"/>
-                  </a:lnTo>
-                  <a:lnTo>
-                    <a:pt x="3942494" y="2730049"/>
-                  </a:lnTo>
-                  <a:lnTo>
-                    <a:pt x="4014116" y="2732661"/>
-                  </a:lnTo>
-                  <a:lnTo>
-                    <a:pt x="4085739" y="2735264"/>
-                  </a:lnTo>
-                  <a:lnTo>
-                    <a:pt x="4157361" y="2737858"/>
+                    <a:pt x="59711" y="175612"/>
+                  </a:lnTo>
+                  <a:lnTo>
+                    <a:pt x="131334" y="373644"/>
+                  </a:lnTo>
+                  <a:lnTo>
+                    <a:pt x="202956" y="559822"/>
+                  </a:lnTo>
+                  <a:lnTo>
+                    <a:pt x="274579" y="734855"/>
+                  </a:lnTo>
+                  <a:lnTo>
+                    <a:pt x="346201" y="899410"/>
+                  </a:lnTo>
+                  <a:lnTo>
+                    <a:pt x="417824" y="1054114"/>
+                  </a:lnTo>
+                  <a:lnTo>
+                    <a:pt x="489447" y="1199557"/>
+                  </a:lnTo>
+                  <a:lnTo>
+                    <a:pt x="561069" y="1336294"/>
+                  </a:lnTo>
+                  <a:lnTo>
+                    <a:pt x="632692" y="1464845"/>
+                  </a:lnTo>
+                  <a:lnTo>
+                    <a:pt x="704314" y="1585701"/>
+                  </a:lnTo>
+                  <a:lnTo>
+                    <a:pt x="775937" y="1699322"/>
+                  </a:lnTo>
+                  <a:lnTo>
+                    <a:pt x="847559" y="1806142"/>
+                  </a:lnTo>
+                  <a:lnTo>
+                    <a:pt x="919182" y="1906567"/>
+                  </a:lnTo>
+                  <a:lnTo>
+                    <a:pt x="990804" y="2000981"/>
+                  </a:lnTo>
+                  <a:lnTo>
+                    <a:pt x="1062427" y="2089742"/>
+                  </a:lnTo>
+                  <a:lnTo>
+                    <a:pt x="1134049" y="2173191"/>
+                  </a:lnTo>
+                  <a:lnTo>
+                    <a:pt x="1205672" y="2251643"/>
+                  </a:lnTo>
+                  <a:lnTo>
+                    <a:pt x="1277294" y="2325400"/>
+                  </a:lnTo>
+                  <a:lnTo>
+                    <a:pt x="1348917" y="2394741"/>
+                  </a:lnTo>
+                  <a:lnTo>
+                    <a:pt x="1420539" y="2459931"/>
+                  </a:lnTo>
+                  <a:lnTo>
+                    <a:pt x="1492162" y="2521219"/>
+                  </a:lnTo>
+                  <a:lnTo>
+                    <a:pt x="1563784" y="2578838"/>
+                  </a:lnTo>
+                  <a:lnTo>
+                    <a:pt x="1635407" y="2633008"/>
+                  </a:lnTo>
+                  <a:lnTo>
+                    <a:pt x="1707029" y="2651655"/>
+                  </a:lnTo>
+                  <a:lnTo>
+                    <a:pt x="1778652" y="2647179"/>
+                  </a:lnTo>
+                  <a:lnTo>
+                    <a:pt x="1850275" y="2642679"/>
+                  </a:lnTo>
+                  <a:lnTo>
+                    <a:pt x="1921897" y="2638155"/>
+                  </a:lnTo>
+                  <a:lnTo>
+                    <a:pt x="1993520" y="2633606"/>
+                  </a:lnTo>
+                  <a:lnTo>
+                    <a:pt x="2065142" y="2629033"/>
+                  </a:lnTo>
+                  <a:lnTo>
+                    <a:pt x="2136765" y="2624436"/>
+                  </a:lnTo>
+                  <a:lnTo>
+                    <a:pt x="2208387" y="2619813"/>
+                  </a:lnTo>
+                  <a:lnTo>
+                    <a:pt x="2280010" y="2615166"/>
+                  </a:lnTo>
+                  <a:lnTo>
+                    <a:pt x="2351632" y="2610494"/>
+                  </a:lnTo>
+                  <a:lnTo>
+                    <a:pt x="2423255" y="2605797"/>
+                  </a:lnTo>
+                  <a:lnTo>
+                    <a:pt x="2494877" y="2601074"/>
+                  </a:lnTo>
+                  <a:lnTo>
+                    <a:pt x="2566500" y="2596326"/>
+                  </a:lnTo>
+                  <a:lnTo>
+                    <a:pt x="2638122" y="2591553"/>
+                  </a:lnTo>
+                  <a:lnTo>
+                    <a:pt x="2709745" y="2586754"/>
+                  </a:lnTo>
+                  <a:lnTo>
+                    <a:pt x="2781367" y="2581929"/>
+                  </a:lnTo>
+                  <a:lnTo>
+                    <a:pt x="2852990" y="2577078"/>
+                  </a:lnTo>
+                  <a:lnTo>
+                    <a:pt x="2924612" y="2572201"/>
+                  </a:lnTo>
+                  <a:lnTo>
+                    <a:pt x="2996235" y="2567298"/>
+                  </a:lnTo>
+                  <a:lnTo>
+                    <a:pt x="3067857" y="2562368"/>
+                  </a:lnTo>
+                  <a:lnTo>
+                    <a:pt x="3139480" y="2557412"/>
+                  </a:lnTo>
+                  <a:lnTo>
+                    <a:pt x="3211103" y="2552429"/>
+                  </a:lnTo>
+                  <a:lnTo>
+                    <a:pt x="3282725" y="2547419"/>
+                  </a:lnTo>
+                  <a:lnTo>
+                    <a:pt x="3354348" y="2542383"/>
+                  </a:lnTo>
+                  <a:lnTo>
+                    <a:pt x="3425970" y="2537319"/>
+                  </a:lnTo>
+                  <a:lnTo>
+                    <a:pt x="3497593" y="2532228"/>
+                  </a:lnTo>
+                  <a:lnTo>
+                    <a:pt x="3569215" y="2527110"/>
+                  </a:lnTo>
+                  <a:lnTo>
+                    <a:pt x="3640838" y="2521964"/>
+                  </a:lnTo>
+                  <a:lnTo>
+                    <a:pt x="3712460" y="2516791"/>
+                  </a:lnTo>
+                  <a:lnTo>
+                    <a:pt x="3784083" y="2511589"/>
+                  </a:lnTo>
+                  <a:lnTo>
+                    <a:pt x="3855705" y="2506360"/>
                   </a:lnTo>
                 </a:path>
               </a:pathLst>
@@ -3718,312 +3691,312 @@
           </p:nvSpPr>
           <p:spPr>
             <a:xfrm>
-              <a:off x="1172049" y="4505416"/>
-              <a:ext cx="7090630" cy="884171"/>
+              <a:off x="1172049" y="4729609"/>
+              <a:ext cx="7090630" cy="702114"/>
             </a:xfrm>
             <a:custGeom>
               <a:avLst/>
               <a:pathLst>
-                <a:path w="7090630" h="884171">
+                <a:path w="7090630" h="702114">
                   <a:moveTo>
-                    <a:pt x="7090630" y="884171"/>
+                    <a:pt x="7090630" y="702114"/>
                   </a:moveTo>
                   <a:lnTo>
-                    <a:pt x="7019007" y="875174"/>
-                  </a:lnTo>
-                  <a:lnTo>
-                    <a:pt x="6947385" y="865696"/>
-                  </a:lnTo>
-                  <a:lnTo>
-                    <a:pt x="6875762" y="855708"/>
-                  </a:lnTo>
-                  <a:lnTo>
-                    <a:pt x="6804139" y="845185"/>
-                  </a:lnTo>
-                  <a:lnTo>
-                    <a:pt x="6732517" y="834096"/>
-                  </a:lnTo>
-                  <a:lnTo>
-                    <a:pt x="6660894" y="822413"/>
-                  </a:lnTo>
-                  <a:lnTo>
-                    <a:pt x="6589272" y="810103"/>
-                  </a:lnTo>
-                  <a:lnTo>
-                    <a:pt x="6517649" y="797133"/>
-                  </a:lnTo>
-                  <a:lnTo>
-                    <a:pt x="6446027" y="783467"/>
-                  </a:lnTo>
-                  <a:lnTo>
-                    <a:pt x="6374404" y="769067"/>
-                  </a:lnTo>
-                  <a:lnTo>
-                    <a:pt x="6302782" y="753895"/>
-                  </a:lnTo>
-                  <a:lnTo>
-                    <a:pt x="6231159" y="737908"/>
-                  </a:lnTo>
-                  <a:lnTo>
-                    <a:pt x="6159537" y="721064"/>
-                  </a:lnTo>
-                  <a:lnTo>
-                    <a:pt x="6087914" y="703316"/>
-                  </a:lnTo>
-                  <a:lnTo>
-                    <a:pt x="6016292" y="684616"/>
-                  </a:lnTo>
-                  <a:lnTo>
-                    <a:pt x="5944669" y="664912"/>
-                  </a:lnTo>
-                  <a:lnTo>
-                    <a:pt x="5873047" y="644151"/>
-                  </a:lnTo>
-                  <a:lnTo>
-                    <a:pt x="5801424" y="622276"/>
-                  </a:lnTo>
-                  <a:lnTo>
-                    <a:pt x="5729802" y="599227"/>
-                  </a:lnTo>
-                  <a:lnTo>
-                    <a:pt x="5658179" y="574942"/>
-                  </a:lnTo>
-                  <a:lnTo>
-                    <a:pt x="5586557" y="549354"/>
-                  </a:lnTo>
-                  <a:lnTo>
-                    <a:pt x="5514934" y="522392"/>
-                  </a:lnTo>
-                  <a:lnTo>
-                    <a:pt x="5443311" y="493984"/>
-                  </a:lnTo>
-                  <a:lnTo>
-                    <a:pt x="5371689" y="464052"/>
-                  </a:lnTo>
-                  <a:lnTo>
-                    <a:pt x="5300066" y="432513"/>
-                  </a:lnTo>
-                  <a:lnTo>
-                    <a:pt x="5228444" y="399282"/>
-                  </a:lnTo>
-                  <a:lnTo>
-                    <a:pt x="5156821" y="364269"/>
-                  </a:lnTo>
-                  <a:lnTo>
-                    <a:pt x="5085199" y="327376"/>
-                  </a:lnTo>
-                  <a:lnTo>
-                    <a:pt x="5013576" y="288504"/>
-                  </a:lnTo>
-                  <a:lnTo>
-                    <a:pt x="4941954" y="247546"/>
-                  </a:lnTo>
-                  <a:lnTo>
-                    <a:pt x="4870331" y="221187"/>
-                  </a:lnTo>
-                  <a:lnTo>
-                    <a:pt x="4798709" y="218298"/>
-                  </a:lnTo>
-                  <a:lnTo>
-                    <a:pt x="4727086" y="215399"/>
-                  </a:lnTo>
-                  <a:lnTo>
-                    <a:pt x="4655464" y="212490"/>
-                  </a:lnTo>
-                  <a:lnTo>
-                    <a:pt x="4583841" y="209571"/>
-                  </a:lnTo>
-                  <a:lnTo>
-                    <a:pt x="4512219" y="206641"/>
-                  </a:lnTo>
-                  <a:lnTo>
-                    <a:pt x="4440596" y="203702"/>
-                  </a:lnTo>
-                  <a:lnTo>
-                    <a:pt x="4368974" y="200752"/>
-                  </a:lnTo>
-                  <a:lnTo>
-                    <a:pt x="4297351" y="197792"/>
-                  </a:lnTo>
-                  <a:lnTo>
-                    <a:pt x="4225729" y="194822"/>
-                  </a:lnTo>
-                  <a:lnTo>
-                    <a:pt x="4154106" y="191841"/>
-                  </a:lnTo>
-                  <a:lnTo>
-                    <a:pt x="4082483" y="188850"/>
-                  </a:lnTo>
-                  <a:lnTo>
-                    <a:pt x="4010861" y="185849"/>
-                  </a:lnTo>
-                  <a:lnTo>
-                    <a:pt x="3939238" y="182837"/>
-                  </a:lnTo>
-                  <a:lnTo>
-                    <a:pt x="3867616" y="179815"/>
-                  </a:lnTo>
-                  <a:lnTo>
-                    <a:pt x="3795993" y="176782"/>
-                  </a:lnTo>
-                  <a:lnTo>
-                    <a:pt x="3724371" y="173739"/>
-                  </a:lnTo>
-                  <a:lnTo>
-                    <a:pt x="3652748" y="170685"/>
-                  </a:lnTo>
-                  <a:lnTo>
-                    <a:pt x="3581126" y="167621"/>
-                  </a:lnTo>
-                  <a:lnTo>
-                    <a:pt x="3509503" y="164545"/>
-                  </a:lnTo>
-                  <a:lnTo>
-                    <a:pt x="3437881" y="161459"/>
-                  </a:lnTo>
-                  <a:lnTo>
-                    <a:pt x="3366258" y="158363"/>
-                  </a:lnTo>
-                  <a:lnTo>
-                    <a:pt x="3294636" y="155255"/>
-                  </a:lnTo>
-                  <a:lnTo>
-                    <a:pt x="3223013" y="152137"/>
-                  </a:lnTo>
-                  <a:lnTo>
-                    <a:pt x="3151391" y="149008"/>
-                  </a:lnTo>
-                  <a:lnTo>
-                    <a:pt x="3079768" y="145868"/>
-                  </a:lnTo>
-                  <a:lnTo>
-                    <a:pt x="3008146" y="142717"/>
-                  </a:lnTo>
-                  <a:lnTo>
-                    <a:pt x="2936523" y="139556"/>
-                  </a:lnTo>
-                  <a:lnTo>
-                    <a:pt x="2864901" y="136383"/>
-                  </a:lnTo>
-                  <a:lnTo>
-                    <a:pt x="2793278" y="133199"/>
-                  </a:lnTo>
-                  <a:lnTo>
-                    <a:pt x="2721655" y="130004"/>
-                  </a:lnTo>
-                  <a:lnTo>
-                    <a:pt x="2650033" y="126798"/>
-                  </a:lnTo>
-                  <a:lnTo>
-                    <a:pt x="2578410" y="123581"/>
-                  </a:lnTo>
-                  <a:lnTo>
-                    <a:pt x="2506788" y="120353"/>
-                  </a:lnTo>
-                  <a:lnTo>
-                    <a:pt x="2435165" y="117113"/>
-                  </a:lnTo>
-                  <a:lnTo>
-                    <a:pt x="2363543" y="113862"/>
-                  </a:lnTo>
-                  <a:lnTo>
-                    <a:pt x="2291920" y="110600"/>
-                  </a:lnTo>
-                  <a:lnTo>
-                    <a:pt x="2220298" y="107326"/>
-                  </a:lnTo>
-                  <a:lnTo>
-                    <a:pt x="2148675" y="104042"/>
-                  </a:lnTo>
-                  <a:lnTo>
-                    <a:pt x="2077053" y="100745"/>
-                  </a:lnTo>
-                  <a:lnTo>
-                    <a:pt x="2005430" y="97437"/>
-                  </a:lnTo>
-                  <a:lnTo>
-                    <a:pt x="1933808" y="94118"/>
-                  </a:lnTo>
-                  <a:lnTo>
-                    <a:pt x="1862185" y="90787"/>
-                  </a:lnTo>
-                  <a:lnTo>
-                    <a:pt x="1790563" y="87445"/>
-                  </a:lnTo>
-                  <a:lnTo>
-                    <a:pt x="1718940" y="84091"/>
-                  </a:lnTo>
-                  <a:lnTo>
-                    <a:pt x="1647318" y="80725"/>
-                  </a:lnTo>
-                  <a:lnTo>
-                    <a:pt x="1575695" y="77348"/>
-                  </a:lnTo>
-                  <a:lnTo>
-                    <a:pt x="1504073" y="73959"/>
-                  </a:lnTo>
-                  <a:lnTo>
-                    <a:pt x="1432450" y="70558"/>
-                  </a:lnTo>
-                  <a:lnTo>
-                    <a:pt x="1360827" y="67145"/>
-                  </a:lnTo>
-                  <a:lnTo>
-                    <a:pt x="1289205" y="63720"/>
-                  </a:lnTo>
-                  <a:lnTo>
-                    <a:pt x="1217582" y="60284"/>
-                  </a:lnTo>
-                  <a:lnTo>
-                    <a:pt x="1145960" y="56835"/>
-                  </a:lnTo>
-                  <a:lnTo>
-                    <a:pt x="1074337" y="53375"/>
-                  </a:lnTo>
-                  <a:lnTo>
-                    <a:pt x="1002715" y="49902"/>
-                  </a:lnTo>
-                  <a:lnTo>
-                    <a:pt x="931092" y="46418"/>
-                  </a:lnTo>
-                  <a:lnTo>
-                    <a:pt x="859470" y="42921"/>
-                  </a:lnTo>
-                  <a:lnTo>
-                    <a:pt x="787847" y="39412"/>
-                  </a:lnTo>
-                  <a:lnTo>
-                    <a:pt x="716225" y="35891"/>
-                  </a:lnTo>
-                  <a:lnTo>
-                    <a:pt x="644602" y="32358"/>
-                  </a:lnTo>
-                  <a:lnTo>
-                    <a:pt x="572980" y="28812"/>
-                  </a:lnTo>
-                  <a:lnTo>
-                    <a:pt x="501357" y="25254"/>
-                  </a:lnTo>
-                  <a:lnTo>
-                    <a:pt x="429735" y="21684"/>
-                  </a:lnTo>
-                  <a:lnTo>
-                    <a:pt x="358112" y="18101"/>
-                  </a:lnTo>
-                  <a:lnTo>
-                    <a:pt x="286490" y="14506"/>
-                  </a:lnTo>
-                  <a:lnTo>
-                    <a:pt x="214867" y="10898"/>
-                  </a:lnTo>
-                  <a:lnTo>
-                    <a:pt x="143245" y="7278"/>
-                  </a:lnTo>
-                  <a:lnTo>
-                    <a:pt x="71622" y="3645"/>
-                  </a:lnTo>
-                  <a:lnTo>
-                    <a:pt x="0" y="0"/>
+                    <a:pt x="7019007" y="694121"/>
+                  </a:lnTo>
+                  <a:lnTo>
+                    <a:pt x="6947385" y="685620"/>
+                  </a:lnTo>
+                  <a:lnTo>
+                    <a:pt x="6875762" y="676577"/>
+                  </a:lnTo>
+                  <a:lnTo>
+                    <a:pt x="6804139" y="666958"/>
+                  </a:lnTo>
+                  <a:lnTo>
+                    <a:pt x="6732517" y="656727"/>
+                  </a:lnTo>
+                  <a:lnTo>
+                    <a:pt x="6660894" y="645844"/>
+                  </a:lnTo>
+                  <a:lnTo>
+                    <a:pt x="6589272" y="634268"/>
+                  </a:lnTo>
+                  <a:lnTo>
+                    <a:pt x="6517649" y="621956"/>
+                  </a:lnTo>
+                  <a:lnTo>
+                    <a:pt x="6446027" y="608859"/>
+                  </a:lnTo>
+                  <a:lnTo>
+                    <a:pt x="6374404" y="594928"/>
+                  </a:lnTo>
+                  <a:lnTo>
+                    <a:pt x="6302782" y="580111"/>
+                  </a:lnTo>
+                  <a:lnTo>
+                    <a:pt x="6231159" y="564350"/>
+                  </a:lnTo>
+                  <a:lnTo>
+                    <a:pt x="6159537" y="547585"/>
+                  </a:lnTo>
+                  <a:lnTo>
+                    <a:pt x="6087914" y="529753"/>
+                  </a:lnTo>
+                  <a:lnTo>
+                    <a:pt x="6016292" y="510785"/>
+                  </a:lnTo>
+                  <a:lnTo>
+                    <a:pt x="5944669" y="490610"/>
+                  </a:lnTo>
+                  <a:lnTo>
+                    <a:pt x="5873047" y="469150"/>
+                  </a:lnTo>
+                  <a:lnTo>
+                    <a:pt x="5801424" y="446323"/>
+                  </a:lnTo>
+                  <a:lnTo>
+                    <a:pt x="5729802" y="422043"/>
+                  </a:lnTo>
+                  <a:lnTo>
+                    <a:pt x="5658179" y="396217"/>
+                  </a:lnTo>
+                  <a:lnTo>
+                    <a:pt x="5586557" y="368747"/>
+                  </a:lnTo>
+                  <a:lnTo>
+                    <a:pt x="5514934" y="339528"/>
+                  </a:lnTo>
+                  <a:lnTo>
+                    <a:pt x="5443311" y="308448"/>
+                  </a:lnTo>
+                  <a:lnTo>
+                    <a:pt x="5371689" y="275389"/>
+                  </a:lnTo>
+                  <a:lnTo>
+                    <a:pt x="5300066" y="240225"/>
+                  </a:lnTo>
+                  <a:lnTo>
+                    <a:pt x="5228444" y="202822"/>
+                  </a:lnTo>
+                  <a:lnTo>
+                    <a:pt x="5156821" y="163037"/>
+                  </a:lnTo>
+                  <a:lnTo>
+                    <a:pt x="5085199" y="120719"/>
+                  </a:lnTo>
+                  <a:lnTo>
+                    <a:pt x="5013576" y="75707"/>
+                  </a:lnTo>
+                  <a:lnTo>
+                    <a:pt x="4941954" y="27828"/>
+                  </a:lnTo>
+                  <a:lnTo>
+                    <a:pt x="4870331" y="0"/>
+                  </a:lnTo>
+                  <a:lnTo>
+                    <a:pt x="4798709" y="4428"/>
+                  </a:lnTo>
+                  <a:lnTo>
+                    <a:pt x="4727086" y="8832"/>
+                  </a:lnTo>
+                  <a:lnTo>
+                    <a:pt x="4655464" y="13213"/>
+                  </a:lnTo>
+                  <a:lnTo>
+                    <a:pt x="4583841" y="17570"/>
+                  </a:lnTo>
+                  <a:lnTo>
+                    <a:pt x="4512219" y="21904"/>
+                  </a:lnTo>
+                  <a:lnTo>
+                    <a:pt x="4440596" y="26215"/>
+                  </a:lnTo>
+                  <a:lnTo>
+                    <a:pt x="4368974" y="30503"/>
+                  </a:lnTo>
+                  <a:lnTo>
+                    <a:pt x="4297351" y="34768"/>
+                  </a:lnTo>
+                  <a:lnTo>
+                    <a:pt x="4225729" y="39010"/>
+                  </a:lnTo>
+                  <a:lnTo>
+                    <a:pt x="4154106" y="43229"/>
+                  </a:lnTo>
+                  <a:lnTo>
+                    <a:pt x="4082483" y="47426"/>
+                  </a:lnTo>
+                  <a:lnTo>
+                    <a:pt x="4010861" y="51601"/>
+                  </a:lnTo>
+                  <a:lnTo>
+                    <a:pt x="3939238" y="55753"/>
+                  </a:lnTo>
+                  <a:lnTo>
+                    <a:pt x="3867616" y="59882"/>
+                  </a:lnTo>
+                  <a:lnTo>
+                    <a:pt x="3795993" y="63990"/>
+                  </a:lnTo>
+                  <a:lnTo>
+                    <a:pt x="3724371" y="68076"/>
+                  </a:lnTo>
+                  <a:lnTo>
+                    <a:pt x="3652748" y="72140"/>
+                  </a:lnTo>
+                  <a:lnTo>
+                    <a:pt x="3581126" y="76182"/>
+                  </a:lnTo>
+                  <a:lnTo>
+                    <a:pt x="3509503" y="80202"/>
+                  </a:lnTo>
+                  <a:lnTo>
+                    <a:pt x="3437881" y="84201"/>
+                  </a:lnTo>
+                  <a:lnTo>
+                    <a:pt x="3366258" y="88179"/>
+                  </a:lnTo>
+                  <a:lnTo>
+                    <a:pt x="3294636" y="92135"/>
+                  </a:lnTo>
+                  <a:lnTo>
+                    <a:pt x="3223013" y="96070"/>
+                  </a:lnTo>
+                  <a:lnTo>
+                    <a:pt x="3151391" y="99984"/>
+                  </a:lnTo>
+                  <a:lnTo>
+                    <a:pt x="3079768" y="103878"/>
+                  </a:lnTo>
+                  <a:lnTo>
+                    <a:pt x="3008146" y="107750"/>
+                  </a:lnTo>
+                  <a:lnTo>
+                    <a:pt x="2936523" y="111602"/>
+                  </a:lnTo>
+                  <a:lnTo>
+                    <a:pt x="2864901" y="115433"/>
+                  </a:lnTo>
+                  <a:lnTo>
+                    <a:pt x="2793278" y="119243"/>
+                  </a:lnTo>
+                  <a:lnTo>
+                    <a:pt x="2721655" y="123033"/>
+                  </a:lnTo>
+                  <a:lnTo>
+                    <a:pt x="2650033" y="126803"/>
+                  </a:lnTo>
+                  <a:lnTo>
+                    <a:pt x="2578410" y="130553"/>
+                  </a:lnTo>
+                  <a:lnTo>
+                    <a:pt x="2506788" y="134282"/>
+                  </a:lnTo>
+                  <a:lnTo>
+                    <a:pt x="2435165" y="137992"/>
+                  </a:lnTo>
+                  <a:lnTo>
+                    <a:pt x="2363543" y="141682"/>
+                  </a:lnTo>
+                  <a:lnTo>
+                    <a:pt x="2291920" y="145352"/>
+                  </a:lnTo>
+                  <a:lnTo>
+                    <a:pt x="2220298" y="149002"/>
+                  </a:lnTo>
+                  <a:lnTo>
+                    <a:pt x="2148675" y="152633"/>
+                  </a:lnTo>
+                  <a:lnTo>
+                    <a:pt x="2077053" y="156245"/>
+                  </a:lnTo>
+                  <a:lnTo>
+                    <a:pt x="2005430" y="159837"/>
+                  </a:lnTo>
+                  <a:lnTo>
+                    <a:pt x="1933808" y="163410"/>
+                  </a:lnTo>
+                  <a:lnTo>
+                    <a:pt x="1862185" y="166963"/>
+                  </a:lnTo>
+                  <a:lnTo>
+                    <a:pt x="1790563" y="170498"/>
+                  </a:lnTo>
+                  <a:lnTo>
+                    <a:pt x="1718940" y="174014"/>
+                  </a:lnTo>
+                  <a:lnTo>
+                    <a:pt x="1647318" y="177511"/>
+                  </a:lnTo>
+                  <a:lnTo>
+                    <a:pt x="1575695" y="180990"/>
+                  </a:lnTo>
+                  <a:lnTo>
+                    <a:pt x="1504073" y="184449"/>
+                  </a:lnTo>
+                  <a:lnTo>
+                    <a:pt x="1432450" y="187891"/>
+                  </a:lnTo>
+                  <a:lnTo>
+                    <a:pt x="1360827" y="191313"/>
+                  </a:lnTo>
+                  <a:lnTo>
+                    <a:pt x="1289205" y="194718"/>
+                  </a:lnTo>
+                  <a:lnTo>
+                    <a:pt x="1217582" y="198104"/>
+                  </a:lnTo>
+                  <a:lnTo>
+                    <a:pt x="1145960" y="201472"/>
+                  </a:lnTo>
+                  <a:lnTo>
+                    <a:pt x="1074337" y="204823"/>
+                  </a:lnTo>
+                  <a:lnTo>
+                    <a:pt x="1002715" y="208155"/>
+                  </a:lnTo>
+                  <a:lnTo>
+                    <a:pt x="931092" y="211469"/>
+                  </a:lnTo>
+                  <a:lnTo>
+                    <a:pt x="859470" y="214766"/>
+                  </a:lnTo>
+                  <a:lnTo>
+                    <a:pt x="787847" y="218045"/>
+                  </a:lnTo>
+                  <a:lnTo>
+                    <a:pt x="716225" y="221306"/>
+                  </a:lnTo>
+                  <a:lnTo>
+                    <a:pt x="644602" y="224550"/>
+                  </a:lnTo>
+                  <a:lnTo>
+                    <a:pt x="572980" y="227777"/>
+                  </a:lnTo>
+                  <a:lnTo>
+                    <a:pt x="501357" y="230987"/>
+                  </a:lnTo>
+                  <a:lnTo>
+                    <a:pt x="429735" y="234179"/>
+                  </a:lnTo>
+                  <a:lnTo>
+                    <a:pt x="358112" y="237354"/>
+                  </a:lnTo>
+                  <a:lnTo>
+                    <a:pt x="286490" y="240512"/>
+                  </a:lnTo>
+                  <a:lnTo>
+                    <a:pt x="214867" y="243654"/>
+                  </a:lnTo>
+                  <a:lnTo>
+                    <a:pt x="143245" y="246778"/>
+                  </a:lnTo>
+                  <a:lnTo>
+                    <a:pt x="71622" y="249886"/>
+                  </a:lnTo>
+                  <a:lnTo>
+                    <a:pt x="0" y="252977"/>
                   </a:lnTo>
                 </a:path>
               </a:pathLst>
@@ -4043,264 +4016,261 @@
           </p:nvSpPr>
           <p:spPr>
             <a:xfrm>
-              <a:off x="2383762" y="2073503"/>
-              <a:ext cx="5878916" cy="3130112"/>
+              <a:off x="2424868" y="2073503"/>
+              <a:ext cx="5837810" cy="3133479"/>
             </a:xfrm>
             <a:custGeom>
               <a:avLst/>
               <a:pathLst>
-                <a:path w="5878916" h="3130112">
+                <a:path w="5837810" h="3133479">
                   <a:moveTo>
                     <a:pt x="0" y="0"/>
                   </a:moveTo>
                   <a:lnTo>
-                    <a:pt x="5869" y="8049"/>
-                  </a:lnTo>
-                  <a:lnTo>
-                    <a:pt x="77491" y="103577"/>
-                  </a:lnTo>
-                  <a:lnTo>
-                    <a:pt x="149114" y="196480"/>
-                  </a:lnTo>
-                  <a:lnTo>
-                    <a:pt x="220736" y="286829"/>
-                  </a:lnTo>
-                  <a:lnTo>
-                    <a:pt x="292359" y="374695"/>
-                  </a:lnTo>
-                  <a:lnTo>
-                    <a:pt x="363981" y="460146"/>
-                  </a:lnTo>
-                  <a:lnTo>
-                    <a:pt x="435604" y="543248"/>
-                  </a:lnTo>
-                  <a:lnTo>
-                    <a:pt x="507227" y="624067"/>
-                  </a:lnTo>
-                  <a:lnTo>
-                    <a:pt x="578849" y="702664"/>
-                  </a:lnTo>
-                  <a:lnTo>
-                    <a:pt x="650472" y="779101"/>
-                  </a:lnTo>
-                  <a:lnTo>
-                    <a:pt x="722094" y="853437"/>
-                  </a:lnTo>
-                  <a:lnTo>
-                    <a:pt x="793717" y="925730"/>
-                  </a:lnTo>
-                  <a:lnTo>
-                    <a:pt x="865339" y="996036"/>
-                  </a:lnTo>
-                  <a:lnTo>
-                    <a:pt x="936962" y="1064410"/>
-                  </a:lnTo>
-                  <a:lnTo>
-                    <a:pt x="1008584" y="1130904"/>
-                  </a:lnTo>
-                  <a:lnTo>
-                    <a:pt x="1080207" y="1195571"/>
-                  </a:lnTo>
-                  <a:lnTo>
-                    <a:pt x="1151829" y="1258461"/>
-                  </a:lnTo>
-                  <a:lnTo>
-                    <a:pt x="1223452" y="1319622"/>
-                  </a:lnTo>
-                  <a:lnTo>
-                    <a:pt x="1295074" y="1379102"/>
-                  </a:lnTo>
-                  <a:lnTo>
-                    <a:pt x="1366697" y="1436947"/>
-                  </a:lnTo>
-                  <a:lnTo>
-                    <a:pt x="1438319" y="1493203"/>
-                  </a:lnTo>
-                  <a:lnTo>
-                    <a:pt x="1509942" y="1547912"/>
-                  </a:lnTo>
-                  <a:lnTo>
-                    <a:pt x="1581564" y="1601117"/>
-                  </a:lnTo>
-                  <a:lnTo>
-                    <a:pt x="1653187" y="1652861"/>
-                  </a:lnTo>
-                  <a:lnTo>
-                    <a:pt x="1724809" y="1703182"/>
-                  </a:lnTo>
-                  <a:lnTo>
-                    <a:pt x="1796432" y="1752120"/>
-                  </a:lnTo>
-                  <a:lnTo>
-                    <a:pt x="1868055" y="1799713"/>
-                  </a:lnTo>
-                  <a:lnTo>
-                    <a:pt x="1939677" y="1845998"/>
-                  </a:lnTo>
-                  <a:lnTo>
-                    <a:pt x="2011300" y="1891011"/>
-                  </a:lnTo>
-                  <a:lnTo>
-                    <a:pt x="2082922" y="1934787"/>
-                  </a:lnTo>
-                  <a:lnTo>
-                    <a:pt x="2154545" y="1977359"/>
-                  </a:lnTo>
-                  <a:lnTo>
-                    <a:pt x="2226167" y="2018761"/>
-                  </a:lnTo>
-                  <a:lnTo>
-                    <a:pt x="2297790" y="2059026"/>
-                  </a:lnTo>
-                  <a:lnTo>
-                    <a:pt x="2369412" y="2098184"/>
-                  </a:lnTo>
-                  <a:lnTo>
-                    <a:pt x="2441035" y="2136265"/>
-                  </a:lnTo>
-                  <a:lnTo>
-                    <a:pt x="2512657" y="2173300"/>
-                  </a:lnTo>
-                  <a:lnTo>
-                    <a:pt x="2584280" y="2209318"/>
-                  </a:lnTo>
-                  <a:lnTo>
-                    <a:pt x="2655902" y="2244345"/>
-                  </a:lnTo>
-                  <a:lnTo>
-                    <a:pt x="2727525" y="2278409"/>
-                  </a:lnTo>
-                  <a:lnTo>
-                    <a:pt x="2799147" y="2311537"/>
-                  </a:lnTo>
-                  <a:lnTo>
-                    <a:pt x="2870770" y="2343755"/>
-                  </a:lnTo>
-                  <a:lnTo>
-                    <a:pt x="2942392" y="2375087"/>
-                  </a:lnTo>
-                  <a:lnTo>
-                    <a:pt x="3014015" y="2405558"/>
-                  </a:lnTo>
-                  <a:lnTo>
-                    <a:pt x="3085637" y="2435192"/>
-                  </a:lnTo>
-                  <a:lnTo>
-                    <a:pt x="3157260" y="2464011"/>
-                  </a:lnTo>
-                  <a:lnTo>
-                    <a:pt x="3228883" y="2492038"/>
-                  </a:lnTo>
-                  <a:lnTo>
-                    <a:pt x="3300505" y="2519295"/>
-                  </a:lnTo>
-                  <a:lnTo>
-                    <a:pt x="3372128" y="2545802"/>
-                  </a:lnTo>
-                  <a:lnTo>
-                    <a:pt x="3443750" y="2571581"/>
-                  </a:lnTo>
-                  <a:lnTo>
-                    <a:pt x="3515373" y="2596652"/>
-                  </a:lnTo>
-                  <a:lnTo>
-                    <a:pt x="3586995" y="2621033"/>
-                  </a:lnTo>
-                  <a:lnTo>
-                    <a:pt x="3658618" y="2644744"/>
-                  </a:lnTo>
-                  <a:lnTo>
-                    <a:pt x="3730240" y="2667804"/>
-                  </a:lnTo>
-                  <a:lnTo>
-                    <a:pt x="3801863" y="2690230"/>
-                  </a:lnTo>
-                  <a:lnTo>
-                    <a:pt x="3873485" y="2712039"/>
-                  </a:lnTo>
-                  <a:lnTo>
-                    <a:pt x="3945108" y="2733249"/>
-                  </a:lnTo>
-                  <a:lnTo>
-                    <a:pt x="4016730" y="2753877"/>
-                  </a:lnTo>
-                  <a:lnTo>
-                    <a:pt x="4088353" y="2773937"/>
-                  </a:lnTo>
-                  <a:lnTo>
-                    <a:pt x="4159975" y="2793446"/>
-                  </a:lnTo>
-                  <a:lnTo>
-                    <a:pt x="4231598" y="2812418"/>
-                  </a:lnTo>
-                  <a:lnTo>
-                    <a:pt x="4303220" y="2830869"/>
-                  </a:lnTo>
-                  <a:lnTo>
-                    <a:pt x="4374843" y="2848813"/>
-                  </a:lnTo>
-                  <a:lnTo>
-                    <a:pt x="4446465" y="2866264"/>
-                  </a:lnTo>
-                  <a:lnTo>
-                    <a:pt x="4518088" y="2883236"/>
-                  </a:lnTo>
-                  <a:lnTo>
-                    <a:pt x="4589711" y="2899740"/>
-                  </a:lnTo>
-                  <a:lnTo>
-                    <a:pt x="4661333" y="2915792"/>
-                  </a:lnTo>
-                  <a:lnTo>
-                    <a:pt x="4732956" y="2931402"/>
-                  </a:lnTo>
-                  <a:lnTo>
-                    <a:pt x="4804578" y="2946583"/>
-                  </a:lnTo>
-                  <a:lnTo>
-                    <a:pt x="4876201" y="2961346"/>
-                  </a:lnTo>
-                  <a:lnTo>
-                    <a:pt x="4947823" y="2975704"/>
-                  </a:lnTo>
-                  <a:lnTo>
-                    <a:pt x="5019446" y="2989668"/>
-                  </a:lnTo>
-                  <a:lnTo>
-                    <a:pt x="5091068" y="3003247"/>
-                  </a:lnTo>
-                  <a:lnTo>
-                    <a:pt x="5162691" y="3016453"/>
-                  </a:lnTo>
-                  <a:lnTo>
-                    <a:pt x="5234313" y="3029297"/>
-                  </a:lnTo>
-                  <a:lnTo>
-                    <a:pt x="5305936" y="3041787"/>
-                  </a:lnTo>
-                  <a:lnTo>
-                    <a:pt x="5377558" y="3053934"/>
-                  </a:lnTo>
-                  <a:lnTo>
-                    <a:pt x="5449181" y="3065747"/>
-                  </a:lnTo>
-                  <a:lnTo>
-                    <a:pt x="5520803" y="3077236"/>
-                  </a:lnTo>
-                  <a:lnTo>
-                    <a:pt x="5592426" y="3088409"/>
-                  </a:lnTo>
-                  <a:lnTo>
-                    <a:pt x="5664048" y="3099274"/>
-                  </a:lnTo>
-                  <a:lnTo>
-                    <a:pt x="5735671" y="3109841"/>
-                  </a:lnTo>
-                  <a:lnTo>
-                    <a:pt x="5807293" y="3120118"/>
-                  </a:lnTo>
-                  <a:lnTo>
-                    <a:pt x="5878916" y="3130112"/>
+                    <a:pt x="36385" y="49862"/>
+                  </a:lnTo>
+                  <a:lnTo>
+                    <a:pt x="108008" y="145285"/>
+                  </a:lnTo>
+                  <a:lnTo>
+                    <a:pt x="179630" y="238057"/>
+                  </a:lnTo>
+                  <a:lnTo>
+                    <a:pt x="251253" y="328251"/>
+                  </a:lnTo>
+                  <a:lnTo>
+                    <a:pt x="322875" y="415938"/>
+                  </a:lnTo>
+                  <a:lnTo>
+                    <a:pt x="394498" y="501188"/>
+                  </a:lnTo>
+                  <a:lnTo>
+                    <a:pt x="466121" y="584070"/>
+                  </a:lnTo>
+                  <a:lnTo>
+                    <a:pt x="537743" y="664648"/>
+                  </a:lnTo>
+                  <a:lnTo>
+                    <a:pt x="609366" y="742987"/>
+                  </a:lnTo>
+                  <a:lnTo>
+                    <a:pt x="680988" y="819149"/>
+                  </a:lnTo>
+                  <a:lnTo>
+                    <a:pt x="752611" y="893195"/>
+                  </a:lnTo>
+                  <a:lnTo>
+                    <a:pt x="824233" y="965183"/>
+                  </a:lnTo>
+                  <a:lnTo>
+                    <a:pt x="895856" y="1035171"/>
+                  </a:lnTo>
+                  <a:lnTo>
+                    <a:pt x="967478" y="1103213"/>
+                  </a:lnTo>
+                  <a:lnTo>
+                    <a:pt x="1039101" y="1169365"/>
+                  </a:lnTo>
+                  <a:lnTo>
+                    <a:pt x="1110723" y="1233679"/>
+                  </a:lnTo>
+                  <a:lnTo>
+                    <a:pt x="1182346" y="1296205"/>
+                  </a:lnTo>
+                  <a:lnTo>
+                    <a:pt x="1253968" y="1356994"/>
+                  </a:lnTo>
+                  <a:lnTo>
+                    <a:pt x="1325591" y="1416094"/>
+                  </a:lnTo>
+                  <a:lnTo>
+                    <a:pt x="1397213" y="1473551"/>
+                  </a:lnTo>
+                  <a:lnTo>
+                    <a:pt x="1468836" y="1529412"/>
+                  </a:lnTo>
+                  <a:lnTo>
+                    <a:pt x="1540458" y="1583721"/>
+                  </a:lnTo>
+                  <a:lnTo>
+                    <a:pt x="1612081" y="1636520"/>
+                  </a:lnTo>
+                  <a:lnTo>
+                    <a:pt x="1683703" y="1687852"/>
+                  </a:lnTo>
+                  <a:lnTo>
+                    <a:pt x="1755326" y="1737757"/>
+                  </a:lnTo>
+                  <a:lnTo>
+                    <a:pt x="1826949" y="1786276"/>
+                  </a:lnTo>
+                  <a:lnTo>
+                    <a:pt x="1898571" y="1833447"/>
+                  </a:lnTo>
+                  <a:lnTo>
+                    <a:pt x="1970194" y="1879306"/>
+                  </a:lnTo>
+                  <a:lnTo>
+                    <a:pt x="2041816" y="1923892"/>
+                  </a:lnTo>
+                  <a:lnTo>
+                    <a:pt x="2113439" y="1967238"/>
+                  </a:lnTo>
+                  <a:lnTo>
+                    <a:pt x="2185061" y="2009380"/>
+                  </a:lnTo>
+                  <a:lnTo>
+                    <a:pt x="2256684" y="2050351"/>
+                  </a:lnTo>
+                  <a:lnTo>
+                    <a:pt x="2328306" y="2090183"/>
+                  </a:lnTo>
+                  <a:lnTo>
+                    <a:pt x="2399929" y="2128908"/>
+                  </a:lnTo>
+                  <a:lnTo>
+                    <a:pt x="2471551" y="2166557"/>
+                  </a:lnTo>
+                  <a:lnTo>
+                    <a:pt x="2543174" y="2203160"/>
+                  </a:lnTo>
+                  <a:lnTo>
+                    <a:pt x="2614796" y="2238746"/>
+                  </a:lnTo>
+                  <a:lnTo>
+                    <a:pt x="2686419" y="2273343"/>
+                  </a:lnTo>
+                  <a:lnTo>
+                    <a:pt x="2758041" y="2306979"/>
+                  </a:lnTo>
+                  <a:lnTo>
+                    <a:pt x="2829664" y="2339680"/>
+                  </a:lnTo>
+                  <a:lnTo>
+                    <a:pt x="2901286" y="2371472"/>
+                  </a:lnTo>
+                  <a:lnTo>
+                    <a:pt x="2972909" y="2402380"/>
+                  </a:lnTo>
+                  <a:lnTo>
+                    <a:pt x="3044531" y="2432430"/>
+                  </a:lnTo>
+                  <a:lnTo>
+                    <a:pt x="3116154" y="2461645"/>
+                  </a:lnTo>
+                  <a:lnTo>
+                    <a:pt x="3187777" y="2490048"/>
+                  </a:lnTo>
+                  <a:lnTo>
+                    <a:pt x="3259399" y="2517661"/>
+                  </a:lnTo>
+                  <a:lnTo>
+                    <a:pt x="3331022" y="2544508"/>
+                  </a:lnTo>
+                  <a:lnTo>
+                    <a:pt x="3402644" y="2570608"/>
+                  </a:lnTo>
+                  <a:lnTo>
+                    <a:pt x="3474267" y="2595983"/>
+                  </a:lnTo>
+                  <a:lnTo>
+                    <a:pt x="3545889" y="2620653"/>
+                  </a:lnTo>
+                  <a:lnTo>
+                    <a:pt x="3617512" y="2644637"/>
+                  </a:lnTo>
+                  <a:lnTo>
+                    <a:pt x="3689134" y="2667955"/>
+                  </a:lnTo>
+                  <a:lnTo>
+                    <a:pt x="3760757" y="2690624"/>
+                  </a:lnTo>
+                  <a:lnTo>
+                    <a:pt x="3832379" y="2712664"/>
+                  </a:lnTo>
+                  <a:lnTo>
+                    <a:pt x="3904002" y="2734092"/>
+                  </a:lnTo>
+                  <a:lnTo>
+                    <a:pt x="3975624" y="2754924"/>
+                  </a:lnTo>
+                  <a:lnTo>
+                    <a:pt x="4047247" y="2775177"/>
+                  </a:lnTo>
+                  <a:lnTo>
+                    <a:pt x="4118869" y="2794867"/>
+                  </a:lnTo>
+                  <a:lnTo>
+                    <a:pt x="4190492" y="2814010"/>
+                  </a:lnTo>
+                  <a:lnTo>
+                    <a:pt x="4262114" y="2832621"/>
+                  </a:lnTo>
+                  <a:lnTo>
+                    <a:pt x="4333737" y="2850715"/>
+                  </a:lnTo>
+                  <a:lnTo>
+                    <a:pt x="4405359" y="2868306"/>
+                  </a:lnTo>
+                  <a:lnTo>
+                    <a:pt x="4476982" y="2885408"/>
+                  </a:lnTo>
+                  <a:lnTo>
+                    <a:pt x="4548605" y="2902035"/>
+                  </a:lnTo>
+                  <a:lnTo>
+                    <a:pt x="4620227" y="2918200"/>
+                  </a:lnTo>
+                  <a:lnTo>
+                    <a:pt x="4691850" y="2933916"/>
+                  </a:lnTo>
+                  <a:lnTo>
+                    <a:pt x="4763472" y="2949195"/>
+                  </a:lnTo>
+                  <a:lnTo>
+                    <a:pt x="4835095" y="2964050"/>
+                  </a:lnTo>
+                  <a:lnTo>
+                    <a:pt x="4906717" y="2978491"/>
+                  </a:lnTo>
+                  <a:lnTo>
+                    <a:pt x="4978340" y="2992532"/>
+                  </a:lnTo>
+                  <a:lnTo>
+                    <a:pt x="5049962" y="3006182"/>
+                  </a:lnTo>
+                  <a:lnTo>
+                    <a:pt x="5121585" y="3019453"/>
+                  </a:lnTo>
+                  <a:lnTo>
+                    <a:pt x="5193207" y="3032355"/>
+                  </a:lnTo>
+                  <a:lnTo>
+                    <a:pt x="5264830" y="3044899"/>
+                  </a:lnTo>
+                  <a:lnTo>
+                    <a:pt x="5336452" y="3057094"/>
+                  </a:lnTo>
+                  <a:lnTo>
+                    <a:pt x="5408075" y="3068950"/>
+                  </a:lnTo>
+                  <a:lnTo>
+                    <a:pt x="5479697" y="3080476"/>
+                  </a:lnTo>
+                  <a:lnTo>
+                    <a:pt x="5551320" y="3091683"/>
+                  </a:lnTo>
+                  <a:lnTo>
+                    <a:pt x="5622942" y="3102578"/>
+                  </a:lnTo>
+                  <a:lnTo>
+                    <a:pt x="5694565" y="3113170"/>
+                  </a:lnTo>
+                  <a:lnTo>
+                    <a:pt x="5766187" y="3123468"/>
+                  </a:lnTo>
+                  <a:lnTo>
+                    <a:pt x="5837810" y="3133479"/>
                   </a:lnTo>
                 </a:path>
               </a:pathLst>
@@ -5040,7 +5010,7 @@
                   <a:latin typeface="Helvetica"/>
                   <a:cs typeface="Helvetica"/>
                 </a:rPr>
-                <a:t>subHR per 1 mL/min: 0.96 (0.93-1.00)  |  per IQR (Δ = 18.2): 0.52 (0.29-0.92)  |  IQR: [-11.5, 6.7]</a:t>
+                <a:t>subHR per 1 mL/min: 0.96 (0.92-1.01)  |  per IQR (Δ = 18.2): 0.52 (0.23-1.13)  |  IQR: [-11.5, 6.7]</a:t>
               </a:r>
             </a:p>
           </p:txBody>

--- a/docs/plots/carbo/jx_carbo_linsubhr_egfrdisc_akikdigo.pptx
+++ b/docs/plots/carbo/jx_carbo_linsubhr_egfrdisc_akikdigo.pptx
@@ -3349,10 +3349,10 @@
                     <a:pt x="3008146" y="2763857"/>
                   </a:lnTo>
                   <a:lnTo>
-                    <a:pt x="2936523" y="2767709"/>
-                  </a:lnTo>
-                  <a:lnTo>
-                    <a:pt x="2864901" y="2771540"/>
+                    <a:pt x="2936523" y="2767708"/>
+                  </a:lnTo>
+                  <a:lnTo>
+                    <a:pt x="2864901" y="2771539"/>
                   </a:lnTo>
                   <a:lnTo>
                     <a:pt x="2793278" y="2775350"/>
@@ -3385,7 +3385,7 @@
                     <a:pt x="2148675" y="2808740"/>
                   </a:lnTo>
                   <a:lnTo>
-                    <a:pt x="2077053" y="2812352"/>
+                    <a:pt x="2077053" y="2812351"/>
                   </a:lnTo>
                   <a:lnTo>
                     <a:pt x="2005430" y="2815944"/>
@@ -3406,13 +3406,13 @@
                     <a:pt x="1647318" y="2833618"/>
                   </a:lnTo>
                   <a:lnTo>
-                    <a:pt x="1575695" y="2837097"/>
+                    <a:pt x="1575695" y="2837096"/>
                   </a:lnTo>
                   <a:lnTo>
                     <a:pt x="1504073" y="2840556"/>
                   </a:lnTo>
                   <a:lnTo>
-                    <a:pt x="1432450" y="2843998"/>
+                    <a:pt x="1432450" y="2843997"/>
                   </a:lnTo>
                   <a:lnTo>
                     <a:pt x="1360827" y="2847420"/>
@@ -3427,7 +3427,7 @@
                     <a:pt x="1145960" y="2857579"/>
                   </a:lnTo>
                   <a:lnTo>
-                    <a:pt x="1074337" y="2860930"/>
+                    <a:pt x="1074337" y="2860929"/>
                   </a:lnTo>
                   <a:lnTo>
                     <a:pt x="1002715" y="2864262"/>
@@ -3451,7 +3451,7 @@
                     <a:pt x="572980" y="2883884"/>
                   </a:lnTo>
                   <a:lnTo>
-                    <a:pt x="501357" y="2887094"/>
+                    <a:pt x="501357" y="2887093"/>
                   </a:lnTo>
                   <a:lnTo>
                     <a:pt x="429735" y="2890286"/>
@@ -3644,7 +3644,7 @@
                     <a:pt x="3139480" y="2557412"/>
                   </a:lnTo>
                   <a:lnTo>
-                    <a:pt x="3211103" y="2552429"/>
+                    <a:pt x="3211102" y="2552429"/>
                   </a:lnTo>
                   <a:lnTo>
                     <a:pt x="3282725" y="2547419"/>
@@ -3987,7 +3987,7 @@
                     <a:pt x="286490" y="240512"/>
                   </a:lnTo>
                   <a:lnTo>
-                    <a:pt x="214867" y="243654"/>
+                    <a:pt x="214867" y="243653"/>
                   </a:lnTo>
                   <a:lnTo>
                     <a:pt x="143245" y="246778"/>
@@ -4016,7 +4016,7 @@
           </p:nvSpPr>
           <p:spPr>
             <a:xfrm>
-              <a:off x="2424868" y="2073503"/>
+              <a:off x="2424869" y="2073503"/>
               <a:ext cx="5837810" cy="3133479"/>
             </a:xfrm>
             <a:custGeom>
@@ -4036,7 +4036,7 @@
                     <a:pt x="179630" y="238057"/>
                   </a:lnTo>
                   <a:lnTo>
-                    <a:pt x="251253" y="328251"/>
+                    <a:pt x="251253" y="328250"/>
                   </a:lnTo>
                   <a:lnTo>
                     <a:pt x="322875" y="415938"/>
@@ -4045,13 +4045,13 @@
                     <a:pt x="394498" y="501188"/>
                   </a:lnTo>
                   <a:lnTo>
-                    <a:pt x="466121" y="584070"/>
+                    <a:pt x="466120" y="584069"/>
                   </a:lnTo>
                   <a:lnTo>
                     <a:pt x="537743" y="664648"/>
                   </a:lnTo>
                   <a:lnTo>
-                    <a:pt x="609366" y="742987"/>
+                    <a:pt x="609365" y="742987"/>
                   </a:lnTo>
                   <a:lnTo>
                     <a:pt x="680988" y="819149"/>
@@ -4063,7 +4063,7 @@
                     <a:pt x="824233" y="965183"/>
                   </a:lnTo>
                   <a:lnTo>
-                    <a:pt x="895856" y="1035171"/>
+                    <a:pt x="895856" y="1035170"/>
                   </a:lnTo>
                   <a:lnTo>
                     <a:pt x="967478" y="1103213"/>
@@ -4090,7 +4090,7 @@
                     <a:pt x="1468836" y="1529412"/>
                   </a:lnTo>
                   <a:lnTo>
-                    <a:pt x="1540458" y="1583721"/>
+                    <a:pt x="1540458" y="1583720"/>
                   </a:lnTo>
                   <a:lnTo>
                     <a:pt x="1612081" y="1636520"/>
@@ -4102,13 +4102,13 @@
                     <a:pt x="1755326" y="1737757"/>
                   </a:lnTo>
                   <a:lnTo>
-                    <a:pt x="1826949" y="1786276"/>
+                    <a:pt x="1826948" y="1786276"/>
                   </a:lnTo>
                   <a:lnTo>
                     <a:pt x="1898571" y="1833447"/>
                   </a:lnTo>
                   <a:lnTo>
-                    <a:pt x="1970194" y="1879306"/>
+                    <a:pt x="1970193" y="1879306"/>
                   </a:lnTo>
                   <a:lnTo>
                     <a:pt x="2041816" y="1923892"/>
@@ -4144,7 +4144,7 @@
                     <a:pt x="2758041" y="2306979"/>
                   </a:lnTo>
                   <a:lnTo>
-                    <a:pt x="2829664" y="2339680"/>
+                    <a:pt x="2829664" y="2339679"/>
                   </a:lnTo>
                   <a:lnTo>
                     <a:pt x="2901286" y="2371472"/>
@@ -4159,13 +4159,13 @@
                     <a:pt x="3116154" y="2461645"/>
                   </a:lnTo>
                   <a:lnTo>
-                    <a:pt x="3187777" y="2490048"/>
+                    <a:pt x="3187776" y="2490048"/>
                   </a:lnTo>
                   <a:lnTo>
                     <a:pt x="3259399" y="2517661"/>
                   </a:lnTo>
                   <a:lnTo>
-                    <a:pt x="3331022" y="2544508"/>
+                    <a:pt x="3331021" y="2544508"/>
                   </a:lnTo>
                   <a:lnTo>
                     <a:pt x="3402644" y="2570608"/>
@@ -4216,13 +4216,13 @@
                     <a:pt x="4476982" y="2885408"/>
                   </a:lnTo>
                   <a:lnTo>
-                    <a:pt x="4548605" y="2902035"/>
+                    <a:pt x="4548604" y="2902035"/>
                   </a:lnTo>
                   <a:lnTo>
                     <a:pt x="4620227" y="2918200"/>
                   </a:lnTo>
                   <a:lnTo>
-                    <a:pt x="4691850" y="2933916"/>
+                    <a:pt x="4691849" y="2933916"/>
                   </a:lnTo>
                   <a:lnTo>
                     <a:pt x="4763472" y="2949195"/>

--- a/docs/plots/carbo/jx_carbo_linsubhr_egfrdisc_akikdigo.pptx
+++ b/docs/plots/carbo/jx_carbo_linsubhr_egfrdisc_akikdigo.pptx
@@ -4978,7 +4978,7 @@
           <p:spPr>
             <a:xfrm>
               <a:off x="817517" y="1896563"/>
-              <a:ext cx="4869911" cy="82021"/>
+              <a:ext cx="5413065" cy="82021"/>
             </a:xfrm>
             <a:prstGeom prst="rect">
               <a:avLst/>
@@ -5010,7 +5010,7 @@
                   <a:latin typeface="Helvetica"/>
                   <a:cs typeface="Helvetica"/>
                 </a:rPr>
-                <a:t>subHR per 1 mL/min: 0.96 (0.92-1.01)  |  per IQR (Δ = 18.2): 0.52 (0.23-1.13)  |  IQR: [-11.5, 6.7]</a:t>
+                <a:t>subHR per 1 mL/min: 0.96 (0.92-1.01), p = 0.100  |  per IQR (Δ = 18.2): 0.52 (0.23-1.13)  |  IQR: [-11.5, 6.7]</a:t>
               </a:r>
             </a:p>
           </p:txBody>

--- a/docs/plots/carbo/jx_carbo_linsubhr_egfrdisc_akikdigo.pptx
+++ b/docs/plots/carbo/jx_carbo_linsubhr_egfrdisc_akikdigo.pptx
@@ -2271,26 +2271,26 @@
           </p:nvSpPr>
           <p:spPr>
             <a:xfrm>
-              <a:off x="817517" y="5142518"/>
-              <a:ext cx="7799693" cy="0"/>
+              <a:off x="915645" y="5071743"/>
+              <a:ext cx="7682587" cy="0"/>
             </a:xfrm>
             <a:custGeom>
               <a:avLst/>
               <a:pathLst>
-                <a:path w="7799693" h="0">
+                <a:path w="7682587" h="0">
                   <a:moveTo>
                     <a:pt x="0" y="0"/>
                   </a:moveTo>
                   <a:lnTo>
-                    <a:pt x="7799693" y="0"/>
-                  </a:lnTo>
-                  <a:lnTo>
-                    <a:pt x="7799693" y="0"/>
+                    <a:pt x="7682587" y="0"/>
+                  </a:lnTo>
+                  <a:lnTo>
+                    <a:pt x="7682587" y="0"/>
                   </a:lnTo>
                 </a:path>
               </a:pathLst>
             </a:custGeom>
-            <a:ln w="6775" cap="flat">
+            <a:ln w="8623" cap="flat">
               <a:solidFill>
                 <a:srgbClr val="EBEBEB">
                   <a:alpha val="100000"/>
@@ -2314,26 +2314,26 @@
           </p:nvSpPr>
           <p:spPr>
             <a:xfrm>
-              <a:off x="817517" y="4313054"/>
-              <a:ext cx="7799693" cy="0"/>
+              <a:off x="915645" y="4298074"/>
+              <a:ext cx="7682587" cy="0"/>
             </a:xfrm>
             <a:custGeom>
               <a:avLst/>
               <a:pathLst>
-                <a:path w="7799693" h="0">
+                <a:path w="7682587" h="0">
                   <a:moveTo>
                     <a:pt x="0" y="0"/>
                   </a:moveTo>
                   <a:lnTo>
-                    <a:pt x="7799693" y="0"/>
-                  </a:lnTo>
-                  <a:lnTo>
-                    <a:pt x="7799693" y="0"/>
+                    <a:pt x="7682587" y="0"/>
+                  </a:lnTo>
+                  <a:lnTo>
+                    <a:pt x="7682587" y="0"/>
                   </a:lnTo>
                 </a:path>
               </a:pathLst>
             </a:custGeom>
-            <a:ln w="6775" cap="flat">
+            <a:ln w="8623" cap="flat">
               <a:solidFill>
                 <a:srgbClr val="EBEBEB">
                   <a:alpha val="100000"/>
@@ -2357,26 +2357,26 @@
           </p:nvSpPr>
           <p:spPr>
             <a:xfrm>
-              <a:off x="817517" y="3483591"/>
-              <a:ext cx="7799693" cy="0"/>
+              <a:off x="915645" y="3524405"/>
+              <a:ext cx="7682587" cy="0"/>
             </a:xfrm>
             <a:custGeom>
               <a:avLst/>
               <a:pathLst>
-                <a:path w="7799693" h="0">
+                <a:path w="7682587" h="0">
                   <a:moveTo>
                     <a:pt x="0" y="0"/>
                   </a:moveTo>
                   <a:lnTo>
-                    <a:pt x="7799693" y="0"/>
-                  </a:lnTo>
-                  <a:lnTo>
-                    <a:pt x="7799693" y="0"/>
+                    <a:pt x="7682587" y="0"/>
+                  </a:lnTo>
+                  <a:lnTo>
+                    <a:pt x="7682587" y="0"/>
                   </a:lnTo>
                 </a:path>
               </a:pathLst>
             </a:custGeom>
-            <a:ln w="6775" cap="flat">
+            <a:ln w="8623" cap="flat">
               <a:solidFill>
                 <a:srgbClr val="EBEBEB">
                   <a:alpha val="100000"/>
@@ -2400,26 +2400,26 @@
           </p:nvSpPr>
           <p:spPr>
             <a:xfrm>
-              <a:off x="817517" y="2654127"/>
-              <a:ext cx="7799693" cy="0"/>
+              <a:off x="915645" y="2750737"/>
+              <a:ext cx="7682587" cy="0"/>
             </a:xfrm>
             <a:custGeom>
               <a:avLst/>
               <a:pathLst>
-                <a:path w="7799693" h="0">
+                <a:path w="7682587" h="0">
                   <a:moveTo>
                     <a:pt x="0" y="0"/>
                   </a:moveTo>
                   <a:lnTo>
-                    <a:pt x="7799693" y="0"/>
-                  </a:lnTo>
-                  <a:lnTo>
-                    <a:pt x="7799693" y="0"/>
+                    <a:pt x="7682587" y="0"/>
+                  </a:lnTo>
+                  <a:lnTo>
+                    <a:pt x="7682587" y="0"/>
                   </a:lnTo>
                 </a:path>
               </a:pathLst>
             </a:custGeom>
-            <a:ln w="6775" cap="flat">
+            <a:ln w="8623" cap="flat">
               <a:solidFill>
                 <a:srgbClr val="EBEBEB">
                   <a:alpha val="100000"/>
@@ -2443,15 +2443,15 @@
           </p:nvSpPr>
           <p:spPr>
             <a:xfrm>
-              <a:off x="1487487" y="2073503"/>
-              <a:ext cx="0" cy="3649639"/>
+              <a:off x="1575555" y="2209169"/>
+              <a:ext cx="0" cy="3404141"/>
             </a:xfrm>
             <a:custGeom>
               <a:avLst/>
               <a:pathLst>
-                <a:path w="0" h="3649639">
+                <a:path w="0" h="3404141">
                   <a:moveTo>
-                    <a:pt x="0" y="3649639"/>
+                    <a:pt x="0" y="3404141"/>
                   </a:moveTo>
                   <a:lnTo>
                     <a:pt x="0" y="0"/>
@@ -2462,7 +2462,7 @@
                 </a:path>
               </a:pathLst>
             </a:custGeom>
-            <a:ln w="6775" cap="flat">
+            <a:ln w="8623" cap="flat">
               <a:solidFill>
                 <a:srgbClr val="EBEBEB">
                   <a:alpha val="100000"/>
@@ -2486,15 +2486,15 @@
           </p:nvSpPr>
           <p:spPr>
             <a:xfrm>
-              <a:off x="3337360" y="2073503"/>
-              <a:ext cx="0" cy="3649639"/>
+              <a:off x="3397654" y="2209169"/>
+              <a:ext cx="0" cy="3404141"/>
             </a:xfrm>
             <a:custGeom>
               <a:avLst/>
               <a:pathLst>
-                <a:path w="0" h="3649639">
+                <a:path w="0" h="3404141">
                   <a:moveTo>
-                    <a:pt x="0" y="3649639"/>
+                    <a:pt x="0" y="3404141"/>
                   </a:moveTo>
                   <a:lnTo>
                     <a:pt x="0" y="0"/>
@@ -2505,7 +2505,7 @@
                 </a:path>
               </a:pathLst>
             </a:custGeom>
-            <a:ln w="6775" cap="flat">
+            <a:ln w="8623" cap="flat">
               <a:solidFill>
                 <a:srgbClr val="EBEBEB">
                   <a:alpha val="100000"/>
@@ -2529,15 +2529,15 @@
           </p:nvSpPr>
           <p:spPr>
             <a:xfrm>
-              <a:off x="5187233" y="2073503"/>
-              <a:ext cx="0" cy="3649639"/>
+              <a:off x="5219752" y="2209169"/>
+              <a:ext cx="0" cy="3404141"/>
             </a:xfrm>
             <a:custGeom>
               <a:avLst/>
               <a:pathLst>
-                <a:path w="0" h="3649639">
+                <a:path w="0" h="3404141">
                   <a:moveTo>
-                    <a:pt x="0" y="3649639"/>
+                    <a:pt x="0" y="3404141"/>
                   </a:moveTo>
                   <a:lnTo>
                     <a:pt x="0" y="0"/>
@@ -2548,7 +2548,7 @@
                 </a:path>
               </a:pathLst>
             </a:custGeom>
-            <a:ln w="6775" cap="flat">
+            <a:ln w="8623" cap="flat">
               <a:solidFill>
                 <a:srgbClr val="EBEBEB">
                   <a:alpha val="100000"/>
@@ -2572,15 +2572,15 @@
           </p:nvSpPr>
           <p:spPr>
             <a:xfrm>
-              <a:off x="7037106" y="2073503"/>
-              <a:ext cx="0" cy="3649639"/>
+              <a:off x="7041851" y="2209169"/>
+              <a:ext cx="0" cy="3404141"/>
             </a:xfrm>
             <a:custGeom>
               <a:avLst/>
               <a:pathLst>
-                <a:path w="0" h="3649639">
+                <a:path w="0" h="3404141">
                   <a:moveTo>
-                    <a:pt x="0" y="3649639"/>
+                    <a:pt x="0" y="3404141"/>
                   </a:moveTo>
                   <a:lnTo>
                     <a:pt x="0" y="0"/>
@@ -2591,7 +2591,7 @@
                 </a:path>
               </a:pathLst>
             </a:custGeom>
-            <a:ln w="6775" cap="flat">
+            <a:ln w="8623" cap="flat">
               <a:solidFill>
                 <a:srgbClr val="EBEBEB">
                   <a:alpha val="100000"/>
@@ -2615,26 +2615,26 @@
           </p:nvSpPr>
           <p:spPr>
             <a:xfrm>
-              <a:off x="817517" y="5557249"/>
-              <a:ext cx="7799693" cy="0"/>
+              <a:off x="915645" y="5458577"/>
+              <a:ext cx="7682587" cy="0"/>
             </a:xfrm>
             <a:custGeom>
               <a:avLst/>
               <a:pathLst>
-                <a:path w="7799693" h="0">
+                <a:path w="7682587" h="0">
                   <a:moveTo>
                     <a:pt x="0" y="0"/>
                   </a:moveTo>
                   <a:lnTo>
-                    <a:pt x="7799693" y="0"/>
-                  </a:lnTo>
-                  <a:lnTo>
-                    <a:pt x="7799693" y="0"/>
+                    <a:pt x="7682587" y="0"/>
+                  </a:lnTo>
+                  <a:lnTo>
+                    <a:pt x="7682587" y="0"/>
                   </a:lnTo>
                 </a:path>
               </a:pathLst>
             </a:custGeom>
-            <a:ln w="13550" cap="flat">
+            <a:ln w="17246" cap="flat">
               <a:solidFill>
                 <a:srgbClr val="EBEBEB">
                   <a:alpha val="100000"/>
@@ -2658,26 +2658,26 @@
           </p:nvSpPr>
           <p:spPr>
             <a:xfrm>
-              <a:off x="817517" y="4727786"/>
-              <a:ext cx="7799693" cy="0"/>
+              <a:off x="915645" y="4684908"/>
+              <a:ext cx="7682587" cy="0"/>
             </a:xfrm>
             <a:custGeom>
               <a:avLst/>
               <a:pathLst>
-                <a:path w="7799693" h="0">
+                <a:path w="7682587" h="0">
                   <a:moveTo>
                     <a:pt x="0" y="0"/>
                   </a:moveTo>
                   <a:lnTo>
-                    <a:pt x="7799693" y="0"/>
-                  </a:lnTo>
-                  <a:lnTo>
-                    <a:pt x="7799693" y="0"/>
+                    <a:pt x="7682587" y="0"/>
+                  </a:lnTo>
+                  <a:lnTo>
+                    <a:pt x="7682587" y="0"/>
                   </a:lnTo>
                 </a:path>
               </a:pathLst>
             </a:custGeom>
-            <a:ln w="13550" cap="flat">
+            <a:ln w="17246" cap="flat">
               <a:solidFill>
                 <a:srgbClr val="EBEBEB">
                   <a:alpha val="100000"/>
@@ -2701,26 +2701,26 @@
           </p:nvSpPr>
           <p:spPr>
             <a:xfrm>
-              <a:off x="817517" y="3898322"/>
-              <a:ext cx="7799693" cy="0"/>
+              <a:off x="915645" y="3911240"/>
+              <a:ext cx="7682587" cy="0"/>
             </a:xfrm>
             <a:custGeom>
               <a:avLst/>
               <a:pathLst>
-                <a:path w="7799693" h="0">
+                <a:path w="7682587" h="0">
                   <a:moveTo>
                     <a:pt x="0" y="0"/>
                   </a:moveTo>
                   <a:lnTo>
-                    <a:pt x="7799693" y="0"/>
-                  </a:lnTo>
-                  <a:lnTo>
-                    <a:pt x="7799693" y="0"/>
+                    <a:pt x="7682587" y="0"/>
+                  </a:lnTo>
+                  <a:lnTo>
+                    <a:pt x="7682587" y="0"/>
                   </a:lnTo>
                 </a:path>
               </a:pathLst>
             </a:custGeom>
-            <a:ln w="13550" cap="flat">
+            <a:ln w="17246" cap="flat">
               <a:solidFill>
                 <a:srgbClr val="EBEBEB">
                   <a:alpha val="100000"/>
@@ -2744,26 +2744,26 @@
           </p:nvSpPr>
           <p:spPr>
             <a:xfrm>
-              <a:off x="817517" y="3068859"/>
-              <a:ext cx="7799693" cy="0"/>
+              <a:off x="915645" y="3137571"/>
+              <a:ext cx="7682587" cy="0"/>
             </a:xfrm>
             <a:custGeom>
               <a:avLst/>
               <a:pathLst>
-                <a:path w="7799693" h="0">
+                <a:path w="7682587" h="0">
                   <a:moveTo>
                     <a:pt x="0" y="0"/>
                   </a:moveTo>
                   <a:lnTo>
-                    <a:pt x="7799693" y="0"/>
-                  </a:lnTo>
-                  <a:lnTo>
-                    <a:pt x="7799693" y="0"/>
+                    <a:pt x="7682587" y="0"/>
+                  </a:lnTo>
+                  <a:lnTo>
+                    <a:pt x="7682587" y="0"/>
                   </a:lnTo>
                 </a:path>
               </a:pathLst>
             </a:custGeom>
-            <a:ln w="13550" cap="flat">
+            <a:ln w="17246" cap="flat">
               <a:solidFill>
                 <a:srgbClr val="EBEBEB">
                   <a:alpha val="100000"/>
@@ -2787,26 +2787,26 @@
           </p:nvSpPr>
           <p:spPr>
             <a:xfrm>
-              <a:off x="817517" y="2239395"/>
-              <a:ext cx="7799693" cy="0"/>
+              <a:off x="915645" y="2363903"/>
+              <a:ext cx="7682587" cy="0"/>
             </a:xfrm>
             <a:custGeom>
               <a:avLst/>
               <a:pathLst>
-                <a:path w="7799693" h="0">
+                <a:path w="7682587" h="0">
                   <a:moveTo>
                     <a:pt x="0" y="0"/>
                   </a:moveTo>
                   <a:lnTo>
-                    <a:pt x="7799693" y="0"/>
-                  </a:lnTo>
-                  <a:lnTo>
-                    <a:pt x="7799693" y="0"/>
+                    <a:pt x="7682587" y="0"/>
+                  </a:lnTo>
+                  <a:lnTo>
+                    <a:pt x="7682587" y="0"/>
                   </a:lnTo>
                 </a:path>
               </a:pathLst>
             </a:custGeom>
-            <a:ln w="13550" cap="flat">
+            <a:ln w="17246" cap="flat">
               <a:solidFill>
                 <a:srgbClr val="EBEBEB">
                   <a:alpha val="100000"/>
@@ -2830,15 +2830,15 @@
           </p:nvSpPr>
           <p:spPr>
             <a:xfrm>
-              <a:off x="2412424" y="2073503"/>
-              <a:ext cx="0" cy="3649639"/>
+              <a:off x="2486605" y="2209169"/>
+              <a:ext cx="0" cy="3404141"/>
             </a:xfrm>
             <a:custGeom>
               <a:avLst/>
               <a:pathLst>
-                <a:path w="0" h="3649639">
+                <a:path w="0" h="3404141">
                   <a:moveTo>
-                    <a:pt x="0" y="3649639"/>
+                    <a:pt x="0" y="3404141"/>
                   </a:moveTo>
                   <a:lnTo>
                     <a:pt x="0" y="0"/>
@@ -2849,7 +2849,7 @@
                 </a:path>
               </a:pathLst>
             </a:custGeom>
-            <a:ln w="13550" cap="flat">
+            <a:ln w="17246" cap="flat">
               <a:solidFill>
                 <a:srgbClr val="EBEBEB">
                   <a:alpha val="100000"/>
@@ -2873,15 +2873,15 @@
           </p:nvSpPr>
           <p:spPr>
             <a:xfrm>
-              <a:off x="4262297" y="2073503"/>
-              <a:ext cx="0" cy="3649639"/>
+              <a:off x="4308703" y="2209169"/>
+              <a:ext cx="0" cy="3404141"/>
             </a:xfrm>
             <a:custGeom>
               <a:avLst/>
               <a:pathLst>
-                <a:path w="0" h="3649639">
+                <a:path w="0" h="3404141">
                   <a:moveTo>
-                    <a:pt x="0" y="3649639"/>
+                    <a:pt x="0" y="3404141"/>
                   </a:moveTo>
                   <a:lnTo>
                     <a:pt x="0" y="0"/>
@@ -2892,7 +2892,7 @@
                 </a:path>
               </a:pathLst>
             </a:custGeom>
-            <a:ln w="13550" cap="flat">
+            <a:ln w="17246" cap="flat">
               <a:solidFill>
                 <a:srgbClr val="EBEBEB">
                   <a:alpha val="100000"/>
@@ -2916,15 +2916,15 @@
           </p:nvSpPr>
           <p:spPr>
             <a:xfrm>
-              <a:off x="6112169" y="2073503"/>
-              <a:ext cx="0" cy="3649639"/>
+              <a:off x="6130802" y="2209169"/>
+              <a:ext cx="0" cy="3404141"/>
             </a:xfrm>
             <a:custGeom>
               <a:avLst/>
               <a:pathLst>
-                <a:path w="0" h="3649639">
+                <a:path w="0" h="3404141">
                   <a:moveTo>
-                    <a:pt x="0" y="3649639"/>
+                    <a:pt x="0" y="3404141"/>
                   </a:moveTo>
                   <a:lnTo>
                     <a:pt x="0" y="0"/>
@@ -2935,7 +2935,7 @@
                 </a:path>
               </a:pathLst>
             </a:custGeom>
-            <a:ln w="13550" cap="flat">
+            <a:ln w="17246" cap="flat">
               <a:solidFill>
                 <a:srgbClr val="EBEBEB">
                   <a:alpha val="100000"/>
@@ -2959,15 +2959,15 @@
           </p:nvSpPr>
           <p:spPr>
             <a:xfrm>
-              <a:off x="7962042" y="2073503"/>
-              <a:ext cx="0" cy="3649639"/>
+              <a:off x="7952900" y="2209169"/>
+              <a:ext cx="0" cy="3404141"/>
             </a:xfrm>
             <a:custGeom>
               <a:avLst/>
               <a:pathLst>
-                <a:path w="0" h="3649639">
+                <a:path w="0" h="3404141">
                   <a:moveTo>
-                    <a:pt x="0" y="3649639"/>
+                    <a:pt x="0" y="3404141"/>
                   </a:moveTo>
                   <a:lnTo>
                     <a:pt x="0" y="0"/>
@@ -2978,7 +2978,7 @@
                 </a:path>
               </a:pathLst>
             </a:custGeom>
-            <a:ln w="13550" cap="flat">
+            <a:ln w="17246" cap="flat">
               <a:solidFill>
                 <a:srgbClr val="EBEBEB">
                   <a:alpha val="100000"/>
@@ -3002,477 +3002,477 @@
           </p:nvSpPr>
           <p:spPr>
             <a:xfrm>
-              <a:off x="1172049" y="2073503"/>
-              <a:ext cx="7090630" cy="3358221"/>
+              <a:off x="1264853" y="2209169"/>
+              <a:ext cx="6984170" cy="3132326"/>
             </a:xfrm>
             <a:custGeom>
               <a:avLst/>
               <a:pathLst>
-                <a:path w="7090630" h="3358221">
+                <a:path w="6984170" h="3132326">
                   <a:moveTo>
-                    <a:pt x="3234924" y="0"/>
+                    <a:pt x="3186354" y="0"/>
                   </a:moveTo>
                   <a:lnTo>
-                    <a:pt x="3294636" y="175612"/>
-                  </a:lnTo>
-                  <a:lnTo>
-                    <a:pt x="3366258" y="373644"/>
-                  </a:lnTo>
-                  <a:lnTo>
-                    <a:pt x="3437881" y="559822"/>
-                  </a:lnTo>
-                  <a:lnTo>
-                    <a:pt x="3509503" y="734855"/>
-                  </a:lnTo>
-                  <a:lnTo>
-                    <a:pt x="3581126" y="899410"/>
-                  </a:lnTo>
-                  <a:lnTo>
-                    <a:pt x="3652748" y="1054114"/>
-                  </a:lnTo>
-                  <a:lnTo>
-                    <a:pt x="3724371" y="1199557"/>
-                  </a:lnTo>
-                  <a:lnTo>
-                    <a:pt x="3795993" y="1336294"/>
-                  </a:lnTo>
-                  <a:lnTo>
-                    <a:pt x="3867616" y="1464845"/>
-                  </a:lnTo>
-                  <a:lnTo>
-                    <a:pt x="3939238" y="1585701"/>
-                  </a:lnTo>
-                  <a:lnTo>
-                    <a:pt x="4010861" y="1699322"/>
-                  </a:lnTo>
-                  <a:lnTo>
-                    <a:pt x="4082483" y="1806142"/>
-                  </a:lnTo>
-                  <a:lnTo>
-                    <a:pt x="4154106" y="1906567"/>
-                  </a:lnTo>
-                  <a:lnTo>
-                    <a:pt x="4225729" y="2000981"/>
-                  </a:lnTo>
-                  <a:lnTo>
-                    <a:pt x="4297351" y="2089742"/>
-                  </a:lnTo>
-                  <a:lnTo>
-                    <a:pt x="4368974" y="2173191"/>
-                  </a:lnTo>
-                  <a:lnTo>
-                    <a:pt x="4440596" y="2251643"/>
-                  </a:lnTo>
-                  <a:lnTo>
-                    <a:pt x="4512219" y="2325400"/>
-                  </a:lnTo>
-                  <a:lnTo>
-                    <a:pt x="4583841" y="2394741"/>
-                  </a:lnTo>
-                  <a:lnTo>
-                    <a:pt x="4655464" y="2459931"/>
-                  </a:lnTo>
-                  <a:lnTo>
-                    <a:pt x="4727086" y="2521219"/>
-                  </a:lnTo>
-                  <a:lnTo>
-                    <a:pt x="4798709" y="2578838"/>
-                  </a:lnTo>
-                  <a:lnTo>
-                    <a:pt x="4870331" y="2633008"/>
-                  </a:lnTo>
-                  <a:lnTo>
-                    <a:pt x="4941954" y="2651655"/>
-                  </a:lnTo>
-                  <a:lnTo>
-                    <a:pt x="5013576" y="2647179"/>
-                  </a:lnTo>
-                  <a:lnTo>
-                    <a:pt x="5085199" y="2642679"/>
-                  </a:lnTo>
-                  <a:lnTo>
-                    <a:pt x="5156821" y="2638155"/>
-                  </a:lnTo>
-                  <a:lnTo>
-                    <a:pt x="5228444" y="2633606"/>
-                  </a:lnTo>
-                  <a:lnTo>
-                    <a:pt x="5300066" y="2629033"/>
-                  </a:lnTo>
-                  <a:lnTo>
-                    <a:pt x="5371689" y="2624436"/>
-                  </a:lnTo>
-                  <a:lnTo>
-                    <a:pt x="5443311" y="2619813"/>
-                  </a:lnTo>
-                  <a:lnTo>
-                    <a:pt x="5514934" y="2615166"/>
-                  </a:lnTo>
-                  <a:lnTo>
-                    <a:pt x="5586557" y="2610494"/>
-                  </a:lnTo>
-                  <a:lnTo>
-                    <a:pt x="5658179" y="2605797"/>
-                  </a:lnTo>
-                  <a:lnTo>
-                    <a:pt x="5729802" y="2601074"/>
-                  </a:lnTo>
-                  <a:lnTo>
-                    <a:pt x="5801424" y="2596326"/>
-                  </a:lnTo>
-                  <a:lnTo>
-                    <a:pt x="5873047" y="2591553"/>
-                  </a:lnTo>
-                  <a:lnTo>
-                    <a:pt x="5944669" y="2586754"/>
-                  </a:lnTo>
-                  <a:lnTo>
-                    <a:pt x="6016292" y="2581929"/>
-                  </a:lnTo>
-                  <a:lnTo>
-                    <a:pt x="6087914" y="2577078"/>
-                  </a:lnTo>
-                  <a:lnTo>
-                    <a:pt x="6159537" y="2572201"/>
-                  </a:lnTo>
-                  <a:lnTo>
-                    <a:pt x="6231159" y="2567298"/>
-                  </a:lnTo>
-                  <a:lnTo>
-                    <a:pt x="6302782" y="2562368"/>
-                  </a:lnTo>
-                  <a:lnTo>
-                    <a:pt x="6374404" y="2557412"/>
-                  </a:lnTo>
-                  <a:lnTo>
-                    <a:pt x="6446027" y="2552429"/>
-                  </a:lnTo>
-                  <a:lnTo>
-                    <a:pt x="6517649" y="2547419"/>
-                  </a:lnTo>
-                  <a:lnTo>
-                    <a:pt x="6589272" y="2542383"/>
-                  </a:lnTo>
-                  <a:lnTo>
-                    <a:pt x="6660894" y="2537319"/>
-                  </a:lnTo>
-                  <a:lnTo>
-                    <a:pt x="6732517" y="2532228"/>
-                  </a:lnTo>
-                  <a:lnTo>
-                    <a:pt x="6804139" y="2527110"/>
-                  </a:lnTo>
-                  <a:lnTo>
-                    <a:pt x="6875762" y="2521964"/>
-                  </a:lnTo>
-                  <a:lnTo>
-                    <a:pt x="6947385" y="2516791"/>
-                  </a:lnTo>
-                  <a:lnTo>
-                    <a:pt x="7019007" y="2511589"/>
-                  </a:lnTo>
-                  <a:lnTo>
-                    <a:pt x="7090630" y="2506360"/>
-                  </a:lnTo>
-                  <a:lnTo>
-                    <a:pt x="7090630" y="3358221"/>
-                  </a:lnTo>
-                  <a:lnTo>
-                    <a:pt x="7019007" y="3350228"/>
-                  </a:lnTo>
-                  <a:lnTo>
-                    <a:pt x="6947385" y="3341727"/>
-                  </a:lnTo>
-                  <a:lnTo>
-                    <a:pt x="6875762" y="3332684"/>
-                  </a:lnTo>
-                  <a:lnTo>
-                    <a:pt x="6804139" y="3323065"/>
-                  </a:lnTo>
-                  <a:lnTo>
-                    <a:pt x="6732517" y="3312834"/>
-                  </a:lnTo>
-                  <a:lnTo>
-                    <a:pt x="6660894" y="3301951"/>
-                  </a:lnTo>
-                  <a:lnTo>
-                    <a:pt x="6589272" y="3290375"/>
-                  </a:lnTo>
-                  <a:lnTo>
-                    <a:pt x="6517649" y="3278063"/>
-                  </a:lnTo>
-                  <a:lnTo>
-                    <a:pt x="6446027" y="3264966"/>
-                  </a:lnTo>
-                  <a:lnTo>
-                    <a:pt x="6374404" y="3251035"/>
-                  </a:lnTo>
-                  <a:lnTo>
-                    <a:pt x="6302782" y="3236218"/>
-                  </a:lnTo>
-                  <a:lnTo>
-                    <a:pt x="6231159" y="3220456"/>
-                  </a:lnTo>
-                  <a:lnTo>
-                    <a:pt x="6159537" y="3203692"/>
-                  </a:lnTo>
-                  <a:lnTo>
-                    <a:pt x="6087914" y="3185860"/>
-                  </a:lnTo>
-                  <a:lnTo>
-                    <a:pt x="6016292" y="3166892"/>
-                  </a:lnTo>
-                  <a:lnTo>
-                    <a:pt x="5944669" y="3146717"/>
-                  </a:lnTo>
-                  <a:lnTo>
-                    <a:pt x="5873047" y="3125257"/>
-                  </a:lnTo>
-                  <a:lnTo>
-                    <a:pt x="5801424" y="3102430"/>
-                  </a:lnTo>
-                  <a:lnTo>
-                    <a:pt x="5729802" y="3078150"/>
-                  </a:lnTo>
-                  <a:lnTo>
-                    <a:pt x="5658179" y="3052324"/>
-                  </a:lnTo>
-                  <a:lnTo>
-                    <a:pt x="5586557" y="3024854"/>
-                  </a:lnTo>
-                  <a:lnTo>
-                    <a:pt x="5514934" y="2995635"/>
-                  </a:lnTo>
-                  <a:lnTo>
-                    <a:pt x="5443311" y="2964555"/>
-                  </a:lnTo>
-                  <a:lnTo>
-                    <a:pt x="5371689" y="2931496"/>
-                  </a:lnTo>
-                  <a:lnTo>
-                    <a:pt x="5300066" y="2896332"/>
-                  </a:lnTo>
-                  <a:lnTo>
-                    <a:pt x="5228444" y="2858929"/>
-                  </a:lnTo>
-                  <a:lnTo>
-                    <a:pt x="5156821" y="2819144"/>
-                  </a:lnTo>
-                  <a:lnTo>
-                    <a:pt x="5085199" y="2776826"/>
-                  </a:lnTo>
-                  <a:lnTo>
-                    <a:pt x="5013576" y="2731814"/>
-                  </a:lnTo>
-                  <a:lnTo>
-                    <a:pt x="4941954" y="2683935"/>
-                  </a:lnTo>
-                  <a:lnTo>
-                    <a:pt x="4870331" y="2656106"/>
-                  </a:lnTo>
-                  <a:lnTo>
-                    <a:pt x="4798709" y="2660535"/>
-                  </a:lnTo>
-                  <a:lnTo>
-                    <a:pt x="4727086" y="2664939"/>
-                  </a:lnTo>
-                  <a:lnTo>
-                    <a:pt x="4655464" y="2669320"/>
-                  </a:lnTo>
-                  <a:lnTo>
-                    <a:pt x="4583841" y="2673677"/>
-                  </a:lnTo>
-                  <a:lnTo>
-                    <a:pt x="4512219" y="2678011"/>
-                  </a:lnTo>
-                  <a:lnTo>
-                    <a:pt x="4440596" y="2682322"/>
-                  </a:lnTo>
-                  <a:lnTo>
-                    <a:pt x="4368974" y="2686610"/>
-                  </a:lnTo>
-                  <a:lnTo>
-                    <a:pt x="4297351" y="2690875"/>
-                  </a:lnTo>
-                  <a:lnTo>
-                    <a:pt x="4225729" y="2695117"/>
-                  </a:lnTo>
-                  <a:lnTo>
-                    <a:pt x="4154106" y="2699336"/>
-                  </a:lnTo>
-                  <a:lnTo>
-                    <a:pt x="4082483" y="2703533"/>
-                  </a:lnTo>
-                  <a:lnTo>
-                    <a:pt x="4010861" y="2707708"/>
-                  </a:lnTo>
-                  <a:lnTo>
-                    <a:pt x="3939238" y="2711860"/>
-                  </a:lnTo>
-                  <a:lnTo>
-                    <a:pt x="3867616" y="2715989"/>
-                  </a:lnTo>
-                  <a:lnTo>
-                    <a:pt x="3795993" y="2720097"/>
-                  </a:lnTo>
-                  <a:lnTo>
-                    <a:pt x="3724371" y="2724183"/>
-                  </a:lnTo>
-                  <a:lnTo>
-                    <a:pt x="3652748" y="2728247"/>
-                  </a:lnTo>
-                  <a:lnTo>
-                    <a:pt x="3581126" y="2732289"/>
-                  </a:lnTo>
-                  <a:lnTo>
-                    <a:pt x="3509503" y="2736309"/>
-                  </a:lnTo>
-                  <a:lnTo>
-                    <a:pt x="3437881" y="2740308"/>
-                  </a:lnTo>
-                  <a:lnTo>
-                    <a:pt x="3366258" y="2744286"/>
-                  </a:lnTo>
-                  <a:lnTo>
-                    <a:pt x="3294636" y="2748242"/>
-                  </a:lnTo>
-                  <a:lnTo>
-                    <a:pt x="3223013" y="2752177"/>
-                  </a:lnTo>
-                  <a:lnTo>
-                    <a:pt x="3151391" y="2756091"/>
-                  </a:lnTo>
-                  <a:lnTo>
-                    <a:pt x="3079768" y="2759985"/>
-                  </a:lnTo>
-                  <a:lnTo>
-                    <a:pt x="3008146" y="2763857"/>
-                  </a:lnTo>
-                  <a:lnTo>
-                    <a:pt x="2936523" y="2767708"/>
-                  </a:lnTo>
-                  <a:lnTo>
-                    <a:pt x="2864901" y="2771539"/>
-                  </a:lnTo>
-                  <a:lnTo>
-                    <a:pt x="2793278" y="2775350"/>
-                  </a:lnTo>
-                  <a:lnTo>
-                    <a:pt x="2721655" y="2779140"/>
-                  </a:lnTo>
-                  <a:lnTo>
-                    <a:pt x="2650033" y="2782910"/>
-                  </a:lnTo>
-                  <a:lnTo>
-                    <a:pt x="2578410" y="2786660"/>
-                  </a:lnTo>
-                  <a:lnTo>
-                    <a:pt x="2506788" y="2790389"/>
-                  </a:lnTo>
-                  <a:lnTo>
-                    <a:pt x="2435165" y="2794099"/>
-                  </a:lnTo>
-                  <a:lnTo>
-                    <a:pt x="2363543" y="2797789"/>
-                  </a:lnTo>
-                  <a:lnTo>
-                    <a:pt x="2291920" y="2801459"/>
-                  </a:lnTo>
-                  <a:lnTo>
-                    <a:pt x="2220298" y="2805109"/>
-                  </a:lnTo>
-                  <a:lnTo>
-                    <a:pt x="2148675" y="2808740"/>
-                  </a:lnTo>
-                  <a:lnTo>
-                    <a:pt x="2077053" y="2812351"/>
-                  </a:lnTo>
-                  <a:lnTo>
-                    <a:pt x="2005430" y="2815944"/>
-                  </a:lnTo>
-                  <a:lnTo>
-                    <a:pt x="1933808" y="2819517"/>
-                  </a:lnTo>
-                  <a:lnTo>
-                    <a:pt x="1862185" y="2823070"/>
-                  </a:lnTo>
-                  <a:lnTo>
-                    <a:pt x="1790563" y="2826605"/>
-                  </a:lnTo>
-                  <a:lnTo>
-                    <a:pt x="1718940" y="2830121"/>
-                  </a:lnTo>
-                  <a:lnTo>
-                    <a:pt x="1647318" y="2833618"/>
-                  </a:lnTo>
-                  <a:lnTo>
-                    <a:pt x="1575695" y="2837096"/>
-                  </a:lnTo>
-                  <a:lnTo>
-                    <a:pt x="1504073" y="2840556"/>
-                  </a:lnTo>
-                  <a:lnTo>
-                    <a:pt x="1432450" y="2843997"/>
-                  </a:lnTo>
-                  <a:lnTo>
-                    <a:pt x="1360827" y="2847420"/>
-                  </a:lnTo>
-                  <a:lnTo>
-                    <a:pt x="1289205" y="2850825"/>
-                  </a:lnTo>
-                  <a:lnTo>
-                    <a:pt x="1217582" y="2854211"/>
-                  </a:lnTo>
-                  <a:lnTo>
-                    <a:pt x="1145960" y="2857579"/>
-                  </a:lnTo>
-                  <a:lnTo>
-                    <a:pt x="1074337" y="2860929"/>
-                  </a:lnTo>
-                  <a:lnTo>
-                    <a:pt x="1002715" y="2864262"/>
-                  </a:lnTo>
-                  <a:lnTo>
-                    <a:pt x="931092" y="2867576"/>
-                  </a:lnTo>
-                  <a:lnTo>
-                    <a:pt x="859470" y="2870873"/>
-                  </a:lnTo>
-                  <a:lnTo>
-                    <a:pt x="787847" y="2874152"/>
-                  </a:lnTo>
-                  <a:lnTo>
-                    <a:pt x="716225" y="2877413"/>
-                  </a:lnTo>
-                  <a:lnTo>
-                    <a:pt x="644602" y="2880657"/>
-                  </a:lnTo>
-                  <a:lnTo>
-                    <a:pt x="572980" y="2883884"/>
-                  </a:lnTo>
-                  <a:lnTo>
-                    <a:pt x="501357" y="2887093"/>
-                  </a:lnTo>
-                  <a:lnTo>
-                    <a:pt x="429735" y="2890286"/>
-                  </a:lnTo>
-                  <a:lnTo>
-                    <a:pt x="358112" y="2893461"/>
-                  </a:lnTo>
-                  <a:lnTo>
-                    <a:pt x="286490" y="2896619"/>
-                  </a:lnTo>
-                  <a:lnTo>
-                    <a:pt x="214867" y="2899760"/>
-                  </a:lnTo>
-                  <a:lnTo>
-                    <a:pt x="143245" y="2902885"/>
-                  </a:lnTo>
-                  <a:lnTo>
-                    <a:pt x="71622" y="2905993"/>
-                  </a:lnTo>
-                  <a:lnTo>
-                    <a:pt x="0" y="2909084"/>
+                    <a:pt x="3245169" y="163799"/>
+                  </a:lnTo>
+                  <a:lnTo>
+                    <a:pt x="3315717" y="348511"/>
+                  </a:lnTo>
+                  <a:lnTo>
+                    <a:pt x="3386264" y="522165"/>
+                  </a:lnTo>
+                  <a:lnTo>
+                    <a:pt x="3456811" y="685424"/>
+                  </a:lnTo>
+                  <a:lnTo>
+                    <a:pt x="3527358" y="838910"/>
+                  </a:lnTo>
+                  <a:lnTo>
+                    <a:pt x="3597905" y="983207"/>
+                  </a:lnTo>
+                  <a:lnTo>
+                    <a:pt x="3668452" y="1118867"/>
+                  </a:lnTo>
+                  <a:lnTo>
+                    <a:pt x="3739000" y="1246406"/>
+                  </a:lnTo>
+                  <a:lnTo>
+                    <a:pt x="3809547" y="1366310"/>
+                  </a:lnTo>
+                  <a:lnTo>
+                    <a:pt x="3880094" y="1479037"/>
+                  </a:lnTo>
+                  <a:lnTo>
+                    <a:pt x="3950641" y="1585015"/>
+                  </a:lnTo>
+                  <a:lnTo>
+                    <a:pt x="4021188" y="1684650"/>
+                  </a:lnTo>
+                  <a:lnTo>
+                    <a:pt x="4091736" y="1778319"/>
+                  </a:lnTo>
+                  <a:lnTo>
+                    <a:pt x="4162283" y="1866382"/>
+                  </a:lnTo>
+                  <a:lnTo>
+                    <a:pt x="4232830" y="1949173"/>
+                  </a:lnTo>
+                  <a:lnTo>
+                    <a:pt x="4303377" y="2027008"/>
+                  </a:lnTo>
+                  <a:lnTo>
+                    <a:pt x="4373924" y="2100184"/>
+                  </a:lnTo>
+                  <a:lnTo>
+                    <a:pt x="4444471" y="2168979"/>
+                  </a:lnTo>
+                  <a:lnTo>
+                    <a:pt x="4515019" y="2233656"/>
+                  </a:lnTo>
+                  <a:lnTo>
+                    <a:pt x="4585566" y="2294461"/>
+                  </a:lnTo>
+                  <a:lnTo>
+                    <a:pt x="4656113" y="2351626"/>
+                  </a:lnTo>
+                  <a:lnTo>
+                    <a:pt x="4726660" y="2405369"/>
+                  </a:lnTo>
+                  <a:lnTo>
+                    <a:pt x="4797207" y="2455895"/>
+                  </a:lnTo>
+                  <a:lnTo>
+                    <a:pt x="4867754" y="2473287"/>
+                  </a:lnTo>
+                  <a:lnTo>
+                    <a:pt x="4938302" y="2469113"/>
+                  </a:lnTo>
+                  <a:lnTo>
+                    <a:pt x="5008849" y="2464915"/>
+                  </a:lnTo>
+                  <a:lnTo>
+                    <a:pt x="5079396" y="2460696"/>
+                  </a:lnTo>
+                  <a:lnTo>
+                    <a:pt x="5149943" y="2456453"/>
+                  </a:lnTo>
+                  <a:lnTo>
+                    <a:pt x="5220490" y="2452188"/>
+                  </a:lnTo>
+                  <a:lnTo>
+                    <a:pt x="5291037" y="2447899"/>
+                  </a:lnTo>
+                  <a:lnTo>
+                    <a:pt x="5361585" y="2443588"/>
+                  </a:lnTo>
+                  <a:lnTo>
+                    <a:pt x="5432132" y="2439254"/>
+                  </a:lnTo>
+                  <a:lnTo>
+                    <a:pt x="5502679" y="2434896"/>
+                  </a:lnTo>
+                  <a:lnTo>
+                    <a:pt x="5573226" y="2430514"/>
+                  </a:lnTo>
+                  <a:lnTo>
+                    <a:pt x="5643773" y="2426110"/>
+                  </a:lnTo>
+                  <a:lnTo>
+                    <a:pt x="5714320" y="2421681"/>
+                  </a:lnTo>
+                  <a:lnTo>
+                    <a:pt x="5784868" y="2417229"/>
+                  </a:lnTo>
+                  <a:lnTo>
+                    <a:pt x="5855415" y="2412752"/>
+                  </a:lnTo>
+                  <a:lnTo>
+                    <a:pt x="5925962" y="2408252"/>
+                  </a:lnTo>
+                  <a:lnTo>
+                    <a:pt x="5996509" y="2403727"/>
+                  </a:lnTo>
+                  <a:lnTo>
+                    <a:pt x="6067056" y="2399178"/>
+                  </a:lnTo>
+                  <a:lnTo>
+                    <a:pt x="6137604" y="2394605"/>
+                  </a:lnTo>
+                  <a:lnTo>
+                    <a:pt x="6208151" y="2390007"/>
+                  </a:lnTo>
+                  <a:lnTo>
+                    <a:pt x="6278698" y="2385384"/>
+                  </a:lnTo>
+                  <a:lnTo>
+                    <a:pt x="6349245" y="2380736"/>
+                  </a:lnTo>
+                  <a:lnTo>
+                    <a:pt x="6419792" y="2376064"/>
+                  </a:lnTo>
+                  <a:lnTo>
+                    <a:pt x="6490339" y="2371366"/>
+                  </a:lnTo>
+                  <a:lnTo>
+                    <a:pt x="6560887" y="2366643"/>
+                  </a:lnTo>
+                  <a:lnTo>
+                    <a:pt x="6631434" y="2361895"/>
+                  </a:lnTo>
+                  <a:lnTo>
+                    <a:pt x="6701981" y="2357121"/>
+                  </a:lnTo>
+                  <a:lnTo>
+                    <a:pt x="6772528" y="2352321"/>
+                  </a:lnTo>
+                  <a:lnTo>
+                    <a:pt x="6843075" y="2347495"/>
+                  </a:lnTo>
+                  <a:lnTo>
+                    <a:pt x="6913622" y="2342644"/>
+                  </a:lnTo>
+                  <a:lnTo>
+                    <a:pt x="6984170" y="2337767"/>
+                  </a:lnTo>
+                  <a:lnTo>
+                    <a:pt x="6984170" y="3132326"/>
+                  </a:lnTo>
+                  <a:lnTo>
+                    <a:pt x="6913622" y="3124871"/>
+                  </a:lnTo>
+                  <a:lnTo>
+                    <a:pt x="6843075" y="3116941"/>
+                  </a:lnTo>
+                  <a:lnTo>
+                    <a:pt x="6772528" y="3108506"/>
+                  </a:lnTo>
+                  <a:lnTo>
+                    <a:pt x="6701981" y="3099534"/>
+                  </a:lnTo>
+                  <a:lnTo>
+                    <a:pt x="6631434" y="3089991"/>
+                  </a:lnTo>
+                  <a:lnTo>
+                    <a:pt x="6560887" y="3079841"/>
+                  </a:lnTo>
+                  <a:lnTo>
+                    <a:pt x="6490339" y="3069044"/>
+                  </a:lnTo>
+                  <a:lnTo>
+                    <a:pt x="6419792" y="3057559"/>
+                  </a:lnTo>
+                  <a:lnTo>
+                    <a:pt x="6349245" y="3045344"/>
+                  </a:lnTo>
+                  <a:lnTo>
+                    <a:pt x="6278698" y="3032350"/>
+                  </a:lnTo>
+                  <a:lnTo>
+                    <a:pt x="6208151" y="3018529"/>
+                  </a:lnTo>
+                  <a:lnTo>
+                    <a:pt x="6137604" y="3003828"/>
+                  </a:lnTo>
+                  <a:lnTo>
+                    <a:pt x="6067056" y="2988191"/>
+                  </a:lnTo>
+                  <a:lnTo>
+                    <a:pt x="5996509" y="2971558"/>
+                  </a:lnTo>
+                  <a:lnTo>
+                    <a:pt x="5925962" y="2953867"/>
+                  </a:lnTo>
+                  <a:lnTo>
+                    <a:pt x="5855415" y="2935049"/>
+                  </a:lnTo>
+                  <a:lnTo>
+                    <a:pt x="5784868" y="2915032"/>
+                  </a:lnTo>
+                  <a:lnTo>
+                    <a:pt x="5714320" y="2893741"/>
+                  </a:lnTo>
+                  <a:lnTo>
+                    <a:pt x="5643773" y="2871094"/>
+                  </a:lnTo>
+                  <a:lnTo>
+                    <a:pt x="5573226" y="2847006"/>
+                  </a:lnTo>
+                  <a:lnTo>
+                    <a:pt x="5502679" y="2821383"/>
+                  </a:lnTo>
+                  <a:lnTo>
+                    <a:pt x="5432132" y="2794129"/>
+                  </a:lnTo>
+                  <a:lnTo>
+                    <a:pt x="5361585" y="2765140"/>
+                  </a:lnTo>
+                  <a:lnTo>
+                    <a:pt x="5291037" y="2734305"/>
+                  </a:lnTo>
+                  <a:lnTo>
+                    <a:pt x="5220490" y="2701506"/>
+                  </a:lnTo>
+                  <a:lnTo>
+                    <a:pt x="5149943" y="2666619"/>
+                  </a:lnTo>
+                  <a:lnTo>
+                    <a:pt x="5079396" y="2629511"/>
+                  </a:lnTo>
+                  <a:lnTo>
+                    <a:pt x="5008849" y="2590039"/>
+                  </a:lnTo>
+                  <a:lnTo>
+                    <a:pt x="4938302" y="2548055"/>
+                  </a:lnTo>
+                  <a:lnTo>
+                    <a:pt x="4867754" y="2503397"/>
+                  </a:lnTo>
+                  <a:lnTo>
+                    <a:pt x="4797207" y="2477440"/>
+                  </a:lnTo>
+                  <a:lnTo>
+                    <a:pt x="4726660" y="2481570"/>
+                  </a:lnTo>
+                  <a:lnTo>
+                    <a:pt x="4656113" y="2485678"/>
+                  </a:lnTo>
+                  <a:lnTo>
+                    <a:pt x="4585566" y="2489764"/>
+                  </a:lnTo>
+                  <a:lnTo>
+                    <a:pt x="4515019" y="2493829"/>
+                  </a:lnTo>
+                  <a:lnTo>
+                    <a:pt x="4444471" y="2497871"/>
+                  </a:lnTo>
+                  <a:lnTo>
+                    <a:pt x="4373924" y="2501892"/>
+                  </a:lnTo>
+                  <a:lnTo>
+                    <a:pt x="4303377" y="2505892"/>
+                  </a:lnTo>
+                  <a:lnTo>
+                    <a:pt x="4232830" y="2509870"/>
+                  </a:lnTo>
+                  <a:lnTo>
+                    <a:pt x="4162283" y="2513826"/>
+                  </a:lnTo>
+                  <a:lnTo>
+                    <a:pt x="4091736" y="2517762"/>
+                  </a:lnTo>
+                  <a:lnTo>
+                    <a:pt x="4021188" y="2521676"/>
+                  </a:lnTo>
+                  <a:lnTo>
+                    <a:pt x="3950641" y="2525570"/>
+                  </a:lnTo>
+                  <a:lnTo>
+                    <a:pt x="3880094" y="2529443"/>
+                  </a:lnTo>
+                  <a:lnTo>
+                    <a:pt x="3809547" y="2533295"/>
+                  </a:lnTo>
+                  <a:lnTo>
+                    <a:pt x="3739000" y="2537126"/>
+                  </a:lnTo>
+                  <a:lnTo>
+                    <a:pt x="3668452" y="2540937"/>
+                  </a:lnTo>
+                  <a:lnTo>
+                    <a:pt x="3597905" y="2544727"/>
+                  </a:lnTo>
+                  <a:lnTo>
+                    <a:pt x="3527358" y="2548498"/>
+                  </a:lnTo>
+                  <a:lnTo>
+                    <a:pt x="3456811" y="2552248"/>
+                  </a:lnTo>
+                  <a:lnTo>
+                    <a:pt x="3386264" y="2555978"/>
+                  </a:lnTo>
+                  <a:lnTo>
+                    <a:pt x="3315717" y="2559688"/>
+                  </a:lnTo>
+                  <a:lnTo>
+                    <a:pt x="3245169" y="2563378"/>
+                  </a:lnTo>
+                  <a:lnTo>
+                    <a:pt x="3174622" y="2567048"/>
+                  </a:lnTo>
+                  <a:lnTo>
+                    <a:pt x="3104075" y="2570699"/>
+                  </a:lnTo>
+                  <a:lnTo>
+                    <a:pt x="3033528" y="2574331"/>
+                  </a:lnTo>
+                  <a:lnTo>
+                    <a:pt x="2962981" y="2577942"/>
+                  </a:lnTo>
+                  <a:lnTo>
+                    <a:pt x="2892434" y="2581535"/>
+                  </a:lnTo>
+                  <a:lnTo>
+                    <a:pt x="2821886" y="2585108"/>
+                  </a:lnTo>
+                  <a:lnTo>
+                    <a:pt x="2751339" y="2588662"/>
+                  </a:lnTo>
+                  <a:lnTo>
+                    <a:pt x="2680792" y="2592198"/>
+                  </a:lnTo>
+                  <a:lnTo>
+                    <a:pt x="2610245" y="2595714"/>
+                  </a:lnTo>
+                  <a:lnTo>
+                    <a:pt x="2539698" y="2599211"/>
+                  </a:lnTo>
+                  <a:lnTo>
+                    <a:pt x="2469151" y="2602690"/>
+                  </a:lnTo>
+                  <a:lnTo>
+                    <a:pt x="2398603" y="2606150"/>
+                  </a:lnTo>
+                  <a:lnTo>
+                    <a:pt x="2328056" y="2609592"/>
+                  </a:lnTo>
+                  <a:lnTo>
+                    <a:pt x="2257509" y="2613015"/>
+                  </a:lnTo>
+                  <a:lnTo>
+                    <a:pt x="2186962" y="2616420"/>
+                  </a:lnTo>
+                  <a:lnTo>
+                    <a:pt x="2116415" y="2619806"/>
+                  </a:lnTo>
+                  <a:lnTo>
+                    <a:pt x="2045868" y="2623175"/>
+                  </a:lnTo>
+                  <a:lnTo>
+                    <a:pt x="1975320" y="2626525"/>
+                  </a:lnTo>
+                  <a:lnTo>
+                    <a:pt x="1904773" y="2629858"/>
+                  </a:lnTo>
+                  <a:lnTo>
+                    <a:pt x="1834226" y="2633173"/>
+                  </a:lnTo>
+                  <a:lnTo>
+                    <a:pt x="1763679" y="2636470"/>
+                  </a:lnTo>
+                  <a:lnTo>
+                    <a:pt x="1693132" y="2639749"/>
+                  </a:lnTo>
+                  <a:lnTo>
+                    <a:pt x="1622584" y="2643011"/>
+                  </a:lnTo>
+                  <a:lnTo>
+                    <a:pt x="1552037" y="2646255"/>
+                  </a:lnTo>
+                  <a:lnTo>
+                    <a:pt x="1481490" y="2649482"/>
+                  </a:lnTo>
+                  <a:lnTo>
+                    <a:pt x="1410943" y="2652692"/>
+                  </a:lnTo>
+                  <a:lnTo>
+                    <a:pt x="1340396" y="2655885"/>
+                  </a:lnTo>
+                  <a:lnTo>
+                    <a:pt x="1269849" y="2659060"/>
+                  </a:lnTo>
+                  <a:lnTo>
+                    <a:pt x="1199301" y="2662219"/>
+                  </a:lnTo>
+                  <a:lnTo>
+                    <a:pt x="1128754" y="2665360"/>
+                  </a:lnTo>
+                  <a:lnTo>
+                    <a:pt x="1058207" y="2668485"/>
+                  </a:lnTo>
+                  <a:lnTo>
+                    <a:pt x="987660" y="2671593"/>
+                  </a:lnTo>
+                  <a:lnTo>
+                    <a:pt x="917113" y="2674685"/>
+                  </a:lnTo>
+                  <a:lnTo>
+                    <a:pt x="846566" y="2677760"/>
+                  </a:lnTo>
+                  <a:lnTo>
+                    <a:pt x="776018" y="2680818"/>
+                  </a:lnTo>
+                  <a:lnTo>
+                    <a:pt x="705471" y="2683860"/>
+                  </a:lnTo>
+                  <a:lnTo>
+                    <a:pt x="634924" y="2686886"/>
+                  </a:lnTo>
+                  <a:lnTo>
+                    <a:pt x="564377" y="2689896"/>
+                  </a:lnTo>
+                  <a:lnTo>
+                    <a:pt x="493830" y="2692889"/>
+                  </a:lnTo>
+                  <a:lnTo>
+                    <a:pt x="423283" y="2695867"/>
+                  </a:lnTo>
+                  <a:lnTo>
+                    <a:pt x="352735" y="2698828"/>
+                  </a:lnTo>
+                  <a:lnTo>
+                    <a:pt x="282188" y="2701774"/>
+                  </a:lnTo>
+                  <a:lnTo>
+                    <a:pt x="211641" y="2704704"/>
+                  </a:lnTo>
+                  <a:lnTo>
+                    <a:pt x="141094" y="2707618"/>
+                  </a:lnTo>
+                  <a:lnTo>
+                    <a:pt x="70547" y="2710517"/>
+                  </a:lnTo>
+                  <a:lnTo>
+                    <a:pt x="0" y="2713400"/>
                   </a:lnTo>
                   <a:lnTo>
                     <a:pt x="0" y="0"/>
@@ -3501,177 +3501,177 @@
           </p:nvSpPr>
           <p:spPr>
             <a:xfrm>
-              <a:off x="4406973" y="2073503"/>
-              <a:ext cx="3855705" cy="2651655"/>
+              <a:off x="4451208" y="2209169"/>
+              <a:ext cx="3797815" cy="2473287"/>
             </a:xfrm>
             <a:custGeom>
               <a:avLst/>
               <a:pathLst>
-                <a:path w="3855705" h="2651655">
+                <a:path w="3797815" h="2473287">
                   <a:moveTo>
                     <a:pt x="0" y="0"/>
                   </a:moveTo>
                   <a:lnTo>
-                    <a:pt x="59711" y="175612"/>
-                  </a:lnTo>
-                  <a:lnTo>
-                    <a:pt x="131334" y="373644"/>
-                  </a:lnTo>
-                  <a:lnTo>
-                    <a:pt x="202956" y="559822"/>
-                  </a:lnTo>
-                  <a:lnTo>
-                    <a:pt x="274579" y="734855"/>
-                  </a:lnTo>
-                  <a:lnTo>
-                    <a:pt x="346201" y="899410"/>
-                  </a:lnTo>
-                  <a:lnTo>
-                    <a:pt x="417824" y="1054114"/>
-                  </a:lnTo>
-                  <a:lnTo>
-                    <a:pt x="489447" y="1199557"/>
-                  </a:lnTo>
-                  <a:lnTo>
-                    <a:pt x="561069" y="1336294"/>
-                  </a:lnTo>
-                  <a:lnTo>
-                    <a:pt x="632692" y="1464845"/>
-                  </a:lnTo>
-                  <a:lnTo>
-                    <a:pt x="704314" y="1585701"/>
-                  </a:lnTo>
-                  <a:lnTo>
-                    <a:pt x="775937" y="1699322"/>
-                  </a:lnTo>
-                  <a:lnTo>
-                    <a:pt x="847559" y="1806142"/>
-                  </a:lnTo>
-                  <a:lnTo>
-                    <a:pt x="919182" y="1906567"/>
-                  </a:lnTo>
-                  <a:lnTo>
-                    <a:pt x="990804" y="2000981"/>
-                  </a:lnTo>
-                  <a:lnTo>
-                    <a:pt x="1062427" y="2089742"/>
-                  </a:lnTo>
-                  <a:lnTo>
-                    <a:pt x="1134049" y="2173191"/>
-                  </a:lnTo>
-                  <a:lnTo>
-                    <a:pt x="1205672" y="2251643"/>
-                  </a:lnTo>
-                  <a:lnTo>
-                    <a:pt x="1277294" y="2325400"/>
-                  </a:lnTo>
-                  <a:lnTo>
-                    <a:pt x="1348917" y="2394741"/>
-                  </a:lnTo>
-                  <a:lnTo>
-                    <a:pt x="1420539" y="2459931"/>
-                  </a:lnTo>
-                  <a:lnTo>
-                    <a:pt x="1492162" y="2521219"/>
-                  </a:lnTo>
-                  <a:lnTo>
-                    <a:pt x="1563784" y="2578838"/>
-                  </a:lnTo>
-                  <a:lnTo>
-                    <a:pt x="1635407" y="2633008"/>
-                  </a:lnTo>
-                  <a:lnTo>
-                    <a:pt x="1707029" y="2651655"/>
-                  </a:lnTo>
-                  <a:lnTo>
-                    <a:pt x="1778652" y="2647179"/>
-                  </a:lnTo>
-                  <a:lnTo>
-                    <a:pt x="1850275" y="2642679"/>
-                  </a:lnTo>
-                  <a:lnTo>
-                    <a:pt x="1921897" y="2638155"/>
-                  </a:lnTo>
-                  <a:lnTo>
-                    <a:pt x="1993520" y="2633606"/>
-                  </a:lnTo>
-                  <a:lnTo>
-                    <a:pt x="2065142" y="2629033"/>
-                  </a:lnTo>
-                  <a:lnTo>
-                    <a:pt x="2136765" y="2624436"/>
-                  </a:lnTo>
-                  <a:lnTo>
-                    <a:pt x="2208387" y="2619813"/>
-                  </a:lnTo>
-                  <a:lnTo>
-                    <a:pt x="2280010" y="2615166"/>
-                  </a:lnTo>
-                  <a:lnTo>
-                    <a:pt x="2351632" y="2610494"/>
-                  </a:lnTo>
-                  <a:lnTo>
-                    <a:pt x="2423255" y="2605797"/>
-                  </a:lnTo>
-                  <a:lnTo>
-                    <a:pt x="2494877" y="2601074"/>
-                  </a:lnTo>
-                  <a:lnTo>
-                    <a:pt x="2566500" y="2596326"/>
-                  </a:lnTo>
-                  <a:lnTo>
-                    <a:pt x="2638122" y="2591553"/>
-                  </a:lnTo>
-                  <a:lnTo>
-                    <a:pt x="2709745" y="2586754"/>
-                  </a:lnTo>
-                  <a:lnTo>
-                    <a:pt x="2781367" y="2581929"/>
-                  </a:lnTo>
-                  <a:lnTo>
-                    <a:pt x="2852990" y="2577078"/>
-                  </a:lnTo>
-                  <a:lnTo>
-                    <a:pt x="2924612" y="2572201"/>
-                  </a:lnTo>
-                  <a:lnTo>
-                    <a:pt x="2996235" y="2567298"/>
-                  </a:lnTo>
-                  <a:lnTo>
-                    <a:pt x="3067857" y="2562368"/>
-                  </a:lnTo>
-                  <a:lnTo>
-                    <a:pt x="3139480" y="2557412"/>
-                  </a:lnTo>
-                  <a:lnTo>
-                    <a:pt x="3211102" y="2552429"/>
-                  </a:lnTo>
-                  <a:lnTo>
-                    <a:pt x="3282725" y="2547419"/>
-                  </a:lnTo>
-                  <a:lnTo>
-                    <a:pt x="3354348" y="2542383"/>
-                  </a:lnTo>
-                  <a:lnTo>
-                    <a:pt x="3425970" y="2537319"/>
-                  </a:lnTo>
-                  <a:lnTo>
-                    <a:pt x="3497593" y="2532228"/>
-                  </a:lnTo>
-                  <a:lnTo>
-                    <a:pt x="3569215" y="2527110"/>
-                  </a:lnTo>
-                  <a:lnTo>
-                    <a:pt x="3640838" y="2521964"/>
-                  </a:lnTo>
-                  <a:lnTo>
-                    <a:pt x="3712460" y="2516791"/>
-                  </a:lnTo>
-                  <a:lnTo>
-                    <a:pt x="3784083" y="2511589"/>
-                  </a:lnTo>
-                  <a:lnTo>
-                    <a:pt x="3855705" y="2506360"/>
+                    <a:pt x="58815" y="163799"/>
+                  </a:lnTo>
+                  <a:lnTo>
+                    <a:pt x="129362" y="348511"/>
+                  </a:lnTo>
+                  <a:lnTo>
+                    <a:pt x="199909" y="522165"/>
+                  </a:lnTo>
+                  <a:lnTo>
+                    <a:pt x="270456" y="685424"/>
+                  </a:lnTo>
+                  <a:lnTo>
+                    <a:pt x="341004" y="838910"/>
+                  </a:lnTo>
+                  <a:lnTo>
+                    <a:pt x="411551" y="983207"/>
+                  </a:lnTo>
+                  <a:lnTo>
+                    <a:pt x="482098" y="1118867"/>
+                  </a:lnTo>
+                  <a:lnTo>
+                    <a:pt x="552645" y="1246406"/>
+                  </a:lnTo>
+                  <a:lnTo>
+                    <a:pt x="623192" y="1366310"/>
+                  </a:lnTo>
+                  <a:lnTo>
+                    <a:pt x="693739" y="1479037"/>
+                  </a:lnTo>
+                  <a:lnTo>
+                    <a:pt x="764287" y="1585015"/>
+                  </a:lnTo>
+                  <a:lnTo>
+                    <a:pt x="834834" y="1684650"/>
+                  </a:lnTo>
+                  <a:lnTo>
+                    <a:pt x="905381" y="1778319"/>
+                  </a:lnTo>
+                  <a:lnTo>
+                    <a:pt x="975928" y="1866382"/>
+                  </a:lnTo>
+                  <a:lnTo>
+                    <a:pt x="1046475" y="1949173"/>
+                  </a:lnTo>
+                  <a:lnTo>
+                    <a:pt x="1117022" y="2027008"/>
+                  </a:lnTo>
+                  <a:lnTo>
+                    <a:pt x="1187570" y="2100184"/>
+                  </a:lnTo>
+                  <a:lnTo>
+                    <a:pt x="1258117" y="2168979"/>
+                  </a:lnTo>
+                  <a:lnTo>
+                    <a:pt x="1328664" y="2233656"/>
+                  </a:lnTo>
+                  <a:lnTo>
+                    <a:pt x="1399211" y="2294461"/>
+                  </a:lnTo>
+                  <a:lnTo>
+                    <a:pt x="1469758" y="2351626"/>
+                  </a:lnTo>
+                  <a:lnTo>
+                    <a:pt x="1540305" y="2405369"/>
+                  </a:lnTo>
+                  <a:lnTo>
+                    <a:pt x="1610853" y="2455895"/>
+                  </a:lnTo>
+                  <a:lnTo>
+                    <a:pt x="1681400" y="2473287"/>
+                  </a:lnTo>
+                  <a:lnTo>
+                    <a:pt x="1751947" y="2469113"/>
+                  </a:lnTo>
+                  <a:lnTo>
+                    <a:pt x="1822494" y="2464915"/>
+                  </a:lnTo>
+                  <a:lnTo>
+                    <a:pt x="1893041" y="2460696"/>
+                  </a:lnTo>
+                  <a:lnTo>
+                    <a:pt x="1963588" y="2456453"/>
+                  </a:lnTo>
+                  <a:lnTo>
+                    <a:pt x="2034136" y="2452188"/>
+                  </a:lnTo>
+                  <a:lnTo>
+                    <a:pt x="2104683" y="2447899"/>
+                  </a:lnTo>
+                  <a:lnTo>
+                    <a:pt x="2175230" y="2443588"/>
+                  </a:lnTo>
+                  <a:lnTo>
+                    <a:pt x="2245777" y="2439254"/>
+                  </a:lnTo>
+                  <a:lnTo>
+                    <a:pt x="2316324" y="2434896"/>
+                  </a:lnTo>
+                  <a:lnTo>
+                    <a:pt x="2386872" y="2430514"/>
+                  </a:lnTo>
+                  <a:lnTo>
+                    <a:pt x="2457419" y="2426110"/>
+                  </a:lnTo>
+                  <a:lnTo>
+                    <a:pt x="2527966" y="2421681"/>
+                  </a:lnTo>
+                  <a:lnTo>
+                    <a:pt x="2598513" y="2417229"/>
+                  </a:lnTo>
+                  <a:lnTo>
+                    <a:pt x="2669060" y="2412752"/>
+                  </a:lnTo>
+                  <a:lnTo>
+                    <a:pt x="2739607" y="2408252"/>
+                  </a:lnTo>
+                  <a:lnTo>
+                    <a:pt x="2810155" y="2403727"/>
+                  </a:lnTo>
+                  <a:lnTo>
+                    <a:pt x="2880702" y="2399178"/>
+                  </a:lnTo>
+                  <a:lnTo>
+                    <a:pt x="2951249" y="2394605"/>
+                  </a:lnTo>
+                  <a:lnTo>
+                    <a:pt x="3021796" y="2390007"/>
+                  </a:lnTo>
+                  <a:lnTo>
+                    <a:pt x="3092343" y="2385384"/>
+                  </a:lnTo>
+                  <a:lnTo>
+                    <a:pt x="3162890" y="2380736"/>
+                  </a:lnTo>
+                  <a:lnTo>
+                    <a:pt x="3233438" y="2376064"/>
+                  </a:lnTo>
+                  <a:lnTo>
+                    <a:pt x="3303985" y="2371366"/>
+                  </a:lnTo>
+                  <a:lnTo>
+                    <a:pt x="3374532" y="2366643"/>
+                  </a:lnTo>
+                  <a:lnTo>
+                    <a:pt x="3445079" y="2361895"/>
+                  </a:lnTo>
+                  <a:lnTo>
+                    <a:pt x="3515626" y="2357121"/>
+                  </a:lnTo>
+                  <a:lnTo>
+                    <a:pt x="3586173" y="2352321"/>
+                  </a:lnTo>
+                  <a:lnTo>
+                    <a:pt x="3656721" y="2347495"/>
+                  </a:lnTo>
+                  <a:lnTo>
+                    <a:pt x="3727268" y="2342644"/>
+                  </a:lnTo>
+                  <a:lnTo>
+                    <a:pt x="3797815" y="2337767"/>
                   </a:lnTo>
                 </a:path>
               </a:pathLst>
@@ -3691,312 +3691,312 @@
           </p:nvSpPr>
           <p:spPr>
             <a:xfrm>
-              <a:off x="1172049" y="4729609"/>
-              <a:ext cx="7090630" cy="702114"/>
+              <a:off x="1264853" y="4686609"/>
+              <a:ext cx="6984170" cy="654885"/>
             </a:xfrm>
             <a:custGeom>
               <a:avLst/>
               <a:pathLst>
-                <a:path w="7090630" h="702114">
+                <a:path w="6984170" h="654885">
                   <a:moveTo>
-                    <a:pt x="7090630" y="702114"/>
+                    <a:pt x="6984170" y="654885"/>
                   </a:moveTo>
                   <a:lnTo>
-                    <a:pt x="7019007" y="694121"/>
-                  </a:lnTo>
-                  <a:lnTo>
-                    <a:pt x="6947385" y="685620"/>
-                  </a:lnTo>
-                  <a:lnTo>
-                    <a:pt x="6875762" y="676577"/>
-                  </a:lnTo>
-                  <a:lnTo>
-                    <a:pt x="6804139" y="666958"/>
-                  </a:lnTo>
-                  <a:lnTo>
-                    <a:pt x="6732517" y="656727"/>
-                  </a:lnTo>
-                  <a:lnTo>
-                    <a:pt x="6660894" y="645844"/>
-                  </a:lnTo>
-                  <a:lnTo>
-                    <a:pt x="6589272" y="634268"/>
-                  </a:lnTo>
-                  <a:lnTo>
-                    <a:pt x="6517649" y="621956"/>
-                  </a:lnTo>
-                  <a:lnTo>
-                    <a:pt x="6446027" y="608859"/>
-                  </a:lnTo>
-                  <a:lnTo>
-                    <a:pt x="6374404" y="594928"/>
-                  </a:lnTo>
-                  <a:lnTo>
-                    <a:pt x="6302782" y="580111"/>
-                  </a:lnTo>
-                  <a:lnTo>
-                    <a:pt x="6231159" y="564350"/>
-                  </a:lnTo>
-                  <a:lnTo>
-                    <a:pt x="6159537" y="547585"/>
-                  </a:lnTo>
-                  <a:lnTo>
-                    <a:pt x="6087914" y="529753"/>
-                  </a:lnTo>
-                  <a:lnTo>
-                    <a:pt x="6016292" y="510785"/>
-                  </a:lnTo>
-                  <a:lnTo>
-                    <a:pt x="5944669" y="490610"/>
-                  </a:lnTo>
-                  <a:lnTo>
-                    <a:pt x="5873047" y="469150"/>
-                  </a:lnTo>
-                  <a:lnTo>
-                    <a:pt x="5801424" y="446323"/>
-                  </a:lnTo>
-                  <a:lnTo>
-                    <a:pt x="5729802" y="422043"/>
-                  </a:lnTo>
-                  <a:lnTo>
-                    <a:pt x="5658179" y="396217"/>
-                  </a:lnTo>
-                  <a:lnTo>
-                    <a:pt x="5586557" y="368747"/>
-                  </a:lnTo>
-                  <a:lnTo>
-                    <a:pt x="5514934" y="339528"/>
-                  </a:lnTo>
-                  <a:lnTo>
-                    <a:pt x="5443311" y="308448"/>
-                  </a:lnTo>
-                  <a:lnTo>
-                    <a:pt x="5371689" y="275389"/>
-                  </a:lnTo>
-                  <a:lnTo>
-                    <a:pt x="5300066" y="240225"/>
-                  </a:lnTo>
-                  <a:lnTo>
-                    <a:pt x="5228444" y="202822"/>
-                  </a:lnTo>
-                  <a:lnTo>
-                    <a:pt x="5156821" y="163037"/>
-                  </a:lnTo>
-                  <a:lnTo>
-                    <a:pt x="5085199" y="120719"/>
-                  </a:lnTo>
-                  <a:lnTo>
-                    <a:pt x="5013576" y="75707"/>
-                  </a:lnTo>
-                  <a:lnTo>
-                    <a:pt x="4941954" y="27828"/>
-                  </a:lnTo>
-                  <a:lnTo>
-                    <a:pt x="4870331" y="0"/>
-                  </a:lnTo>
-                  <a:lnTo>
-                    <a:pt x="4798709" y="4428"/>
-                  </a:lnTo>
-                  <a:lnTo>
-                    <a:pt x="4727086" y="8832"/>
-                  </a:lnTo>
-                  <a:lnTo>
-                    <a:pt x="4655464" y="13213"/>
-                  </a:lnTo>
-                  <a:lnTo>
-                    <a:pt x="4583841" y="17570"/>
-                  </a:lnTo>
-                  <a:lnTo>
-                    <a:pt x="4512219" y="21904"/>
-                  </a:lnTo>
-                  <a:lnTo>
-                    <a:pt x="4440596" y="26215"/>
-                  </a:lnTo>
-                  <a:lnTo>
-                    <a:pt x="4368974" y="30503"/>
-                  </a:lnTo>
-                  <a:lnTo>
-                    <a:pt x="4297351" y="34768"/>
-                  </a:lnTo>
-                  <a:lnTo>
-                    <a:pt x="4225729" y="39010"/>
-                  </a:lnTo>
-                  <a:lnTo>
-                    <a:pt x="4154106" y="43229"/>
-                  </a:lnTo>
-                  <a:lnTo>
-                    <a:pt x="4082483" y="47426"/>
-                  </a:lnTo>
-                  <a:lnTo>
-                    <a:pt x="4010861" y="51601"/>
-                  </a:lnTo>
-                  <a:lnTo>
-                    <a:pt x="3939238" y="55753"/>
-                  </a:lnTo>
-                  <a:lnTo>
-                    <a:pt x="3867616" y="59882"/>
-                  </a:lnTo>
-                  <a:lnTo>
-                    <a:pt x="3795993" y="63990"/>
-                  </a:lnTo>
-                  <a:lnTo>
-                    <a:pt x="3724371" y="68076"/>
-                  </a:lnTo>
-                  <a:lnTo>
-                    <a:pt x="3652748" y="72140"/>
-                  </a:lnTo>
-                  <a:lnTo>
-                    <a:pt x="3581126" y="76182"/>
-                  </a:lnTo>
-                  <a:lnTo>
-                    <a:pt x="3509503" y="80202"/>
-                  </a:lnTo>
-                  <a:lnTo>
-                    <a:pt x="3437881" y="84201"/>
-                  </a:lnTo>
-                  <a:lnTo>
-                    <a:pt x="3366258" y="88179"/>
-                  </a:lnTo>
-                  <a:lnTo>
-                    <a:pt x="3294636" y="92135"/>
-                  </a:lnTo>
-                  <a:lnTo>
-                    <a:pt x="3223013" y="96070"/>
-                  </a:lnTo>
-                  <a:lnTo>
-                    <a:pt x="3151391" y="99984"/>
-                  </a:lnTo>
-                  <a:lnTo>
-                    <a:pt x="3079768" y="103878"/>
-                  </a:lnTo>
-                  <a:lnTo>
-                    <a:pt x="3008146" y="107750"/>
-                  </a:lnTo>
-                  <a:lnTo>
-                    <a:pt x="2936523" y="111602"/>
-                  </a:lnTo>
-                  <a:lnTo>
-                    <a:pt x="2864901" y="115433"/>
-                  </a:lnTo>
-                  <a:lnTo>
-                    <a:pt x="2793278" y="119243"/>
-                  </a:lnTo>
-                  <a:lnTo>
-                    <a:pt x="2721655" y="123033"/>
-                  </a:lnTo>
-                  <a:lnTo>
-                    <a:pt x="2650033" y="126803"/>
-                  </a:lnTo>
-                  <a:lnTo>
-                    <a:pt x="2578410" y="130553"/>
-                  </a:lnTo>
-                  <a:lnTo>
-                    <a:pt x="2506788" y="134282"/>
-                  </a:lnTo>
-                  <a:lnTo>
-                    <a:pt x="2435165" y="137992"/>
-                  </a:lnTo>
-                  <a:lnTo>
-                    <a:pt x="2363543" y="141682"/>
-                  </a:lnTo>
-                  <a:lnTo>
-                    <a:pt x="2291920" y="145352"/>
-                  </a:lnTo>
-                  <a:lnTo>
-                    <a:pt x="2220298" y="149002"/>
-                  </a:lnTo>
-                  <a:lnTo>
-                    <a:pt x="2148675" y="152633"/>
-                  </a:lnTo>
-                  <a:lnTo>
-                    <a:pt x="2077053" y="156245"/>
-                  </a:lnTo>
-                  <a:lnTo>
-                    <a:pt x="2005430" y="159837"/>
-                  </a:lnTo>
-                  <a:lnTo>
-                    <a:pt x="1933808" y="163410"/>
-                  </a:lnTo>
-                  <a:lnTo>
-                    <a:pt x="1862185" y="166963"/>
-                  </a:lnTo>
-                  <a:lnTo>
-                    <a:pt x="1790563" y="170498"/>
-                  </a:lnTo>
-                  <a:lnTo>
-                    <a:pt x="1718940" y="174014"/>
-                  </a:lnTo>
-                  <a:lnTo>
-                    <a:pt x="1647318" y="177511"/>
-                  </a:lnTo>
-                  <a:lnTo>
-                    <a:pt x="1575695" y="180990"/>
-                  </a:lnTo>
-                  <a:lnTo>
-                    <a:pt x="1504073" y="184449"/>
-                  </a:lnTo>
-                  <a:lnTo>
-                    <a:pt x="1432450" y="187891"/>
-                  </a:lnTo>
-                  <a:lnTo>
-                    <a:pt x="1360827" y="191313"/>
-                  </a:lnTo>
-                  <a:lnTo>
-                    <a:pt x="1289205" y="194718"/>
-                  </a:lnTo>
-                  <a:lnTo>
-                    <a:pt x="1217582" y="198104"/>
-                  </a:lnTo>
-                  <a:lnTo>
-                    <a:pt x="1145960" y="201472"/>
-                  </a:lnTo>
-                  <a:lnTo>
-                    <a:pt x="1074337" y="204823"/>
-                  </a:lnTo>
-                  <a:lnTo>
-                    <a:pt x="1002715" y="208155"/>
-                  </a:lnTo>
-                  <a:lnTo>
-                    <a:pt x="931092" y="211469"/>
-                  </a:lnTo>
-                  <a:lnTo>
-                    <a:pt x="859470" y="214766"/>
-                  </a:lnTo>
-                  <a:lnTo>
-                    <a:pt x="787847" y="218045"/>
-                  </a:lnTo>
-                  <a:lnTo>
-                    <a:pt x="716225" y="221306"/>
-                  </a:lnTo>
-                  <a:lnTo>
-                    <a:pt x="644602" y="224550"/>
-                  </a:lnTo>
-                  <a:lnTo>
-                    <a:pt x="572980" y="227777"/>
-                  </a:lnTo>
-                  <a:lnTo>
-                    <a:pt x="501357" y="230987"/>
-                  </a:lnTo>
-                  <a:lnTo>
-                    <a:pt x="429735" y="234179"/>
-                  </a:lnTo>
-                  <a:lnTo>
-                    <a:pt x="358112" y="237354"/>
-                  </a:lnTo>
-                  <a:lnTo>
-                    <a:pt x="286490" y="240512"/>
-                  </a:lnTo>
-                  <a:lnTo>
-                    <a:pt x="214867" y="243653"/>
-                  </a:lnTo>
-                  <a:lnTo>
-                    <a:pt x="143245" y="246778"/>
-                  </a:lnTo>
-                  <a:lnTo>
-                    <a:pt x="71622" y="249886"/>
-                  </a:lnTo>
-                  <a:lnTo>
-                    <a:pt x="0" y="252977"/>
+                    <a:pt x="6913622" y="647430"/>
+                  </a:lnTo>
+                  <a:lnTo>
+                    <a:pt x="6843075" y="639500"/>
+                  </a:lnTo>
+                  <a:lnTo>
+                    <a:pt x="6772528" y="631066"/>
+                  </a:lnTo>
+                  <a:lnTo>
+                    <a:pt x="6701981" y="622094"/>
+                  </a:lnTo>
+                  <a:lnTo>
+                    <a:pt x="6631434" y="612551"/>
+                  </a:lnTo>
+                  <a:lnTo>
+                    <a:pt x="6560887" y="602400"/>
+                  </a:lnTo>
+                  <a:lnTo>
+                    <a:pt x="6490339" y="591603"/>
+                  </a:lnTo>
+                  <a:lnTo>
+                    <a:pt x="6419792" y="580119"/>
+                  </a:lnTo>
+                  <a:lnTo>
+                    <a:pt x="6349245" y="567903"/>
+                  </a:lnTo>
+                  <a:lnTo>
+                    <a:pt x="6278698" y="554910"/>
+                  </a:lnTo>
+                  <a:lnTo>
+                    <a:pt x="6208151" y="541089"/>
+                  </a:lnTo>
+                  <a:lnTo>
+                    <a:pt x="6137604" y="526388"/>
+                  </a:lnTo>
+                  <a:lnTo>
+                    <a:pt x="6067056" y="510751"/>
+                  </a:lnTo>
+                  <a:lnTo>
+                    <a:pt x="5996509" y="494118"/>
+                  </a:lnTo>
+                  <a:lnTo>
+                    <a:pt x="5925962" y="476426"/>
+                  </a:lnTo>
+                  <a:lnTo>
+                    <a:pt x="5855415" y="457608"/>
+                  </a:lnTo>
+                  <a:lnTo>
+                    <a:pt x="5784868" y="437592"/>
+                  </a:lnTo>
+                  <a:lnTo>
+                    <a:pt x="5714320" y="416301"/>
+                  </a:lnTo>
+                  <a:lnTo>
+                    <a:pt x="5643773" y="393654"/>
+                  </a:lnTo>
+                  <a:lnTo>
+                    <a:pt x="5573226" y="369565"/>
+                  </a:lnTo>
+                  <a:lnTo>
+                    <a:pt x="5502679" y="343943"/>
+                  </a:lnTo>
+                  <a:lnTo>
+                    <a:pt x="5432132" y="316689"/>
+                  </a:lnTo>
+                  <a:lnTo>
+                    <a:pt x="5361585" y="287699"/>
+                  </a:lnTo>
+                  <a:lnTo>
+                    <a:pt x="5291037" y="256864"/>
+                  </a:lnTo>
+                  <a:lnTo>
+                    <a:pt x="5220490" y="224066"/>
+                  </a:lnTo>
+                  <a:lnTo>
+                    <a:pt x="5149943" y="189179"/>
+                  </a:lnTo>
+                  <a:lnTo>
+                    <a:pt x="5079396" y="152070"/>
+                  </a:lnTo>
+                  <a:lnTo>
+                    <a:pt x="5008849" y="112599"/>
+                  </a:lnTo>
+                  <a:lnTo>
+                    <a:pt x="4938302" y="70614"/>
+                  </a:lnTo>
+                  <a:lnTo>
+                    <a:pt x="4867754" y="25956"/>
+                  </a:lnTo>
+                  <a:lnTo>
+                    <a:pt x="4797207" y="0"/>
+                  </a:lnTo>
+                  <a:lnTo>
+                    <a:pt x="4726660" y="4130"/>
+                  </a:lnTo>
+                  <a:lnTo>
+                    <a:pt x="4656113" y="8238"/>
+                  </a:lnTo>
+                  <a:lnTo>
+                    <a:pt x="4585566" y="12324"/>
+                  </a:lnTo>
+                  <a:lnTo>
+                    <a:pt x="4515019" y="16388"/>
+                  </a:lnTo>
+                  <a:lnTo>
+                    <a:pt x="4444471" y="20431"/>
+                  </a:lnTo>
+                  <a:lnTo>
+                    <a:pt x="4373924" y="24452"/>
+                  </a:lnTo>
+                  <a:lnTo>
+                    <a:pt x="4303377" y="28451"/>
+                  </a:lnTo>
+                  <a:lnTo>
+                    <a:pt x="4232830" y="32429"/>
+                  </a:lnTo>
+                  <a:lnTo>
+                    <a:pt x="4162283" y="36386"/>
+                  </a:lnTo>
+                  <a:lnTo>
+                    <a:pt x="4091736" y="40322"/>
+                  </a:lnTo>
+                  <a:lnTo>
+                    <a:pt x="4021188" y="44236"/>
+                  </a:lnTo>
+                  <a:lnTo>
+                    <a:pt x="3950641" y="48130"/>
+                  </a:lnTo>
+                  <a:lnTo>
+                    <a:pt x="3880094" y="52002"/>
+                  </a:lnTo>
+                  <a:lnTo>
+                    <a:pt x="3809547" y="55854"/>
+                  </a:lnTo>
+                  <a:lnTo>
+                    <a:pt x="3739000" y="59686"/>
+                  </a:lnTo>
+                  <a:lnTo>
+                    <a:pt x="3668452" y="63497"/>
+                  </a:lnTo>
+                  <a:lnTo>
+                    <a:pt x="3597905" y="67287"/>
+                  </a:lnTo>
+                  <a:lnTo>
+                    <a:pt x="3527358" y="71057"/>
+                  </a:lnTo>
+                  <a:lnTo>
+                    <a:pt x="3456811" y="74807"/>
+                  </a:lnTo>
+                  <a:lnTo>
+                    <a:pt x="3386264" y="78537"/>
+                  </a:lnTo>
+                  <a:lnTo>
+                    <a:pt x="3315717" y="82247"/>
+                  </a:lnTo>
+                  <a:lnTo>
+                    <a:pt x="3245169" y="85938"/>
+                  </a:lnTo>
+                  <a:lnTo>
+                    <a:pt x="3174622" y="89608"/>
+                  </a:lnTo>
+                  <a:lnTo>
+                    <a:pt x="3104075" y="93259"/>
+                  </a:lnTo>
+                  <a:lnTo>
+                    <a:pt x="3033528" y="96890"/>
+                  </a:lnTo>
+                  <a:lnTo>
+                    <a:pt x="2962981" y="100502"/>
+                  </a:lnTo>
+                  <a:lnTo>
+                    <a:pt x="2892434" y="104094"/>
+                  </a:lnTo>
+                  <a:lnTo>
+                    <a:pt x="2821886" y="107668"/>
+                  </a:lnTo>
+                  <a:lnTo>
+                    <a:pt x="2751339" y="111222"/>
+                  </a:lnTo>
+                  <a:lnTo>
+                    <a:pt x="2680792" y="114757"/>
+                  </a:lnTo>
+                  <a:lnTo>
+                    <a:pt x="2610245" y="118273"/>
+                  </a:lnTo>
+                  <a:lnTo>
+                    <a:pt x="2539698" y="121771"/>
+                  </a:lnTo>
+                  <a:lnTo>
+                    <a:pt x="2469151" y="125250"/>
+                  </a:lnTo>
+                  <a:lnTo>
+                    <a:pt x="2398603" y="128710"/>
+                  </a:lnTo>
+                  <a:lnTo>
+                    <a:pt x="2328056" y="132151"/>
+                  </a:lnTo>
+                  <a:lnTo>
+                    <a:pt x="2257509" y="135574"/>
+                  </a:lnTo>
+                  <a:lnTo>
+                    <a:pt x="2186962" y="138979"/>
+                  </a:lnTo>
+                  <a:lnTo>
+                    <a:pt x="2116415" y="142366"/>
+                  </a:lnTo>
+                  <a:lnTo>
+                    <a:pt x="2045868" y="145735"/>
+                  </a:lnTo>
+                  <a:lnTo>
+                    <a:pt x="1975320" y="149085"/>
+                  </a:lnTo>
+                  <a:lnTo>
+                    <a:pt x="1904773" y="152418"/>
+                  </a:lnTo>
+                  <a:lnTo>
+                    <a:pt x="1834226" y="155732"/>
+                  </a:lnTo>
+                  <a:lnTo>
+                    <a:pt x="1763679" y="159029"/>
+                  </a:lnTo>
+                  <a:lnTo>
+                    <a:pt x="1693132" y="162309"/>
+                  </a:lnTo>
+                  <a:lnTo>
+                    <a:pt x="1622584" y="165571"/>
+                  </a:lnTo>
+                  <a:lnTo>
+                    <a:pt x="1552037" y="168815"/>
+                  </a:lnTo>
+                  <a:lnTo>
+                    <a:pt x="1481490" y="172042"/>
+                  </a:lnTo>
+                  <a:lnTo>
+                    <a:pt x="1410943" y="175252"/>
+                  </a:lnTo>
+                  <a:lnTo>
+                    <a:pt x="1340396" y="178444"/>
+                  </a:lnTo>
+                  <a:lnTo>
+                    <a:pt x="1269849" y="181620"/>
+                  </a:lnTo>
+                  <a:lnTo>
+                    <a:pt x="1199301" y="184778"/>
+                  </a:lnTo>
+                  <a:lnTo>
+                    <a:pt x="1128754" y="187920"/>
+                  </a:lnTo>
+                  <a:lnTo>
+                    <a:pt x="1058207" y="191045"/>
+                  </a:lnTo>
+                  <a:lnTo>
+                    <a:pt x="987660" y="194153"/>
+                  </a:lnTo>
+                  <a:lnTo>
+                    <a:pt x="917113" y="197244"/>
+                  </a:lnTo>
+                  <a:lnTo>
+                    <a:pt x="846566" y="200319"/>
+                  </a:lnTo>
+                  <a:lnTo>
+                    <a:pt x="776018" y="203378"/>
+                  </a:lnTo>
+                  <a:lnTo>
+                    <a:pt x="705471" y="206420"/>
+                  </a:lnTo>
+                  <a:lnTo>
+                    <a:pt x="634924" y="209446"/>
+                  </a:lnTo>
+                  <a:lnTo>
+                    <a:pt x="564377" y="212455"/>
+                  </a:lnTo>
+                  <a:lnTo>
+                    <a:pt x="493830" y="215449"/>
+                  </a:lnTo>
+                  <a:lnTo>
+                    <a:pt x="423283" y="218426"/>
+                  </a:lnTo>
+                  <a:lnTo>
+                    <a:pt x="352735" y="221388"/>
+                  </a:lnTo>
+                  <a:lnTo>
+                    <a:pt x="282188" y="224334"/>
+                  </a:lnTo>
+                  <a:lnTo>
+                    <a:pt x="211641" y="227264"/>
+                  </a:lnTo>
+                  <a:lnTo>
+                    <a:pt x="141094" y="230178"/>
+                  </a:lnTo>
+                  <a:lnTo>
+                    <a:pt x="70547" y="233077"/>
+                  </a:lnTo>
+                  <a:lnTo>
+                    <a:pt x="0" y="235960"/>
                   </a:lnTo>
                 </a:path>
               </a:pathLst>
@@ -4016,261 +4016,261 @@
           </p:nvSpPr>
           <p:spPr>
             <a:xfrm>
-              <a:off x="2424869" y="2073503"/>
-              <a:ext cx="5837810" cy="3133479"/>
+              <a:off x="2498863" y="2209169"/>
+              <a:ext cx="5750160" cy="2922702"/>
             </a:xfrm>
             <a:custGeom>
               <a:avLst/>
               <a:pathLst>
-                <a:path w="5837810" h="3133479">
+                <a:path w="5750160" h="2922702">
                   <a:moveTo>
                     <a:pt x="0" y="0"/>
                   </a:moveTo>
                   <a:lnTo>
-                    <a:pt x="36385" y="49862"/>
-                  </a:lnTo>
-                  <a:lnTo>
-                    <a:pt x="108008" y="145285"/>
-                  </a:lnTo>
-                  <a:lnTo>
-                    <a:pt x="179630" y="238057"/>
-                  </a:lnTo>
-                  <a:lnTo>
-                    <a:pt x="251253" y="328250"/>
-                  </a:lnTo>
-                  <a:lnTo>
-                    <a:pt x="322875" y="415938"/>
-                  </a:lnTo>
-                  <a:lnTo>
-                    <a:pt x="394498" y="501188"/>
-                  </a:lnTo>
-                  <a:lnTo>
-                    <a:pt x="466120" y="584069"/>
-                  </a:lnTo>
-                  <a:lnTo>
-                    <a:pt x="537743" y="664648"/>
-                  </a:lnTo>
-                  <a:lnTo>
-                    <a:pt x="609365" y="742987"/>
-                  </a:lnTo>
-                  <a:lnTo>
-                    <a:pt x="680988" y="819149"/>
-                  </a:lnTo>
-                  <a:lnTo>
-                    <a:pt x="752611" y="893195"/>
-                  </a:lnTo>
-                  <a:lnTo>
-                    <a:pt x="824233" y="965183"/>
-                  </a:lnTo>
-                  <a:lnTo>
-                    <a:pt x="895856" y="1035170"/>
-                  </a:lnTo>
-                  <a:lnTo>
-                    <a:pt x="967478" y="1103213"/>
-                  </a:lnTo>
-                  <a:lnTo>
-                    <a:pt x="1039101" y="1169365"/>
-                  </a:lnTo>
-                  <a:lnTo>
-                    <a:pt x="1110723" y="1233679"/>
-                  </a:lnTo>
-                  <a:lnTo>
-                    <a:pt x="1182346" y="1296205"/>
-                  </a:lnTo>
-                  <a:lnTo>
-                    <a:pt x="1253968" y="1356994"/>
-                  </a:lnTo>
-                  <a:lnTo>
-                    <a:pt x="1325591" y="1416094"/>
-                  </a:lnTo>
-                  <a:lnTo>
-                    <a:pt x="1397213" y="1473551"/>
-                  </a:lnTo>
-                  <a:lnTo>
-                    <a:pt x="1468836" y="1529412"/>
-                  </a:lnTo>
-                  <a:lnTo>
-                    <a:pt x="1540458" y="1583720"/>
-                  </a:lnTo>
-                  <a:lnTo>
-                    <a:pt x="1612081" y="1636520"/>
-                  </a:lnTo>
-                  <a:lnTo>
-                    <a:pt x="1683703" y="1687852"/>
-                  </a:lnTo>
-                  <a:lnTo>
-                    <a:pt x="1755326" y="1737757"/>
-                  </a:lnTo>
-                  <a:lnTo>
-                    <a:pt x="1826948" y="1786276"/>
-                  </a:lnTo>
-                  <a:lnTo>
-                    <a:pt x="1898571" y="1833447"/>
-                  </a:lnTo>
-                  <a:lnTo>
-                    <a:pt x="1970193" y="1879306"/>
-                  </a:lnTo>
-                  <a:lnTo>
-                    <a:pt x="2041816" y="1923892"/>
-                  </a:lnTo>
-                  <a:lnTo>
-                    <a:pt x="2113439" y="1967238"/>
-                  </a:lnTo>
-                  <a:lnTo>
-                    <a:pt x="2185061" y="2009380"/>
-                  </a:lnTo>
-                  <a:lnTo>
-                    <a:pt x="2256684" y="2050351"/>
-                  </a:lnTo>
-                  <a:lnTo>
-                    <a:pt x="2328306" y="2090183"/>
-                  </a:lnTo>
-                  <a:lnTo>
-                    <a:pt x="2399929" y="2128908"/>
-                  </a:lnTo>
-                  <a:lnTo>
-                    <a:pt x="2471551" y="2166557"/>
-                  </a:lnTo>
-                  <a:lnTo>
-                    <a:pt x="2543174" y="2203160"/>
-                  </a:lnTo>
-                  <a:lnTo>
-                    <a:pt x="2614796" y="2238746"/>
-                  </a:lnTo>
-                  <a:lnTo>
-                    <a:pt x="2686419" y="2273343"/>
-                  </a:lnTo>
-                  <a:lnTo>
-                    <a:pt x="2758041" y="2306979"/>
-                  </a:lnTo>
-                  <a:lnTo>
-                    <a:pt x="2829664" y="2339679"/>
-                  </a:lnTo>
-                  <a:lnTo>
-                    <a:pt x="2901286" y="2371472"/>
-                  </a:lnTo>
-                  <a:lnTo>
-                    <a:pt x="2972909" y="2402380"/>
-                  </a:lnTo>
-                  <a:lnTo>
-                    <a:pt x="3044531" y="2432430"/>
-                  </a:lnTo>
-                  <a:lnTo>
-                    <a:pt x="3116154" y="2461645"/>
-                  </a:lnTo>
-                  <a:lnTo>
-                    <a:pt x="3187776" y="2490048"/>
-                  </a:lnTo>
-                  <a:lnTo>
-                    <a:pt x="3259399" y="2517661"/>
-                  </a:lnTo>
-                  <a:lnTo>
-                    <a:pt x="3331021" y="2544508"/>
-                  </a:lnTo>
-                  <a:lnTo>
-                    <a:pt x="3402644" y="2570608"/>
-                  </a:lnTo>
-                  <a:lnTo>
-                    <a:pt x="3474267" y="2595983"/>
-                  </a:lnTo>
-                  <a:lnTo>
-                    <a:pt x="3545889" y="2620653"/>
-                  </a:lnTo>
-                  <a:lnTo>
-                    <a:pt x="3617512" y="2644637"/>
-                  </a:lnTo>
-                  <a:lnTo>
-                    <a:pt x="3689134" y="2667955"/>
-                  </a:lnTo>
-                  <a:lnTo>
-                    <a:pt x="3760757" y="2690624"/>
-                  </a:lnTo>
-                  <a:lnTo>
-                    <a:pt x="3832379" y="2712664"/>
-                  </a:lnTo>
-                  <a:lnTo>
-                    <a:pt x="3904002" y="2734092"/>
-                  </a:lnTo>
-                  <a:lnTo>
-                    <a:pt x="3975624" y="2754924"/>
-                  </a:lnTo>
-                  <a:lnTo>
-                    <a:pt x="4047247" y="2775177"/>
-                  </a:lnTo>
-                  <a:lnTo>
-                    <a:pt x="4118869" y="2794867"/>
-                  </a:lnTo>
-                  <a:lnTo>
-                    <a:pt x="4190492" y="2814010"/>
-                  </a:lnTo>
-                  <a:lnTo>
-                    <a:pt x="4262114" y="2832621"/>
-                  </a:lnTo>
-                  <a:lnTo>
-                    <a:pt x="4333737" y="2850715"/>
-                  </a:lnTo>
-                  <a:lnTo>
-                    <a:pt x="4405359" y="2868306"/>
-                  </a:lnTo>
-                  <a:lnTo>
-                    <a:pt x="4476982" y="2885408"/>
-                  </a:lnTo>
-                  <a:lnTo>
-                    <a:pt x="4548604" y="2902035"/>
-                  </a:lnTo>
-                  <a:lnTo>
-                    <a:pt x="4620227" y="2918200"/>
-                  </a:lnTo>
-                  <a:lnTo>
-                    <a:pt x="4691849" y="2933916"/>
-                  </a:lnTo>
-                  <a:lnTo>
-                    <a:pt x="4763472" y="2949195"/>
-                  </a:lnTo>
-                  <a:lnTo>
-                    <a:pt x="4835095" y="2964050"/>
-                  </a:lnTo>
-                  <a:lnTo>
-                    <a:pt x="4906717" y="2978491"/>
-                  </a:lnTo>
-                  <a:lnTo>
-                    <a:pt x="4978340" y="2992532"/>
-                  </a:lnTo>
-                  <a:lnTo>
-                    <a:pt x="5049962" y="3006182"/>
-                  </a:lnTo>
-                  <a:lnTo>
-                    <a:pt x="5121585" y="3019453"/>
-                  </a:lnTo>
-                  <a:lnTo>
-                    <a:pt x="5193207" y="3032355"/>
-                  </a:lnTo>
-                  <a:lnTo>
-                    <a:pt x="5264830" y="3044899"/>
-                  </a:lnTo>
-                  <a:lnTo>
-                    <a:pt x="5336452" y="3057094"/>
-                  </a:lnTo>
-                  <a:lnTo>
-                    <a:pt x="5408075" y="3068950"/>
-                  </a:lnTo>
-                  <a:lnTo>
-                    <a:pt x="5479697" y="3080476"/>
-                  </a:lnTo>
-                  <a:lnTo>
-                    <a:pt x="5551320" y="3091683"/>
-                  </a:lnTo>
-                  <a:lnTo>
-                    <a:pt x="5622942" y="3102578"/>
-                  </a:lnTo>
-                  <a:lnTo>
-                    <a:pt x="5694565" y="3113170"/>
-                  </a:lnTo>
-                  <a:lnTo>
-                    <a:pt x="5766187" y="3123468"/>
-                  </a:lnTo>
-                  <a:lnTo>
-                    <a:pt x="5837810" y="3133479"/>
+                    <a:pt x="35839" y="46508"/>
+                  </a:lnTo>
+                  <a:lnTo>
+                    <a:pt x="106386" y="135513"/>
+                  </a:lnTo>
+                  <a:lnTo>
+                    <a:pt x="176933" y="222044"/>
+                  </a:lnTo>
+                  <a:lnTo>
+                    <a:pt x="247481" y="306170"/>
+                  </a:lnTo>
+                  <a:lnTo>
+                    <a:pt x="318028" y="387959"/>
+                  </a:lnTo>
+                  <a:lnTo>
+                    <a:pt x="388575" y="467475"/>
+                  </a:lnTo>
+                  <a:lnTo>
+                    <a:pt x="459122" y="544781"/>
+                  </a:lnTo>
+                  <a:lnTo>
+                    <a:pt x="529669" y="619939"/>
+                  </a:lnTo>
+                  <a:lnTo>
+                    <a:pt x="600216" y="693009"/>
+                  </a:lnTo>
+                  <a:lnTo>
+                    <a:pt x="670764" y="764048"/>
+                  </a:lnTo>
+                  <a:lnTo>
+                    <a:pt x="741311" y="833113"/>
+                  </a:lnTo>
+                  <a:lnTo>
+                    <a:pt x="811858" y="900258"/>
+                  </a:lnTo>
+                  <a:lnTo>
+                    <a:pt x="882405" y="965538"/>
+                  </a:lnTo>
+                  <a:lnTo>
+                    <a:pt x="952952" y="1029004"/>
+                  </a:lnTo>
+                  <a:lnTo>
+                    <a:pt x="1023499" y="1090706"/>
+                  </a:lnTo>
+                  <a:lnTo>
+                    <a:pt x="1094047" y="1150694"/>
+                  </a:lnTo>
+                  <a:lnTo>
+                    <a:pt x="1164594" y="1209014"/>
+                  </a:lnTo>
+                  <a:lnTo>
+                    <a:pt x="1235141" y="1265714"/>
+                  </a:lnTo>
+                  <a:lnTo>
+                    <a:pt x="1305688" y="1320838"/>
+                  </a:lnTo>
+                  <a:lnTo>
+                    <a:pt x="1376235" y="1374431"/>
+                  </a:lnTo>
+                  <a:lnTo>
+                    <a:pt x="1446782" y="1426534"/>
+                  </a:lnTo>
+                  <a:lnTo>
+                    <a:pt x="1517330" y="1477189"/>
+                  </a:lnTo>
+                  <a:lnTo>
+                    <a:pt x="1587877" y="1526437"/>
+                  </a:lnTo>
+                  <a:lnTo>
+                    <a:pt x="1658424" y="1574316"/>
+                  </a:lnTo>
+                  <a:lnTo>
+                    <a:pt x="1728971" y="1620865"/>
+                  </a:lnTo>
+                  <a:lnTo>
+                    <a:pt x="1799518" y="1666120"/>
+                  </a:lnTo>
+                  <a:lnTo>
+                    <a:pt x="1870065" y="1710117"/>
+                  </a:lnTo>
+                  <a:lnTo>
+                    <a:pt x="1940613" y="1752892"/>
+                  </a:lnTo>
+                  <a:lnTo>
+                    <a:pt x="2011160" y="1794479"/>
+                  </a:lnTo>
+                  <a:lnTo>
+                    <a:pt x="2081707" y="1834909"/>
+                  </a:lnTo>
+                  <a:lnTo>
+                    <a:pt x="2152254" y="1874216"/>
+                  </a:lnTo>
+                  <a:lnTo>
+                    <a:pt x="2222801" y="1912431"/>
+                  </a:lnTo>
+                  <a:lnTo>
+                    <a:pt x="2293349" y="1949584"/>
+                  </a:lnTo>
+                  <a:lnTo>
+                    <a:pt x="2363896" y="1985704"/>
+                  </a:lnTo>
+                  <a:lnTo>
+                    <a:pt x="2434443" y="2020821"/>
+                  </a:lnTo>
+                  <a:lnTo>
+                    <a:pt x="2504990" y="2054962"/>
+                  </a:lnTo>
+                  <a:lnTo>
+                    <a:pt x="2575537" y="2088154"/>
+                  </a:lnTo>
+                  <a:lnTo>
+                    <a:pt x="2646084" y="2120424"/>
+                  </a:lnTo>
+                  <a:lnTo>
+                    <a:pt x="2716632" y="2151797"/>
+                  </a:lnTo>
+                  <a:lnTo>
+                    <a:pt x="2787179" y="2182298"/>
+                  </a:lnTo>
+                  <a:lnTo>
+                    <a:pt x="2857726" y="2211951"/>
+                  </a:lnTo>
+                  <a:lnTo>
+                    <a:pt x="2928273" y="2240781"/>
+                  </a:lnTo>
+                  <a:lnTo>
+                    <a:pt x="2998820" y="2268809"/>
+                  </a:lnTo>
+                  <a:lnTo>
+                    <a:pt x="3069367" y="2296059"/>
+                  </a:lnTo>
+                  <a:lnTo>
+                    <a:pt x="3139915" y="2322551"/>
+                  </a:lnTo>
+                  <a:lnTo>
+                    <a:pt x="3210462" y="2348307"/>
+                  </a:lnTo>
+                  <a:lnTo>
+                    <a:pt x="3281009" y="2373348"/>
+                  </a:lnTo>
+                  <a:lnTo>
+                    <a:pt x="3351556" y="2397692"/>
+                  </a:lnTo>
+                  <a:lnTo>
+                    <a:pt x="3422103" y="2421360"/>
+                  </a:lnTo>
+                  <a:lnTo>
+                    <a:pt x="3492650" y="2444371"/>
+                  </a:lnTo>
+                  <a:lnTo>
+                    <a:pt x="3563198" y="2466742"/>
+                  </a:lnTo>
+                  <a:lnTo>
+                    <a:pt x="3633745" y="2488491"/>
+                  </a:lnTo>
+                  <a:lnTo>
+                    <a:pt x="3704292" y="2509636"/>
+                  </a:lnTo>
+                  <a:lnTo>
+                    <a:pt x="3774839" y="2530193"/>
+                  </a:lnTo>
+                  <a:lnTo>
+                    <a:pt x="3845386" y="2550179"/>
+                  </a:lnTo>
+                  <a:lnTo>
+                    <a:pt x="3915933" y="2569610"/>
+                  </a:lnTo>
+                  <a:lnTo>
+                    <a:pt x="3986481" y="2588501"/>
+                  </a:lnTo>
+                  <a:lnTo>
+                    <a:pt x="4057028" y="2606866"/>
+                  </a:lnTo>
+                  <a:lnTo>
+                    <a:pt x="4127575" y="2624722"/>
+                  </a:lnTo>
+                  <a:lnTo>
+                    <a:pt x="4198122" y="2642081"/>
+                  </a:lnTo>
+                  <a:lnTo>
+                    <a:pt x="4268669" y="2658958"/>
+                  </a:lnTo>
+                  <a:lnTo>
+                    <a:pt x="4339217" y="2675366"/>
+                  </a:lnTo>
+                  <a:lnTo>
+                    <a:pt x="4409764" y="2691318"/>
+                  </a:lnTo>
+                  <a:lnTo>
+                    <a:pt x="4480311" y="2706826"/>
+                  </a:lnTo>
+                  <a:lnTo>
+                    <a:pt x="4550858" y="2721904"/>
+                  </a:lnTo>
+                  <a:lnTo>
+                    <a:pt x="4621405" y="2736562"/>
+                  </a:lnTo>
+                  <a:lnTo>
+                    <a:pt x="4691952" y="2750814"/>
+                  </a:lnTo>
+                  <a:lnTo>
+                    <a:pt x="4762500" y="2764669"/>
+                  </a:lnTo>
+                  <a:lnTo>
+                    <a:pt x="4833047" y="2778139"/>
+                  </a:lnTo>
+                  <a:lnTo>
+                    <a:pt x="4903594" y="2791235"/>
+                  </a:lnTo>
+                  <a:lnTo>
+                    <a:pt x="4974141" y="2803967"/>
+                  </a:lnTo>
+                  <a:lnTo>
+                    <a:pt x="5044688" y="2816345"/>
+                  </a:lnTo>
+                  <a:lnTo>
+                    <a:pt x="5115235" y="2828380"/>
+                  </a:lnTo>
+                  <a:lnTo>
+                    <a:pt x="5185783" y="2840079"/>
+                  </a:lnTo>
+                  <a:lnTo>
+                    <a:pt x="5256330" y="2851454"/>
+                  </a:lnTo>
+                  <a:lnTo>
+                    <a:pt x="5326877" y="2862513"/>
+                  </a:lnTo>
+                  <a:lnTo>
+                    <a:pt x="5397424" y="2873264"/>
+                  </a:lnTo>
+                  <a:lnTo>
+                    <a:pt x="5467971" y="2883717"/>
+                  </a:lnTo>
+                  <a:lnTo>
+                    <a:pt x="5538518" y="2893879"/>
+                  </a:lnTo>
+                  <a:lnTo>
+                    <a:pt x="5609066" y="2903758"/>
+                  </a:lnTo>
+                  <a:lnTo>
+                    <a:pt x="5679613" y="2913364"/>
+                  </a:lnTo>
+                  <a:lnTo>
+                    <a:pt x="5750160" y="2922702"/>
                   </a:lnTo>
                 </a:path>
               </a:pathLst>
@@ -4299,21 +4299,21 @@
           </p:nvSpPr>
           <p:spPr>
             <a:xfrm>
-              <a:off x="817517" y="4727786"/>
-              <a:ext cx="7799693" cy="0"/>
+              <a:off x="915645" y="4684908"/>
+              <a:ext cx="7682587" cy="0"/>
             </a:xfrm>
             <a:custGeom>
               <a:avLst/>
               <a:pathLst>
-                <a:path w="7799693" h="0">
+                <a:path w="7682587" h="0">
                   <a:moveTo>
                     <a:pt x="0" y="0"/>
                   </a:moveTo>
                   <a:lnTo>
-                    <a:pt x="7799693" y="0"/>
-                  </a:lnTo>
-                  <a:lnTo>
-                    <a:pt x="7799693" y="0"/>
+                    <a:pt x="7682587" y="0"/>
+                  </a:lnTo>
+                  <a:lnTo>
+                    <a:pt x="7682587" y="0"/>
                   </a:lnTo>
                 </a:path>
               </a:pathLst>
@@ -4342,15 +4342,15 @@
           </p:nvSpPr>
           <p:spPr>
             <a:xfrm>
-              <a:off x="6071765" y="2073503"/>
-              <a:ext cx="0" cy="3649639"/>
+              <a:off x="6091004" y="2209169"/>
+              <a:ext cx="0" cy="3404141"/>
             </a:xfrm>
             <a:custGeom>
               <a:avLst/>
               <a:pathLst>
-                <a:path w="0" h="3649639">
+                <a:path w="0" h="3404141">
                   <a:moveTo>
-                    <a:pt x="0" y="3649639"/>
+                    <a:pt x="0" y="3404141"/>
                   </a:moveTo>
                   <a:lnTo>
                     <a:pt x="0" y="0"/>
@@ -4385,15 +4385,15 @@
           </p:nvSpPr>
           <p:spPr>
             <a:xfrm>
-              <a:off x="5051213" y="2073503"/>
-              <a:ext cx="0" cy="3649639"/>
+              <a:off x="5085775" y="2209169"/>
+              <a:ext cx="0" cy="3404141"/>
             </a:xfrm>
             <a:custGeom>
               <a:avLst/>
               <a:pathLst>
-                <a:path w="0" h="3649639">
+                <a:path w="0" h="3404141">
                   <a:moveTo>
-                    <a:pt x="0" y="3649639"/>
+                    <a:pt x="0" y="3404141"/>
                   </a:moveTo>
                   <a:lnTo>
                     <a:pt x="0" y="0"/>
@@ -4428,15 +4428,15 @@
           </p:nvSpPr>
           <p:spPr>
             <a:xfrm>
-              <a:off x="6733531" y="2073503"/>
-              <a:ext cx="0" cy="3649639"/>
+              <a:off x="6742834" y="2209169"/>
+              <a:ext cx="0" cy="3404141"/>
             </a:xfrm>
             <a:custGeom>
               <a:avLst/>
               <a:pathLst>
-                <a:path w="0" h="3649639">
+                <a:path w="0" h="3404141">
                   <a:moveTo>
-                    <a:pt x="0" y="3649639"/>
+                    <a:pt x="0" y="3404141"/>
                   </a:moveTo>
                   <a:lnTo>
                     <a:pt x="0" y="0"/>
@@ -4471,8 +4471,8 @@
           </p:nvSpPr>
           <p:spPr>
             <a:xfrm>
-              <a:off x="692708" y="5517199"/>
-              <a:ext cx="62179" cy="80101"/>
+              <a:off x="756929" y="5407599"/>
+              <a:ext cx="79004" cy="101955"/>
             </a:xfrm>
             <a:prstGeom prst="rect">
               <a:avLst/>
@@ -4485,7 +4485,7 @@
             <a:p>
               <a:pPr algn="l" marL="0" marR="0" indent="0">
                 <a:lnSpc>
-                  <a:spcPts val="880"/>
+                  <a:spcPts val="1120"/>
                 </a:lnSpc>
                 <a:spcBef>
                   <a:spcPts val="0"/>
@@ -4495,7 +4495,7 @@
                 </a:spcAft>
               </a:pPr>
               <a:r>
-                <a:rPr sz="880">
+                <a:rPr sz="1120">
                   <a:solidFill>
                     <a:srgbClr val="4D4D4D">
                       <a:alpha val="100000"/>
@@ -4517,8 +4517,8 @@
           </p:nvSpPr>
           <p:spPr>
             <a:xfrm>
-              <a:off x="692708" y="4687735"/>
-              <a:ext cx="62179" cy="80101"/>
+              <a:off x="756929" y="4633931"/>
+              <a:ext cx="79004" cy="101955"/>
             </a:xfrm>
             <a:prstGeom prst="rect">
               <a:avLst/>
@@ -4531,7 +4531,7 @@
             <a:p>
               <a:pPr algn="l" marL="0" marR="0" indent="0">
                 <a:lnSpc>
-                  <a:spcPts val="880"/>
+                  <a:spcPts val="1120"/>
                 </a:lnSpc>
                 <a:spcBef>
                   <a:spcPts val="0"/>
@@ -4541,7 +4541,7 @@
                 </a:spcAft>
               </a:pPr>
               <a:r>
-                <a:rPr sz="880">
+                <a:rPr sz="1120">
                   <a:solidFill>
                     <a:srgbClr val="4D4D4D">
                       <a:alpha val="100000"/>
@@ -4563,8 +4563,8 @@
           </p:nvSpPr>
           <p:spPr>
             <a:xfrm>
-              <a:off x="692708" y="3858272"/>
-              <a:ext cx="62179" cy="80101"/>
+              <a:off x="756929" y="3860262"/>
+              <a:ext cx="79004" cy="101955"/>
             </a:xfrm>
             <a:prstGeom prst="rect">
               <a:avLst/>
@@ -4577,7 +4577,7 @@
             <a:p>
               <a:pPr algn="l" marL="0" marR="0" indent="0">
                 <a:lnSpc>
-                  <a:spcPts val="880"/>
+                  <a:spcPts val="1120"/>
                 </a:lnSpc>
                 <a:spcBef>
                   <a:spcPts val="0"/>
@@ -4587,7 +4587,7 @@
                 </a:spcAft>
               </a:pPr>
               <a:r>
-                <a:rPr sz="880">
+                <a:rPr sz="1120">
                   <a:solidFill>
                     <a:srgbClr val="4D4D4D">
                       <a:alpha val="100000"/>
@@ -4609,8 +4609,8 @@
           </p:nvSpPr>
           <p:spPr>
             <a:xfrm>
-              <a:off x="692708" y="3028808"/>
-              <a:ext cx="62179" cy="80101"/>
+              <a:off x="756929" y="3086593"/>
+              <a:ext cx="79004" cy="101955"/>
             </a:xfrm>
             <a:prstGeom prst="rect">
               <a:avLst/>
@@ -4623,7 +4623,7 @@
             <a:p>
               <a:pPr algn="l" marL="0" marR="0" indent="0">
                 <a:lnSpc>
-                  <a:spcPts val="880"/>
+                  <a:spcPts val="1120"/>
                 </a:lnSpc>
                 <a:spcBef>
                   <a:spcPts val="0"/>
@@ -4633,7 +4633,7 @@
                 </a:spcAft>
               </a:pPr>
               <a:r>
-                <a:rPr sz="880">
+                <a:rPr sz="1120">
                   <a:solidFill>
                     <a:srgbClr val="4D4D4D">
                       <a:alpha val="100000"/>
@@ -4655,8 +4655,8 @@
           </p:nvSpPr>
           <p:spPr>
             <a:xfrm>
-              <a:off x="692708" y="2199345"/>
-              <a:ext cx="62179" cy="80101"/>
+              <a:off x="756929" y="2312925"/>
+              <a:ext cx="79004" cy="101955"/>
             </a:xfrm>
             <a:prstGeom prst="rect">
               <a:avLst/>
@@ -4669,7 +4669,7 @@
             <a:p>
               <a:pPr algn="l" marL="0" marR="0" indent="0">
                 <a:lnSpc>
-                  <a:spcPts val="880"/>
+                  <a:spcPts val="1120"/>
                 </a:lnSpc>
                 <a:spcBef>
                   <a:spcPts val="0"/>
@@ -4679,7 +4679,7 @@
                 </a:spcAft>
               </a:pPr>
               <a:r>
-                <a:rPr sz="880">
+                <a:rPr sz="1120">
                   <a:solidFill>
                     <a:srgbClr val="4D4D4D">
                       <a:alpha val="100000"/>
@@ -4701,8 +4701,8 @@
           </p:nvSpPr>
           <p:spPr>
             <a:xfrm>
-              <a:off x="2331636" y="5785772"/>
-              <a:ext cx="161574" cy="80101"/>
+              <a:off x="2383963" y="5693022"/>
+              <a:ext cx="205282" cy="101955"/>
             </a:xfrm>
             <a:prstGeom prst="rect">
               <a:avLst/>
@@ -4715,7 +4715,7 @@
             <a:p>
               <a:pPr algn="l" marL="0" marR="0" indent="0">
                 <a:lnSpc>
-                  <a:spcPts val="880"/>
+                  <a:spcPts val="1120"/>
                 </a:lnSpc>
                 <a:spcBef>
                   <a:spcPts val="0"/>
@@ -4725,7 +4725,7 @@
                 </a:spcAft>
               </a:pPr>
               <a:r>
-                <a:rPr sz="880">
+                <a:rPr sz="1120">
                   <a:solidFill>
                     <a:srgbClr val="4D4D4D">
                       <a:alpha val="100000"/>
@@ -4747,8 +4747,8 @@
           </p:nvSpPr>
           <p:spPr>
             <a:xfrm>
-              <a:off x="4181509" y="5785772"/>
-              <a:ext cx="161574" cy="80101"/>
+              <a:off x="4206062" y="5693022"/>
+              <a:ext cx="205282" cy="101955"/>
             </a:xfrm>
             <a:prstGeom prst="rect">
               <a:avLst/>
@@ -4761,7 +4761,7 @@
             <a:p>
               <a:pPr algn="l" marL="0" marR="0" indent="0">
                 <a:lnSpc>
-                  <a:spcPts val="880"/>
+                  <a:spcPts val="1120"/>
                 </a:lnSpc>
                 <a:spcBef>
                   <a:spcPts val="0"/>
@@ -4771,7 +4771,7 @@
                 </a:spcAft>
               </a:pPr>
               <a:r>
-                <a:rPr sz="880">
+                <a:rPr sz="1120">
                   <a:solidFill>
                     <a:srgbClr val="4D4D4D">
                       <a:alpha val="100000"/>
@@ -4793,8 +4793,8 @@
           </p:nvSpPr>
           <p:spPr>
             <a:xfrm>
-              <a:off x="6081080" y="5785772"/>
-              <a:ext cx="62179" cy="80101"/>
+              <a:off x="6091300" y="5693022"/>
+              <a:ext cx="79004" cy="101955"/>
             </a:xfrm>
             <a:prstGeom prst="rect">
               <a:avLst/>
@@ -4807,7 +4807,7 @@
             <a:p>
               <a:pPr algn="l" marL="0" marR="0" indent="0">
                 <a:lnSpc>
-                  <a:spcPts val="880"/>
+                  <a:spcPts val="1120"/>
                 </a:lnSpc>
                 <a:spcBef>
                   <a:spcPts val="0"/>
@@ -4817,7 +4817,7 @@
                 </a:spcAft>
               </a:pPr>
               <a:r>
-                <a:rPr sz="880">
+                <a:rPr sz="1120">
                   <a:solidFill>
                     <a:srgbClr val="4D4D4D">
                       <a:alpha val="100000"/>
@@ -4839,8 +4839,8 @@
           </p:nvSpPr>
           <p:spPr>
             <a:xfrm>
-              <a:off x="7899863" y="5785772"/>
-              <a:ext cx="124358" cy="80101"/>
+              <a:off x="7873896" y="5693022"/>
+              <a:ext cx="158008" cy="101955"/>
             </a:xfrm>
             <a:prstGeom prst="rect">
               <a:avLst/>
@@ -4853,7 +4853,7 @@
             <a:p>
               <a:pPr algn="l" marL="0" marR="0" indent="0">
                 <a:lnSpc>
-                  <a:spcPts val="880"/>
+                  <a:spcPts val="1120"/>
                 </a:lnSpc>
                 <a:spcBef>
                   <a:spcPts val="0"/>
@@ -4863,7 +4863,7 @@
                 </a:spcAft>
               </a:pPr>
               <a:r>
-                <a:rPr sz="880">
+                <a:rPr sz="1120">
                   <a:solidFill>
                     <a:srgbClr val="4D4D4D">
                       <a:alpha val="100000"/>
@@ -4885,8 +4885,8 @@
           </p:nvSpPr>
           <p:spPr>
             <a:xfrm>
-              <a:off x="3832408" y="5925448"/>
-              <a:ext cx="1769912" cy="100218"/>
+              <a:off x="3630809" y="5870717"/>
+              <a:ext cx="2252258" cy="127558"/>
             </a:xfrm>
             <a:prstGeom prst="rect">
               <a:avLst/>
@@ -4899,7 +4899,7 @@
             <a:p>
               <a:pPr algn="l" marL="0" marR="0" indent="0">
                 <a:lnSpc>
-                  <a:spcPts val="1100"/>
+                  <a:spcPts val="1400"/>
                 </a:lnSpc>
                 <a:spcBef>
                   <a:spcPts val="0"/>
@@ -4909,7 +4909,7 @@
                 </a:spcAft>
               </a:pPr>
               <a:r>
-                <a:rPr sz="1100">
+                <a:rPr sz="1400">
                   <a:solidFill>
                     <a:srgbClr val="000000">
                       <a:alpha val="100000"/>
@@ -4931,8 +4931,8 @@
           </p:nvSpPr>
           <p:spPr>
             <a:xfrm rot="-5400000">
-              <a:off x="68446" y="3848213"/>
-              <a:ext cx="1016904" cy="100218"/>
+              <a:off x="-37527" y="3847460"/>
+              <a:ext cx="1294150" cy="127558"/>
             </a:xfrm>
             <a:prstGeom prst="rect">
               <a:avLst/>
@@ -4945,7 +4945,7 @@
             <a:p>
               <a:pPr algn="l" marL="0" marR="0" indent="0">
                 <a:lnSpc>
-                  <a:spcPts val="1100"/>
+                  <a:spcPts val="1400"/>
                 </a:lnSpc>
                 <a:spcBef>
                   <a:spcPts val="0"/>
@@ -4955,7 +4955,7 @@
                 </a:spcAft>
               </a:pPr>
               <a:r>
-                <a:rPr sz="1100">
+                <a:rPr sz="1400">
                   <a:solidFill>
                     <a:srgbClr val="000000">
                       <a:alpha val="100000"/>
@@ -4977,8 +4977,8 @@
           </p:nvSpPr>
           <p:spPr>
             <a:xfrm>
-              <a:off x="817517" y="1896563"/>
-              <a:ext cx="5413065" cy="82021"/>
+              <a:off x="915645" y="1977589"/>
+              <a:ext cx="7220102" cy="109362"/>
             </a:xfrm>
             <a:prstGeom prst="rect">
               <a:avLst/>
@@ -4991,7 +4991,7 @@
             <a:p>
               <a:pPr algn="l" marL="0" marR="0" indent="0">
                 <a:lnSpc>
-                  <a:spcPts val="900"/>
+                  <a:spcPts val="1200"/>
                 </a:lnSpc>
                 <a:spcBef>
                   <a:spcPts val="0"/>
@@ -5001,7 +5001,7 @@
                 </a:spcAft>
               </a:pPr>
               <a:r>
-                <a:rPr sz="900">
+                <a:rPr sz="1200">
                   <a:solidFill>
                     <a:srgbClr val="404040">
                       <a:alpha val="100000"/>
@@ -5023,8 +5023,8 @@
           </p:nvSpPr>
           <p:spPr>
             <a:xfrm>
-              <a:off x="817517" y="1669789"/>
-              <a:ext cx="1982876" cy="120152"/>
+              <a:off x="915645" y="1688767"/>
+              <a:ext cx="2524749" cy="153070"/>
             </a:xfrm>
             <a:prstGeom prst="rect">
               <a:avLst/>
@@ -5037,7 +5037,7 @@
             <a:p>
               <a:pPr algn="l" marL="0" marR="0" indent="0">
                 <a:lnSpc>
-                  <a:spcPts val="1320"/>
+                  <a:spcPts val="1680"/>
                 </a:lnSpc>
                 <a:spcBef>
                   <a:spcPts val="0"/>
@@ -5047,7 +5047,7 @@
                 </a:spcAft>
               </a:pPr>
               <a:r>
-                <a:rPr sz="1320">
+                <a:rPr sz="1680">
                   <a:solidFill>
                     <a:srgbClr val="000000">
                       <a:alpha val="100000"/>
